--- a/1차 프로젝트/기획서.pptx
+++ b/1차 프로젝트/기획서.pptx
@@ -222,7 +222,7 @@
           <a:p>
             <a:fld id="{C29A2857-52EE-4322-B040-F7AE6E3FFBF0}" type="datetimeFigureOut">
               <a:rPr lang="ko-KR" altLang="en-US" smtClean="0"/>
-              <a:t>2026-03-16</a:t>
+              <a:t>2026-03-18</a:t>
             </a:fld>
             <a:endParaRPr lang="ko-KR" altLang="en-US"/>
           </a:p>
@@ -620,7 +620,7 @@
           <a:p>
             <a:fld id="{D71FF700-8BFB-4C30-A2B6-F509E51DF773}" type="datetimeFigureOut">
               <a:rPr lang="ko-KR" altLang="en-US" smtClean="0"/>
-              <a:t>2026-03-16</a:t>
+              <a:t>2026-03-18</a:t>
             </a:fld>
             <a:endParaRPr lang="ko-KR" altLang="en-US"/>
           </a:p>
@@ -790,7 +790,7 @@
           <a:p>
             <a:fld id="{D71FF700-8BFB-4C30-A2B6-F509E51DF773}" type="datetimeFigureOut">
               <a:rPr lang="ko-KR" altLang="en-US" smtClean="0"/>
-              <a:t>2026-03-16</a:t>
+              <a:t>2026-03-18</a:t>
             </a:fld>
             <a:endParaRPr lang="ko-KR" altLang="en-US"/>
           </a:p>
@@ -970,7 +970,7 @@
           <a:p>
             <a:fld id="{D71FF700-8BFB-4C30-A2B6-F509E51DF773}" type="datetimeFigureOut">
               <a:rPr lang="ko-KR" altLang="en-US" smtClean="0"/>
-              <a:t>2026-03-16</a:t>
+              <a:t>2026-03-18</a:t>
             </a:fld>
             <a:endParaRPr lang="ko-KR" altLang="en-US"/>
           </a:p>
@@ -1140,7 +1140,7 @@
           <a:p>
             <a:fld id="{D71FF700-8BFB-4C30-A2B6-F509E51DF773}" type="datetimeFigureOut">
               <a:rPr lang="ko-KR" altLang="en-US" smtClean="0"/>
-              <a:t>2026-03-16</a:t>
+              <a:t>2026-03-18</a:t>
             </a:fld>
             <a:endParaRPr lang="ko-KR" altLang="en-US"/>
           </a:p>
@@ -1386,7 +1386,7 @@
           <a:p>
             <a:fld id="{D71FF700-8BFB-4C30-A2B6-F509E51DF773}" type="datetimeFigureOut">
               <a:rPr lang="ko-KR" altLang="en-US" smtClean="0"/>
-              <a:t>2026-03-16</a:t>
+              <a:t>2026-03-18</a:t>
             </a:fld>
             <a:endParaRPr lang="ko-KR" altLang="en-US"/>
           </a:p>
@@ -1618,7 +1618,7 @@
           <a:p>
             <a:fld id="{D71FF700-8BFB-4C30-A2B6-F509E51DF773}" type="datetimeFigureOut">
               <a:rPr lang="ko-KR" altLang="en-US" smtClean="0"/>
-              <a:t>2026-03-16</a:t>
+              <a:t>2026-03-18</a:t>
             </a:fld>
             <a:endParaRPr lang="ko-KR" altLang="en-US"/>
           </a:p>
@@ -1985,7 +1985,7 @@
           <a:p>
             <a:fld id="{D71FF700-8BFB-4C30-A2B6-F509E51DF773}" type="datetimeFigureOut">
               <a:rPr lang="ko-KR" altLang="en-US" smtClean="0"/>
-              <a:t>2026-03-16</a:t>
+              <a:t>2026-03-18</a:t>
             </a:fld>
             <a:endParaRPr lang="ko-KR" altLang="en-US"/>
           </a:p>
@@ -2103,7 +2103,7 @@
           <a:p>
             <a:fld id="{D71FF700-8BFB-4C30-A2B6-F509E51DF773}" type="datetimeFigureOut">
               <a:rPr lang="ko-KR" altLang="en-US" smtClean="0"/>
-              <a:t>2026-03-16</a:t>
+              <a:t>2026-03-18</a:t>
             </a:fld>
             <a:endParaRPr lang="ko-KR" altLang="en-US"/>
           </a:p>
@@ -2198,7 +2198,7 @@
           <a:p>
             <a:fld id="{D71FF700-8BFB-4C30-A2B6-F509E51DF773}" type="datetimeFigureOut">
               <a:rPr lang="ko-KR" altLang="en-US" smtClean="0"/>
-              <a:t>2026-03-16</a:t>
+              <a:t>2026-03-18</a:t>
             </a:fld>
             <a:endParaRPr lang="ko-KR" altLang="en-US"/>
           </a:p>
@@ -2475,7 +2475,7 @@
           <a:p>
             <a:fld id="{D71FF700-8BFB-4C30-A2B6-F509E51DF773}" type="datetimeFigureOut">
               <a:rPr lang="ko-KR" altLang="en-US" smtClean="0"/>
-              <a:t>2026-03-16</a:t>
+              <a:t>2026-03-18</a:t>
             </a:fld>
             <a:endParaRPr lang="ko-KR" altLang="en-US"/>
           </a:p>
@@ -2732,7 +2732,7 @@
           <a:p>
             <a:fld id="{D71FF700-8BFB-4C30-A2B6-F509E51DF773}" type="datetimeFigureOut">
               <a:rPr lang="ko-KR" altLang="en-US" smtClean="0"/>
-              <a:t>2026-03-16</a:t>
+              <a:t>2026-03-18</a:t>
             </a:fld>
             <a:endParaRPr lang="ko-KR" altLang="en-US"/>
           </a:p>
@@ -2945,7 +2945,7 @@
           <a:p>
             <a:fld id="{D71FF700-8BFB-4C30-A2B6-F509E51DF773}" type="datetimeFigureOut">
               <a:rPr lang="ko-KR" altLang="en-US" smtClean="0"/>
-              <a:t>2026-03-16</a:t>
+              <a:t>2026-03-18</a:t>
             </a:fld>
             <a:endParaRPr lang="ko-KR" altLang="en-US"/>
           </a:p>
@@ -5087,49 +5087,7 @@
                 </a:solidFill>
                 <a:latin typeface="Noto Sans KR"/>
               </a:rPr>
-              <a:t>동일한 식단을 섭취해도 </a:t>
-            </a:r>
-            <a:r>
-              <a:rPr lang="ko-KR" altLang="en-US" sz="1400" b="1">
-                <a:latin typeface="Noto Sans KR"/>
-              </a:rPr>
-              <a:t>성별</a:t>
-            </a:r>
-            <a:r>
-              <a:rPr lang="en-US" altLang="ko-KR" sz="1400" b="1">
-                <a:latin typeface="Noto Sans KR"/>
-              </a:rPr>
-              <a:t>, </a:t>
-            </a:r>
-            <a:r>
-              <a:rPr lang="ko-KR" altLang="en-US" sz="1400" b="1">
-                <a:latin typeface="Noto Sans KR"/>
-              </a:rPr>
-              <a:t>연령</a:t>
-            </a:r>
-            <a:r>
-              <a:rPr lang="en-US" altLang="ko-KR" sz="1400" b="1">
-                <a:latin typeface="Noto Sans KR"/>
-              </a:rPr>
-              <a:t>, </a:t>
-            </a:r>
-            <a:r>
-              <a:rPr lang="ko-KR" altLang="en-US" sz="1400" b="1">
-                <a:latin typeface="Noto Sans KR"/>
-              </a:rPr>
-              <a:t>생활습관 </a:t>
-            </a:r>
-            <a:r>
-              <a:rPr lang="ko-KR" altLang="en-US" sz="1400">
-                <a:solidFill>
-                  <a:schemeClr val="tx1">
-                    <a:lumMod val="75000"/>
-                    <a:lumOff val="25000"/>
-                  </a:schemeClr>
-                </a:solidFill>
-                <a:latin typeface="Noto Sans KR"/>
-              </a:rPr>
-              <a:t>등 개인별 특성에 따라 건강에 미치는 영향이 다름</a:t>
+              <a:t>동일한 식단을 테스트트</a:t>
             </a:r>
             <a:endParaRPr lang="ko-KR" altLang="en-US" sz="1400">
               <a:solidFill>

--- a/1차 프로젝트/기획서.pptx
+++ b/1차 프로젝트/기획서.pptx
@@ -5,16 +5,19 @@
     <p:sldMasterId id="2147483672" r:id="rId1"/>
   </p:sldMasterIdLst>
   <p:notesMasterIdLst>
-    <p:notesMasterId r:id="rId9"/>
+    <p:notesMasterId r:id="rId12"/>
   </p:notesMasterIdLst>
   <p:sldIdLst>
     <p:sldId id="256" r:id="rId2"/>
     <p:sldId id="261" r:id="rId3"/>
-    <p:sldId id="262" r:id="rId4"/>
-    <p:sldId id="259" r:id="rId5"/>
-    <p:sldId id="260" r:id="rId6"/>
-    <p:sldId id="264" r:id="rId7"/>
-    <p:sldId id="265" r:id="rId8"/>
+    <p:sldId id="271" r:id="rId4"/>
+    <p:sldId id="275" r:id="rId5"/>
+    <p:sldId id="274" r:id="rId6"/>
+    <p:sldId id="270" r:id="rId7"/>
+    <p:sldId id="259" r:id="rId8"/>
+    <p:sldId id="267" r:id="rId9"/>
+    <p:sldId id="272" r:id="rId10"/>
+    <p:sldId id="273" r:id="rId11"/>
   </p:sldIdLst>
   <p:sldSz cx="12192000" cy="6858000"/>
   <p:notesSz cx="6858000" cy="9144000"/>
@@ -121,14 +124,29 @@
             <p14:sldId id="256"/>
           </p14:sldIdLst>
         </p14:section>
-        <p14:section name="본문" id="{5776D462-103A-4A94-B329-79D7A809B440}">
+        <p14:section name="기획의도" id="{5776D462-103A-4A94-B329-79D7A809B440}">
           <p14:sldIdLst>
             <p14:sldId id="261"/>
-            <p14:sldId id="262"/>
+            <p14:sldId id="271"/>
+            <p14:sldId id="275"/>
+            <p14:sldId id="274"/>
+          </p14:sldIdLst>
+        </p14:section>
+        <p14:section name="개발목표" id="{68215A09-B176-47FD-B779-768E16B11801}">
+          <p14:sldIdLst>
+            <p14:sldId id="270"/>
+          </p14:sldIdLst>
+        </p14:section>
+        <p14:section name="개발 스케줄" id="{3B2639DA-94DE-47E4-BC35-687CBCEDE099}">
+          <p14:sldIdLst>
             <p14:sldId id="259"/>
-            <p14:sldId id="260"/>
-            <p14:sldId id="264"/>
-            <p14:sldId id="265"/>
+          </p14:sldIdLst>
+        </p14:section>
+        <p14:section name="화면설계서" id="{E4806D9E-3AD0-4089-A3C6-C15EABD6A583}">
+          <p14:sldIdLst>
+            <p14:sldId id="267"/>
+            <p14:sldId id="272"/>
+            <p14:sldId id="273"/>
           </p14:sldIdLst>
         </p14:section>
       </p14:sectionLst>
@@ -138,6 +156,35 @@
     </p:ext>
   </p:extLst>
 </p:presentation>
+</file>
+
+<file path=ppt/authors.xml><?xml version="1.0" encoding="utf-8"?>
+<p188:authorLst xmlns:a="http://schemas.openxmlformats.org/drawingml/2006/main" xmlns:r="http://schemas.openxmlformats.org/officeDocument/2006/relationships" xmlns:p188="http://schemas.microsoft.com/office/powerpoint/2018/8/main">
+  <p188:author id="{D5143AD7-E749-5E1E-371D-A585C0C727CD}" name="User" initials="Own" userId="User" providerId="None"/>
+</p188:authorLst>
+</file>
+
+<file path=ppt/comments/modernComment_105_475D2187.xml><?xml version="1.0" encoding="utf-8"?>
+<p188:cmLst xmlns:a="http://schemas.openxmlformats.org/drawingml/2006/main" xmlns:r="http://schemas.openxmlformats.org/officeDocument/2006/relationships" xmlns:p188="http://schemas.microsoft.com/office/powerpoint/2018/8/main">
+  <p188:cm id="{4C81EC46-816F-4E82-9DAA-8FF4D1E45057}" authorId="{D5143AD7-E749-5E1E-371D-A585C0C727CD}" created="2026-03-19T08:14:17.691">
+    <ac:deMkLst xmlns:ac="http://schemas.microsoft.com/office/drawing/2013/main/command">
+      <pc:docMk xmlns:pc="http://schemas.microsoft.com/office/powerpoint/2013/main/command"/>
+      <pc:sldMk xmlns:pc="http://schemas.microsoft.com/office/powerpoint/2013/main/command" cId="1197285767" sldId="261"/>
+      <ac:spMk id="3" creationId="{F3E0445D-6120-B7A6-8C93-5DFA859689ED}"/>
+    </ac:deMkLst>
+    <p188:txBody>
+      <a:bodyPr/>
+      <a:lstStyle/>
+      <a:p>
+        <a:r>
+          <a:rPr lang="ko-KR" altLang="en-US"/>
+          <a:t>기획 의도 근거자료 영역 확대하고 4가지 흐름으로 진행
+외식, 가공식품 섭취 증가 - 지방,</a:t>
+        </a:r>
+      </a:p>
+    </p188:txBody>
+  </p188:cm>
+</p188:cmLst>
 </file>
 
 <file path=ppt/notesMasters/notesMaster1.xml><?xml version="1.0" encoding="utf-8"?>
@@ -222,7 +269,7 @@
           <a:p>
             <a:fld id="{C29A2857-52EE-4322-B040-F7AE6E3FFBF0}" type="datetimeFigureOut">
               <a:rPr lang="ko-KR" altLang="en-US" smtClean="0"/>
-              <a:t>2026-03-18</a:t>
+              <a:t>2026-03-20</a:t>
             </a:fld>
             <a:endParaRPr lang="ko-KR" altLang="en-US"/>
           </a:p>
@@ -620,7 +667,7 @@
           <a:p>
             <a:fld id="{D71FF700-8BFB-4C30-A2B6-F509E51DF773}" type="datetimeFigureOut">
               <a:rPr lang="ko-KR" altLang="en-US" smtClean="0"/>
-              <a:t>2026-03-18</a:t>
+              <a:t>2026-03-20</a:t>
             </a:fld>
             <a:endParaRPr lang="ko-KR" altLang="en-US"/>
           </a:p>
@@ -790,7 +837,7 @@
           <a:p>
             <a:fld id="{D71FF700-8BFB-4C30-A2B6-F509E51DF773}" type="datetimeFigureOut">
               <a:rPr lang="ko-KR" altLang="en-US" smtClean="0"/>
-              <a:t>2026-03-18</a:t>
+              <a:t>2026-03-20</a:t>
             </a:fld>
             <a:endParaRPr lang="ko-KR" altLang="en-US"/>
           </a:p>
@@ -970,7 +1017,7 @@
           <a:p>
             <a:fld id="{D71FF700-8BFB-4C30-A2B6-F509E51DF773}" type="datetimeFigureOut">
               <a:rPr lang="ko-KR" altLang="en-US" smtClean="0"/>
-              <a:t>2026-03-18</a:t>
+              <a:t>2026-03-20</a:t>
             </a:fld>
             <a:endParaRPr lang="ko-KR" altLang="en-US"/>
           </a:p>
@@ -1140,7 +1187,7 @@
           <a:p>
             <a:fld id="{D71FF700-8BFB-4C30-A2B6-F509E51DF773}" type="datetimeFigureOut">
               <a:rPr lang="ko-KR" altLang="en-US" smtClean="0"/>
-              <a:t>2026-03-18</a:t>
+              <a:t>2026-03-20</a:t>
             </a:fld>
             <a:endParaRPr lang="ko-KR" altLang="en-US"/>
           </a:p>
@@ -1386,7 +1433,7 @@
           <a:p>
             <a:fld id="{D71FF700-8BFB-4C30-A2B6-F509E51DF773}" type="datetimeFigureOut">
               <a:rPr lang="ko-KR" altLang="en-US" smtClean="0"/>
-              <a:t>2026-03-18</a:t>
+              <a:t>2026-03-20</a:t>
             </a:fld>
             <a:endParaRPr lang="ko-KR" altLang="en-US"/>
           </a:p>
@@ -1618,7 +1665,7 @@
           <a:p>
             <a:fld id="{D71FF700-8BFB-4C30-A2B6-F509E51DF773}" type="datetimeFigureOut">
               <a:rPr lang="ko-KR" altLang="en-US" smtClean="0"/>
-              <a:t>2026-03-18</a:t>
+              <a:t>2026-03-20</a:t>
             </a:fld>
             <a:endParaRPr lang="ko-KR" altLang="en-US"/>
           </a:p>
@@ -1985,7 +2032,7 @@
           <a:p>
             <a:fld id="{D71FF700-8BFB-4C30-A2B6-F509E51DF773}" type="datetimeFigureOut">
               <a:rPr lang="ko-KR" altLang="en-US" smtClean="0"/>
-              <a:t>2026-03-18</a:t>
+              <a:t>2026-03-20</a:t>
             </a:fld>
             <a:endParaRPr lang="ko-KR" altLang="en-US"/>
           </a:p>
@@ -2103,7 +2150,7 @@
           <a:p>
             <a:fld id="{D71FF700-8BFB-4C30-A2B6-F509E51DF773}" type="datetimeFigureOut">
               <a:rPr lang="ko-KR" altLang="en-US" smtClean="0"/>
-              <a:t>2026-03-18</a:t>
+              <a:t>2026-03-20</a:t>
             </a:fld>
             <a:endParaRPr lang="ko-KR" altLang="en-US"/>
           </a:p>
@@ -2198,7 +2245,7 @@
           <a:p>
             <a:fld id="{D71FF700-8BFB-4C30-A2B6-F509E51DF773}" type="datetimeFigureOut">
               <a:rPr lang="ko-KR" altLang="en-US" smtClean="0"/>
-              <a:t>2026-03-18</a:t>
+              <a:t>2026-03-20</a:t>
             </a:fld>
             <a:endParaRPr lang="ko-KR" altLang="en-US"/>
           </a:p>
@@ -2475,7 +2522,7 @@
           <a:p>
             <a:fld id="{D71FF700-8BFB-4C30-A2B6-F509E51DF773}" type="datetimeFigureOut">
               <a:rPr lang="ko-KR" altLang="en-US" smtClean="0"/>
-              <a:t>2026-03-18</a:t>
+              <a:t>2026-03-20</a:t>
             </a:fld>
             <a:endParaRPr lang="ko-KR" altLang="en-US"/>
           </a:p>
@@ -2732,7 +2779,7 @@
           <a:p>
             <a:fld id="{D71FF700-8BFB-4C30-A2B6-F509E51DF773}" type="datetimeFigureOut">
               <a:rPr lang="ko-KR" altLang="en-US" smtClean="0"/>
-              <a:t>2026-03-18</a:t>
+              <a:t>2026-03-20</a:t>
             </a:fld>
             <a:endParaRPr lang="ko-KR" altLang="en-US"/>
           </a:p>
@@ -2945,7 +2992,7 @@
           <a:p>
             <a:fld id="{D71FF700-8BFB-4C30-A2B6-F509E51DF773}" type="datetimeFigureOut">
               <a:rPr lang="ko-KR" altLang="en-US" smtClean="0"/>
-              <a:t>2026-03-18</a:t>
+              <a:t>2026-03-20</a:t>
             </a:fld>
             <a:endParaRPr lang="ko-KR" altLang="en-US"/>
           </a:p>
@@ -3352,6 +3399,62 @@
       </p:grpSpPr>
       <p:sp>
         <p:nvSpPr>
+          <p:cNvPr id="4" name="직사각형 3">
+            <a:extLst>
+              <a:ext uri="{FF2B5EF4-FFF2-40B4-BE49-F238E27FC236}">
+                <a16:creationId xmlns:a16="http://schemas.microsoft.com/office/drawing/2014/main" id="{A1441BF8-BC31-A14F-06C9-DCC0D1B6E63B}"/>
+              </a:ext>
+            </a:extLst>
+          </p:cNvPr>
+          <p:cNvSpPr>
+            <a:spLocks/>
+          </p:cNvSpPr>
+          <p:nvPr/>
+        </p:nvSpPr>
+        <p:spPr>
+          <a:xfrm>
+            <a:off x="3048000" y="-11750"/>
+            <a:ext cx="6096000" cy="6869750"/>
+          </a:xfrm>
+          <a:prstGeom prst="rect">
+            <a:avLst/>
+          </a:prstGeom>
+          <a:solidFill>
+            <a:schemeClr val="tx1">
+              <a:alpha val="80000"/>
+            </a:schemeClr>
+          </a:solidFill>
+          <a:ln>
+            <a:noFill/>
+          </a:ln>
+        </p:spPr>
+        <p:style>
+          <a:lnRef idx="2">
+            <a:schemeClr val="accent1">
+              <a:shade val="15000"/>
+            </a:schemeClr>
+          </a:lnRef>
+          <a:fillRef idx="1">
+            <a:schemeClr val="accent1"/>
+          </a:fillRef>
+          <a:effectRef idx="0">
+            <a:schemeClr val="accent1"/>
+          </a:effectRef>
+          <a:fontRef idx="minor">
+            <a:schemeClr val="lt1"/>
+          </a:fontRef>
+        </p:style>
+        <p:txBody>
+          <a:bodyPr rtlCol="0" anchor="ctr"/>
+          <a:lstStyle/>
+          <a:p>
+            <a:pPr algn="ctr"/>
+            <a:endParaRPr lang="ko-KR" altLang="en-US"/>
+          </a:p>
+        </p:txBody>
+      </p:sp>
+      <p:sp>
+        <p:nvSpPr>
           <p:cNvPr id="2" name="제목 1">
             <a:extLst>
               <a:ext uri="{FF2B5EF4-FFF2-40B4-BE49-F238E27FC236}">
@@ -3368,8 +3471,8 @@
         </p:nvSpPr>
         <p:spPr>
           <a:xfrm>
-            <a:off x="3241963" y="1676360"/>
-            <a:ext cx="5708073" cy="1643619"/>
+            <a:off x="3459853" y="1462917"/>
+            <a:ext cx="5272290" cy="1277604"/>
           </a:xfrm>
         </p:spPr>
         <p:txBody>
@@ -3378,59 +3481,34 @@
           </a:bodyPr>
           <a:lstStyle/>
           <a:p>
-            <a:pPr algn="ctr" latinLnBrk="0"/>
-            <a:r>
-              <a:rPr lang="ko-KR" altLang="en-US" sz="3200" b="1" i="0">
-                <a:solidFill>
-                  <a:srgbClr val="111827"/>
+            <a:pPr algn="ctr" latinLnBrk="0">
+              <a:lnSpc>
+                <a:spcPct val="100000"/>
+              </a:lnSpc>
+            </a:pPr>
+            <a:r>
+              <a:rPr lang="ko-KR" altLang="en-US" sz="2400" b="1" i="0">
+                <a:solidFill>
+                  <a:schemeClr val="bg1"/>
                 </a:solidFill>
                 <a:effectLst/>
                 <a:latin typeface="Noto Sans KR"/>
               </a:rPr>
-              <a:t>영양소 섭취 패턴 기반</a:t>
+              <a:t>영양소 섭취 기반 고콜레스테롤혈증 위험도 예측 및</a:t>
             </a:r>
             <a:br>
-              <a:rPr lang="ko-KR" altLang="en-US" sz="3200" b="1" i="0">
-                <a:solidFill>
-                  <a:srgbClr val="111827"/>
+              <a:rPr lang="ko-KR" altLang="en-US" sz="2800" b="1" i="0">
+                <a:solidFill>
+                  <a:schemeClr val="bg1"/>
                 </a:solidFill>
                 <a:effectLst/>
                 <a:latin typeface="Noto Sans KR"/>
               </a:rPr>
             </a:br>
             <a:r>
-              <a:rPr lang="ko-KR" altLang="en-US" sz="3200" b="1" i="0">
-                <a:solidFill>
-                  <a:srgbClr val="374151"/>
-                </a:solidFill>
-                <a:effectLst/>
-                <a:latin typeface="Noto Sans KR"/>
-              </a:rPr>
-              <a:t>이상지질혈증 위험도 예측</a:t>
-            </a:r>
-            <a:r>
-              <a:rPr lang="ko-KR" altLang="en-US" sz="3200" b="1" i="0">
-                <a:solidFill>
-                  <a:srgbClr val="111827"/>
-                </a:solidFill>
-                <a:effectLst/>
-                <a:latin typeface="Noto Sans KR"/>
-              </a:rPr>
-              <a:t> 및</a:t>
-            </a:r>
-            <a:br>
-              <a:rPr lang="ko-KR" altLang="en-US" sz="3200" b="1" i="0">
-                <a:solidFill>
-                  <a:srgbClr val="111827"/>
-                </a:solidFill>
-                <a:effectLst/>
-                <a:latin typeface="Noto Sans KR"/>
-              </a:rPr>
-            </a:br>
-            <a:r>
-              <a:rPr lang="ko-KR" altLang="en-US" sz="2800" b="1" i="0">
-                <a:solidFill>
-                  <a:srgbClr val="6B7280"/>
+              <a:rPr lang="ko-KR" altLang="en-US" sz="2400" b="1" i="0">
+                <a:solidFill>
+                  <a:schemeClr val="bg1"/>
                 </a:solidFill>
                 <a:effectLst/>
                 <a:latin typeface="Noto Sans KR"/>
@@ -3458,8 +3536,8 @@
         </p:nvSpPr>
         <p:spPr>
           <a:xfrm>
-            <a:off x="5570515" y="4695949"/>
-            <a:ext cx="1050968" cy="855023"/>
+            <a:off x="5570514" y="5492792"/>
+            <a:ext cx="1050968" cy="1365208"/>
           </a:xfrm>
         </p:spPr>
         <p:txBody>
@@ -3469,10 +3547,10 @@
           <a:lstStyle/>
           <a:p>
             <a:r>
-              <a:rPr lang="en-US" altLang="ko-KR" sz="1400">
+              <a:rPr lang="en-US" altLang="ko-KR" sz="1200">
                 <a:solidFill>
                   <a:schemeClr val="bg1">
-                    <a:lumMod val="50000"/>
+                    <a:lumMod val="85000"/>
                   </a:schemeClr>
                 </a:solidFill>
               </a:rPr>
@@ -3481,167 +3559,214 @@
           </a:p>
           <a:p>
             <a:r>
-              <a:rPr lang="ko-KR" altLang="en-US" sz="2000" b="1"/>
+              <a:rPr lang="ko-KR" altLang="en-US" sz="1600" b="1">
+                <a:solidFill>
+                  <a:schemeClr val="bg1"/>
+                </a:solidFill>
+              </a:rPr>
               <a:t>이 승 찬</a:t>
             </a:r>
+            <a:endParaRPr lang="en-US" altLang="ko-KR" sz="1600" b="1">
+              <a:solidFill>
+                <a:schemeClr val="bg1"/>
+              </a:solidFill>
+            </a:endParaRPr>
+          </a:p>
+          <a:p>
+            <a:endParaRPr lang="en-US" altLang="ko-KR" sz="1200" b="1">
+              <a:solidFill>
+                <a:schemeClr val="bg1"/>
+              </a:solidFill>
+            </a:endParaRPr>
+          </a:p>
+          <a:p>
+            <a:r>
+              <a:rPr lang="en-US" altLang="ko-KR" sz="1200" b="1">
+                <a:solidFill>
+                  <a:schemeClr val="bg1">
+                    <a:lumMod val="85000"/>
+                  </a:schemeClr>
+                </a:solidFill>
+              </a:rPr>
+              <a:t>2026.03.17</a:t>
+            </a:r>
+            <a:endParaRPr lang="ko-KR" altLang="en-US" sz="1200" b="1">
+              <a:solidFill>
+                <a:schemeClr val="bg1">
+                  <a:lumMod val="85000"/>
+                </a:schemeClr>
+              </a:solidFill>
+            </a:endParaRPr>
+          </a:p>
+        </p:txBody>
+      </p:sp>
+    </p:spTree>
+    <p:extLst>
+      <p:ext uri="{BB962C8B-B14F-4D97-AF65-F5344CB8AC3E}">
+        <p14:creationId xmlns:p14="http://schemas.microsoft.com/office/powerpoint/2010/main" val="1701865029"/>
+      </p:ext>
+    </p:extLst>
+  </p:cSld>
+  <p:clrMapOvr>
+    <a:masterClrMapping/>
+  </p:clrMapOvr>
+</p:sld>
+</file>
+
+<file path=ppt/slides/slide10.xml><?xml version="1.0" encoding="utf-8"?>
+<p:sld xmlns:a="http://schemas.openxmlformats.org/drawingml/2006/main" xmlns:r="http://schemas.openxmlformats.org/officeDocument/2006/relationships" xmlns:p="http://schemas.openxmlformats.org/presentationml/2006/main">
+  <p:cSld>
+    <p:spTree>
+      <p:nvGrpSpPr>
+        <p:cNvPr id="1" name=""/>
+        <p:cNvGrpSpPr/>
+        <p:nvPr/>
+      </p:nvGrpSpPr>
+      <p:grpSpPr>
+        <a:xfrm>
+          <a:off x="0" y="0"/>
+          <a:ext cx="0" cy="0"/>
+          <a:chOff x="0" y="0"/>
+          <a:chExt cx="0" cy="0"/>
+        </a:xfrm>
+      </p:grpSpPr>
+      <p:sp>
+        <p:nvSpPr>
+          <p:cNvPr id="2" name="직사각형 1">
+            <a:extLst>
+              <a:ext uri="{FF2B5EF4-FFF2-40B4-BE49-F238E27FC236}">
+                <a16:creationId xmlns:a16="http://schemas.microsoft.com/office/drawing/2014/main" id="{0E71911F-795E-955F-950B-60464C6202D5}"/>
+              </a:ext>
+            </a:extLst>
+          </p:cNvPr>
+          <p:cNvSpPr/>
+          <p:nvPr/>
+        </p:nvSpPr>
+        <p:spPr>
+          <a:xfrm>
+            <a:off x="0" y="0"/>
+            <a:ext cx="12192000" cy="1180396"/>
+          </a:xfrm>
+          <a:prstGeom prst="rect">
+            <a:avLst/>
+          </a:prstGeom>
+          <a:solidFill>
+            <a:schemeClr val="dk1">
+              <a:alpha val="80000"/>
+            </a:schemeClr>
+          </a:solidFill>
+          <a:ln>
+            <a:noFill/>
+          </a:ln>
+        </p:spPr>
+        <p:style>
+          <a:lnRef idx="2">
+            <a:schemeClr val="dk1">
+              <a:shade val="15000"/>
+            </a:schemeClr>
+          </a:lnRef>
+          <a:fillRef idx="1">
+            <a:schemeClr val="dk1"/>
+          </a:fillRef>
+          <a:effectRef idx="0">
+            <a:schemeClr val="dk1"/>
+          </a:effectRef>
+          <a:fontRef idx="minor">
+            <a:schemeClr val="lt1"/>
+          </a:fontRef>
+        </p:style>
+        <p:txBody>
+          <a:bodyPr rtlCol="0" anchor="ctr"/>
+          <a:lstStyle/>
+          <a:p>
+            <a:endParaRPr lang="ko-KR" altLang="en-US"/>
           </a:p>
         </p:txBody>
       </p:sp>
       <p:sp>
         <p:nvSpPr>
-          <p:cNvPr id="10" name="TextBox 9">
+          <p:cNvPr id="5" name="제목 1">
             <a:extLst>
               <a:ext uri="{FF2B5EF4-FFF2-40B4-BE49-F238E27FC236}">
-                <a16:creationId xmlns:a16="http://schemas.microsoft.com/office/drawing/2014/main" id="{6F654B26-59B6-6455-CF46-7189600EC228}"/>
+                <a16:creationId xmlns:a16="http://schemas.microsoft.com/office/drawing/2014/main" id="{E6B21E77-88D1-0F37-CAD7-BE7EC7FC1682}"/>
               </a:ext>
             </a:extLst>
           </p:cNvPr>
-          <p:cNvSpPr txBox="1"/>
+          <p:cNvSpPr txBox="1">
+            <a:spLocks/>
+          </p:cNvSpPr>
           <p:nvPr/>
         </p:nvSpPr>
         <p:spPr>
           <a:xfrm>
-            <a:off x="4275630" y="937696"/>
-            <a:ext cx="3640740" cy="369332"/>
+            <a:off x="603253" y="234000"/>
+            <a:ext cx="2883105" cy="946104"/>
           </a:xfrm>
           <a:prstGeom prst="rect">
             <a:avLst/>
           </a:prstGeom>
-          <a:noFill/>
         </p:spPr>
         <p:txBody>
-          <a:bodyPr wrap="none" rtlCol="0">
-            <a:spAutoFit/>
+          <a:bodyPr vert="horz" lIns="91440" tIns="45720" rIns="91440" bIns="45720" rtlCol="0" anchor="ctr">
+            <a:normAutofit/>
           </a:bodyPr>
-          <a:lstStyle/>
-          <a:p>
-            <a:r>
-              <a:rPr lang="ko-KR" altLang="en-US" b="0" i="0" cap="all">
-                <a:solidFill>
-                  <a:srgbClr val="6B7280"/>
+          <a:lstStyle>
+            <a:lvl1pPr algn="l" defTabSz="914400" rtl="0" eaLnBrk="1" latinLnBrk="1" hangingPunct="1">
+              <a:lnSpc>
+                <a:spcPct val="90000"/>
+              </a:lnSpc>
+              <a:spcBef>
+                <a:spcPct val="0"/>
+              </a:spcBef>
+              <a:buNone/>
+              <a:defRPr sz="4400" kern="1200">
+                <a:solidFill>
+                  <a:schemeClr val="tx1"/>
+                </a:solidFill>
+                <a:latin typeface="+mj-lt"/>
+                <a:ea typeface="+mj-ea"/>
+                <a:cs typeface="+mj-cs"/>
+              </a:defRPr>
+            </a:lvl1pPr>
+          </a:lstStyle>
+          <a:p>
+            <a:r>
+              <a:rPr lang="ko-KR" altLang="en-US" sz="3200" b="1">
+                <a:solidFill>
+                  <a:schemeClr val="bg1"/>
+                </a:solidFill>
+              </a:rPr>
+              <a:t>화면 설계서</a:t>
+            </a:r>
+            <a:br>
+              <a:rPr lang="en-US" altLang="ko-KR" sz="3200" b="1"/>
+            </a:br>
+            <a:r>
+              <a:rPr lang="en-US" altLang="ko-KR" sz="1400" b="0" i="0">
+                <a:solidFill>
+                  <a:schemeClr val="bg1">
+                    <a:lumMod val="75000"/>
+                  </a:schemeClr>
                 </a:solidFill>
                 <a:effectLst/>
                 <a:latin typeface="Noto Sans KR"/>
               </a:rPr>
-              <a:t>생성형 </a:t>
-            </a:r>
-            <a:r>
-              <a:rPr lang="en-US" altLang="ko-KR" b="0" i="0" cap="all">
-                <a:solidFill>
-                  <a:srgbClr val="6B7280"/>
-                </a:solidFill>
-                <a:effectLst/>
-                <a:latin typeface="Noto Sans KR"/>
-              </a:rPr>
-              <a:t>AI </a:t>
-            </a:r>
-            <a:r>
-              <a:rPr lang="ko-KR" altLang="en-US" b="0" i="0" cap="all">
-                <a:solidFill>
-                  <a:srgbClr val="6B7280"/>
-                </a:solidFill>
-                <a:effectLst/>
-                <a:latin typeface="Noto Sans KR"/>
-              </a:rPr>
-              <a:t>기반 서비스 개발자 양성</a:t>
-            </a:r>
-            <a:endParaRPr lang="en-US" altLang="ko-KR" b="0" i="0" cap="all">
+              <a:t>Wireframe</a:t>
+            </a:r>
+            <a:endParaRPr lang="ko-KR" altLang="en-US" sz="1400" b="1">
               <a:solidFill>
-                <a:srgbClr val="6B7280"/>
+                <a:schemeClr val="bg1">
+                  <a:lumMod val="75000"/>
+                </a:schemeClr>
               </a:solidFill>
-              <a:effectLst/>
-              <a:latin typeface="Noto Sans KR"/>
             </a:endParaRPr>
           </a:p>
         </p:txBody>
       </p:sp>
-      <p:cxnSp>
-        <p:nvCxnSpPr>
-          <p:cNvPr id="12" name="직선 연결선 11">
-            <a:extLst>
-              <a:ext uri="{FF2B5EF4-FFF2-40B4-BE49-F238E27FC236}">
-                <a16:creationId xmlns:a16="http://schemas.microsoft.com/office/drawing/2014/main" id="{377DD429-CB33-2EF7-E6B3-361CCE414DD1}"/>
-              </a:ext>
-            </a:extLst>
-          </p:cNvPr>
-          <p:cNvCxnSpPr>
-            <a:cxnSpLocks/>
-          </p:cNvCxnSpPr>
-          <p:nvPr/>
-        </p:nvCxnSpPr>
-        <p:spPr>
-          <a:xfrm>
-            <a:off x="4275630" y="1307028"/>
-            <a:ext cx="3640740" cy="0"/>
-          </a:xfrm>
-          <a:prstGeom prst="line">
-            <a:avLst/>
-          </a:prstGeom>
-          <a:ln>
-            <a:solidFill>
-              <a:schemeClr val="bg1">
-                <a:lumMod val="75000"/>
-              </a:schemeClr>
-            </a:solidFill>
-          </a:ln>
-        </p:spPr>
-        <p:style>
-          <a:lnRef idx="2">
-            <a:schemeClr val="dk1"/>
-          </a:lnRef>
-          <a:fillRef idx="0">
-            <a:schemeClr val="dk1"/>
-          </a:fillRef>
-          <a:effectRef idx="1">
-            <a:schemeClr val="dk1"/>
-          </a:effectRef>
-          <a:fontRef idx="minor">
-            <a:schemeClr val="tx1"/>
-          </a:fontRef>
-        </p:style>
-      </p:cxnSp>
-      <p:cxnSp>
-        <p:nvCxnSpPr>
-          <p:cNvPr id="20" name="직선 연결선 19">
-            <a:extLst>
-              <a:ext uri="{FF2B5EF4-FFF2-40B4-BE49-F238E27FC236}">
-                <a16:creationId xmlns:a16="http://schemas.microsoft.com/office/drawing/2014/main" id="{4C082F9A-3391-5AC3-6BBA-AB6C5E3B7B28}"/>
-              </a:ext>
-            </a:extLst>
-          </p:cNvPr>
-          <p:cNvCxnSpPr>
-            <a:cxnSpLocks/>
-          </p:cNvCxnSpPr>
-          <p:nvPr/>
-        </p:nvCxnSpPr>
-        <p:spPr>
-          <a:xfrm>
-            <a:off x="5570515" y="4458442"/>
-            <a:ext cx="1050968" cy="0"/>
-          </a:xfrm>
-          <a:prstGeom prst="line">
-            <a:avLst/>
-          </a:prstGeom>
-        </p:spPr>
-        <p:style>
-          <a:lnRef idx="2">
-            <a:schemeClr val="dk1"/>
-          </a:lnRef>
-          <a:fillRef idx="0">
-            <a:schemeClr val="dk1"/>
-          </a:fillRef>
-          <a:effectRef idx="1">
-            <a:schemeClr val="dk1"/>
-          </a:effectRef>
-          <a:fontRef idx="minor">
-            <a:schemeClr val="tx1"/>
-          </a:fontRef>
-        </p:style>
-      </p:cxnSp>
     </p:spTree>
     <p:extLst>
       <p:ext uri="{BB962C8B-B14F-4D97-AF65-F5344CB8AC3E}">
-        <p14:creationId xmlns:p14="http://schemas.microsoft.com/office/powerpoint/2010/main" val="1701865029"/>
+        <p14:creationId xmlns:p14="http://schemas.microsoft.com/office/powerpoint/2010/main" val="2501084304"/>
       </p:ext>
     </p:extLst>
   </p:cSld>
@@ -3670,6 +3795,471 @@
       </p:grpSpPr>
       <p:sp>
         <p:nvSpPr>
+          <p:cNvPr id="3" name="내용 개체 틀 2">
+            <a:extLst>
+              <a:ext uri="{FF2B5EF4-FFF2-40B4-BE49-F238E27FC236}">
+                <a16:creationId xmlns:a16="http://schemas.microsoft.com/office/drawing/2014/main" id="{F3E0445D-6120-B7A6-8C93-5DFA859689ED}"/>
+              </a:ext>
+            </a:extLst>
+          </p:cNvPr>
+          <p:cNvSpPr>
+            <a:spLocks noGrp="1"/>
+          </p:cNvSpPr>
+          <p:nvPr>
+            <p:ph idx="1"/>
+          </p:nvPr>
+        </p:nvSpPr>
+        <p:spPr>
+          <a:xfrm>
+            <a:off x="304800" y="2319204"/>
+            <a:ext cx="4428000" cy="1180396"/>
+          </a:xfrm>
+        </p:spPr>
+        <p:txBody>
+          <a:bodyPr>
+            <a:normAutofit lnSpcReduction="10000"/>
+          </a:bodyPr>
+          <a:lstStyle/>
+          <a:p>
+            <a:pPr marL="0" indent="0" algn="l">
+              <a:lnSpc>
+                <a:spcPct val="100000"/>
+              </a:lnSpc>
+              <a:buNone/>
+            </a:pPr>
+            <a:r>
+              <a:rPr lang="ko-KR" altLang="en-US" sz="1800" b="1" i="0">
+                <a:effectLst/>
+                <a:latin typeface="Noto Sans KR"/>
+              </a:rPr>
+              <a:t>현대인 식생활 문제 심화</a:t>
+            </a:r>
+          </a:p>
+          <a:p>
+            <a:pPr marL="0" indent="0">
+              <a:lnSpc>
+                <a:spcPct val="150000"/>
+              </a:lnSpc>
+              <a:buNone/>
+            </a:pPr>
+            <a:r>
+              <a:rPr lang="ko-KR" altLang="en-US" sz="1400" b="0" i="0">
+                <a:solidFill>
+                  <a:schemeClr val="tx1">
+                    <a:lumMod val="75000"/>
+                    <a:lumOff val="25000"/>
+                  </a:schemeClr>
+                </a:solidFill>
+                <a:effectLst/>
+                <a:latin typeface="Noto Sans KR"/>
+              </a:rPr>
+              <a:t>외식 및 가공식품 섭취로</a:t>
+            </a:r>
+            <a:r>
+              <a:rPr lang="ko-KR" altLang="en-US" sz="1400" b="1" i="0">
+                <a:solidFill>
+                  <a:schemeClr val="tx1">
+                    <a:lumMod val="75000"/>
+                    <a:lumOff val="25000"/>
+                  </a:schemeClr>
+                </a:solidFill>
+                <a:effectLst/>
+                <a:latin typeface="Noto Sans KR"/>
+              </a:rPr>
+              <a:t> </a:t>
+            </a:r>
+            <a:r>
+              <a:rPr lang="ko-KR" altLang="en-US" sz="1600" b="1" i="0">
+                <a:effectLst/>
+                <a:latin typeface="Noto Sans KR"/>
+              </a:rPr>
+              <a:t>지방</a:t>
+            </a:r>
+            <a:r>
+              <a:rPr lang="en-US" altLang="ko-KR" sz="1600" b="1" i="0">
+                <a:effectLst/>
+                <a:latin typeface="Noto Sans KR"/>
+              </a:rPr>
+              <a:t>, </a:t>
+            </a:r>
+            <a:r>
+              <a:rPr lang="ko-KR" altLang="en-US" sz="1600" b="1" i="0">
+                <a:effectLst/>
+                <a:latin typeface="Noto Sans KR"/>
+              </a:rPr>
+              <a:t>당류</a:t>
+            </a:r>
+            <a:r>
+              <a:rPr lang="en-US" altLang="ko-KR" sz="1600" b="1" i="0">
+                <a:effectLst/>
+                <a:latin typeface="Noto Sans KR"/>
+              </a:rPr>
+              <a:t>, </a:t>
+            </a:r>
+            <a:r>
+              <a:rPr lang="ko-KR" altLang="en-US" sz="1600" b="1" i="0">
+                <a:effectLst/>
+                <a:latin typeface="Noto Sans KR"/>
+              </a:rPr>
+              <a:t>나트륨의 과잉 섭취</a:t>
+            </a:r>
+            <a:r>
+              <a:rPr lang="ko-KR" altLang="en-US" sz="1400" i="0">
+                <a:solidFill>
+                  <a:schemeClr val="tx1">
+                    <a:lumMod val="75000"/>
+                    <a:lumOff val="25000"/>
+                  </a:schemeClr>
+                </a:solidFill>
+                <a:effectLst/>
+                <a:latin typeface="Noto Sans KR"/>
+              </a:rPr>
+              <a:t>가</a:t>
+            </a:r>
+            <a:r>
+              <a:rPr lang="ko-KR" altLang="en-US" sz="1400" b="1" i="0">
+                <a:solidFill>
+                  <a:schemeClr val="tx1">
+                    <a:lumMod val="75000"/>
+                    <a:lumOff val="25000"/>
+                  </a:schemeClr>
+                </a:solidFill>
+                <a:effectLst/>
+                <a:latin typeface="Noto Sans KR"/>
+              </a:rPr>
+              <a:t> </a:t>
+            </a:r>
+            <a:r>
+              <a:rPr lang="ko-KR" altLang="en-US" sz="1400" b="0" i="0">
+                <a:solidFill>
+                  <a:schemeClr val="tx1">
+                    <a:lumMod val="75000"/>
+                    <a:lumOff val="25000"/>
+                  </a:schemeClr>
+                </a:solidFill>
+                <a:effectLst/>
+                <a:latin typeface="Noto Sans KR"/>
+              </a:rPr>
+              <a:t>일상화되어 심각한 영양 불균형 초래</a:t>
+            </a:r>
+            <a:endParaRPr lang="ko-KR" altLang="en-US" sz="1400">
+              <a:solidFill>
+                <a:schemeClr val="tx1">
+                  <a:lumMod val="75000"/>
+                  <a:lumOff val="25000"/>
+                </a:schemeClr>
+              </a:solidFill>
+            </a:endParaRPr>
+          </a:p>
+        </p:txBody>
+      </p:sp>
+      <p:sp>
+        <p:nvSpPr>
+          <p:cNvPr id="12" name="내용 개체 틀 2">
+            <a:extLst>
+              <a:ext uri="{FF2B5EF4-FFF2-40B4-BE49-F238E27FC236}">
+                <a16:creationId xmlns:a16="http://schemas.microsoft.com/office/drawing/2014/main" id="{6F9FC355-108D-229C-8C47-754079D811C4}"/>
+              </a:ext>
+            </a:extLst>
+          </p:cNvPr>
+          <p:cNvSpPr txBox="1">
+            <a:spLocks/>
+          </p:cNvSpPr>
+          <p:nvPr/>
+        </p:nvSpPr>
+        <p:spPr>
+          <a:xfrm>
+            <a:off x="304800" y="4638409"/>
+            <a:ext cx="4428000" cy="1180396"/>
+          </a:xfrm>
+          <a:prstGeom prst="rect">
+            <a:avLst/>
+          </a:prstGeom>
+        </p:spPr>
+        <p:txBody>
+          <a:bodyPr vert="horz" lIns="91440" tIns="45720" rIns="91440" bIns="45720" rtlCol="0">
+            <a:normAutofit/>
+          </a:bodyPr>
+          <a:lstStyle>
+            <a:lvl1pPr marL="228600" indent="-228600" algn="l" defTabSz="914400" rtl="0" eaLnBrk="1" latinLnBrk="1" hangingPunct="1">
+              <a:lnSpc>
+                <a:spcPct val="90000"/>
+              </a:lnSpc>
+              <a:spcBef>
+                <a:spcPts val="1000"/>
+              </a:spcBef>
+              <a:buFont typeface="Arial" panose="020B0604020202020204" pitchFamily="34" charset="0"/>
+              <a:buChar char="•"/>
+              <a:defRPr sz="2800" kern="1200">
+                <a:solidFill>
+                  <a:schemeClr val="tx1"/>
+                </a:solidFill>
+                <a:latin typeface="+mn-lt"/>
+                <a:ea typeface="+mn-ea"/>
+                <a:cs typeface="+mn-cs"/>
+              </a:defRPr>
+            </a:lvl1pPr>
+            <a:lvl2pPr marL="685800" indent="-228600" algn="l" defTabSz="914400" rtl="0" eaLnBrk="1" latinLnBrk="1" hangingPunct="1">
+              <a:lnSpc>
+                <a:spcPct val="90000"/>
+              </a:lnSpc>
+              <a:spcBef>
+                <a:spcPts val="500"/>
+              </a:spcBef>
+              <a:buFont typeface="Arial" panose="020B0604020202020204" pitchFamily="34" charset="0"/>
+              <a:buChar char="•"/>
+              <a:defRPr sz="2400" kern="1200">
+                <a:solidFill>
+                  <a:schemeClr val="tx1"/>
+                </a:solidFill>
+                <a:latin typeface="+mn-lt"/>
+                <a:ea typeface="+mn-ea"/>
+                <a:cs typeface="+mn-cs"/>
+              </a:defRPr>
+            </a:lvl2pPr>
+            <a:lvl3pPr marL="1143000" indent="-228600" algn="l" defTabSz="914400" rtl="0" eaLnBrk="1" latinLnBrk="1" hangingPunct="1">
+              <a:lnSpc>
+                <a:spcPct val="90000"/>
+              </a:lnSpc>
+              <a:spcBef>
+                <a:spcPts val="500"/>
+              </a:spcBef>
+              <a:buFont typeface="Arial" panose="020B0604020202020204" pitchFamily="34" charset="0"/>
+              <a:buChar char="•"/>
+              <a:defRPr sz="2000" kern="1200">
+                <a:solidFill>
+                  <a:schemeClr val="tx1"/>
+                </a:solidFill>
+                <a:latin typeface="+mn-lt"/>
+                <a:ea typeface="+mn-ea"/>
+                <a:cs typeface="+mn-cs"/>
+              </a:defRPr>
+            </a:lvl3pPr>
+            <a:lvl4pPr marL="1600200" indent="-228600" algn="l" defTabSz="914400" rtl="0" eaLnBrk="1" latinLnBrk="1" hangingPunct="1">
+              <a:lnSpc>
+                <a:spcPct val="90000"/>
+              </a:lnSpc>
+              <a:spcBef>
+                <a:spcPts val="500"/>
+              </a:spcBef>
+              <a:buFont typeface="Arial" panose="020B0604020202020204" pitchFamily="34" charset="0"/>
+              <a:buChar char="•"/>
+              <a:defRPr sz="1800" kern="1200">
+                <a:solidFill>
+                  <a:schemeClr val="tx1"/>
+                </a:solidFill>
+                <a:latin typeface="+mn-lt"/>
+                <a:ea typeface="+mn-ea"/>
+                <a:cs typeface="+mn-cs"/>
+              </a:defRPr>
+            </a:lvl4pPr>
+            <a:lvl5pPr marL="2057400" indent="-228600" algn="l" defTabSz="914400" rtl="0" eaLnBrk="1" latinLnBrk="1" hangingPunct="1">
+              <a:lnSpc>
+                <a:spcPct val="90000"/>
+              </a:lnSpc>
+              <a:spcBef>
+                <a:spcPts val="500"/>
+              </a:spcBef>
+              <a:buFont typeface="Arial" panose="020B0604020202020204" pitchFamily="34" charset="0"/>
+              <a:buChar char="•"/>
+              <a:defRPr sz="1800" kern="1200">
+                <a:solidFill>
+                  <a:schemeClr val="tx1"/>
+                </a:solidFill>
+                <a:latin typeface="+mn-lt"/>
+                <a:ea typeface="+mn-ea"/>
+                <a:cs typeface="+mn-cs"/>
+              </a:defRPr>
+            </a:lvl5pPr>
+            <a:lvl6pPr marL="2514600" indent="-228600" algn="l" defTabSz="914400" rtl="0" eaLnBrk="1" latinLnBrk="1" hangingPunct="1">
+              <a:lnSpc>
+                <a:spcPct val="90000"/>
+              </a:lnSpc>
+              <a:spcBef>
+                <a:spcPts val="500"/>
+              </a:spcBef>
+              <a:buFont typeface="Arial" panose="020B0604020202020204" pitchFamily="34" charset="0"/>
+              <a:buChar char="•"/>
+              <a:defRPr sz="1800" kern="1200">
+                <a:solidFill>
+                  <a:schemeClr val="tx1"/>
+                </a:solidFill>
+                <a:latin typeface="+mn-lt"/>
+                <a:ea typeface="+mn-ea"/>
+                <a:cs typeface="+mn-cs"/>
+              </a:defRPr>
+            </a:lvl6pPr>
+            <a:lvl7pPr marL="2971800" indent="-228600" algn="l" defTabSz="914400" rtl="0" eaLnBrk="1" latinLnBrk="1" hangingPunct="1">
+              <a:lnSpc>
+                <a:spcPct val="90000"/>
+              </a:lnSpc>
+              <a:spcBef>
+                <a:spcPts val="500"/>
+              </a:spcBef>
+              <a:buFont typeface="Arial" panose="020B0604020202020204" pitchFamily="34" charset="0"/>
+              <a:buChar char="•"/>
+              <a:defRPr sz="1800" kern="1200">
+                <a:solidFill>
+                  <a:schemeClr val="tx1"/>
+                </a:solidFill>
+                <a:latin typeface="+mn-lt"/>
+                <a:ea typeface="+mn-ea"/>
+                <a:cs typeface="+mn-cs"/>
+              </a:defRPr>
+            </a:lvl7pPr>
+            <a:lvl8pPr marL="3429000" indent="-228600" algn="l" defTabSz="914400" rtl="0" eaLnBrk="1" latinLnBrk="1" hangingPunct="1">
+              <a:lnSpc>
+                <a:spcPct val="90000"/>
+              </a:lnSpc>
+              <a:spcBef>
+                <a:spcPts val="500"/>
+              </a:spcBef>
+              <a:buFont typeface="Arial" panose="020B0604020202020204" pitchFamily="34" charset="0"/>
+              <a:buChar char="•"/>
+              <a:defRPr sz="1800" kern="1200">
+                <a:solidFill>
+                  <a:schemeClr val="tx1"/>
+                </a:solidFill>
+                <a:latin typeface="+mn-lt"/>
+                <a:ea typeface="+mn-ea"/>
+                <a:cs typeface="+mn-cs"/>
+              </a:defRPr>
+            </a:lvl8pPr>
+            <a:lvl9pPr marL="3886200" indent="-228600" algn="l" defTabSz="914400" rtl="0" eaLnBrk="1" latinLnBrk="1" hangingPunct="1">
+              <a:lnSpc>
+                <a:spcPct val="90000"/>
+              </a:lnSpc>
+              <a:spcBef>
+                <a:spcPts val="500"/>
+              </a:spcBef>
+              <a:buFont typeface="Arial" panose="020B0604020202020204" pitchFamily="34" charset="0"/>
+              <a:buChar char="•"/>
+              <a:defRPr sz="1800" kern="1200">
+                <a:solidFill>
+                  <a:schemeClr val="tx1"/>
+                </a:solidFill>
+                <a:latin typeface="+mn-lt"/>
+                <a:ea typeface="+mn-ea"/>
+                <a:cs typeface="+mn-cs"/>
+              </a:defRPr>
+            </a:lvl9pPr>
+          </a:lstStyle>
+          <a:p>
+            <a:pPr marL="0" indent="0">
+              <a:buFont typeface="Arial" panose="020B0604020202020204" pitchFamily="34" charset="0"/>
+              <a:buNone/>
+            </a:pPr>
+            <a:r>
+              <a:rPr lang="ko-KR" altLang="en-US" sz="1800" b="1">
+                <a:latin typeface="Noto Sans KR"/>
+              </a:rPr>
+              <a:t>만성질환 위험 증가</a:t>
+            </a:r>
+          </a:p>
+          <a:p>
+            <a:pPr marL="0" indent="0">
+              <a:lnSpc>
+                <a:spcPct val="150000"/>
+              </a:lnSpc>
+              <a:buFont typeface="Arial" panose="020B0604020202020204" pitchFamily="34" charset="0"/>
+              <a:buNone/>
+            </a:pPr>
+            <a:r>
+              <a:rPr lang="ko-KR" altLang="en-US" sz="1400">
+                <a:solidFill>
+                  <a:schemeClr val="tx1">
+                    <a:lumMod val="75000"/>
+                    <a:lumOff val="25000"/>
+                  </a:schemeClr>
+                </a:solidFill>
+                <a:latin typeface="Noto Sans KR"/>
+              </a:rPr>
+              <a:t>잘못된 식습관으로 인해 </a:t>
+            </a:r>
+            <a:r>
+              <a:rPr lang="ko-KR" altLang="en-US" sz="1400" b="1">
+                <a:latin typeface="Noto Sans KR"/>
+              </a:rPr>
+              <a:t>고콜레스테롤혈증</a:t>
+            </a:r>
+            <a:r>
+              <a:rPr lang="ko-KR" altLang="en-US" sz="1400">
+                <a:solidFill>
+                  <a:schemeClr val="tx1">
+                    <a:lumMod val="75000"/>
+                    <a:lumOff val="25000"/>
+                  </a:schemeClr>
+                </a:solidFill>
+                <a:latin typeface="Noto Sans KR"/>
+              </a:rPr>
+              <a:t> 만성질환 유병률 증가</a:t>
+            </a:r>
+            <a:endParaRPr lang="ko-KR" altLang="en-US" sz="1400">
+              <a:solidFill>
+                <a:schemeClr val="tx1">
+                  <a:lumMod val="75000"/>
+                  <a:lumOff val="25000"/>
+                </a:schemeClr>
+              </a:solidFill>
+            </a:endParaRPr>
+          </a:p>
+        </p:txBody>
+      </p:sp>
+      <p:sp>
+        <p:nvSpPr>
+          <p:cNvPr id="4" name="직사각형 3">
+            <a:extLst>
+              <a:ext uri="{FF2B5EF4-FFF2-40B4-BE49-F238E27FC236}">
+                <a16:creationId xmlns:a16="http://schemas.microsoft.com/office/drawing/2014/main" id="{9BD01A12-581E-B7EB-1FA7-940AA8F5F3A2}"/>
+              </a:ext>
+            </a:extLst>
+          </p:cNvPr>
+          <p:cNvSpPr/>
+          <p:nvPr/>
+        </p:nvSpPr>
+        <p:spPr>
+          <a:xfrm>
+            <a:off x="0" y="0"/>
+            <a:ext cx="12192000" cy="1180396"/>
+          </a:xfrm>
+          <a:prstGeom prst="rect">
+            <a:avLst/>
+          </a:prstGeom>
+          <a:solidFill>
+            <a:schemeClr val="dk1">
+              <a:alpha val="80000"/>
+            </a:schemeClr>
+          </a:solidFill>
+          <a:ln>
+            <a:noFill/>
+          </a:ln>
+        </p:spPr>
+        <p:style>
+          <a:lnRef idx="2">
+            <a:schemeClr val="dk1">
+              <a:shade val="15000"/>
+            </a:schemeClr>
+          </a:lnRef>
+          <a:fillRef idx="1">
+            <a:schemeClr val="dk1"/>
+          </a:fillRef>
+          <a:effectRef idx="0">
+            <a:schemeClr val="dk1"/>
+          </a:effectRef>
+          <a:fontRef idx="minor">
+            <a:schemeClr val="lt1"/>
+          </a:fontRef>
+        </p:style>
+        <p:txBody>
+          <a:bodyPr rtlCol="0" anchor="ctr"/>
+          <a:lstStyle/>
+          <a:p>
+            <a:endParaRPr lang="ko-KR" altLang="en-US"/>
+          </a:p>
+        </p:txBody>
+      </p:sp>
+      <p:sp>
+        <p:nvSpPr>
           <p:cNvPr id="2" name="제목 1">
             <a:extLst>
               <a:ext uri="{FF2B5EF4-FFF2-40B4-BE49-F238E27FC236}">
@@ -3686,8 +4276,8 @@
         </p:nvSpPr>
         <p:spPr>
           <a:xfrm>
-            <a:off x="642251" y="696848"/>
-            <a:ext cx="2883105" cy="1325563"/>
+            <a:off x="603253" y="234292"/>
+            <a:ext cx="2009318" cy="946104"/>
           </a:xfrm>
         </p:spPr>
         <p:txBody>
@@ -3697,7 +4287,11 @@
           <a:lstStyle/>
           <a:p>
             <a:r>
-              <a:rPr lang="ko-KR" altLang="en-US" sz="3200" b="1"/>
+              <a:rPr lang="ko-KR" altLang="en-US" sz="3200" b="1">
+                <a:solidFill>
+                  <a:schemeClr val="bg1"/>
+                </a:solidFill>
+              </a:rPr>
               <a:t>기획의도</a:t>
             </a:r>
             <a:br>
@@ -3706,17 +4300,153 @@
             <a:r>
               <a:rPr lang="en-US" altLang="ko-KR" sz="1400" b="0" i="0">
                 <a:solidFill>
-                  <a:srgbClr val="6B7280"/>
+                  <a:schemeClr val="bg1">
+                    <a:lumMod val="75000"/>
+                  </a:schemeClr>
                 </a:solidFill>
                 <a:effectLst/>
                 <a:latin typeface="Noto Sans KR"/>
               </a:rPr>
               <a:t>Background &amp; Purpose</a:t>
             </a:r>
-            <a:endParaRPr lang="ko-KR" altLang="en-US" sz="1400" b="1"/>
+            <a:endParaRPr lang="ko-KR" altLang="en-US" sz="1400" b="1">
+              <a:solidFill>
+                <a:schemeClr val="bg1">
+                  <a:lumMod val="75000"/>
+                </a:schemeClr>
+              </a:solidFill>
+            </a:endParaRPr>
           </a:p>
         </p:txBody>
       </p:sp>
+      <p:pic>
+        <p:nvPicPr>
+          <p:cNvPr id="1034" name="Picture 10">
+            <a:extLst>
+              <a:ext uri="{FF2B5EF4-FFF2-40B4-BE49-F238E27FC236}">
+                <a16:creationId xmlns:a16="http://schemas.microsoft.com/office/drawing/2014/main" id="{9CA5E893-BE61-1B2C-5561-000A6EBB97A8}"/>
+              </a:ext>
+            </a:extLst>
+          </p:cNvPr>
+          <p:cNvPicPr>
+            <a:picLocks noChangeAspect="1" noChangeArrowheads="1"/>
+          </p:cNvPicPr>
+          <p:nvPr/>
+        </p:nvPicPr>
+        <p:blipFill>
+          <a:blip r:embed="rId3">
+            <a:extLst>
+              <a:ext uri="{28A0092B-C50C-407E-A947-70E740481C1C}">
+                <a14:useLocalDpi xmlns:a14="http://schemas.microsoft.com/office/drawing/2010/main" val="0"/>
+              </a:ext>
+            </a:extLst>
+          </a:blip>
+          <a:srcRect/>
+          <a:stretch>
+            <a:fillRect/>
+          </a:stretch>
+        </p:blipFill>
+        <p:spPr bwMode="auto">
+          <a:xfrm rot="5400000">
+            <a:off x="2320800" y="3854315"/>
+            <a:ext cx="396000" cy="396000"/>
+          </a:xfrm>
+          <a:prstGeom prst="rect">
+            <a:avLst/>
+          </a:prstGeom>
+          <a:noFill/>
+          <a:extLst>
+            <a:ext uri="{909E8E84-426E-40DD-AFC4-6F175D3DCCD1}">
+              <a14:hiddenFill xmlns:a14="http://schemas.microsoft.com/office/drawing/2010/main">
+                <a:solidFill>
+                  <a:srgbClr val="FFFFFF"/>
+                </a:solidFill>
+              </a14:hiddenFill>
+            </a:ext>
+          </a:extLst>
+        </p:spPr>
+      </p:pic>
+      <p:cxnSp>
+        <p:nvCxnSpPr>
+          <p:cNvPr id="16" name="직선 연결선 15">
+            <a:extLst>
+              <a:ext uri="{FF2B5EF4-FFF2-40B4-BE49-F238E27FC236}">
+                <a16:creationId xmlns:a16="http://schemas.microsoft.com/office/drawing/2014/main" id="{8ED8B41D-99E1-876D-2BFC-742037A8D708}"/>
+              </a:ext>
+            </a:extLst>
+          </p:cNvPr>
+          <p:cNvCxnSpPr>
+            <a:cxnSpLocks/>
+          </p:cNvCxnSpPr>
+          <p:nvPr/>
+        </p:nvCxnSpPr>
+        <p:spPr>
+          <a:xfrm>
+            <a:off x="4874400" y="1915525"/>
+            <a:ext cx="0" cy="4273580"/>
+          </a:xfrm>
+          <a:prstGeom prst="line">
+            <a:avLst/>
+          </a:prstGeom>
+          <a:ln>
+            <a:solidFill>
+              <a:schemeClr val="tx1">
+                <a:lumMod val="75000"/>
+                <a:lumOff val="25000"/>
+              </a:schemeClr>
+            </a:solidFill>
+          </a:ln>
+        </p:spPr>
+        <p:style>
+          <a:lnRef idx="2">
+            <a:schemeClr val="dk1"/>
+          </a:lnRef>
+          <a:fillRef idx="0">
+            <a:schemeClr val="dk1"/>
+          </a:fillRef>
+          <a:effectRef idx="1">
+            <a:schemeClr val="dk1"/>
+          </a:effectRef>
+          <a:fontRef idx="minor">
+            <a:schemeClr val="tx1"/>
+          </a:fontRef>
+        </p:style>
+      </p:cxnSp>
+    </p:spTree>
+    <p:extLst>
+      <p:ext uri="{BB962C8B-B14F-4D97-AF65-F5344CB8AC3E}">
+        <p14:creationId xmlns:p14="http://schemas.microsoft.com/office/powerpoint/2010/main" val="1197285767"/>
+      </p:ext>
+    </p:extLst>
+  </p:cSld>
+  <p:clrMapOvr>
+    <a:masterClrMapping/>
+  </p:clrMapOvr>
+  <p:extLst>
+    <p:ext uri="{6950BFC3-D8DA-4A85-94F7-54DA5524770B}">
+      <p188:commentRel xmlns:p188="http://schemas.microsoft.com/office/powerpoint/2018/8/main" r:id="rId2"/>
+    </p:ext>
+  </p:extLst>
+</p:sld>
+</file>
+
+<file path=ppt/slides/slide3.xml><?xml version="1.0" encoding="utf-8"?>
+<p:sld xmlns:a="http://schemas.openxmlformats.org/drawingml/2006/main" xmlns:r="http://schemas.openxmlformats.org/officeDocument/2006/relationships" xmlns:p="http://schemas.openxmlformats.org/presentationml/2006/main">
+  <p:cSld>
+    <p:spTree>
+      <p:nvGrpSpPr>
+        <p:cNvPr id="1" name=""/>
+        <p:cNvGrpSpPr/>
+        <p:nvPr/>
+      </p:nvGrpSpPr>
+      <p:grpSpPr>
+        <a:xfrm>
+          <a:off x="0" y="0"/>
+          <a:ext cx="0" cy="0"/>
+          <a:chOff x="0" y="0"/>
+          <a:chExt cx="0" cy="0"/>
+        </a:xfrm>
+      </p:grpSpPr>
       <p:sp>
         <p:nvSpPr>
           <p:cNvPr id="3" name="내용 개체 틀 2">
@@ -3735,15 +4465,20 @@
         </p:nvSpPr>
         <p:spPr>
           <a:xfrm>
-            <a:off x="1313243" y="2604670"/>
-            <a:ext cx="4782757" cy="965077"/>
+            <a:off x="1313243" y="2248604"/>
+            <a:ext cx="4889983" cy="1180396"/>
           </a:xfrm>
         </p:spPr>
         <p:txBody>
-          <a:bodyPr/>
+          <a:bodyPr>
+            <a:normAutofit/>
+          </a:bodyPr>
           <a:lstStyle/>
           <a:p>
             <a:pPr marL="0" indent="0" algn="l">
+              <a:lnSpc>
+                <a:spcPct val="100000"/>
+              </a:lnSpc>
               <a:buNone/>
             </a:pPr>
             <a:r>
@@ -3756,6 +4491,9 @@
           </a:p>
           <a:p>
             <a:pPr marL="0" indent="0">
+              <a:lnSpc>
+                <a:spcPct val="150000"/>
+              </a:lnSpc>
               <a:buNone/>
             </a:pPr>
             <a:r>
@@ -3769,7 +4507,7 @@
                 <a:effectLst/>
                 <a:latin typeface="Noto Sans KR"/>
               </a:rPr>
-              <a:t>외식 및 가공식품 섭취 증가</a:t>
+              <a:t>외식 및 가공식품 섭취로</a:t>
             </a:r>
             <a:r>
               <a:rPr lang="ko-KR" altLang="en-US" sz="1400" b="1" i="0">
@@ -3785,35 +4523,35 @@
               <a:t> </a:t>
             </a:r>
             <a:r>
-              <a:rPr lang="ko-KR" altLang="en-US" sz="1400" b="1" i="0">
+              <a:rPr lang="ko-KR" altLang="en-US" sz="1600" b="1" i="0">
                 <a:effectLst/>
                 <a:latin typeface="Noto Sans KR"/>
               </a:rPr>
               <a:t>지방</a:t>
             </a:r>
             <a:r>
-              <a:rPr lang="en-US" altLang="ko-KR" sz="1400" b="1" i="0">
+              <a:rPr lang="en-US" altLang="ko-KR" sz="1600" b="1" i="0">
                 <a:effectLst/>
                 <a:latin typeface="Noto Sans KR"/>
               </a:rPr>
               <a:t>, </a:t>
             </a:r>
             <a:r>
-              <a:rPr lang="ko-KR" altLang="en-US" sz="1400" b="1" i="0">
+              <a:rPr lang="ko-KR" altLang="en-US" sz="1600" b="1" i="0">
                 <a:effectLst/>
                 <a:latin typeface="Noto Sans KR"/>
               </a:rPr>
               <a:t>당류</a:t>
             </a:r>
             <a:r>
-              <a:rPr lang="en-US" altLang="ko-KR" sz="1400" b="1" i="0">
+              <a:rPr lang="en-US" altLang="ko-KR" sz="1600" b="1" i="0">
                 <a:effectLst/>
                 <a:latin typeface="Noto Sans KR"/>
               </a:rPr>
               <a:t>, </a:t>
             </a:r>
             <a:r>
-              <a:rPr lang="ko-KR" altLang="en-US" sz="1400" b="1" i="0">
+              <a:rPr lang="ko-KR" altLang="en-US" sz="1600" b="1" i="0">
                 <a:effectLst/>
                 <a:latin typeface="Noto Sans KR"/>
               </a:rPr>
@@ -3897,7 +4635,7 @@
         </p:blipFill>
         <p:spPr>
           <a:xfrm>
-            <a:off x="603253" y="2853208"/>
+            <a:off x="603253" y="2497142"/>
             <a:ext cx="468000" cy="468000"/>
           </a:xfrm>
           <a:prstGeom prst="rect">
@@ -4349,10 +5087,10 @@
       </p:pic>
       <p:sp>
         <p:nvSpPr>
-          <p:cNvPr id="11" name="내용 개체 틀 2">
+          <p:cNvPr id="12" name="내용 개체 틀 2">
             <a:extLst>
               <a:ext uri="{FF2B5EF4-FFF2-40B4-BE49-F238E27FC236}">
-                <a16:creationId xmlns:a16="http://schemas.microsoft.com/office/drawing/2014/main" id="{CD23C796-558C-4894-E4F8-A0200F1534FA}"/>
+                <a16:creationId xmlns:a16="http://schemas.microsoft.com/office/drawing/2014/main" id="{6F9FC355-108D-229C-8C47-754079D811C4}"/>
               </a:ext>
             </a:extLst>
           </p:cNvPr>
@@ -4363,8 +5101,8 @@
         </p:nvSpPr>
         <p:spPr>
           <a:xfrm>
-            <a:off x="7137781" y="4338512"/>
-            <a:ext cx="4782757" cy="965077"/>
+            <a:off x="1313244" y="4813418"/>
+            <a:ext cx="4452226" cy="1375687"/>
           </a:xfrm>
           <a:prstGeom prst="rect">
             <a:avLst/>
@@ -4547,11 +5285,14 @@
               <a:rPr lang="ko-KR" altLang="en-US" sz="1800" b="1">
                 <a:latin typeface="Noto Sans KR"/>
               </a:rPr>
-              <a:t>정량적 분석 및 맞춤형 가이드</a:t>
+              <a:t>만성질환 위험 증가</a:t>
             </a:r>
           </a:p>
           <a:p>
             <a:pPr marL="0" indent="0">
+              <a:lnSpc>
+                <a:spcPct val="150000"/>
+              </a:lnSpc>
               <a:buFont typeface="Arial" panose="020B0604020202020204" pitchFamily="34" charset="0"/>
               <a:buNone/>
             </a:pPr>
@@ -4565,10 +5306,16 @@
                 </a:solidFill>
                 <a:latin typeface="Noto Sans KR"/>
               </a:rPr>
-              <a:t>단순 식이조절을 넘어</a:t>
-            </a:r>
-            <a:r>
-              <a:rPr lang="en-US" altLang="ko-KR" sz="1400">
+              <a:t>잘못된 식습관으로 인해 </a:t>
+            </a:r>
+            <a:r>
+              <a:rPr lang="ko-KR" altLang="en-US" sz="1400" b="1">
+                <a:latin typeface="Noto Sans KR"/>
+              </a:rPr>
+              <a:t>고콜레스테롤혈증</a:t>
+            </a:r>
+            <a:r>
+              <a:rPr lang="ko-KR" altLang="en-US" sz="1400">
                 <a:solidFill>
                   <a:schemeClr val="tx1">
                     <a:lumMod val="75000"/>
@@ -4577,37 +5324,7 @@
                 </a:solidFill>
                 <a:latin typeface="Noto Sans KR"/>
               </a:rPr>
-              <a:t>, </a:t>
-            </a:r>
-            <a:r>
-              <a:rPr lang="ko-KR" altLang="en-US" sz="1400">
-                <a:solidFill>
-                  <a:schemeClr val="tx1">
-                    <a:lumMod val="75000"/>
-                    <a:lumOff val="25000"/>
-                  </a:schemeClr>
-                </a:solidFill>
-                <a:latin typeface="Noto Sans KR"/>
-              </a:rPr>
-              <a:t>데이터 기반의 </a:t>
-            </a:r>
-            <a:r>
-              <a:rPr lang="ko-KR" altLang="en-US" sz="1400" b="1">
-                <a:latin typeface="Noto Sans KR"/>
-              </a:rPr>
-              <a:t>정량적 분석</a:t>
-            </a:r>
-            <a:r>
-              <a:rPr lang="ko-KR" altLang="en-US" sz="1400">
-                <a:solidFill>
-                  <a:schemeClr val="tx1">
-                    <a:lumMod val="75000"/>
-                    <a:lumOff val="25000"/>
-                  </a:schemeClr>
-                </a:solidFill>
-                <a:latin typeface="Noto Sans KR"/>
-              </a:rPr>
-              <a:t>을 통한 개인 맞춤형 식습관 개선 가이드가 필요</a:t>
+              <a:t> 만성질환 유병률 증가</a:t>
             </a:r>
             <a:endParaRPr lang="ko-KR" altLang="en-US" sz="1400">
               <a:solidFill>
@@ -4620,492 +5337,12 @@
           </a:p>
         </p:txBody>
       </p:sp>
-      <p:sp>
-        <p:nvSpPr>
-          <p:cNvPr id="12" name="내용 개체 틀 2">
+      <p:pic>
+        <p:nvPicPr>
+          <p:cNvPr id="17" name="그림 16" descr="블랙, 어둠이(가) 표시된 사진&#10;&#10;AI가 생성한 콘텐츠는 부정확할 수 있습니다.">
             <a:extLst>
               <a:ext uri="{FF2B5EF4-FFF2-40B4-BE49-F238E27FC236}">
-                <a16:creationId xmlns:a16="http://schemas.microsoft.com/office/drawing/2014/main" id="{6F9FC355-108D-229C-8C47-754079D811C4}"/>
-              </a:ext>
-            </a:extLst>
-          </p:cNvPr>
-          <p:cNvSpPr txBox="1">
-            <a:spLocks/>
-          </p:cNvSpPr>
-          <p:nvPr/>
-        </p:nvSpPr>
-        <p:spPr>
-          <a:xfrm>
-            <a:off x="7137781" y="2604670"/>
-            <a:ext cx="4782757" cy="965077"/>
-          </a:xfrm>
-          <a:prstGeom prst="rect">
-            <a:avLst/>
-          </a:prstGeom>
-        </p:spPr>
-        <p:txBody>
-          <a:bodyPr vert="horz" lIns="91440" tIns="45720" rIns="91440" bIns="45720" rtlCol="0">
-            <a:normAutofit/>
-          </a:bodyPr>
-          <a:lstStyle>
-            <a:lvl1pPr marL="228600" indent="-228600" algn="l" defTabSz="914400" rtl="0" eaLnBrk="1" latinLnBrk="1" hangingPunct="1">
-              <a:lnSpc>
-                <a:spcPct val="90000"/>
-              </a:lnSpc>
-              <a:spcBef>
-                <a:spcPts val="1000"/>
-              </a:spcBef>
-              <a:buFont typeface="Arial" panose="020B0604020202020204" pitchFamily="34" charset="0"/>
-              <a:buChar char="•"/>
-              <a:defRPr sz="2800" kern="1200">
-                <a:solidFill>
-                  <a:schemeClr val="tx1"/>
-                </a:solidFill>
-                <a:latin typeface="+mn-lt"/>
-                <a:ea typeface="+mn-ea"/>
-                <a:cs typeface="+mn-cs"/>
-              </a:defRPr>
-            </a:lvl1pPr>
-            <a:lvl2pPr marL="685800" indent="-228600" algn="l" defTabSz="914400" rtl="0" eaLnBrk="1" latinLnBrk="1" hangingPunct="1">
-              <a:lnSpc>
-                <a:spcPct val="90000"/>
-              </a:lnSpc>
-              <a:spcBef>
-                <a:spcPts val="500"/>
-              </a:spcBef>
-              <a:buFont typeface="Arial" panose="020B0604020202020204" pitchFamily="34" charset="0"/>
-              <a:buChar char="•"/>
-              <a:defRPr sz="2400" kern="1200">
-                <a:solidFill>
-                  <a:schemeClr val="tx1"/>
-                </a:solidFill>
-                <a:latin typeface="+mn-lt"/>
-                <a:ea typeface="+mn-ea"/>
-                <a:cs typeface="+mn-cs"/>
-              </a:defRPr>
-            </a:lvl2pPr>
-            <a:lvl3pPr marL="1143000" indent="-228600" algn="l" defTabSz="914400" rtl="0" eaLnBrk="1" latinLnBrk="1" hangingPunct="1">
-              <a:lnSpc>
-                <a:spcPct val="90000"/>
-              </a:lnSpc>
-              <a:spcBef>
-                <a:spcPts val="500"/>
-              </a:spcBef>
-              <a:buFont typeface="Arial" panose="020B0604020202020204" pitchFamily="34" charset="0"/>
-              <a:buChar char="•"/>
-              <a:defRPr sz="2000" kern="1200">
-                <a:solidFill>
-                  <a:schemeClr val="tx1"/>
-                </a:solidFill>
-                <a:latin typeface="+mn-lt"/>
-                <a:ea typeface="+mn-ea"/>
-                <a:cs typeface="+mn-cs"/>
-              </a:defRPr>
-            </a:lvl3pPr>
-            <a:lvl4pPr marL="1600200" indent="-228600" algn="l" defTabSz="914400" rtl="0" eaLnBrk="1" latinLnBrk="1" hangingPunct="1">
-              <a:lnSpc>
-                <a:spcPct val="90000"/>
-              </a:lnSpc>
-              <a:spcBef>
-                <a:spcPts val="500"/>
-              </a:spcBef>
-              <a:buFont typeface="Arial" panose="020B0604020202020204" pitchFamily="34" charset="0"/>
-              <a:buChar char="•"/>
-              <a:defRPr sz="1800" kern="1200">
-                <a:solidFill>
-                  <a:schemeClr val="tx1"/>
-                </a:solidFill>
-                <a:latin typeface="+mn-lt"/>
-                <a:ea typeface="+mn-ea"/>
-                <a:cs typeface="+mn-cs"/>
-              </a:defRPr>
-            </a:lvl4pPr>
-            <a:lvl5pPr marL="2057400" indent="-228600" algn="l" defTabSz="914400" rtl="0" eaLnBrk="1" latinLnBrk="1" hangingPunct="1">
-              <a:lnSpc>
-                <a:spcPct val="90000"/>
-              </a:lnSpc>
-              <a:spcBef>
-                <a:spcPts val="500"/>
-              </a:spcBef>
-              <a:buFont typeface="Arial" panose="020B0604020202020204" pitchFamily="34" charset="0"/>
-              <a:buChar char="•"/>
-              <a:defRPr sz="1800" kern="1200">
-                <a:solidFill>
-                  <a:schemeClr val="tx1"/>
-                </a:solidFill>
-                <a:latin typeface="+mn-lt"/>
-                <a:ea typeface="+mn-ea"/>
-                <a:cs typeface="+mn-cs"/>
-              </a:defRPr>
-            </a:lvl5pPr>
-            <a:lvl6pPr marL="2514600" indent="-228600" algn="l" defTabSz="914400" rtl="0" eaLnBrk="1" latinLnBrk="1" hangingPunct="1">
-              <a:lnSpc>
-                <a:spcPct val="90000"/>
-              </a:lnSpc>
-              <a:spcBef>
-                <a:spcPts val="500"/>
-              </a:spcBef>
-              <a:buFont typeface="Arial" panose="020B0604020202020204" pitchFamily="34" charset="0"/>
-              <a:buChar char="•"/>
-              <a:defRPr sz="1800" kern="1200">
-                <a:solidFill>
-                  <a:schemeClr val="tx1"/>
-                </a:solidFill>
-                <a:latin typeface="+mn-lt"/>
-                <a:ea typeface="+mn-ea"/>
-                <a:cs typeface="+mn-cs"/>
-              </a:defRPr>
-            </a:lvl6pPr>
-            <a:lvl7pPr marL="2971800" indent="-228600" algn="l" defTabSz="914400" rtl="0" eaLnBrk="1" latinLnBrk="1" hangingPunct="1">
-              <a:lnSpc>
-                <a:spcPct val="90000"/>
-              </a:lnSpc>
-              <a:spcBef>
-                <a:spcPts val="500"/>
-              </a:spcBef>
-              <a:buFont typeface="Arial" panose="020B0604020202020204" pitchFamily="34" charset="0"/>
-              <a:buChar char="•"/>
-              <a:defRPr sz="1800" kern="1200">
-                <a:solidFill>
-                  <a:schemeClr val="tx1"/>
-                </a:solidFill>
-                <a:latin typeface="+mn-lt"/>
-                <a:ea typeface="+mn-ea"/>
-                <a:cs typeface="+mn-cs"/>
-              </a:defRPr>
-            </a:lvl7pPr>
-            <a:lvl8pPr marL="3429000" indent="-228600" algn="l" defTabSz="914400" rtl="0" eaLnBrk="1" latinLnBrk="1" hangingPunct="1">
-              <a:lnSpc>
-                <a:spcPct val="90000"/>
-              </a:lnSpc>
-              <a:spcBef>
-                <a:spcPts val="500"/>
-              </a:spcBef>
-              <a:buFont typeface="Arial" panose="020B0604020202020204" pitchFamily="34" charset="0"/>
-              <a:buChar char="•"/>
-              <a:defRPr sz="1800" kern="1200">
-                <a:solidFill>
-                  <a:schemeClr val="tx1"/>
-                </a:solidFill>
-                <a:latin typeface="+mn-lt"/>
-                <a:ea typeface="+mn-ea"/>
-                <a:cs typeface="+mn-cs"/>
-              </a:defRPr>
-            </a:lvl8pPr>
-            <a:lvl9pPr marL="3886200" indent="-228600" algn="l" defTabSz="914400" rtl="0" eaLnBrk="1" latinLnBrk="1" hangingPunct="1">
-              <a:lnSpc>
-                <a:spcPct val="90000"/>
-              </a:lnSpc>
-              <a:spcBef>
-                <a:spcPts val="500"/>
-              </a:spcBef>
-              <a:buFont typeface="Arial" panose="020B0604020202020204" pitchFamily="34" charset="0"/>
-              <a:buChar char="•"/>
-              <a:defRPr sz="1800" kern="1200">
-                <a:solidFill>
-                  <a:schemeClr val="tx1"/>
-                </a:solidFill>
-                <a:latin typeface="+mn-lt"/>
-                <a:ea typeface="+mn-ea"/>
-                <a:cs typeface="+mn-cs"/>
-              </a:defRPr>
-            </a:lvl9pPr>
-          </a:lstStyle>
-          <a:p>
-            <a:pPr marL="0" indent="0">
-              <a:buFont typeface="Arial" panose="020B0604020202020204" pitchFamily="34" charset="0"/>
-              <a:buNone/>
-            </a:pPr>
-            <a:r>
-              <a:rPr lang="ko-KR" altLang="en-US" sz="1800" b="1">
-                <a:latin typeface="Noto Sans KR"/>
-              </a:rPr>
-              <a:t>만성질환 위험 증가</a:t>
-            </a:r>
-          </a:p>
-          <a:p>
-            <a:pPr marL="0" indent="0">
-              <a:buFont typeface="Arial" panose="020B0604020202020204" pitchFamily="34" charset="0"/>
-              <a:buNone/>
-            </a:pPr>
-            <a:r>
-              <a:rPr lang="ko-KR" altLang="en-US" sz="1400">
-                <a:solidFill>
-                  <a:schemeClr val="tx1">
-                    <a:lumMod val="75000"/>
-                    <a:lumOff val="25000"/>
-                  </a:schemeClr>
-                </a:solidFill>
-                <a:latin typeface="Noto Sans KR"/>
-              </a:rPr>
-              <a:t>잘못된 식습관으로 인해 </a:t>
-            </a:r>
-            <a:r>
-              <a:rPr lang="ko-KR" altLang="en-US" sz="1400" b="1">
-                <a:latin typeface="Noto Sans KR"/>
-              </a:rPr>
-              <a:t>이상지질혈증</a:t>
-            </a:r>
-            <a:r>
-              <a:rPr lang="ko-KR" altLang="en-US" sz="1400">
-                <a:solidFill>
-                  <a:schemeClr val="tx1">
-                    <a:lumMod val="75000"/>
-                    <a:lumOff val="25000"/>
-                  </a:schemeClr>
-                </a:solidFill>
-                <a:latin typeface="Noto Sans KR"/>
-              </a:rPr>
-              <a:t>으로 인한 만성질환 유병률 증가</a:t>
-            </a:r>
-            <a:endParaRPr lang="ko-KR" altLang="en-US" sz="1400">
-              <a:solidFill>
-                <a:schemeClr val="tx1">
-                  <a:lumMod val="75000"/>
-                  <a:lumOff val="25000"/>
-                </a:schemeClr>
-              </a:solidFill>
-            </a:endParaRPr>
-          </a:p>
-        </p:txBody>
-      </p:sp>
-      <p:sp>
-        <p:nvSpPr>
-          <p:cNvPr id="13" name="내용 개체 틀 2">
-            <a:extLst>
-              <a:ext uri="{FF2B5EF4-FFF2-40B4-BE49-F238E27FC236}">
-                <a16:creationId xmlns:a16="http://schemas.microsoft.com/office/drawing/2014/main" id="{5843F2E1-287C-59D7-B75A-AA5F67E08038}"/>
-              </a:ext>
-            </a:extLst>
-          </p:cNvPr>
-          <p:cNvSpPr txBox="1">
-            <a:spLocks/>
-          </p:cNvSpPr>
-          <p:nvPr/>
-        </p:nvSpPr>
-        <p:spPr>
-          <a:xfrm>
-            <a:off x="1313242" y="4338512"/>
-            <a:ext cx="4782757" cy="965077"/>
-          </a:xfrm>
-          <a:prstGeom prst="rect">
-            <a:avLst/>
-          </a:prstGeom>
-        </p:spPr>
-        <p:txBody>
-          <a:bodyPr vert="horz" lIns="91440" tIns="45720" rIns="91440" bIns="45720" rtlCol="0">
-            <a:normAutofit/>
-          </a:bodyPr>
-          <a:lstStyle>
-            <a:lvl1pPr marL="228600" indent="-228600" algn="l" defTabSz="914400" rtl="0" eaLnBrk="1" latinLnBrk="1" hangingPunct="1">
-              <a:lnSpc>
-                <a:spcPct val="90000"/>
-              </a:lnSpc>
-              <a:spcBef>
-                <a:spcPts val="1000"/>
-              </a:spcBef>
-              <a:buFont typeface="Arial" panose="020B0604020202020204" pitchFamily="34" charset="0"/>
-              <a:buChar char="•"/>
-              <a:defRPr sz="2800" kern="1200">
-                <a:solidFill>
-                  <a:schemeClr val="tx1"/>
-                </a:solidFill>
-                <a:latin typeface="+mn-lt"/>
-                <a:ea typeface="+mn-ea"/>
-                <a:cs typeface="+mn-cs"/>
-              </a:defRPr>
-            </a:lvl1pPr>
-            <a:lvl2pPr marL="685800" indent="-228600" algn="l" defTabSz="914400" rtl="0" eaLnBrk="1" latinLnBrk="1" hangingPunct="1">
-              <a:lnSpc>
-                <a:spcPct val="90000"/>
-              </a:lnSpc>
-              <a:spcBef>
-                <a:spcPts val="500"/>
-              </a:spcBef>
-              <a:buFont typeface="Arial" panose="020B0604020202020204" pitchFamily="34" charset="0"/>
-              <a:buChar char="•"/>
-              <a:defRPr sz="2400" kern="1200">
-                <a:solidFill>
-                  <a:schemeClr val="tx1"/>
-                </a:solidFill>
-                <a:latin typeface="+mn-lt"/>
-                <a:ea typeface="+mn-ea"/>
-                <a:cs typeface="+mn-cs"/>
-              </a:defRPr>
-            </a:lvl2pPr>
-            <a:lvl3pPr marL="1143000" indent="-228600" algn="l" defTabSz="914400" rtl="0" eaLnBrk="1" latinLnBrk="1" hangingPunct="1">
-              <a:lnSpc>
-                <a:spcPct val="90000"/>
-              </a:lnSpc>
-              <a:spcBef>
-                <a:spcPts val="500"/>
-              </a:spcBef>
-              <a:buFont typeface="Arial" panose="020B0604020202020204" pitchFamily="34" charset="0"/>
-              <a:buChar char="•"/>
-              <a:defRPr sz="2000" kern="1200">
-                <a:solidFill>
-                  <a:schemeClr val="tx1"/>
-                </a:solidFill>
-                <a:latin typeface="+mn-lt"/>
-                <a:ea typeface="+mn-ea"/>
-                <a:cs typeface="+mn-cs"/>
-              </a:defRPr>
-            </a:lvl3pPr>
-            <a:lvl4pPr marL="1600200" indent="-228600" algn="l" defTabSz="914400" rtl="0" eaLnBrk="1" latinLnBrk="1" hangingPunct="1">
-              <a:lnSpc>
-                <a:spcPct val="90000"/>
-              </a:lnSpc>
-              <a:spcBef>
-                <a:spcPts val="500"/>
-              </a:spcBef>
-              <a:buFont typeface="Arial" panose="020B0604020202020204" pitchFamily="34" charset="0"/>
-              <a:buChar char="•"/>
-              <a:defRPr sz="1800" kern="1200">
-                <a:solidFill>
-                  <a:schemeClr val="tx1"/>
-                </a:solidFill>
-                <a:latin typeface="+mn-lt"/>
-                <a:ea typeface="+mn-ea"/>
-                <a:cs typeface="+mn-cs"/>
-              </a:defRPr>
-            </a:lvl4pPr>
-            <a:lvl5pPr marL="2057400" indent="-228600" algn="l" defTabSz="914400" rtl="0" eaLnBrk="1" latinLnBrk="1" hangingPunct="1">
-              <a:lnSpc>
-                <a:spcPct val="90000"/>
-              </a:lnSpc>
-              <a:spcBef>
-                <a:spcPts val="500"/>
-              </a:spcBef>
-              <a:buFont typeface="Arial" panose="020B0604020202020204" pitchFamily="34" charset="0"/>
-              <a:buChar char="•"/>
-              <a:defRPr sz="1800" kern="1200">
-                <a:solidFill>
-                  <a:schemeClr val="tx1"/>
-                </a:solidFill>
-                <a:latin typeface="+mn-lt"/>
-                <a:ea typeface="+mn-ea"/>
-                <a:cs typeface="+mn-cs"/>
-              </a:defRPr>
-            </a:lvl5pPr>
-            <a:lvl6pPr marL="2514600" indent="-228600" algn="l" defTabSz="914400" rtl="0" eaLnBrk="1" latinLnBrk="1" hangingPunct="1">
-              <a:lnSpc>
-                <a:spcPct val="90000"/>
-              </a:lnSpc>
-              <a:spcBef>
-                <a:spcPts val="500"/>
-              </a:spcBef>
-              <a:buFont typeface="Arial" panose="020B0604020202020204" pitchFamily="34" charset="0"/>
-              <a:buChar char="•"/>
-              <a:defRPr sz="1800" kern="1200">
-                <a:solidFill>
-                  <a:schemeClr val="tx1"/>
-                </a:solidFill>
-                <a:latin typeface="+mn-lt"/>
-                <a:ea typeface="+mn-ea"/>
-                <a:cs typeface="+mn-cs"/>
-              </a:defRPr>
-            </a:lvl6pPr>
-            <a:lvl7pPr marL="2971800" indent="-228600" algn="l" defTabSz="914400" rtl="0" eaLnBrk="1" latinLnBrk="1" hangingPunct="1">
-              <a:lnSpc>
-                <a:spcPct val="90000"/>
-              </a:lnSpc>
-              <a:spcBef>
-                <a:spcPts val="500"/>
-              </a:spcBef>
-              <a:buFont typeface="Arial" panose="020B0604020202020204" pitchFamily="34" charset="0"/>
-              <a:buChar char="•"/>
-              <a:defRPr sz="1800" kern="1200">
-                <a:solidFill>
-                  <a:schemeClr val="tx1"/>
-                </a:solidFill>
-                <a:latin typeface="+mn-lt"/>
-                <a:ea typeface="+mn-ea"/>
-                <a:cs typeface="+mn-cs"/>
-              </a:defRPr>
-            </a:lvl7pPr>
-            <a:lvl8pPr marL="3429000" indent="-228600" algn="l" defTabSz="914400" rtl="0" eaLnBrk="1" latinLnBrk="1" hangingPunct="1">
-              <a:lnSpc>
-                <a:spcPct val="90000"/>
-              </a:lnSpc>
-              <a:spcBef>
-                <a:spcPts val="500"/>
-              </a:spcBef>
-              <a:buFont typeface="Arial" panose="020B0604020202020204" pitchFamily="34" charset="0"/>
-              <a:buChar char="•"/>
-              <a:defRPr sz="1800" kern="1200">
-                <a:solidFill>
-                  <a:schemeClr val="tx1"/>
-                </a:solidFill>
-                <a:latin typeface="+mn-lt"/>
-                <a:ea typeface="+mn-ea"/>
-                <a:cs typeface="+mn-cs"/>
-              </a:defRPr>
-            </a:lvl8pPr>
-            <a:lvl9pPr marL="3886200" indent="-228600" algn="l" defTabSz="914400" rtl="0" eaLnBrk="1" latinLnBrk="1" hangingPunct="1">
-              <a:lnSpc>
-                <a:spcPct val="90000"/>
-              </a:lnSpc>
-              <a:spcBef>
-                <a:spcPts val="500"/>
-              </a:spcBef>
-              <a:buFont typeface="Arial" panose="020B0604020202020204" pitchFamily="34" charset="0"/>
-              <a:buChar char="•"/>
-              <a:defRPr sz="1800" kern="1200">
-                <a:solidFill>
-                  <a:schemeClr val="tx1"/>
-                </a:solidFill>
-                <a:latin typeface="+mn-lt"/>
-                <a:ea typeface="+mn-ea"/>
-                <a:cs typeface="+mn-cs"/>
-              </a:defRPr>
-            </a:lvl9pPr>
-          </a:lstStyle>
-          <a:p>
-            <a:pPr marL="0" indent="0">
-              <a:buFont typeface="Arial" panose="020B0604020202020204" pitchFamily="34" charset="0"/>
-              <a:buNone/>
-            </a:pPr>
-            <a:r>
-              <a:rPr lang="ko-KR" altLang="en-US" sz="1800" b="1">
-                <a:latin typeface="Noto Sans KR"/>
-              </a:rPr>
-              <a:t>개인별 특성</a:t>
-            </a:r>
-          </a:p>
-          <a:p>
-            <a:pPr marL="0" indent="0">
-              <a:buFont typeface="Arial" panose="020B0604020202020204" pitchFamily="34" charset="0"/>
-              <a:buNone/>
-            </a:pPr>
-            <a:r>
-              <a:rPr lang="ko-KR" altLang="en-US" sz="1400">
-                <a:solidFill>
-                  <a:schemeClr val="tx1">
-                    <a:lumMod val="75000"/>
-                    <a:lumOff val="25000"/>
-                  </a:schemeClr>
-                </a:solidFill>
-                <a:latin typeface="Noto Sans KR"/>
-              </a:rPr>
-              <a:t>동일한 식단을 테스트트</a:t>
-            </a:r>
-            <a:endParaRPr lang="ko-KR" altLang="en-US" sz="1400">
-              <a:solidFill>
-                <a:schemeClr val="tx1">
-                  <a:lumMod val="75000"/>
-                  <a:lumOff val="25000"/>
-                </a:schemeClr>
-              </a:solidFill>
-            </a:endParaRPr>
-          </a:p>
-        </p:txBody>
-      </p:sp>
-      <p:pic>
-        <p:nvPicPr>
-          <p:cNvPr id="15" name="그림 14" descr="블랙, 어둠이(가) 표시된 사진&#10;&#10;AI가 생성한 콘텐츠는 부정확할 수 있습니다.">
-            <a:extLst>
-              <a:ext uri="{FF2B5EF4-FFF2-40B4-BE49-F238E27FC236}">
-                <a16:creationId xmlns:a16="http://schemas.microsoft.com/office/drawing/2014/main" id="{BFB87C0F-DED0-CA81-9198-4B4F7654964E}"/>
+                <a16:creationId xmlns:a16="http://schemas.microsoft.com/office/drawing/2014/main" id="{2D4F120A-9945-AF4B-0051-06D1126780D8}"/>
               </a:ext>
             </a:extLst>
           </p:cNvPr>
@@ -5128,7 +5365,7 @@
         </p:blipFill>
         <p:spPr>
           <a:xfrm>
-            <a:off x="603252" y="4587050"/>
+            <a:off x="603253" y="5080397"/>
             <a:ext cx="468000" cy="468000"/>
           </a:xfrm>
           <a:prstGeom prst="rect">
@@ -5136,17 +5373,131 @@
           </a:prstGeom>
         </p:spPr>
       </p:pic>
+      <p:sp>
+        <p:nvSpPr>
+          <p:cNvPr id="4" name="직사각형 3">
+            <a:extLst>
+              <a:ext uri="{FF2B5EF4-FFF2-40B4-BE49-F238E27FC236}">
+                <a16:creationId xmlns:a16="http://schemas.microsoft.com/office/drawing/2014/main" id="{9BD01A12-581E-B7EB-1FA7-940AA8F5F3A2}"/>
+              </a:ext>
+            </a:extLst>
+          </p:cNvPr>
+          <p:cNvSpPr/>
+          <p:nvPr/>
+        </p:nvSpPr>
+        <p:spPr>
+          <a:xfrm>
+            <a:off x="0" y="0"/>
+            <a:ext cx="12192000" cy="1180396"/>
+          </a:xfrm>
+          <a:prstGeom prst="rect">
+            <a:avLst/>
+          </a:prstGeom>
+          <a:solidFill>
+            <a:schemeClr val="dk1">
+              <a:alpha val="80000"/>
+            </a:schemeClr>
+          </a:solidFill>
+          <a:ln>
+            <a:noFill/>
+          </a:ln>
+        </p:spPr>
+        <p:style>
+          <a:lnRef idx="2">
+            <a:schemeClr val="dk1">
+              <a:shade val="15000"/>
+            </a:schemeClr>
+          </a:lnRef>
+          <a:fillRef idx="1">
+            <a:schemeClr val="dk1"/>
+          </a:fillRef>
+          <a:effectRef idx="0">
+            <a:schemeClr val="dk1"/>
+          </a:effectRef>
+          <a:fontRef idx="minor">
+            <a:schemeClr val="lt1"/>
+          </a:fontRef>
+        </p:style>
+        <p:txBody>
+          <a:bodyPr rtlCol="0" anchor="ctr"/>
+          <a:lstStyle/>
+          <a:p>
+            <a:endParaRPr lang="ko-KR" altLang="en-US"/>
+          </a:p>
+        </p:txBody>
+      </p:sp>
+      <p:sp>
+        <p:nvSpPr>
+          <p:cNvPr id="2" name="제목 1">
+            <a:extLst>
+              <a:ext uri="{FF2B5EF4-FFF2-40B4-BE49-F238E27FC236}">
+                <a16:creationId xmlns:a16="http://schemas.microsoft.com/office/drawing/2014/main" id="{3085BA4F-DA62-4ACF-71F5-86330591C96A}"/>
+              </a:ext>
+            </a:extLst>
+          </p:cNvPr>
+          <p:cNvSpPr>
+            <a:spLocks noGrp="1"/>
+          </p:cNvSpPr>
+          <p:nvPr>
+            <p:ph type="title"/>
+          </p:nvPr>
+        </p:nvSpPr>
+        <p:spPr>
+          <a:xfrm>
+            <a:off x="603253" y="234292"/>
+            <a:ext cx="2009318" cy="946104"/>
+          </a:xfrm>
+        </p:spPr>
+        <p:txBody>
+          <a:bodyPr>
+            <a:normAutofit/>
+          </a:bodyPr>
+          <a:lstStyle/>
+          <a:p>
+            <a:r>
+              <a:rPr lang="ko-KR" altLang="en-US" sz="3200" b="1">
+                <a:solidFill>
+                  <a:schemeClr val="bg1"/>
+                </a:solidFill>
+              </a:rPr>
+              <a:t>기획의도</a:t>
+            </a:r>
+            <a:br>
+              <a:rPr lang="en-US" altLang="ko-KR" sz="3200" b="1"/>
+            </a:br>
+            <a:r>
+              <a:rPr lang="en-US" altLang="ko-KR" sz="1400" b="0" i="0">
+                <a:solidFill>
+                  <a:schemeClr val="bg1">
+                    <a:lumMod val="75000"/>
+                  </a:schemeClr>
+                </a:solidFill>
+                <a:effectLst/>
+                <a:latin typeface="Noto Sans KR"/>
+              </a:rPr>
+              <a:t>Background &amp; Purpose</a:t>
+            </a:r>
+            <a:endParaRPr lang="ko-KR" altLang="en-US" sz="1400" b="1">
+              <a:solidFill>
+                <a:schemeClr val="bg1">
+                  <a:lumMod val="75000"/>
+                </a:schemeClr>
+              </a:solidFill>
+            </a:endParaRPr>
+          </a:p>
+        </p:txBody>
+      </p:sp>
       <p:pic>
         <p:nvPicPr>
-          <p:cNvPr id="17" name="그림 16" descr="블랙, 어둠이(가) 표시된 사진&#10;&#10;AI가 생성한 콘텐츠는 부정확할 수 있습니다.">
+          <p:cNvPr id="1034" name="Picture 10">
             <a:extLst>
               <a:ext uri="{FF2B5EF4-FFF2-40B4-BE49-F238E27FC236}">
-                <a16:creationId xmlns:a16="http://schemas.microsoft.com/office/drawing/2014/main" id="{2D4F120A-9945-AF4B-0051-06D1126780D8}"/>
+                <a16:creationId xmlns:a16="http://schemas.microsoft.com/office/drawing/2014/main" id="{9CA5E893-BE61-1B2C-5561-000A6EBB97A8}"/>
               </a:ext>
             </a:extLst>
           </p:cNvPr>
           <p:cNvPicPr>
-            <a:picLocks noChangeAspect="1"/>
+            <a:picLocks noChangeAspect="1" noChangeArrowheads="1"/>
           </p:cNvPicPr>
           <p:nvPr/>
         </p:nvPicPr>
@@ -5158,26 +5509,37 @@
               </a:ext>
             </a:extLst>
           </a:blip>
+          <a:srcRect/>
           <a:stretch>
             <a:fillRect/>
           </a:stretch>
         </p:blipFill>
-        <p:spPr>
-          <a:xfrm>
-            <a:off x="6427791" y="2871649"/>
-            <a:ext cx="468000" cy="468000"/>
+        <p:spPr bwMode="auto">
+          <a:xfrm rot="5400000">
+            <a:off x="3288358" y="3758025"/>
+            <a:ext cx="396000" cy="396000"/>
           </a:xfrm>
           <a:prstGeom prst="rect">
             <a:avLst/>
           </a:prstGeom>
+          <a:noFill/>
+          <a:extLst>
+            <a:ext uri="{909E8E84-426E-40DD-AFC4-6F175D3DCCD1}">
+              <a14:hiddenFill xmlns:a14="http://schemas.microsoft.com/office/drawing/2010/main">
+                <a:solidFill>
+                  <a:srgbClr val="FFFFFF"/>
+                </a:solidFill>
+              </a14:hiddenFill>
+            </a:ext>
+          </a:extLst>
         </p:spPr>
       </p:pic>
       <p:pic>
         <p:nvPicPr>
-          <p:cNvPr id="19" name="그림 18" descr="블랙, 어둠이(가) 표시된 사진&#10;&#10;AI가 생성한 콘텐츠는 부정확할 수 있습니다.">
+          <p:cNvPr id="6" name="그림 5" descr="텍스트, 폰트, 스크린샷, 라인이(가) 표시된 사진&#10;&#10;AI가 생성한 콘텐츠는 부정확할 수 있습니다.">
             <a:extLst>
               <a:ext uri="{FF2B5EF4-FFF2-40B4-BE49-F238E27FC236}">
-                <a16:creationId xmlns:a16="http://schemas.microsoft.com/office/drawing/2014/main" id="{B9F022F9-D8B2-B4C8-E89A-562037972BA9}"/>
+                <a16:creationId xmlns:a16="http://schemas.microsoft.com/office/drawing/2014/main" id="{8ED0E3DF-A767-B1A3-C31A-CAA6D0ADDF38}"/>
               </a:ext>
             </a:extLst>
           </p:cNvPr>
@@ -5200,8 +5562,150 @@
         </p:blipFill>
         <p:spPr>
           <a:xfrm>
-            <a:off x="6427791" y="4587050"/>
-            <a:ext cx="468000" cy="468000"/>
+            <a:off x="6511018" y="5501261"/>
+            <a:ext cx="5373738" cy="1056904"/>
+          </a:xfrm>
+          <a:prstGeom prst="rect">
+            <a:avLst/>
+          </a:prstGeom>
+        </p:spPr>
+      </p:pic>
+      <p:pic>
+        <p:nvPicPr>
+          <p:cNvPr id="8" name="그림 7" descr="텍스트, 스크린샷이(가) 표시된 사진&#10;&#10;AI가 생성한 콘텐츠는 부정확할 수 있습니다.">
+            <a:extLst>
+              <a:ext uri="{FF2B5EF4-FFF2-40B4-BE49-F238E27FC236}">
+                <a16:creationId xmlns:a16="http://schemas.microsoft.com/office/drawing/2014/main" id="{7C0D45A7-01FB-D98F-271F-4BABD3FAA698}"/>
+              </a:ext>
+            </a:extLst>
+          </p:cNvPr>
+          <p:cNvPicPr>
+            <a:picLocks noChangeAspect="1"/>
+          </p:cNvPicPr>
+          <p:nvPr/>
+        </p:nvPicPr>
+        <p:blipFill>
+          <a:blip r:embed="rId6">
+            <a:extLst>
+              <a:ext uri="{28A0092B-C50C-407E-A947-70E740481C1C}">
+                <a14:useLocalDpi xmlns:a14="http://schemas.microsoft.com/office/drawing/2010/main" val="0"/>
+              </a:ext>
+            </a:extLst>
+          </a:blip>
+          <a:stretch>
+            <a:fillRect/>
+          </a:stretch>
+        </p:blipFill>
+        <p:spPr>
+          <a:xfrm>
+            <a:off x="6512647" y="3955981"/>
+            <a:ext cx="5372109" cy="1575819"/>
+          </a:xfrm>
+          <a:prstGeom prst="rect">
+            <a:avLst/>
+          </a:prstGeom>
+        </p:spPr>
+      </p:pic>
+      <p:cxnSp>
+        <p:nvCxnSpPr>
+          <p:cNvPr id="16" name="직선 연결선 15">
+            <a:extLst>
+              <a:ext uri="{FF2B5EF4-FFF2-40B4-BE49-F238E27FC236}">
+                <a16:creationId xmlns:a16="http://schemas.microsoft.com/office/drawing/2014/main" id="{8ED8B41D-99E1-876D-2BFC-742037A8D708}"/>
+              </a:ext>
+            </a:extLst>
+          </p:cNvPr>
+          <p:cNvCxnSpPr>
+            <a:cxnSpLocks/>
+          </p:cNvCxnSpPr>
+          <p:nvPr/>
+        </p:nvCxnSpPr>
+        <p:spPr>
+          <a:xfrm>
+            <a:off x="6204857" y="1915525"/>
+            <a:ext cx="0" cy="4273580"/>
+          </a:xfrm>
+          <a:prstGeom prst="line">
+            <a:avLst/>
+          </a:prstGeom>
+          <a:ln>
+            <a:solidFill>
+              <a:schemeClr val="tx1">
+                <a:lumMod val="75000"/>
+                <a:lumOff val="25000"/>
+              </a:schemeClr>
+            </a:solidFill>
+          </a:ln>
+        </p:spPr>
+        <p:style>
+          <a:lnRef idx="2">
+            <a:schemeClr val="dk1"/>
+          </a:lnRef>
+          <a:fillRef idx="0">
+            <a:schemeClr val="dk1"/>
+          </a:fillRef>
+          <a:effectRef idx="1">
+            <a:schemeClr val="dk1"/>
+          </a:effectRef>
+          <a:fontRef idx="minor">
+            <a:schemeClr val="tx1"/>
+          </a:fontRef>
+        </p:style>
+      </p:cxnSp>
+      <p:pic>
+        <p:nvPicPr>
+          <p:cNvPr id="11" name="그림 10">
+            <a:extLst>
+              <a:ext uri="{FF2B5EF4-FFF2-40B4-BE49-F238E27FC236}">
+                <a16:creationId xmlns:a16="http://schemas.microsoft.com/office/drawing/2014/main" id="{D9147C75-3356-63BC-9412-754748EC52EC}"/>
+              </a:ext>
+            </a:extLst>
+          </p:cNvPr>
+          <p:cNvPicPr>
+            <a:picLocks noChangeAspect="1"/>
+          </p:cNvPicPr>
+          <p:nvPr/>
+        </p:nvPicPr>
+        <p:blipFill>
+          <a:blip r:embed="rId7"/>
+          <a:stretch>
+            <a:fillRect/>
+          </a:stretch>
+        </p:blipFill>
+        <p:spPr>
+          <a:xfrm>
+            <a:off x="6513461" y="2908102"/>
+            <a:ext cx="5373738" cy="1047879"/>
+          </a:xfrm>
+          <a:prstGeom prst="rect">
+            <a:avLst/>
+          </a:prstGeom>
+        </p:spPr>
+      </p:pic>
+      <p:pic>
+        <p:nvPicPr>
+          <p:cNvPr id="15" name="그림 14">
+            <a:extLst>
+              <a:ext uri="{FF2B5EF4-FFF2-40B4-BE49-F238E27FC236}">
+                <a16:creationId xmlns:a16="http://schemas.microsoft.com/office/drawing/2014/main" id="{EEC5012B-FC18-6B7D-F1D7-F7FC63B45BF2}"/>
+              </a:ext>
+            </a:extLst>
+          </p:cNvPr>
+          <p:cNvPicPr>
+            <a:picLocks noChangeAspect="1"/>
+          </p:cNvPicPr>
+          <p:nvPr/>
+        </p:nvPicPr>
+        <p:blipFill>
+          <a:blip r:embed="rId8"/>
+          <a:stretch>
+            <a:fillRect/>
+          </a:stretch>
+        </p:blipFill>
+        <p:spPr>
+          <a:xfrm>
+            <a:off x="6513462" y="1915525"/>
+            <a:ext cx="5372108" cy="1073364"/>
           </a:xfrm>
           <a:prstGeom prst="rect">
             <a:avLst/>
@@ -5211,7 +5715,7 @@
     </p:spTree>
     <p:extLst>
       <p:ext uri="{BB962C8B-B14F-4D97-AF65-F5344CB8AC3E}">
-        <p14:creationId xmlns:p14="http://schemas.microsoft.com/office/powerpoint/2010/main" val="1197285767"/>
+        <p14:creationId xmlns:p14="http://schemas.microsoft.com/office/powerpoint/2010/main" val="3993980935"/>
       </p:ext>
     </p:extLst>
   </p:cSld>
@@ -5221,8 +5725,8 @@
 </p:sld>
 </file>
 
-<file path=ppt/slides/slide3.xml><?xml version="1.0" encoding="utf-8"?>
-<p:sld xmlns:a="http://schemas.openxmlformats.org/drawingml/2006/main" xmlns:r="http://schemas.openxmlformats.org/officeDocument/2006/relationships" xmlns:p="http://schemas.openxmlformats.org/presentationml/2006/main">
+<file path=ppt/slides/slide4.xml><?xml version="1.0" encoding="utf-8"?>
+<p:sld xmlns:a="http://schemas.openxmlformats.org/drawingml/2006/main" xmlns:r="http://schemas.openxmlformats.org/officeDocument/2006/relationships" xmlns:p="http://schemas.openxmlformats.org/presentationml/2006/main" show="0">
   <p:cSld>
     <p:spTree>
       <p:nvGrpSpPr>
@@ -5238,55 +5742,6 @@
           <a:chExt cx="0" cy="0"/>
         </a:xfrm>
       </p:grpSpPr>
-      <p:sp>
-        <p:nvSpPr>
-          <p:cNvPr id="2" name="제목 1">
-            <a:extLst>
-              <a:ext uri="{FF2B5EF4-FFF2-40B4-BE49-F238E27FC236}">
-                <a16:creationId xmlns:a16="http://schemas.microsoft.com/office/drawing/2014/main" id="{3085BA4F-DA62-4ACF-71F5-86330591C96A}"/>
-              </a:ext>
-            </a:extLst>
-          </p:cNvPr>
-          <p:cNvSpPr>
-            <a:spLocks noGrp="1"/>
-          </p:cNvSpPr>
-          <p:nvPr>
-            <p:ph type="title"/>
-          </p:nvPr>
-        </p:nvSpPr>
-        <p:spPr>
-          <a:xfrm>
-            <a:off x="642251" y="696848"/>
-            <a:ext cx="2883105" cy="1325563"/>
-          </a:xfrm>
-        </p:spPr>
-        <p:txBody>
-          <a:bodyPr>
-            <a:normAutofit/>
-          </a:bodyPr>
-          <a:lstStyle/>
-          <a:p>
-            <a:r>
-              <a:rPr lang="ko-KR" altLang="en-US" sz="3200" b="1"/>
-              <a:t>개발목표</a:t>
-            </a:r>
-            <a:br>
-              <a:rPr lang="en-US" altLang="ko-KR" sz="6600" b="1"/>
-            </a:br>
-            <a:r>
-              <a:rPr lang="en-US" altLang="ko-KR" sz="1400" b="0" i="0">
-                <a:solidFill>
-                  <a:srgbClr val="6B7280"/>
-                </a:solidFill>
-                <a:effectLst/>
-                <a:latin typeface="Noto Sans KR"/>
-              </a:rPr>
-              <a:t>Development Objectives</a:t>
-            </a:r>
-            <a:endParaRPr lang="ko-KR" altLang="en-US" sz="1400" b="1"/>
-          </a:p>
-        </p:txBody>
-      </p:sp>
       <p:sp>
         <p:nvSpPr>
           <p:cNvPr id="3" name="내용 개체 틀 2">
@@ -5305,8 +5760,8 @@
         </p:nvSpPr>
         <p:spPr>
           <a:xfrm>
-            <a:off x="642252" y="2024224"/>
-            <a:ext cx="3379230" cy="647540"/>
+            <a:off x="1313243" y="2248604"/>
+            <a:ext cx="4889983" cy="1180396"/>
           </a:xfrm>
         </p:spPr>
         <p:txBody>
@@ -5315,7 +5770,10 @@
           </a:bodyPr>
           <a:lstStyle/>
           <a:p>
-            <a:pPr marL="0" indent="0" algn="ctr">
+            <a:pPr marL="0" indent="0" algn="l">
+              <a:lnSpc>
+                <a:spcPct val="100000"/>
+              </a:lnSpc>
               <a:buNone/>
             </a:pPr>
             <a:r>
@@ -5323,1033 +5781,133 @@
                 <a:effectLst/>
                 <a:latin typeface="Noto Sans KR"/>
               </a:rPr>
-              <a:t>영양소 섭취 빅데이터 구축</a:t>
-            </a:r>
-          </a:p>
-        </p:txBody>
-      </p:sp>
-      <p:sp>
-        <p:nvSpPr>
-          <p:cNvPr id="11" name="내용 개체 틀 2">
-            <a:extLst>
-              <a:ext uri="{FF2B5EF4-FFF2-40B4-BE49-F238E27FC236}">
-                <a16:creationId xmlns:a16="http://schemas.microsoft.com/office/drawing/2014/main" id="{CD23C796-558C-4894-E4F8-A0200F1534FA}"/>
-              </a:ext>
-            </a:extLst>
-          </p:cNvPr>
-          <p:cNvSpPr txBox="1">
-            <a:spLocks/>
-          </p:cNvSpPr>
-          <p:nvPr/>
-        </p:nvSpPr>
-        <p:spPr>
-          <a:xfrm>
-            <a:off x="8160767" y="2038512"/>
-            <a:ext cx="3551354" cy="633252"/>
-          </a:xfrm>
-          <a:prstGeom prst="rect">
-            <a:avLst/>
-          </a:prstGeom>
-        </p:spPr>
-        <p:txBody>
-          <a:bodyPr vert="horz" lIns="91440" tIns="45720" rIns="91440" bIns="45720" rtlCol="0">
-            <a:normAutofit/>
-          </a:bodyPr>
-          <a:lstStyle>
-            <a:lvl1pPr marL="228600" indent="-228600" algn="l" defTabSz="914400" rtl="0" eaLnBrk="1" latinLnBrk="1" hangingPunct="1">
+              <a:t>현대인 식생활 문제 심화</a:t>
+            </a:r>
+          </a:p>
+          <a:p>
+            <a:pPr marL="0" indent="0">
               <a:lnSpc>
-                <a:spcPct val="90000"/>
+                <a:spcPct val="150000"/>
               </a:lnSpc>
-              <a:spcBef>
-                <a:spcPts val="1000"/>
-              </a:spcBef>
-              <a:buFont typeface="Arial" panose="020B0604020202020204" pitchFamily="34" charset="0"/>
-              <a:buChar char="•"/>
-              <a:defRPr sz="2800" kern="1200">
-                <a:solidFill>
-                  <a:schemeClr val="tx1"/>
-                </a:solidFill>
-                <a:latin typeface="+mn-lt"/>
-                <a:ea typeface="+mn-ea"/>
-                <a:cs typeface="+mn-cs"/>
-              </a:defRPr>
-            </a:lvl1pPr>
-            <a:lvl2pPr marL="685800" indent="-228600" algn="l" defTabSz="914400" rtl="0" eaLnBrk="1" latinLnBrk="1" hangingPunct="1">
-              <a:lnSpc>
-                <a:spcPct val="90000"/>
-              </a:lnSpc>
-              <a:spcBef>
-                <a:spcPts val="500"/>
-              </a:spcBef>
-              <a:buFont typeface="Arial" panose="020B0604020202020204" pitchFamily="34" charset="0"/>
-              <a:buChar char="•"/>
-              <a:defRPr sz="2400" kern="1200">
-                <a:solidFill>
-                  <a:schemeClr val="tx1"/>
-                </a:solidFill>
-                <a:latin typeface="+mn-lt"/>
-                <a:ea typeface="+mn-ea"/>
-                <a:cs typeface="+mn-cs"/>
-              </a:defRPr>
-            </a:lvl2pPr>
-            <a:lvl3pPr marL="1143000" indent="-228600" algn="l" defTabSz="914400" rtl="0" eaLnBrk="1" latinLnBrk="1" hangingPunct="1">
-              <a:lnSpc>
-                <a:spcPct val="90000"/>
-              </a:lnSpc>
-              <a:spcBef>
-                <a:spcPts val="500"/>
-              </a:spcBef>
-              <a:buFont typeface="Arial" panose="020B0604020202020204" pitchFamily="34" charset="0"/>
-              <a:buChar char="•"/>
-              <a:defRPr sz="2000" kern="1200">
-                <a:solidFill>
-                  <a:schemeClr val="tx1"/>
-                </a:solidFill>
-                <a:latin typeface="+mn-lt"/>
-                <a:ea typeface="+mn-ea"/>
-                <a:cs typeface="+mn-cs"/>
-              </a:defRPr>
-            </a:lvl3pPr>
-            <a:lvl4pPr marL="1600200" indent="-228600" algn="l" defTabSz="914400" rtl="0" eaLnBrk="1" latinLnBrk="1" hangingPunct="1">
-              <a:lnSpc>
-                <a:spcPct val="90000"/>
-              </a:lnSpc>
-              <a:spcBef>
-                <a:spcPts val="500"/>
-              </a:spcBef>
-              <a:buFont typeface="Arial" panose="020B0604020202020204" pitchFamily="34" charset="0"/>
-              <a:buChar char="•"/>
-              <a:defRPr sz="1800" kern="1200">
-                <a:solidFill>
-                  <a:schemeClr val="tx1"/>
-                </a:solidFill>
-                <a:latin typeface="+mn-lt"/>
-                <a:ea typeface="+mn-ea"/>
-                <a:cs typeface="+mn-cs"/>
-              </a:defRPr>
-            </a:lvl4pPr>
-            <a:lvl5pPr marL="2057400" indent="-228600" algn="l" defTabSz="914400" rtl="0" eaLnBrk="1" latinLnBrk="1" hangingPunct="1">
-              <a:lnSpc>
-                <a:spcPct val="90000"/>
-              </a:lnSpc>
-              <a:spcBef>
-                <a:spcPts val="500"/>
-              </a:spcBef>
-              <a:buFont typeface="Arial" panose="020B0604020202020204" pitchFamily="34" charset="0"/>
-              <a:buChar char="•"/>
-              <a:defRPr sz="1800" kern="1200">
-                <a:solidFill>
-                  <a:schemeClr val="tx1"/>
-                </a:solidFill>
-                <a:latin typeface="+mn-lt"/>
-                <a:ea typeface="+mn-ea"/>
-                <a:cs typeface="+mn-cs"/>
-              </a:defRPr>
-            </a:lvl5pPr>
-            <a:lvl6pPr marL="2514600" indent="-228600" algn="l" defTabSz="914400" rtl="0" eaLnBrk="1" latinLnBrk="1" hangingPunct="1">
-              <a:lnSpc>
-                <a:spcPct val="90000"/>
-              </a:lnSpc>
-              <a:spcBef>
-                <a:spcPts val="500"/>
-              </a:spcBef>
-              <a:buFont typeface="Arial" panose="020B0604020202020204" pitchFamily="34" charset="0"/>
-              <a:buChar char="•"/>
-              <a:defRPr sz="1800" kern="1200">
-                <a:solidFill>
-                  <a:schemeClr val="tx1"/>
-                </a:solidFill>
-                <a:latin typeface="+mn-lt"/>
-                <a:ea typeface="+mn-ea"/>
-                <a:cs typeface="+mn-cs"/>
-              </a:defRPr>
-            </a:lvl6pPr>
-            <a:lvl7pPr marL="2971800" indent="-228600" algn="l" defTabSz="914400" rtl="0" eaLnBrk="1" latinLnBrk="1" hangingPunct="1">
-              <a:lnSpc>
-                <a:spcPct val="90000"/>
-              </a:lnSpc>
-              <a:spcBef>
-                <a:spcPts val="500"/>
-              </a:spcBef>
-              <a:buFont typeface="Arial" panose="020B0604020202020204" pitchFamily="34" charset="0"/>
-              <a:buChar char="•"/>
-              <a:defRPr sz="1800" kern="1200">
-                <a:solidFill>
-                  <a:schemeClr val="tx1"/>
-                </a:solidFill>
-                <a:latin typeface="+mn-lt"/>
-                <a:ea typeface="+mn-ea"/>
-                <a:cs typeface="+mn-cs"/>
-              </a:defRPr>
-            </a:lvl7pPr>
-            <a:lvl8pPr marL="3429000" indent="-228600" algn="l" defTabSz="914400" rtl="0" eaLnBrk="1" latinLnBrk="1" hangingPunct="1">
-              <a:lnSpc>
-                <a:spcPct val="90000"/>
-              </a:lnSpc>
-              <a:spcBef>
-                <a:spcPts val="500"/>
-              </a:spcBef>
-              <a:buFont typeface="Arial" panose="020B0604020202020204" pitchFamily="34" charset="0"/>
-              <a:buChar char="•"/>
-              <a:defRPr sz="1800" kern="1200">
-                <a:solidFill>
-                  <a:schemeClr val="tx1"/>
-                </a:solidFill>
-                <a:latin typeface="+mn-lt"/>
-                <a:ea typeface="+mn-ea"/>
-                <a:cs typeface="+mn-cs"/>
-              </a:defRPr>
-            </a:lvl8pPr>
-            <a:lvl9pPr marL="3886200" indent="-228600" algn="l" defTabSz="914400" rtl="0" eaLnBrk="1" latinLnBrk="1" hangingPunct="1">
-              <a:lnSpc>
-                <a:spcPct val="90000"/>
-              </a:lnSpc>
-              <a:spcBef>
-                <a:spcPts val="500"/>
-              </a:spcBef>
-              <a:buFont typeface="Arial" panose="020B0604020202020204" pitchFamily="34" charset="0"/>
-              <a:buChar char="•"/>
-              <a:defRPr sz="1800" kern="1200">
-                <a:solidFill>
-                  <a:schemeClr val="tx1"/>
-                </a:solidFill>
-                <a:latin typeface="+mn-lt"/>
-                <a:ea typeface="+mn-ea"/>
-                <a:cs typeface="+mn-cs"/>
-              </a:defRPr>
-            </a:lvl9pPr>
-          </a:lstStyle>
-          <a:p>
-            <a:pPr marL="0" indent="0" algn="ctr">
-              <a:buFont typeface="Arial" panose="020B0604020202020204" pitchFamily="34" charset="0"/>
               <a:buNone/>
             </a:pPr>
             <a:r>
-              <a:rPr lang="ko-KR" altLang="en-US" sz="1800" b="1">
-                <a:latin typeface="Noto Sans KR"/>
-              </a:rPr>
-              <a:t>맞춤형 식습관 가이드 서비스</a:t>
-            </a:r>
-            <a:endParaRPr lang="en-US" altLang="ko-KR" sz="1800" b="1">
-              <a:latin typeface="Noto Sans KR"/>
-            </a:endParaRPr>
-          </a:p>
-        </p:txBody>
-      </p:sp>
-      <p:sp>
-        <p:nvSpPr>
-          <p:cNvPr id="12" name="내용 개체 틀 2">
-            <a:extLst>
-              <a:ext uri="{FF2B5EF4-FFF2-40B4-BE49-F238E27FC236}">
-                <a16:creationId xmlns:a16="http://schemas.microsoft.com/office/drawing/2014/main" id="{6F9FC355-108D-229C-8C47-754079D811C4}"/>
-              </a:ext>
-            </a:extLst>
-          </p:cNvPr>
-          <p:cNvSpPr txBox="1">
-            <a:spLocks/>
-          </p:cNvSpPr>
-          <p:nvPr/>
-        </p:nvSpPr>
-        <p:spPr>
-          <a:xfrm>
-            <a:off x="4317792" y="2038511"/>
-            <a:ext cx="3663051" cy="876139"/>
-          </a:xfrm>
-          <a:prstGeom prst="rect">
-            <a:avLst/>
-          </a:prstGeom>
-        </p:spPr>
-        <p:txBody>
-          <a:bodyPr vert="horz" lIns="91440" tIns="45720" rIns="91440" bIns="45720" rtlCol="0">
-            <a:normAutofit/>
-          </a:bodyPr>
-          <a:lstStyle>
-            <a:lvl1pPr marL="228600" indent="-228600" algn="l" defTabSz="914400" rtl="0" eaLnBrk="1" latinLnBrk="1" hangingPunct="1">
-              <a:lnSpc>
-                <a:spcPct val="90000"/>
-              </a:lnSpc>
-              <a:spcBef>
-                <a:spcPts val="1000"/>
-              </a:spcBef>
-              <a:buFont typeface="Arial" panose="020B0604020202020204" pitchFamily="34" charset="0"/>
-              <a:buChar char="•"/>
-              <a:defRPr sz="2800" kern="1200">
-                <a:solidFill>
-                  <a:schemeClr val="tx1"/>
-                </a:solidFill>
-                <a:latin typeface="+mn-lt"/>
-                <a:ea typeface="+mn-ea"/>
-                <a:cs typeface="+mn-cs"/>
-              </a:defRPr>
-            </a:lvl1pPr>
-            <a:lvl2pPr marL="685800" indent="-228600" algn="l" defTabSz="914400" rtl="0" eaLnBrk="1" latinLnBrk="1" hangingPunct="1">
-              <a:lnSpc>
-                <a:spcPct val="90000"/>
-              </a:lnSpc>
-              <a:spcBef>
-                <a:spcPts val="500"/>
-              </a:spcBef>
-              <a:buFont typeface="Arial" panose="020B0604020202020204" pitchFamily="34" charset="0"/>
-              <a:buChar char="•"/>
-              <a:defRPr sz="2400" kern="1200">
-                <a:solidFill>
-                  <a:schemeClr val="tx1"/>
-                </a:solidFill>
-                <a:latin typeface="+mn-lt"/>
-                <a:ea typeface="+mn-ea"/>
-                <a:cs typeface="+mn-cs"/>
-              </a:defRPr>
-            </a:lvl2pPr>
-            <a:lvl3pPr marL="1143000" indent="-228600" algn="l" defTabSz="914400" rtl="0" eaLnBrk="1" latinLnBrk="1" hangingPunct="1">
-              <a:lnSpc>
-                <a:spcPct val="90000"/>
-              </a:lnSpc>
-              <a:spcBef>
-                <a:spcPts val="500"/>
-              </a:spcBef>
-              <a:buFont typeface="Arial" panose="020B0604020202020204" pitchFamily="34" charset="0"/>
-              <a:buChar char="•"/>
-              <a:defRPr sz="2000" kern="1200">
-                <a:solidFill>
-                  <a:schemeClr val="tx1"/>
-                </a:solidFill>
-                <a:latin typeface="+mn-lt"/>
-                <a:ea typeface="+mn-ea"/>
-                <a:cs typeface="+mn-cs"/>
-              </a:defRPr>
-            </a:lvl3pPr>
-            <a:lvl4pPr marL="1600200" indent="-228600" algn="l" defTabSz="914400" rtl="0" eaLnBrk="1" latinLnBrk="1" hangingPunct="1">
-              <a:lnSpc>
-                <a:spcPct val="90000"/>
-              </a:lnSpc>
-              <a:spcBef>
-                <a:spcPts val="500"/>
-              </a:spcBef>
-              <a:buFont typeface="Arial" panose="020B0604020202020204" pitchFamily="34" charset="0"/>
-              <a:buChar char="•"/>
-              <a:defRPr sz="1800" kern="1200">
-                <a:solidFill>
-                  <a:schemeClr val="tx1"/>
-                </a:solidFill>
-                <a:latin typeface="+mn-lt"/>
-                <a:ea typeface="+mn-ea"/>
-                <a:cs typeface="+mn-cs"/>
-              </a:defRPr>
-            </a:lvl4pPr>
-            <a:lvl5pPr marL="2057400" indent="-228600" algn="l" defTabSz="914400" rtl="0" eaLnBrk="1" latinLnBrk="1" hangingPunct="1">
-              <a:lnSpc>
-                <a:spcPct val="90000"/>
-              </a:lnSpc>
-              <a:spcBef>
-                <a:spcPts val="500"/>
-              </a:spcBef>
-              <a:buFont typeface="Arial" panose="020B0604020202020204" pitchFamily="34" charset="0"/>
-              <a:buChar char="•"/>
-              <a:defRPr sz="1800" kern="1200">
-                <a:solidFill>
-                  <a:schemeClr val="tx1"/>
-                </a:solidFill>
-                <a:latin typeface="+mn-lt"/>
-                <a:ea typeface="+mn-ea"/>
-                <a:cs typeface="+mn-cs"/>
-              </a:defRPr>
-            </a:lvl5pPr>
-            <a:lvl6pPr marL="2514600" indent="-228600" algn="l" defTabSz="914400" rtl="0" eaLnBrk="1" latinLnBrk="1" hangingPunct="1">
-              <a:lnSpc>
-                <a:spcPct val="90000"/>
-              </a:lnSpc>
-              <a:spcBef>
-                <a:spcPts val="500"/>
-              </a:spcBef>
-              <a:buFont typeface="Arial" panose="020B0604020202020204" pitchFamily="34" charset="0"/>
-              <a:buChar char="•"/>
-              <a:defRPr sz="1800" kern="1200">
-                <a:solidFill>
-                  <a:schemeClr val="tx1"/>
-                </a:solidFill>
-                <a:latin typeface="+mn-lt"/>
-                <a:ea typeface="+mn-ea"/>
-                <a:cs typeface="+mn-cs"/>
-              </a:defRPr>
-            </a:lvl6pPr>
-            <a:lvl7pPr marL="2971800" indent="-228600" algn="l" defTabSz="914400" rtl="0" eaLnBrk="1" latinLnBrk="1" hangingPunct="1">
-              <a:lnSpc>
-                <a:spcPct val="90000"/>
-              </a:lnSpc>
-              <a:spcBef>
-                <a:spcPts val="500"/>
-              </a:spcBef>
-              <a:buFont typeface="Arial" panose="020B0604020202020204" pitchFamily="34" charset="0"/>
-              <a:buChar char="•"/>
-              <a:defRPr sz="1800" kern="1200">
-                <a:solidFill>
-                  <a:schemeClr val="tx1"/>
-                </a:solidFill>
-                <a:latin typeface="+mn-lt"/>
-                <a:ea typeface="+mn-ea"/>
-                <a:cs typeface="+mn-cs"/>
-              </a:defRPr>
-            </a:lvl7pPr>
-            <a:lvl8pPr marL="3429000" indent="-228600" algn="l" defTabSz="914400" rtl="0" eaLnBrk="1" latinLnBrk="1" hangingPunct="1">
-              <a:lnSpc>
-                <a:spcPct val="90000"/>
-              </a:lnSpc>
-              <a:spcBef>
-                <a:spcPts val="500"/>
-              </a:spcBef>
-              <a:buFont typeface="Arial" panose="020B0604020202020204" pitchFamily="34" charset="0"/>
-              <a:buChar char="•"/>
-              <a:defRPr sz="1800" kern="1200">
-                <a:solidFill>
-                  <a:schemeClr val="tx1"/>
-                </a:solidFill>
-                <a:latin typeface="+mn-lt"/>
-                <a:ea typeface="+mn-ea"/>
-                <a:cs typeface="+mn-cs"/>
-              </a:defRPr>
-            </a:lvl8pPr>
-            <a:lvl9pPr marL="3886200" indent="-228600" algn="l" defTabSz="914400" rtl="0" eaLnBrk="1" latinLnBrk="1" hangingPunct="1">
-              <a:lnSpc>
-                <a:spcPct val="90000"/>
-              </a:lnSpc>
-              <a:spcBef>
-                <a:spcPts val="500"/>
-              </a:spcBef>
-              <a:buFont typeface="Arial" panose="020B0604020202020204" pitchFamily="34" charset="0"/>
-              <a:buChar char="•"/>
-              <a:defRPr sz="1800" kern="1200">
-                <a:solidFill>
-                  <a:schemeClr val="tx1"/>
-                </a:solidFill>
-                <a:latin typeface="+mn-lt"/>
-                <a:ea typeface="+mn-ea"/>
-                <a:cs typeface="+mn-cs"/>
-              </a:defRPr>
-            </a:lvl9pPr>
-          </a:lstStyle>
-          <a:p>
-            <a:pPr marL="0" indent="0" algn="ctr">
-              <a:buFont typeface="Arial" panose="020B0604020202020204" pitchFamily="34" charset="0"/>
-              <a:buNone/>
-            </a:pPr>
-            <a:r>
-              <a:rPr lang="ko-KR" altLang="en-US" sz="1800" b="1">
-                <a:latin typeface="Noto Sans KR"/>
-              </a:rPr>
-              <a:t>복합 요인 상관관계 분석 </a:t>
-            </a:r>
-            <a:endParaRPr lang="en-US" altLang="ko-KR" sz="1800" b="1">
-              <a:latin typeface="Noto Sans KR"/>
-            </a:endParaRPr>
-          </a:p>
-          <a:p>
-            <a:pPr marL="0" indent="0" algn="ctr">
-              <a:buFont typeface="Arial" panose="020B0604020202020204" pitchFamily="34" charset="0"/>
-              <a:buNone/>
-            </a:pPr>
-            <a:r>
-              <a:rPr lang="ko-KR" altLang="en-US" sz="1800" b="1">
-                <a:latin typeface="Noto Sans KR"/>
-              </a:rPr>
-              <a:t>이상지질혈증 위험도 예측 시스템</a:t>
-            </a:r>
-            <a:endParaRPr lang="en-US" altLang="ko-KR" sz="1800" b="1">
-              <a:latin typeface="Noto Sans KR"/>
-            </a:endParaRPr>
-          </a:p>
-        </p:txBody>
-      </p:sp>
-      <p:cxnSp>
-        <p:nvCxnSpPr>
-          <p:cNvPr id="5" name="직선 연결선 4">
-            <a:extLst>
-              <a:ext uri="{FF2B5EF4-FFF2-40B4-BE49-F238E27FC236}">
-                <a16:creationId xmlns:a16="http://schemas.microsoft.com/office/drawing/2014/main" id="{C3727F66-C5EA-DF8B-1736-E096078233F6}"/>
-              </a:ext>
-            </a:extLst>
-          </p:cNvPr>
-          <p:cNvCxnSpPr>
-            <a:cxnSpLocks/>
-          </p:cNvCxnSpPr>
-          <p:nvPr/>
-        </p:nvCxnSpPr>
-        <p:spPr>
-          <a:xfrm>
-            <a:off x="4211156" y="1782283"/>
-            <a:ext cx="0" cy="4193381"/>
-          </a:xfrm>
-          <a:prstGeom prst="line">
-            <a:avLst/>
-          </a:prstGeom>
-          <a:ln>
-            <a:solidFill>
-              <a:schemeClr val="bg1">
-                <a:lumMod val="75000"/>
-              </a:schemeClr>
-            </a:solidFill>
-          </a:ln>
-        </p:spPr>
-        <p:style>
-          <a:lnRef idx="2">
-            <a:schemeClr val="accent1"/>
-          </a:lnRef>
-          <a:fillRef idx="0">
-            <a:schemeClr val="accent1"/>
-          </a:fillRef>
-          <a:effectRef idx="1">
-            <a:schemeClr val="accent1"/>
-          </a:effectRef>
-          <a:fontRef idx="minor">
-            <a:schemeClr val="tx1"/>
-          </a:fontRef>
-        </p:style>
-      </p:cxnSp>
-      <p:cxnSp>
-        <p:nvCxnSpPr>
-          <p:cNvPr id="7" name="직선 연결선 6">
-            <a:extLst>
-              <a:ext uri="{FF2B5EF4-FFF2-40B4-BE49-F238E27FC236}">
-                <a16:creationId xmlns:a16="http://schemas.microsoft.com/office/drawing/2014/main" id="{1DE88E11-80C2-C43A-22E5-D31874F8A854}"/>
-              </a:ext>
-            </a:extLst>
-          </p:cNvPr>
-          <p:cNvCxnSpPr>
-            <a:cxnSpLocks/>
-          </p:cNvCxnSpPr>
-          <p:nvPr/>
-        </p:nvCxnSpPr>
-        <p:spPr>
-          <a:xfrm>
-            <a:off x="8049074" y="1782283"/>
-            <a:ext cx="0" cy="4193381"/>
-          </a:xfrm>
-          <a:prstGeom prst="line">
-            <a:avLst/>
-          </a:prstGeom>
-          <a:ln>
-            <a:solidFill>
-              <a:schemeClr val="bg1">
-                <a:lumMod val="75000"/>
-              </a:schemeClr>
-            </a:solidFill>
-          </a:ln>
-        </p:spPr>
-        <p:style>
-          <a:lnRef idx="2">
-            <a:schemeClr val="accent1"/>
-          </a:lnRef>
-          <a:fillRef idx="0">
-            <a:schemeClr val="accent1"/>
-          </a:fillRef>
-          <a:effectRef idx="1">
-            <a:schemeClr val="accent1"/>
-          </a:effectRef>
-          <a:fontRef idx="minor">
-            <a:schemeClr val="tx1"/>
-          </a:fontRef>
-        </p:style>
-      </p:cxnSp>
-      <p:sp>
-        <p:nvSpPr>
-          <p:cNvPr id="8" name="TextBox 7">
-            <a:extLst>
-              <a:ext uri="{FF2B5EF4-FFF2-40B4-BE49-F238E27FC236}">
-                <a16:creationId xmlns:a16="http://schemas.microsoft.com/office/drawing/2014/main" id="{5C88F9D6-72F0-D710-E313-2DB583FBFC85}"/>
-              </a:ext>
-            </a:extLst>
-          </p:cNvPr>
-          <p:cNvSpPr txBox="1"/>
-          <p:nvPr/>
-        </p:nvSpPr>
-        <p:spPr>
-          <a:xfrm>
-            <a:off x="541043" y="2971710"/>
-            <a:ext cx="3480440" cy="1322926"/>
-          </a:xfrm>
-          <a:prstGeom prst="rect">
-            <a:avLst/>
-          </a:prstGeom>
-          <a:noFill/>
-        </p:spPr>
-        <p:txBody>
-          <a:bodyPr wrap="square" rtlCol="0">
-            <a:spAutoFit/>
-          </a:bodyPr>
-          <a:lstStyle/>
-          <a:p>
-            <a:pPr marL="285750" indent="-285750">
-              <a:lnSpc>
-                <a:spcPct val="200000"/>
-              </a:lnSpc>
-              <a:buFont typeface="Arial" panose="020B0604020202020204" pitchFamily="34" charset="0"/>
-              <a:buChar char="•"/>
-            </a:pPr>
-            <a:r>
-              <a:rPr lang="ko-KR" altLang="en-US" sz="1400">
-                <a:solidFill>
-                  <a:srgbClr val="6B7280"/>
-                </a:solidFill>
-                <a:latin typeface="Noto Sans KR"/>
-              </a:rPr>
-              <a:t>탄수화물</a:t>
-            </a:r>
-            <a:r>
-              <a:rPr lang="en-US" altLang="ko-KR" sz="1400">
-                <a:solidFill>
-                  <a:srgbClr val="6B7280"/>
-                </a:solidFill>
-                <a:latin typeface="Noto Sans KR"/>
-              </a:rPr>
-              <a:t>, </a:t>
-            </a:r>
-            <a:r>
-              <a:rPr lang="ko-KR" altLang="en-US" sz="1400">
-                <a:solidFill>
-                  <a:srgbClr val="6B7280"/>
-                </a:solidFill>
-                <a:latin typeface="Noto Sans KR"/>
-              </a:rPr>
-              <a:t>단백질</a:t>
-            </a:r>
-            <a:r>
-              <a:rPr lang="en-US" altLang="ko-KR" sz="1400">
-                <a:solidFill>
-                  <a:srgbClr val="6B7280"/>
-                </a:solidFill>
-                <a:latin typeface="Noto Sans KR"/>
-              </a:rPr>
-              <a:t>, </a:t>
-            </a:r>
-            <a:r>
-              <a:rPr lang="ko-KR" altLang="en-US" sz="1400">
-                <a:solidFill>
-                  <a:srgbClr val="6B7280"/>
-                </a:solidFill>
-                <a:latin typeface="Noto Sans KR"/>
-              </a:rPr>
-              <a:t>지방</a:t>
-            </a:r>
-            <a:r>
-              <a:rPr lang="en-US" altLang="ko-KR" sz="1400">
-                <a:solidFill>
-                  <a:srgbClr val="6B7280"/>
-                </a:solidFill>
-                <a:latin typeface="Noto Sans KR"/>
-              </a:rPr>
-              <a:t>, </a:t>
-            </a:r>
-            <a:r>
-              <a:rPr lang="ko-KR" altLang="en-US" sz="1400">
-                <a:solidFill>
-                  <a:srgbClr val="6B7280"/>
-                </a:solidFill>
-                <a:latin typeface="Noto Sans KR"/>
-              </a:rPr>
-              <a:t>당류</a:t>
-            </a:r>
-            <a:r>
-              <a:rPr lang="en-US" altLang="ko-KR" sz="1400">
-                <a:solidFill>
-                  <a:srgbClr val="6B7280"/>
-                </a:solidFill>
-                <a:latin typeface="Noto Sans KR"/>
-              </a:rPr>
-              <a:t>, </a:t>
-            </a:r>
-            <a:r>
-              <a:rPr lang="ko-KR" altLang="en-US" sz="1400">
-                <a:solidFill>
-                  <a:srgbClr val="6B7280"/>
-                </a:solidFill>
-                <a:latin typeface="Noto Sans KR"/>
-              </a:rPr>
-              <a:t>나트륨 등 주요 영양소 섭취 패턴 정량화</a:t>
-            </a:r>
-            <a:br>
-              <a:rPr lang="en-US" altLang="ko-KR" sz="1400">
-                <a:solidFill>
-                  <a:srgbClr val="6B7280"/>
-                </a:solidFill>
-                <a:latin typeface="Noto Sans KR"/>
-              </a:rPr>
-            </a:br>
-            <a:r>
-              <a:rPr lang="ko-KR" altLang="en-US" sz="1400">
-                <a:solidFill>
-                  <a:srgbClr val="6B7280"/>
-                </a:solidFill>
-                <a:latin typeface="Noto Sans KR"/>
-              </a:rPr>
-              <a:t>→ 영양 </a:t>
-            </a:r>
-            <a:r>
-              <a:rPr lang="ko-KR" altLang="en-US" sz="1400" b="1">
-                <a:latin typeface="Noto Sans KR"/>
-              </a:rPr>
-              <a:t>데이터베이스 구축</a:t>
-            </a:r>
-            <a:endParaRPr lang="en-US" altLang="ko-KR" sz="1400" b="1">
-              <a:latin typeface="Noto Sans KR"/>
-            </a:endParaRPr>
-          </a:p>
-        </p:txBody>
-      </p:sp>
-      <p:sp>
-        <p:nvSpPr>
-          <p:cNvPr id="9" name="TextBox 8">
-            <a:extLst>
-              <a:ext uri="{FF2B5EF4-FFF2-40B4-BE49-F238E27FC236}">
-                <a16:creationId xmlns:a16="http://schemas.microsoft.com/office/drawing/2014/main" id="{32372C32-8F73-FAB9-E521-1E48EB1C7047}"/>
-              </a:ext>
-            </a:extLst>
-          </p:cNvPr>
-          <p:cNvSpPr txBox="1"/>
-          <p:nvPr/>
-        </p:nvSpPr>
-        <p:spPr>
-          <a:xfrm>
-            <a:off x="4357668" y="2971710"/>
-            <a:ext cx="3480440" cy="2615588"/>
-          </a:xfrm>
-          <a:prstGeom prst="rect">
-            <a:avLst/>
-          </a:prstGeom>
-          <a:noFill/>
-        </p:spPr>
-        <p:txBody>
-          <a:bodyPr wrap="square" rtlCol="0">
-            <a:spAutoFit/>
-          </a:bodyPr>
-          <a:lstStyle/>
-          <a:p>
-            <a:pPr marL="285750" indent="-285750">
-              <a:lnSpc>
-                <a:spcPct val="200000"/>
-              </a:lnSpc>
-              <a:buFont typeface="Arial" panose="020B0604020202020204" pitchFamily="34" charset="0"/>
-              <a:buChar char="•"/>
-            </a:pPr>
-            <a:r>
-              <a:rPr lang="ko-KR" altLang="en-US" sz="1400">
-                <a:solidFill>
-                  <a:srgbClr val="6B7280"/>
-                </a:solidFill>
-                <a:latin typeface="Noto Sans KR"/>
-              </a:rPr>
-              <a:t>영양소 데이터와 생활습관</a:t>
-            </a:r>
-            <a:r>
-              <a:rPr lang="en-US" altLang="ko-KR" sz="1400">
-                <a:solidFill>
-                  <a:srgbClr val="6B7280"/>
-                </a:solidFill>
-                <a:latin typeface="Noto Sans KR"/>
-              </a:rPr>
-              <a:t>(</a:t>
-            </a:r>
-            <a:r>
-              <a:rPr lang="ko-KR" altLang="en-US" sz="1400">
-                <a:solidFill>
-                  <a:srgbClr val="6B7280"/>
-                </a:solidFill>
-                <a:latin typeface="Noto Sans KR"/>
-              </a:rPr>
-              <a:t>흡연</a:t>
-            </a:r>
-            <a:r>
-              <a:rPr lang="en-US" altLang="ko-KR" sz="1400">
-                <a:solidFill>
-                  <a:srgbClr val="6B7280"/>
-                </a:solidFill>
-                <a:latin typeface="Noto Sans KR"/>
-              </a:rPr>
-              <a:t>·</a:t>
-            </a:r>
-            <a:r>
-              <a:rPr lang="ko-KR" altLang="en-US" sz="1400">
-                <a:solidFill>
-                  <a:srgbClr val="6B7280"/>
-                </a:solidFill>
-                <a:latin typeface="Noto Sans KR"/>
-              </a:rPr>
-              <a:t>운동 등</a:t>
-            </a:r>
-            <a:r>
-              <a:rPr lang="en-US" altLang="ko-KR" sz="1400">
-                <a:solidFill>
-                  <a:srgbClr val="6B7280"/>
-                </a:solidFill>
-                <a:latin typeface="Noto Sans KR"/>
-              </a:rPr>
-              <a:t>), </a:t>
-            </a:r>
-            <a:r>
-              <a:rPr lang="ko-KR" altLang="en-US" sz="1400">
-                <a:solidFill>
-                  <a:srgbClr val="6B7280"/>
-                </a:solidFill>
-                <a:latin typeface="Noto Sans KR"/>
-              </a:rPr>
-              <a:t>사회경제적 요인</a:t>
-            </a:r>
-            <a:r>
-              <a:rPr lang="en-US" altLang="ko-KR" sz="1400">
-                <a:solidFill>
-                  <a:srgbClr val="6B7280"/>
-                </a:solidFill>
-                <a:latin typeface="Noto Sans KR"/>
-              </a:rPr>
-              <a:t>(</a:t>
-            </a:r>
-            <a:r>
-              <a:rPr lang="ko-KR" altLang="en-US" sz="1400">
-                <a:solidFill>
-                  <a:srgbClr val="6B7280"/>
-                </a:solidFill>
-                <a:latin typeface="Noto Sans KR"/>
-              </a:rPr>
-              <a:t>소득</a:t>
-            </a:r>
-            <a:r>
-              <a:rPr lang="en-US" altLang="ko-KR" sz="1400">
-                <a:solidFill>
-                  <a:srgbClr val="6B7280"/>
-                </a:solidFill>
-                <a:latin typeface="Noto Sans KR"/>
-              </a:rPr>
-              <a:t>·</a:t>
-            </a:r>
-            <a:r>
-              <a:rPr lang="ko-KR" altLang="en-US" sz="1400">
-                <a:solidFill>
-                  <a:srgbClr val="6B7280"/>
-                </a:solidFill>
-                <a:latin typeface="Noto Sans KR"/>
-              </a:rPr>
-              <a:t>교육 수준</a:t>
-            </a:r>
-            <a:r>
-              <a:rPr lang="en-US" altLang="ko-KR" sz="1400">
-                <a:solidFill>
-                  <a:srgbClr val="6B7280"/>
-                </a:solidFill>
-                <a:latin typeface="Noto Sans KR"/>
-              </a:rPr>
-              <a:t>)</a:t>
-            </a:r>
-            <a:r>
-              <a:rPr lang="ko-KR" altLang="en-US" sz="1400">
-                <a:solidFill>
-                  <a:srgbClr val="6B7280"/>
-                </a:solidFill>
-                <a:latin typeface="Noto Sans KR"/>
-              </a:rPr>
-              <a:t>을 통합 분석하여 건강에 영향을 주는 상관관계 도출</a:t>
-            </a:r>
-            <a:endParaRPr lang="en-US" altLang="ko-KR" sz="1400">
-              <a:solidFill>
-                <a:srgbClr val="6B7280"/>
-              </a:solidFill>
-              <a:latin typeface="Noto Sans KR"/>
-            </a:endParaRPr>
-          </a:p>
-          <a:p>
-            <a:pPr marL="285750" indent="-285750">
-              <a:lnSpc>
-                <a:spcPct val="200000"/>
-              </a:lnSpc>
-              <a:buFont typeface="Arial" panose="020B0604020202020204" pitchFamily="34" charset="0"/>
-              <a:buChar char="•"/>
-            </a:pPr>
-            <a:r>
-              <a:rPr lang="ko-KR" altLang="en-US" sz="1400">
-                <a:solidFill>
-                  <a:srgbClr val="6B7280"/>
-                </a:solidFill>
-                <a:latin typeface="Noto Sans KR"/>
-              </a:rPr>
-              <a:t>현재 영양 상태에 따른 이상지질혈증 발병 위험도 </a:t>
-            </a:r>
-            <a:r>
-              <a:rPr lang="ko-KR" altLang="en-US" sz="1400" u="sng">
-                <a:solidFill>
-                  <a:srgbClr val="6B7280"/>
-                </a:solidFill>
-                <a:latin typeface="Noto Sans KR"/>
-              </a:rPr>
-              <a:t>예</a:t>
-            </a:r>
-            <a:r>
-              <a:rPr lang="ko-KR" altLang="en-US" sz="1400">
-                <a:solidFill>
-                  <a:srgbClr val="6B7280"/>
-                </a:solidFill>
-                <a:latin typeface="Noto Sans KR"/>
-              </a:rPr>
-              <a:t>측 모델 개발</a:t>
-            </a:r>
-            <a:endParaRPr lang="en-US" altLang="ko-KR" sz="1400">
-              <a:solidFill>
-                <a:srgbClr val="6B7280"/>
-              </a:solidFill>
-              <a:latin typeface="Noto Sans KR"/>
-            </a:endParaRPr>
-          </a:p>
-        </p:txBody>
-      </p:sp>
-      <p:sp>
-        <p:nvSpPr>
-          <p:cNvPr id="14" name="TextBox 13">
-            <a:extLst>
-              <a:ext uri="{FF2B5EF4-FFF2-40B4-BE49-F238E27FC236}">
-                <a16:creationId xmlns:a16="http://schemas.microsoft.com/office/drawing/2014/main" id="{117D0424-A27E-A4C2-287C-775C35320942}"/>
-              </a:ext>
-            </a:extLst>
-          </p:cNvPr>
-          <p:cNvSpPr txBox="1"/>
-          <p:nvPr/>
-        </p:nvSpPr>
-        <p:spPr>
-          <a:xfrm>
-            <a:off x="8260041" y="2971710"/>
-            <a:ext cx="3480440" cy="1322926"/>
-          </a:xfrm>
-          <a:prstGeom prst="rect">
-            <a:avLst/>
-          </a:prstGeom>
-          <a:noFill/>
-        </p:spPr>
-        <p:txBody>
-          <a:bodyPr wrap="square" rtlCol="0">
-            <a:spAutoFit/>
-          </a:bodyPr>
-          <a:lstStyle/>
-          <a:p>
-            <a:pPr marL="285750" indent="-285750">
-              <a:lnSpc>
-                <a:spcPct val="200000"/>
-              </a:lnSpc>
-              <a:buFont typeface="Arial" panose="020B0604020202020204" pitchFamily="34" charset="0"/>
-              <a:buChar char="•"/>
-            </a:pPr>
-            <a:r>
-              <a:rPr lang="ko-KR" altLang="en-US" sz="1400">
-                <a:solidFill>
-                  <a:srgbClr val="6B7280"/>
-                </a:solidFill>
-                <a:latin typeface="Noto Sans KR"/>
-              </a:rPr>
-              <a:t>연령과 성별에 따른 신체 특성을 고려하여 개선 가능한 최적의 식습관 및 </a:t>
-            </a:r>
-            <a:r>
-              <a:rPr lang="ko-KR" altLang="en-US" sz="1400" b="1">
-                <a:latin typeface="Noto Sans KR"/>
-              </a:rPr>
-              <a:t>영양 섭취 가이드라인 </a:t>
-            </a:r>
-            <a:r>
-              <a:rPr lang="ko-KR" altLang="en-US" sz="1400">
-                <a:solidFill>
-                  <a:srgbClr val="6B7280"/>
-                </a:solidFill>
-                <a:latin typeface="Noto Sans KR"/>
-              </a:rPr>
-              <a:t>제공</a:t>
-            </a:r>
-            <a:endParaRPr lang="en-US" altLang="ko-KR" sz="1400">
-              <a:solidFill>
-                <a:srgbClr val="6B7280"/>
-              </a:solidFill>
-              <a:latin typeface="Noto Sans KR"/>
-            </a:endParaRPr>
-          </a:p>
-        </p:txBody>
-      </p:sp>
-    </p:spTree>
-    <p:extLst>
-      <p:ext uri="{BB962C8B-B14F-4D97-AF65-F5344CB8AC3E}">
-        <p14:creationId xmlns:p14="http://schemas.microsoft.com/office/powerpoint/2010/main" val="2376676503"/>
-      </p:ext>
-    </p:extLst>
-  </p:cSld>
-  <p:clrMapOvr>
-    <a:masterClrMapping/>
-  </p:clrMapOvr>
-</p:sld>
-</file>
-
-<file path=ppt/slides/slide4.xml><?xml version="1.0" encoding="utf-8"?>
-<p:sld xmlns:a="http://schemas.openxmlformats.org/drawingml/2006/main" xmlns:r="http://schemas.openxmlformats.org/officeDocument/2006/relationships" xmlns:p="http://schemas.openxmlformats.org/presentationml/2006/main">
-  <p:cSld>
-    <p:spTree>
-      <p:nvGrpSpPr>
-        <p:cNvPr id="1" name=""/>
-        <p:cNvGrpSpPr/>
-        <p:nvPr/>
-      </p:nvGrpSpPr>
-      <p:grpSpPr>
-        <a:xfrm>
-          <a:off x="0" y="0"/>
-          <a:ext cx="0" cy="0"/>
-          <a:chOff x="0" y="0"/>
-          <a:chExt cx="0" cy="0"/>
-        </a:xfrm>
-      </p:grpSpPr>
-      <p:sp>
-        <p:nvSpPr>
-          <p:cNvPr id="4" name="제목 1">
-            <a:extLst>
-              <a:ext uri="{FF2B5EF4-FFF2-40B4-BE49-F238E27FC236}">
-                <a16:creationId xmlns:a16="http://schemas.microsoft.com/office/drawing/2014/main" id="{CCC888A9-C915-7772-629B-7C6C2B9D95DB}"/>
-              </a:ext>
-            </a:extLst>
-          </p:cNvPr>
-          <p:cNvSpPr>
-            <a:spLocks noGrp="1"/>
-          </p:cNvSpPr>
-          <p:nvPr>
-            <p:ph type="title"/>
-          </p:nvPr>
-        </p:nvSpPr>
-        <p:spPr>
-          <a:xfrm>
-            <a:off x="642251" y="696848"/>
-            <a:ext cx="2883105" cy="1325563"/>
-          </a:xfrm>
-        </p:spPr>
-        <p:txBody>
-          <a:bodyPr>
-            <a:normAutofit/>
-          </a:bodyPr>
-          <a:lstStyle/>
-          <a:p>
-            <a:r>
-              <a:rPr lang="ko-KR" altLang="en-US" sz="3200" b="1"/>
-              <a:t>개발 스케줄</a:t>
-            </a:r>
-            <a:br>
-              <a:rPr lang="en-US" altLang="ko-KR" sz="6600" b="1"/>
-            </a:br>
-            <a:r>
-              <a:rPr lang="en-US" altLang="ko-KR" sz="1400" b="0" i="0">
-                <a:solidFill>
-                  <a:srgbClr val="6B7280"/>
+              <a:rPr lang="ko-KR" altLang="en-US" sz="1400" b="0" i="0">
+                <a:solidFill>
+                  <a:schemeClr val="tx1">
+                    <a:lumMod val="75000"/>
+                    <a:lumOff val="25000"/>
+                  </a:schemeClr>
                 </a:solidFill>
                 <a:effectLst/>
                 <a:latin typeface="Noto Sans KR"/>
               </a:rPr>
-              <a:t>Development Schedule</a:t>
-            </a:r>
-            <a:endParaRPr lang="ko-KR" altLang="en-US" sz="1400" b="1"/>
+              <a:t>외식 및 가공식품 섭취로</a:t>
+            </a:r>
+            <a:r>
+              <a:rPr lang="ko-KR" altLang="en-US" sz="1400" b="1" i="0">
+                <a:solidFill>
+                  <a:schemeClr val="tx1">
+                    <a:lumMod val="75000"/>
+                    <a:lumOff val="25000"/>
+                  </a:schemeClr>
+                </a:solidFill>
+                <a:effectLst/>
+                <a:latin typeface="Noto Sans KR"/>
+              </a:rPr>
+              <a:t> </a:t>
+            </a:r>
+            <a:r>
+              <a:rPr lang="ko-KR" altLang="en-US" sz="1600" b="1" i="0">
+                <a:effectLst/>
+                <a:latin typeface="Noto Sans KR"/>
+              </a:rPr>
+              <a:t>지방</a:t>
+            </a:r>
+            <a:r>
+              <a:rPr lang="en-US" altLang="ko-KR" sz="1600" b="1" i="0">
+                <a:effectLst/>
+                <a:latin typeface="Noto Sans KR"/>
+              </a:rPr>
+              <a:t>, </a:t>
+            </a:r>
+            <a:r>
+              <a:rPr lang="ko-KR" altLang="en-US" sz="1600" b="1" i="0">
+                <a:effectLst/>
+                <a:latin typeface="Noto Sans KR"/>
+              </a:rPr>
+              <a:t>당류</a:t>
+            </a:r>
+            <a:r>
+              <a:rPr lang="en-US" altLang="ko-KR" sz="1600" b="1" i="0">
+                <a:effectLst/>
+                <a:latin typeface="Noto Sans KR"/>
+              </a:rPr>
+              <a:t>, </a:t>
+            </a:r>
+            <a:r>
+              <a:rPr lang="ko-KR" altLang="en-US" sz="1600" b="1" i="0">
+                <a:effectLst/>
+                <a:latin typeface="Noto Sans KR"/>
+              </a:rPr>
+              <a:t>나트륨의 과잉 섭취</a:t>
+            </a:r>
+            <a:r>
+              <a:rPr lang="ko-KR" altLang="en-US" sz="1400" i="0">
+                <a:solidFill>
+                  <a:schemeClr val="tx1">
+                    <a:lumMod val="75000"/>
+                    <a:lumOff val="25000"/>
+                  </a:schemeClr>
+                </a:solidFill>
+                <a:effectLst/>
+                <a:latin typeface="Noto Sans KR"/>
+              </a:rPr>
+              <a:t>가</a:t>
+            </a:r>
+            <a:r>
+              <a:rPr lang="ko-KR" altLang="en-US" sz="1400" b="1" i="0">
+                <a:solidFill>
+                  <a:schemeClr val="tx1">
+                    <a:lumMod val="75000"/>
+                    <a:lumOff val="25000"/>
+                  </a:schemeClr>
+                </a:solidFill>
+                <a:effectLst/>
+                <a:latin typeface="Noto Sans KR"/>
+              </a:rPr>
+              <a:t> </a:t>
+            </a:r>
+            <a:r>
+              <a:rPr lang="ko-KR" altLang="en-US" sz="1400" b="0" i="0">
+                <a:solidFill>
+                  <a:schemeClr val="tx1">
+                    <a:lumMod val="75000"/>
+                    <a:lumOff val="25000"/>
+                  </a:schemeClr>
+                </a:solidFill>
+                <a:effectLst/>
+                <a:latin typeface="Noto Sans KR"/>
+              </a:rPr>
+              <a:t>일상화되어 심각한 영양 불균형 초래</a:t>
+            </a:r>
+            <a:endParaRPr lang="ko-KR" altLang="en-US" sz="1400">
+              <a:solidFill>
+                <a:schemeClr val="tx1">
+                  <a:lumMod val="75000"/>
+                  <a:lumOff val="25000"/>
+                </a:schemeClr>
+              </a:solidFill>
+            </a:endParaRPr>
           </a:p>
         </p:txBody>
       </p:sp>
       <p:pic>
         <p:nvPicPr>
-          <p:cNvPr id="6" name="그림 5" descr="텍스트, 스크린샷, 라인, 그래프이(가) 표시된 사진&#10;&#10;AI가 생성한 콘텐츠는 부정확할 수 있습니다.">
+          <p:cNvPr id="10" name="그림 9" descr="블랙, 어둠이(가) 표시된 사진&#10;&#10;AI가 생성한 콘텐츠는 부정확할 수 있습니다.">
             <a:extLst>
               <a:ext uri="{FF2B5EF4-FFF2-40B4-BE49-F238E27FC236}">
-                <a16:creationId xmlns:a16="http://schemas.microsoft.com/office/drawing/2014/main" id="{4805C950-3065-39BC-6D83-250081D842BD}"/>
+                <a16:creationId xmlns:a16="http://schemas.microsoft.com/office/drawing/2014/main" id="{C0E1470B-2FAA-6645-115D-938C838B9EC8}"/>
               </a:ext>
             </a:extLst>
           </p:cNvPr>
@@ -6372,8 +5930,1077 @@
         </p:blipFill>
         <p:spPr>
           <a:xfrm>
-            <a:off x="321125" y="2022411"/>
-            <a:ext cx="11549749" cy="3498138"/>
+            <a:off x="603253" y="2497142"/>
+            <a:ext cx="468000" cy="468000"/>
+          </a:xfrm>
+          <a:prstGeom prst="rect">
+            <a:avLst/>
+          </a:prstGeom>
+          <a:ln w="12700" cap="rnd">
+            <a:noFill/>
+            <a:prstDash val="solid"/>
+            <a:round/>
+            <a:extLst>
+              <a:ext uri="{C807C97D-BFC1-408E-A445-0C87EB9F89A2}">
+                <ask:lineSketchStyleProps xmlns:ask="http://schemas.microsoft.com/office/drawing/2018/sketchyshapes" sd="1219033472">
+                  <a:custGeom>
+                    <a:avLst/>
+                    <a:gdLst>
+                      <a:gd name="connsiteX0" fmla="*/ 0 w 4161662"/>
+                      <a:gd name="connsiteY0" fmla="*/ 0 h 4161662"/>
+                      <a:gd name="connsiteX1" fmla="*/ 677756 w 4161662"/>
+                      <a:gd name="connsiteY1" fmla="*/ 0 h 4161662"/>
+                      <a:gd name="connsiteX2" fmla="*/ 1355513 w 4161662"/>
+                      <a:gd name="connsiteY2" fmla="*/ 0 h 4161662"/>
+                      <a:gd name="connsiteX3" fmla="*/ 1950036 w 4161662"/>
+                      <a:gd name="connsiteY3" fmla="*/ 0 h 4161662"/>
+                      <a:gd name="connsiteX4" fmla="*/ 2586176 w 4161662"/>
+                      <a:gd name="connsiteY4" fmla="*/ 0 h 4161662"/>
+                      <a:gd name="connsiteX5" fmla="*/ 3139082 w 4161662"/>
+                      <a:gd name="connsiteY5" fmla="*/ 0 h 4161662"/>
+                      <a:gd name="connsiteX6" fmla="*/ 4161662 w 4161662"/>
+                      <a:gd name="connsiteY6" fmla="*/ 0 h 4161662"/>
+                      <a:gd name="connsiteX7" fmla="*/ 4161662 w 4161662"/>
+                      <a:gd name="connsiteY7" fmla="*/ 677756 h 4161662"/>
+                      <a:gd name="connsiteX8" fmla="*/ 4161662 w 4161662"/>
+                      <a:gd name="connsiteY8" fmla="*/ 1189046 h 4161662"/>
+                      <a:gd name="connsiteX9" fmla="*/ 4161662 w 4161662"/>
+                      <a:gd name="connsiteY9" fmla="*/ 1658720 h 4161662"/>
+                      <a:gd name="connsiteX10" fmla="*/ 4161662 w 4161662"/>
+                      <a:gd name="connsiteY10" fmla="*/ 2170009 h 4161662"/>
+                      <a:gd name="connsiteX11" fmla="*/ 4161662 w 4161662"/>
+                      <a:gd name="connsiteY11" fmla="*/ 2722916 h 4161662"/>
+                      <a:gd name="connsiteX12" fmla="*/ 4161662 w 4161662"/>
+                      <a:gd name="connsiteY12" fmla="*/ 3317439 h 4161662"/>
+                      <a:gd name="connsiteX13" fmla="*/ 4161662 w 4161662"/>
+                      <a:gd name="connsiteY13" fmla="*/ 4161662 h 4161662"/>
+                      <a:gd name="connsiteX14" fmla="*/ 3483906 w 4161662"/>
+                      <a:gd name="connsiteY14" fmla="*/ 4161662 h 4161662"/>
+                      <a:gd name="connsiteX15" fmla="*/ 2889382 w 4161662"/>
+                      <a:gd name="connsiteY15" fmla="*/ 4161662 h 4161662"/>
+                      <a:gd name="connsiteX16" fmla="*/ 2294859 w 4161662"/>
+                      <a:gd name="connsiteY16" fmla="*/ 4161662 h 4161662"/>
+                      <a:gd name="connsiteX17" fmla="*/ 1700336 w 4161662"/>
+                      <a:gd name="connsiteY17" fmla="*/ 4161662 h 4161662"/>
+                      <a:gd name="connsiteX18" fmla="*/ 1105813 w 4161662"/>
+                      <a:gd name="connsiteY18" fmla="*/ 4161662 h 4161662"/>
+                      <a:gd name="connsiteX19" fmla="*/ 552907 w 4161662"/>
+                      <a:gd name="connsiteY19" fmla="*/ 4161662 h 4161662"/>
+                      <a:gd name="connsiteX20" fmla="*/ 0 w 4161662"/>
+                      <a:gd name="connsiteY20" fmla="*/ 4161662 h 4161662"/>
+                      <a:gd name="connsiteX21" fmla="*/ 0 w 4161662"/>
+                      <a:gd name="connsiteY21" fmla="*/ 3567139 h 4161662"/>
+                      <a:gd name="connsiteX22" fmla="*/ 0 w 4161662"/>
+                      <a:gd name="connsiteY22" fmla="*/ 2930999 h 4161662"/>
+                      <a:gd name="connsiteX23" fmla="*/ 0 w 4161662"/>
+                      <a:gd name="connsiteY23" fmla="*/ 2294859 h 4161662"/>
+                      <a:gd name="connsiteX24" fmla="*/ 0 w 4161662"/>
+                      <a:gd name="connsiteY24" fmla="*/ 1617103 h 4161662"/>
+                      <a:gd name="connsiteX25" fmla="*/ 0 w 4161662"/>
+                      <a:gd name="connsiteY25" fmla="*/ 1022580 h 4161662"/>
+                      <a:gd name="connsiteX26" fmla="*/ 0 w 4161662"/>
+                      <a:gd name="connsiteY26" fmla="*/ 0 h 4161662"/>
+                    </a:gdLst>
+                    <a:ahLst/>
+                    <a:cxnLst>
+                      <a:cxn ang="0">
+                        <a:pos x="connsiteX0" y="connsiteY0"/>
+                      </a:cxn>
+                      <a:cxn ang="0">
+                        <a:pos x="connsiteX1" y="connsiteY1"/>
+                      </a:cxn>
+                      <a:cxn ang="0">
+                        <a:pos x="connsiteX2" y="connsiteY2"/>
+                      </a:cxn>
+                      <a:cxn ang="0">
+                        <a:pos x="connsiteX3" y="connsiteY3"/>
+                      </a:cxn>
+                      <a:cxn ang="0">
+                        <a:pos x="connsiteX4" y="connsiteY4"/>
+                      </a:cxn>
+                      <a:cxn ang="0">
+                        <a:pos x="connsiteX5" y="connsiteY5"/>
+                      </a:cxn>
+                      <a:cxn ang="0">
+                        <a:pos x="connsiteX6" y="connsiteY6"/>
+                      </a:cxn>
+                      <a:cxn ang="0">
+                        <a:pos x="connsiteX7" y="connsiteY7"/>
+                      </a:cxn>
+                      <a:cxn ang="0">
+                        <a:pos x="connsiteX8" y="connsiteY8"/>
+                      </a:cxn>
+                      <a:cxn ang="0">
+                        <a:pos x="connsiteX9" y="connsiteY9"/>
+                      </a:cxn>
+                      <a:cxn ang="0">
+                        <a:pos x="connsiteX10" y="connsiteY10"/>
+                      </a:cxn>
+                      <a:cxn ang="0">
+                        <a:pos x="connsiteX11" y="connsiteY11"/>
+                      </a:cxn>
+                      <a:cxn ang="0">
+                        <a:pos x="connsiteX12" y="connsiteY12"/>
+                      </a:cxn>
+                      <a:cxn ang="0">
+                        <a:pos x="connsiteX13" y="connsiteY13"/>
+                      </a:cxn>
+                      <a:cxn ang="0">
+                        <a:pos x="connsiteX14" y="connsiteY14"/>
+                      </a:cxn>
+                      <a:cxn ang="0">
+                        <a:pos x="connsiteX15" y="connsiteY15"/>
+                      </a:cxn>
+                      <a:cxn ang="0">
+                        <a:pos x="connsiteX16" y="connsiteY16"/>
+                      </a:cxn>
+                      <a:cxn ang="0">
+                        <a:pos x="connsiteX17" y="connsiteY17"/>
+                      </a:cxn>
+                      <a:cxn ang="0">
+                        <a:pos x="connsiteX18" y="connsiteY18"/>
+                      </a:cxn>
+                      <a:cxn ang="0">
+                        <a:pos x="connsiteX19" y="connsiteY19"/>
+                      </a:cxn>
+                      <a:cxn ang="0">
+                        <a:pos x="connsiteX20" y="connsiteY20"/>
+                      </a:cxn>
+                      <a:cxn ang="0">
+                        <a:pos x="connsiteX21" y="connsiteY21"/>
+                      </a:cxn>
+                      <a:cxn ang="0">
+                        <a:pos x="connsiteX22" y="connsiteY22"/>
+                      </a:cxn>
+                      <a:cxn ang="0">
+                        <a:pos x="connsiteX23" y="connsiteY23"/>
+                      </a:cxn>
+                      <a:cxn ang="0">
+                        <a:pos x="connsiteX24" y="connsiteY24"/>
+                      </a:cxn>
+                      <a:cxn ang="0">
+                        <a:pos x="connsiteX25" y="connsiteY25"/>
+                      </a:cxn>
+                      <a:cxn ang="0">
+                        <a:pos x="connsiteX26" y="connsiteY26"/>
+                      </a:cxn>
+                    </a:cxnLst>
+                    <a:rect l="l" t="t" r="r" b="b"/>
+                    <a:pathLst>
+                      <a:path w="4161662" h="4161662" fill="none" extrusionOk="0">
+                        <a:moveTo>
+                          <a:pt x="0" y="0"/>
+                        </a:moveTo>
+                        <a:cubicBezTo>
+                          <a:pt x="146926" y="-49179"/>
+                          <a:pt x="423112" y="76956"/>
+                          <a:pt x="677756" y="0"/>
+                        </a:cubicBezTo>
+                        <a:cubicBezTo>
+                          <a:pt x="932400" y="-76956"/>
+                          <a:pt x="1175110" y="63608"/>
+                          <a:pt x="1355513" y="0"/>
+                        </a:cubicBezTo>
+                        <a:cubicBezTo>
+                          <a:pt x="1535916" y="-63608"/>
+                          <a:pt x="1693715" y="59913"/>
+                          <a:pt x="1950036" y="0"/>
+                        </a:cubicBezTo>
+                        <a:cubicBezTo>
+                          <a:pt x="2206357" y="-59913"/>
+                          <a:pt x="2440393" y="51885"/>
+                          <a:pt x="2586176" y="0"/>
+                        </a:cubicBezTo>
+                        <a:cubicBezTo>
+                          <a:pt x="2731959" y="-51885"/>
+                          <a:pt x="2897339" y="11509"/>
+                          <a:pt x="3139082" y="0"/>
+                        </a:cubicBezTo>
+                        <a:cubicBezTo>
+                          <a:pt x="3380825" y="-11509"/>
+                          <a:pt x="3850267" y="92030"/>
+                          <a:pt x="4161662" y="0"/>
+                        </a:cubicBezTo>
+                        <a:cubicBezTo>
+                          <a:pt x="4193447" y="244183"/>
+                          <a:pt x="4113423" y="380579"/>
+                          <a:pt x="4161662" y="677756"/>
+                        </a:cubicBezTo>
+                        <a:cubicBezTo>
+                          <a:pt x="4209901" y="974933"/>
+                          <a:pt x="4133575" y="1077025"/>
+                          <a:pt x="4161662" y="1189046"/>
+                        </a:cubicBezTo>
+                        <a:cubicBezTo>
+                          <a:pt x="4189749" y="1301067"/>
+                          <a:pt x="4136844" y="1473854"/>
+                          <a:pt x="4161662" y="1658720"/>
+                        </a:cubicBezTo>
+                        <a:cubicBezTo>
+                          <a:pt x="4186480" y="1843586"/>
+                          <a:pt x="4102672" y="2024012"/>
+                          <a:pt x="4161662" y="2170009"/>
+                        </a:cubicBezTo>
+                        <a:cubicBezTo>
+                          <a:pt x="4220652" y="2316006"/>
+                          <a:pt x="4114940" y="2588273"/>
+                          <a:pt x="4161662" y="2722916"/>
+                        </a:cubicBezTo>
+                        <a:cubicBezTo>
+                          <a:pt x="4208384" y="2857559"/>
+                          <a:pt x="4135370" y="3085759"/>
+                          <a:pt x="4161662" y="3317439"/>
+                        </a:cubicBezTo>
+                        <a:cubicBezTo>
+                          <a:pt x="4187954" y="3549119"/>
+                          <a:pt x="4106061" y="3795915"/>
+                          <a:pt x="4161662" y="4161662"/>
+                        </a:cubicBezTo>
+                        <a:cubicBezTo>
+                          <a:pt x="4013904" y="4228695"/>
+                          <a:pt x="3630628" y="4080432"/>
+                          <a:pt x="3483906" y="4161662"/>
+                        </a:cubicBezTo>
+                        <a:cubicBezTo>
+                          <a:pt x="3337184" y="4242892"/>
+                          <a:pt x="3078083" y="4157000"/>
+                          <a:pt x="2889382" y="4161662"/>
+                        </a:cubicBezTo>
+                        <a:cubicBezTo>
+                          <a:pt x="2700681" y="4166324"/>
+                          <a:pt x="2475360" y="4157994"/>
+                          <a:pt x="2294859" y="4161662"/>
+                        </a:cubicBezTo>
+                        <a:cubicBezTo>
+                          <a:pt x="2114358" y="4165330"/>
+                          <a:pt x="1843668" y="4160905"/>
+                          <a:pt x="1700336" y="4161662"/>
+                        </a:cubicBezTo>
+                        <a:cubicBezTo>
+                          <a:pt x="1557004" y="4162419"/>
+                          <a:pt x="1243994" y="4154280"/>
+                          <a:pt x="1105813" y="4161662"/>
+                        </a:cubicBezTo>
+                        <a:cubicBezTo>
+                          <a:pt x="967632" y="4169044"/>
+                          <a:pt x="828129" y="4157753"/>
+                          <a:pt x="552907" y="4161662"/>
+                        </a:cubicBezTo>
+                        <a:cubicBezTo>
+                          <a:pt x="277685" y="4165571"/>
+                          <a:pt x="178676" y="4096086"/>
+                          <a:pt x="0" y="4161662"/>
+                        </a:cubicBezTo>
+                        <a:cubicBezTo>
+                          <a:pt x="-14981" y="3992741"/>
+                          <a:pt x="37689" y="3797757"/>
+                          <a:pt x="0" y="3567139"/>
+                        </a:cubicBezTo>
+                        <a:cubicBezTo>
+                          <a:pt x="-37689" y="3336521"/>
+                          <a:pt x="27091" y="3228718"/>
+                          <a:pt x="0" y="2930999"/>
+                        </a:cubicBezTo>
+                        <a:cubicBezTo>
+                          <a:pt x="-27091" y="2633280"/>
+                          <a:pt x="43696" y="2510108"/>
+                          <a:pt x="0" y="2294859"/>
+                        </a:cubicBezTo>
+                        <a:cubicBezTo>
+                          <a:pt x="-43696" y="2079610"/>
+                          <a:pt x="4052" y="1817541"/>
+                          <a:pt x="0" y="1617103"/>
+                        </a:cubicBezTo>
+                        <a:cubicBezTo>
+                          <a:pt x="-4052" y="1416665"/>
+                          <a:pt x="40187" y="1175011"/>
+                          <a:pt x="0" y="1022580"/>
+                        </a:cubicBezTo>
+                        <a:cubicBezTo>
+                          <a:pt x="-40187" y="870149"/>
+                          <a:pt x="26983" y="470975"/>
+                          <a:pt x="0" y="0"/>
+                        </a:cubicBezTo>
+                        <a:close/>
+                      </a:path>
+                      <a:path w="4161662" h="4161662" stroke="0" extrusionOk="0">
+                        <a:moveTo>
+                          <a:pt x="0" y="0"/>
+                        </a:moveTo>
+                        <a:cubicBezTo>
+                          <a:pt x="161768" y="-46457"/>
+                          <a:pt x="364502" y="48232"/>
+                          <a:pt x="552907" y="0"/>
+                        </a:cubicBezTo>
+                        <a:cubicBezTo>
+                          <a:pt x="741312" y="-48232"/>
+                          <a:pt x="901010" y="47903"/>
+                          <a:pt x="1022580" y="0"/>
+                        </a:cubicBezTo>
+                        <a:cubicBezTo>
+                          <a:pt x="1144150" y="-47903"/>
+                          <a:pt x="1425180" y="53507"/>
+                          <a:pt x="1700336" y="0"/>
+                        </a:cubicBezTo>
+                        <a:cubicBezTo>
+                          <a:pt x="1975492" y="-53507"/>
+                          <a:pt x="2028110" y="7650"/>
+                          <a:pt x="2253243" y="0"/>
+                        </a:cubicBezTo>
+                        <a:cubicBezTo>
+                          <a:pt x="2478376" y="-7650"/>
+                          <a:pt x="2628386" y="50070"/>
+                          <a:pt x="2806149" y="0"/>
+                        </a:cubicBezTo>
+                        <a:cubicBezTo>
+                          <a:pt x="2983912" y="-50070"/>
+                          <a:pt x="3193663" y="51605"/>
+                          <a:pt x="3483906" y="0"/>
+                        </a:cubicBezTo>
+                        <a:cubicBezTo>
+                          <a:pt x="3774149" y="-51605"/>
+                          <a:pt x="3855060" y="61047"/>
+                          <a:pt x="4161662" y="0"/>
+                        </a:cubicBezTo>
+                        <a:cubicBezTo>
+                          <a:pt x="4214231" y="324916"/>
+                          <a:pt x="4140513" y="417896"/>
+                          <a:pt x="4161662" y="677756"/>
+                        </a:cubicBezTo>
+                        <a:cubicBezTo>
+                          <a:pt x="4182811" y="937616"/>
+                          <a:pt x="4143716" y="959576"/>
+                          <a:pt x="4161662" y="1189046"/>
+                        </a:cubicBezTo>
+                        <a:cubicBezTo>
+                          <a:pt x="4179608" y="1418516"/>
+                          <a:pt x="4105787" y="1527198"/>
+                          <a:pt x="4161662" y="1700336"/>
+                        </a:cubicBezTo>
+                        <a:cubicBezTo>
+                          <a:pt x="4217537" y="1873474"/>
+                          <a:pt x="4155444" y="2157875"/>
+                          <a:pt x="4161662" y="2294859"/>
+                        </a:cubicBezTo>
+                        <a:cubicBezTo>
+                          <a:pt x="4167880" y="2431843"/>
+                          <a:pt x="4130736" y="2718138"/>
+                          <a:pt x="4161662" y="2930999"/>
+                        </a:cubicBezTo>
+                        <a:cubicBezTo>
+                          <a:pt x="4192588" y="3143860"/>
+                          <a:pt x="4160212" y="3219224"/>
+                          <a:pt x="4161662" y="3400672"/>
+                        </a:cubicBezTo>
+                        <a:cubicBezTo>
+                          <a:pt x="4163112" y="3582120"/>
+                          <a:pt x="4094120" y="3802505"/>
+                          <a:pt x="4161662" y="4161662"/>
+                        </a:cubicBezTo>
+                        <a:cubicBezTo>
+                          <a:pt x="3921811" y="4166974"/>
+                          <a:pt x="3722507" y="4142918"/>
+                          <a:pt x="3567139" y="4161662"/>
+                        </a:cubicBezTo>
+                        <a:cubicBezTo>
+                          <a:pt x="3411771" y="4180406"/>
+                          <a:pt x="3120016" y="4136184"/>
+                          <a:pt x="2972616" y="4161662"/>
+                        </a:cubicBezTo>
+                        <a:cubicBezTo>
+                          <a:pt x="2825216" y="4187140"/>
+                          <a:pt x="2543113" y="4110598"/>
+                          <a:pt x="2294859" y="4161662"/>
+                        </a:cubicBezTo>
+                        <a:cubicBezTo>
+                          <a:pt x="2046605" y="4212726"/>
+                          <a:pt x="1981969" y="4133006"/>
+                          <a:pt x="1700336" y="4161662"/>
+                        </a:cubicBezTo>
+                        <a:cubicBezTo>
+                          <a:pt x="1418703" y="4190318"/>
+                          <a:pt x="1354265" y="4106015"/>
+                          <a:pt x="1230663" y="4161662"/>
+                        </a:cubicBezTo>
+                        <a:cubicBezTo>
+                          <a:pt x="1107061" y="4217309"/>
+                          <a:pt x="957609" y="4118690"/>
+                          <a:pt x="719373" y="4161662"/>
+                        </a:cubicBezTo>
+                        <a:cubicBezTo>
+                          <a:pt x="481137" y="4204634"/>
+                          <a:pt x="167330" y="4156625"/>
+                          <a:pt x="0" y="4161662"/>
+                        </a:cubicBezTo>
+                        <a:cubicBezTo>
+                          <a:pt x="-65854" y="3896313"/>
+                          <a:pt x="16740" y="3726990"/>
+                          <a:pt x="0" y="3567139"/>
+                        </a:cubicBezTo>
+                        <a:cubicBezTo>
+                          <a:pt x="-16740" y="3407288"/>
+                          <a:pt x="21521" y="3243218"/>
+                          <a:pt x="0" y="2972616"/>
+                        </a:cubicBezTo>
+                        <a:cubicBezTo>
+                          <a:pt x="-21521" y="2702014"/>
+                          <a:pt x="8046" y="2679564"/>
+                          <a:pt x="0" y="2419709"/>
+                        </a:cubicBezTo>
+                        <a:cubicBezTo>
+                          <a:pt x="-8046" y="2159854"/>
+                          <a:pt x="4077" y="2143863"/>
+                          <a:pt x="0" y="1950036"/>
+                        </a:cubicBezTo>
+                        <a:cubicBezTo>
+                          <a:pt x="-4077" y="1756209"/>
+                          <a:pt x="49112" y="1658208"/>
+                          <a:pt x="0" y="1480363"/>
+                        </a:cubicBezTo>
+                        <a:cubicBezTo>
+                          <a:pt x="-49112" y="1302518"/>
+                          <a:pt x="59946" y="1077805"/>
+                          <a:pt x="0" y="844223"/>
+                        </a:cubicBezTo>
+                        <a:cubicBezTo>
+                          <a:pt x="-59946" y="610641"/>
+                          <a:pt x="86630" y="409246"/>
+                          <a:pt x="0" y="0"/>
+                        </a:cubicBezTo>
+                        <a:close/>
+                      </a:path>
+                    </a:pathLst>
+                  </a:custGeom>
+                  <ask:type>
+                    <ask:lineSketchNone/>
+                  </ask:type>
+                </ask:lineSketchStyleProps>
+              </a:ext>
+            </a:extLst>
+          </a:ln>
+        </p:spPr>
+      </p:pic>
+      <p:sp>
+        <p:nvSpPr>
+          <p:cNvPr id="12" name="내용 개체 틀 2">
+            <a:extLst>
+              <a:ext uri="{FF2B5EF4-FFF2-40B4-BE49-F238E27FC236}">
+                <a16:creationId xmlns:a16="http://schemas.microsoft.com/office/drawing/2014/main" id="{6F9FC355-108D-229C-8C47-754079D811C4}"/>
+              </a:ext>
+            </a:extLst>
+          </p:cNvPr>
+          <p:cNvSpPr txBox="1">
+            <a:spLocks/>
+          </p:cNvSpPr>
+          <p:nvPr/>
+        </p:nvSpPr>
+        <p:spPr>
+          <a:xfrm>
+            <a:off x="1313244" y="4813418"/>
+            <a:ext cx="4452226" cy="1375687"/>
+          </a:xfrm>
+          <a:prstGeom prst="rect">
+            <a:avLst/>
+          </a:prstGeom>
+        </p:spPr>
+        <p:txBody>
+          <a:bodyPr vert="horz" lIns="91440" tIns="45720" rIns="91440" bIns="45720" rtlCol="0">
+            <a:normAutofit/>
+          </a:bodyPr>
+          <a:lstStyle>
+            <a:lvl1pPr marL="228600" indent="-228600" algn="l" defTabSz="914400" rtl="0" eaLnBrk="1" latinLnBrk="1" hangingPunct="1">
+              <a:lnSpc>
+                <a:spcPct val="90000"/>
+              </a:lnSpc>
+              <a:spcBef>
+                <a:spcPts val="1000"/>
+              </a:spcBef>
+              <a:buFont typeface="Arial" panose="020B0604020202020204" pitchFamily="34" charset="0"/>
+              <a:buChar char="•"/>
+              <a:defRPr sz="2800" kern="1200">
+                <a:solidFill>
+                  <a:schemeClr val="tx1"/>
+                </a:solidFill>
+                <a:latin typeface="+mn-lt"/>
+                <a:ea typeface="+mn-ea"/>
+                <a:cs typeface="+mn-cs"/>
+              </a:defRPr>
+            </a:lvl1pPr>
+            <a:lvl2pPr marL="685800" indent="-228600" algn="l" defTabSz="914400" rtl="0" eaLnBrk="1" latinLnBrk="1" hangingPunct="1">
+              <a:lnSpc>
+                <a:spcPct val="90000"/>
+              </a:lnSpc>
+              <a:spcBef>
+                <a:spcPts val="500"/>
+              </a:spcBef>
+              <a:buFont typeface="Arial" panose="020B0604020202020204" pitchFamily="34" charset="0"/>
+              <a:buChar char="•"/>
+              <a:defRPr sz="2400" kern="1200">
+                <a:solidFill>
+                  <a:schemeClr val="tx1"/>
+                </a:solidFill>
+                <a:latin typeface="+mn-lt"/>
+                <a:ea typeface="+mn-ea"/>
+                <a:cs typeface="+mn-cs"/>
+              </a:defRPr>
+            </a:lvl2pPr>
+            <a:lvl3pPr marL="1143000" indent="-228600" algn="l" defTabSz="914400" rtl="0" eaLnBrk="1" latinLnBrk="1" hangingPunct="1">
+              <a:lnSpc>
+                <a:spcPct val="90000"/>
+              </a:lnSpc>
+              <a:spcBef>
+                <a:spcPts val="500"/>
+              </a:spcBef>
+              <a:buFont typeface="Arial" panose="020B0604020202020204" pitchFamily="34" charset="0"/>
+              <a:buChar char="•"/>
+              <a:defRPr sz="2000" kern="1200">
+                <a:solidFill>
+                  <a:schemeClr val="tx1"/>
+                </a:solidFill>
+                <a:latin typeface="+mn-lt"/>
+                <a:ea typeface="+mn-ea"/>
+                <a:cs typeface="+mn-cs"/>
+              </a:defRPr>
+            </a:lvl3pPr>
+            <a:lvl4pPr marL="1600200" indent="-228600" algn="l" defTabSz="914400" rtl="0" eaLnBrk="1" latinLnBrk="1" hangingPunct="1">
+              <a:lnSpc>
+                <a:spcPct val="90000"/>
+              </a:lnSpc>
+              <a:spcBef>
+                <a:spcPts val="500"/>
+              </a:spcBef>
+              <a:buFont typeface="Arial" panose="020B0604020202020204" pitchFamily="34" charset="0"/>
+              <a:buChar char="•"/>
+              <a:defRPr sz="1800" kern="1200">
+                <a:solidFill>
+                  <a:schemeClr val="tx1"/>
+                </a:solidFill>
+                <a:latin typeface="+mn-lt"/>
+                <a:ea typeface="+mn-ea"/>
+                <a:cs typeface="+mn-cs"/>
+              </a:defRPr>
+            </a:lvl4pPr>
+            <a:lvl5pPr marL="2057400" indent="-228600" algn="l" defTabSz="914400" rtl="0" eaLnBrk="1" latinLnBrk="1" hangingPunct="1">
+              <a:lnSpc>
+                <a:spcPct val="90000"/>
+              </a:lnSpc>
+              <a:spcBef>
+                <a:spcPts val="500"/>
+              </a:spcBef>
+              <a:buFont typeface="Arial" panose="020B0604020202020204" pitchFamily="34" charset="0"/>
+              <a:buChar char="•"/>
+              <a:defRPr sz="1800" kern="1200">
+                <a:solidFill>
+                  <a:schemeClr val="tx1"/>
+                </a:solidFill>
+                <a:latin typeface="+mn-lt"/>
+                <a:ea typeface="+mn-ea"/>
+                <a:cs typeface="+mn-cs"/>
+              </a:defRPr>
+            </a:lvl5pPr>
+            <a:lvl6pPr marL="2514600" indent="-228600" algn="l" defTabSz="914400" rtl="0" eaLnBrk="1" latinLnBrk="1" hangingPunct="1">
+              <a:lnSpc>
+                <a:spcPct val="90000"/>
+              </a:lnSpc>
+              <a:spcBef>
+                <a:spcPts val="500"/>
+              </a:spcBef>
+              <a:buFont typeface="Arial" panose="020B0604020202020204" pitchFamily="34" charset="0"/>
+              <a:buChar char="•"/>
+              <a:defRPr sz="1800" kern="1200">
+                <a:solidFill>
+                  <a:schemeClr val="tx1"/>
+                </a:solidFill>
+                <a:latin typeface="+mn-lt"/>
+                <a:ea typeface="+mn-ea"/>
+                <a:cs typeface="+mn-cs"/>
+              </a:defRPr>
+            </a:lvl6pPr>
+            <a:lvl7pPr marL="2971800" indent="-228600" algn="l" defTabSz="914400" rtl="0" eaLnBrk="1" latinLnBrk="1" hangingPunct="1">
+              <a:lnSpc>
+                <a:spcPct val="90000"/>
+              </a:lnSpc>
+              <a:spcBef>
+                <a:spcPts val="500"/>
+              </a:spcBef>
+              <a:buFont typeface="Arial" panose="020B0604020202020204" pitchFamily="34" charset="0"/>
+              <a:buChar char="•"/>
+              <a:defRPr sz="1800" kern="1200">
+                <a:solidFill>
+                  <a:schemeClr val="tx1"/>
+                </a:solidFill>
+                <a:latin typeface="+mn-lt"/>
+                <a:ea typeface="+mn-ea"/>
+                <a:cs typeface="+mn-cs"/>
+              </a:defRPr>
+            </a:lvl7pPr>
+            <a:lvl8pPr marL="3429000" indent="-228600" algn="l" defTabSz="914400" rtl="0" eaLnBrk="1" latinLnBrk="1" hangingPunct="1">
+              <a:lnSpc>
+                <a:spcPct val="90000"/>
+              </a:lnSpc>
+              <a:spcBef>
+                <a:spcPts val="500"/>
+              </a:spcBef>
+              <a:buFont typeface="Arial" panose="020B0604020202020204" pitchFamily="34" charset="0"/>
+              <a:buChar char="•"/>
+              <a:defRPr sz="1800" kern="1200">
+                <a:solidFill>
+                  <a:schemeClr val="tx1"/>
+                </a:solidFill>
+                <a:latin typeface="+mn-lt"/>
+                <a:ea typeface="+mn-ea"/>
+                <a:cs typeface="+mn-cs"/>
+              </a:defRPr>
+            </a:lvl8pPr>
+            <a:lvl9pPr marL="3886200" indent="-228600" algn="l" defTabSz="914400" rtl="0" eaLnBrk="1" latinLnBrk="1" hangingPunct="1">
+              <a:lnSpc>
+                <a:spcPct val="90000"/>
+              </a:lnSpc>
+              <a:spcBef>
+                <a:spcPts val="500"/>
+              </a:spcBef>
+              <a:buFont typeface="Arial" panose="020B0604020202020204" pitchFamily="34" charset="0"/>
+              <a:buChar char="•"/>
+              <a:defRPr sz="1800" kern="1200">
+                <a:solidFill>
+                  <a:schemeClr val="tx1"/>
+                </a:solidFill>
+                <a:latin typeface="+mn-lt"/>
+                <a:ea typeface="+mn-ea"/>
+                <a:cs typeface="+mn-cs"/>
+              </a:defRPr>
+            </a:lvl9pPr>
+          </a:lstStyle>
+          <a:p>
+            <a:pPr marL="0" indent="0">
+              <a:buFont typeface="Arial" panose="020B0604020202020204" pitchFamily="34" charset="0"/>
+              <a:buNone/>
+            </a:pPr>
+            <a:r>
+              <a:rPr lang="ko-KR" altLang="en-US" sz="1800" b="1">
+                <a:latin typeface="Noto Sans KR"/>
+              </a:rPr>
+              <a:t>만성질환 위험 증가</a:t>
+            </a:r>
+          </a:p>
+          <a:p>
+            <a:pPr marL="0" indent="0">
+              <a:lnSpc>
+                <a:spcPct val="150000"/>
+              </a:lnSpc>
+              <a:buFont typeface="Arial" panose="020B0604020202020204" pitchFamily="34" charset="0"/>
+              <a:buNone/>
+            </a:pPr>
+            <a:r>
+              <a:rPr lang="ko-KR" altLang="en-US" sz="1400">
+                <a:solidFill>
+                  <a:schemeClr val="tx1">
+                    <a:lumMod val="75000"/>
+                    <a:lumOff val="25000"/>
+                  </a:schemeClr>
+                </a:solidFill>
+                <a:latin typeface="Noto Sans KR"/>
+              </a:rPr>
+              <a:t>잘못된 식습관으로 인해 </a:t>
+            </a:r>
+            <a:r>
+              <a:rPr lang="ko-KR" altLang="en-US" sz="1400" b="1">
+                <a:latin typeface="Noto Sans KR"/>
+              </a:rPr>
+              <a:t>고콜레스테롤혈증</a:t>
+            </a:r>
+            <a:r>
+              <a:rPr lang="ko-KR" altLang="en-US" sz="1400">
+                <a:solidFill>
+                  <a:schemeClr val="tx1">
+                    <a:lumMod val="75000"/>
+                    <a:lumOff val="25000"/>
+                  </a:schemeClr>
+                </a:solidFill>
+                <a:latin typeface="Noto Sans KR"/>
+              </a:rPr>
+              <a:t> 만성질환 유병률 증가</a:t>
+            </a:r>
+            <a:endParaRPr lang="ko-KR" altLang="en-US" sz="1400">
+              <a:solidFill>
+                <a:schemeClr val="tx1">
+                  <a:lumMod val="75000"/>
+                  <a:lumOff val="25000"/>
+                </a:schemeClr>
+              </a:solidFill>
+            </a:endParaRPr>
+          </a:p>
+        </p:txBody>
+      </p:sp>
+      <p:pic>
+        <p:nvPicPr>
+          <p:cNvPr id="17" name="그림 16" descr="블랙, 어둠이(가) 표시된 사진&#10;&#10;AI가 생성한 콘텐츠는 부정확할 수 있습니다.">
+            <a:extLst>
+              <a:ext uri="{FF2B5EF4-FFF2-40B4-BE49-F238E27FC236}">
+                <a16:creationId xmlns:a16="http://schemas.microsoft.com/office/drawing/2014/main" id="{2D4F120A-9945-AF4B-0051-06D1126780D8}"/>
+              </a:ext>
+            </a:extLst>
+          </p:cNvPr>
+          <p:cNvPicPr>
+            <a:picLocks noChangeAspect="1"/>
+          </p:cNvPicPr>
+          <p:nvPr/>
+        </p:nvPicPr>
+        <p:blipFill>
+          <a:blip r:embed="rId3">
+            <a:extLst>
+              <a:ext uri="{28A0092B-C50C-407E-A947-70E740481C1C}">
+                <a14:useLocalDpi xmlns:a14="http://schemas.microsoft.com/office/drawing/2010/main" val="0"/>
+              </a:ext>
+            </a:extLst>
+          </a:blip>
+          <a:stretch>
+            <a:fillRect/>
+          </a:stretch>
+        </p:blipFill>
+        <p:spPr>
+          <a:xfrm>
+            <a:off x="603253" y="5080397"/>
+            <a:ext cx="468000" cy="468000"/>
+          </a:xfrm>
+          <a:prstGeom prst="rect">
+            <a:avLst/>
+          </a:prstGeom>
+        </p:spPr>
+      </p:pic>
+      <p:sp>
+        <p:nvSpPr>
+          <p:cNvPr id="4" name="직사각형 3">
+            <a:extLst>
+              <a:ext uri="{FF2B5EF4-FFF2-40B4-BE49-F238E27FC236}">
+                <a16:creationId xmlns:a16="http://schemas.microsoft.com/office/drawing/2014/main" id="{9BD01A12-581E-B7EB-1FA7-940AA8F5F3A2}"/>
+              </a:ext>
+            </a:extLst>
+          </p:cNvPr>
+          <p:cNvSpPr/>
+          <p:nvPr/>
+        </p:nvSpPr>
+        <p:spPr>
+          <a:xfrm>
+            <a:off x="0" y="0"/>
+            <a:ext cx="12192000" cy="1180396"/>
+          </a:xfrm>
+          <a:prstGeom prst="rect">
+            <a:avLst/>
+          </a:prstGeom>
+          <a:solidFill>
+            <a:schemeClr val="dk1">
+              <a:alpha val="80000"/>
+            </a:schemeClr>
+          </a:solidFill>
+          <a:ln>
+            <a:noFill/>
+          </a:ln>
+        </p:spPr>
+        <p:style>
+          <a:lnRef idx="2">
+            <a:schemeClr val="dk1">
+              <a:shade val="15000"/>
+            </a:schemeClr>
+          </a:lnRef>
+          <a:fillRef idx="1">
+            <a:schemeClr val="dk1"/>
+          </a:fillRef>
+          <a:effectRef idx="0">
+            <a:schemeClr val="dk1"/>
+          </a:effectRef>
+          <a:fontRef idx="minor">
+            <a:schemeClr val="lt1"/>
+          </a:fontRef>
+        </p:style>
+        <p:txBody>
+          <a:bodyPr rtlCol="0" anchor="ctr"/>
+          <a:lstStyle/>
+          <a:p>
+            <a:endParaRPr lang="ko-KR" altLang="en-US"/>
+          </a:p>
+        </p:txBody>
+      </p:sp>
+      <p:sp>
+        <p:nvSpPr>
+          <p:cNvPr id="2" name="제목 1">
+            <a:extLst>
+              <a:ext uri="{FF2B5EF4-FFF2-40B4-BE49-F238E27FC236}">
+                <a16:creationId xmlns:a16="http://schemas.microsoft.com/office/drawing/2014/main" id="{3085BA4F-DA62-4ACF-71F5-86330591C96A}"/>
+              </a:ext>
+            </a:extLst>
+          </p:cNvPr>
+          <p:cNvSpPr>
+            <a:spLocks noGrp="1"/>
+          </p:cNvSpPr>
+          <p:nvPr>
+            <p:ph type="title"/>
+          </p:nvPr>
+        </p:nvSpPr>
+        <p:spPr>
+          <a:xfrm>
+            <a:off x="603253" y="234292"/>
+            <a:ext cx="2009318" cy="946104"/>
+          </a:xfrm>
+        </p:spPr>
+        <p:txBody>
+          <a:bodyPr>
+            <a:normAutofit/>
+          </a:bodyPr>
+          <a:lstStyle/>
+          <a:p>
+            <a:r>
+              <a:rPr lang="ko-KR" altLang="en-US" sz="3200" b="1">
+                <a:solidFill>
+                  <a:schemeClr val="bg1"/>
+                </a:solidFill>
+              </a:rPr>
+              <a:t>기획의도</a:t>
+            </a:r>
+            <a:br>
+              <a:rPr lang="en-US" altLang="ko-KR" sz="3200" b="1"/>
+            </a:br>
+            <a:r>
+              <a:rPr lang="en-US" altLang="ko-KR" sz="1400" b="0" i="0">
+                <a:solidFill>
+                  <a:schemeClr val="bg1">
+                    <a:lumMod val="75000"/>
+                  </a:schemeClr>
+                </a:solidFill>
+                <a:effectLst/>
+                <a:latin typeface="Noto Sans KR"/>
+              </a:rPr>
+              <a:t>Background &amp; Purpose</a:t>
+            </a:r>
+            <a:endParaRPr lang="ko-KR" altLang="en-US" sz="1400" b="1">
+              <a:solidFill>
+                <a:schemeClr val="bg1">
+                  <a:lumMod val="75000"/>
+                </a:schemeClr>
+              </a:solidFill>
+            </a:endParaRPr>
+          </a:p>
+        </p:txBody>
+      </p:sp>
+      <p:pic>
+        <p:nvPicPr>
+          <p:cNvPr id="1034" name="Picture 10">
+            <a:extLst>
+              <a:ext uri="{FF2B5EF4-FFF2-40B4-BE49-F238E27FC236}">
+                <a16:creationId xmlns:a16="http://schemas.microsoft.com/office/drawing/2014/main" id="{9CA5E893-BE61-1B2C-5561-000A6EBB97A8}"/>
+              </a:ext>
+            </a:extLst>
+          </p:cNvPr>
+          <p:cNvPicPr>
+            <a:picLocks noChangeAspect="1" noChangeArrowheads="1"/>
+          </p:cNvPicPr>
+          <p:nvPr/>
+        </p:nvPicPr>
+        <p:blipFill>
+          <a:blip r:embed="rId4">
+            <a:extLst>
+              <a:ext uri="{28A0092B-C50C-407E-A947-70E740481C1C}">
+                <a14:useLocalDpi xmlns:a14="http://schemas.microsoft.com/office/drawing/2010/main" val="0"/>
+              </a:ext>
+            </a:extLst>
+          </a:blip>
+          <a:srcRect/>
+          <a:stretch>
+            <a:fillRect/>
+          </a:stretch>
+        </p:blipFill>
+        <p:spPr bwMode="auto">
+          <a:xfrm rot="5400000">
+            <a:off x="3288358" y="3758025"/>
+            <a:ext cx="396000" cy="396000"/>
+          </a:xfrm>
+          <a:prstGeom prst="rect">
+            <a:avLst/>
+          </a:prstGeom>
+          <a:noFill/>
+          <a:extLst>
+            <a:ext uri="{909E8E84-426E-40DD-AFC4-6F175D3DCCD1}">
+              <a14:hiddenFill xmlns:a14="http://schemas.microsoft.com/office/drawing/2010/main">
+                <a:solidFill>
+                  <a:srgbClr val="FFFFFF"/>
+                </a:solidFill>
+              </a14:hiddenFill>
+            </a:ext>
+          </a:extLst>
+        </p:spPr>
+      </p:pic>
+      <p:pic>
+        <p:nvPicPr>
+          <p:cNvPr id="6" name="그림 5" descr="텍스트, 폰트, 스크린샷, 라인이(가) 표시된 사진&#10;&#10;AI가 생성한 콘텐츠는 부정확할 수 있습니다.">
+            <a:extLst>
+              <a:ext uri="{FF2B5EF4-FFF2-40B4-BE49-F238E27FC236}">
+                <a16:creationId xmlns:a16="http://schemas.microsoft.com/office/drawing/2014/main" id="{8ED0E3DF-A767-B1A3-C31A-CAA6D0ADDF38}"/>
+              </a:ext>
+            </a:extLst>
+          </p:cNvPr>
+          <p:cNvPicPr>
+            <a:picLocks noChangeAspect="1"/>
+          </p:cNvPicPr>
+          <p:nvPr/>
+        </p:nvPicPr>
+        <p:blipFill>
+          <a:blip r:embed="rId5">
+            <a:extLst>
+              <a:ext uri="{28A0092B-C50C-407E-A947-70E740481C1C}">
+                <a14:useLocalDpi xmlns:a14="http://schemas.microsoft.com/office/drawing/2010/main" val="0"/>
+              </a:ext>
+            </a:extLst>
+          </a:blip>
+          <a:stretch>
+            <a:fillRect/>
+          </a:stretch>
+        </p:blipFill>
+        <p:spPr>
+          <a:xfrm>
+            <a:off x="6511018" y="5501261"/>
+            <a:ext cx="5373738" cy="1056904"/>
+          </a:xfrm>
+          <a:prstGeom prst="rect">
+            <a:avLst/>
+          </a:prstGeom>
+        </p:spPr>
+      </p:pic>
+      <p:pic>
+        <p:nvPicPr>
+          <p:cNvPr id="8" name="그림 7" descr="텍스트, 스크린샷이(가) 표시된 사진&#10;&#10;AI가 생성한 콘텐츠는 부정확할 수 있습니다.">
+            <a:extLst>
+              <a:ext uri="{FF2B5EF4-FFF2-40B4-BE49-F238E27FC236}">
+                <a16:creationId xmlns:a16="http://schemas.microsoft.com/office/drawing/2014/main" id="{7C0D45A7-01FB-D98F-271F-4BABD3FAA698}"/>
+              </a:ext>
+            </a:extLst>
+          </p:cNvPr>
+          <p:cNvPicPr>
+            <a:picLocks noChangeAspect="1"/>
+          </p:cNvPicPr>
+          <p:nvPr/>
+        </p:nvPicPr>
+        <p:blipFill>
+          <a:blip r:embed="rId6">
+            <a:extLst>
+              <a:ext uri="{28A0092B-C50C-407E-A947-70E740481C1C}">
+                <a14:useLocalDpi xmlns:a14="http://schemas.microsoft.com/office/drawing/2010/main" val="0"/>
+              </a:ext>
+            </a:extLst>
+          </a:blip>
+          <a:stretch>
+            <a:fillRect/>
+          </a:stretch>
+        </p:blipFill>
+        <p:spPr>
+          <a:xfrm>
+            <a:off x="6512647" y="3955981"/>
+            <a:ext cx="5372109" cy="1575819"/>
+          </a:xfrm>
+          <a:prstGeom prst="rect">
+            <a:avLst/>
+          </a:prstGeom>
+        </p:spPr>
+      </p:pic>
+      <p:cxnSp>
+        <p:nvCxnSpPr>
+          <p:cNvPr id="16" name="직선 연결선 15">
+            <a:extLst>
+              <a:ext uri="{FF2B5EF4-FFF2-40B4-BE49-F238E27FC236}">
+                <a16:creationId xmlns:a16="http://schemas.microsoft.com/office/drawing/2014/main" id="{8ED8B41D-99E1-876D-2BFC-742037A8D708}"/>
+              </a:ext>
+            </a:extLst>
+          </p:cNvPr>
+          <p:cNvCxnSpPr>
+            <a:cxnSpLocks/>
+          </p:cNvCxnSpPr>
+          <p:nvPr/>
+        </p:nvCxnSpPr>
+        <p:spPr>
+          <a:xfrm>
+            <a:off x="6204857" y="1915525"/>
+            <a:ext cx="0" cy="4273580"/>
+          </a:xfrm>
+          <a:prstGeom prst="line">
+            <a:avLst/>
+          </a:prstGeom>
+          <a:ln>
+            <a:solidFill>
+              <a:schemeClr val="tx1">
+                <a:lumMod val="75000"/>
+                <a:lumOff val="25000"/>
+              </a:schemeClr>
+            </a:solidFill>
+          </a:ln>
+        </p:spPr>
+        <p:style>
+          <a:lnRef idx="2">
+            <a:schemeClr val="dk1"/>
+          </a:lnRef>
+          <a:fillRef idx="0">
+            <a:schemeClr val="dk1"/>
+          </a:fillRef>
+          <a:effectRef idx="1">
+            <a:schemeClr val="dk1"/>
+          </a:effectRef>
+          <a:fontRef idx="minor">
+            <a:schemeClr val="tx1"/>
+          </a:fontRef>
+        </p:style>
+      </p:cxnSp>
+      <p:pic>
+        <p:nvPicPr>
+          <p:cNvPr id="11" name="그림 10">
+            <a:extLst>
+              <a:ext uri="{FF2B5EF4-FFF2-40B4-BE49-F238E27FC236}">
+                <a16:creationId xmlns:a16="http://schemas.microsoft.com/office/drawing/2014/main" id="{D9147C75-3356-63BC-9412-754748EC52EC}"/>
+              </a:ext>
+            </a:extLst>
+          </p:cNvPr>
+          <p:cNvPicPr>
+            <a:picLocks noChangeAspect="1"/>
+          </p:cNvPicPr>
+          <p:nvPr/>
+        </p:nvPicPr>
+        <p:blipFill>
+          <a:blip r:embed="rId7"/>
+          <a:stretch>
+            <a:fillRect/>
+          </a:stretch>
+        </p:blipFill>
+        <p:spPr>
+          <a:xfrm>
+            <a:off x="6513461" y="2908102"/>
+            <a:ext cx="5373738" cy="1047879"/>
+          </a:xfrm>
+          <a:prstGeom prst="rect">
+            <a:avLst/>
+          </a:prstGeom>
+        </p:spPr>
+      </p:pic>
+      <p:pic>
+        <p:nvPicPr>
+          <p:cNvPr id="15" name="그림 14">
+            <a:extLst>
+              <a:ext uri="{FF2B5EF4-FFF2-40B4-BE49-F238E27FC236}">
+                <a16:creationId xmlns:a16="http://schemas.microsoft.com/office/drawing/2014/main" id="{EEC5012B-FC18-6B7D-F1D7-F7FC63B45BF2}"/>
+              </a:ext>
+            </a:extLst>
+          </p:cNvPr>
+          <p:cNvPicPr>
+            <a:picLocks noChangeAspect="1"/>
+          </p:cNvPicPr>
+          <p:nvPr/>
+        </p:nvPicPr>
+        <p:blipFill>
+          <a:blip r:embed="rId8"/>
+          <a:stretch>
+            <a:fillRect/>
+          </a:stretch>
+        </p:blipFill>
+        <p:spPr>
+          <a:xfrm>
+            <a:off x="6513462" y="1915525"/>
+            <a:ext cx="5372108" cy="1073364"/>
           </a:xfrm>
           <a:prstGeom prst="rect">
             <a:avLst/>
@@ -6383,7 +7010,7 @@
     </p:spTree>
     <p:extLst>
       <p:ext uri="{BB962C8B-B14F-4D97-AF65-F5344CB8AC3E}">
-        <p14:creationId xmlns:p14="http://schemas.microsoft.com/office/powerpoint/2010/main" val="2563103981"/>
+        <p14:creationId xmlns:p14="http://schemas.microsoft.com/office/powerpoint/2010/main" val="3896962773"/>
       </p:ext>
     </p:extLst>
   </p:cSld>
@@ -6394,7 +7021,7 @@
 </file>
 
 <file path=ppt/slides/slide5.xml><?xml version="1.0" encoding="utf-8"?>
-<p:sld xmlns:a="http://schemas.openxmlformats.org/drawingml/2006/main" xmlns:r="http://schemas.openxmlformats.org/officeDocument/2006/relationships" xmlns:p="http://schemas.openxmlformats.org/presentationml/2006/main">
+<p:sld xmlns:a="http://schemas.openxmlformats.org/drawingml/2006/main" xmlns:r="http://schemas.openxmlformats.org/officeDocument/2006/relationships" xmlns:p="http://schemas.openxmlformats.org/presentationml/2006/main" show="0">
   <p:cSld>
     <p:spTree>
       <p:nvGrpSpPr>
@@ -6412,221 +7039,170 @@
       </p:grpSpPr>
       <p:sp>
         <p:nvSpPr>
-          <p:cNvPr id="8" name="사각형: 둥근 모서리 7">
+          <p:cNvPr id="3" name="내용 개체 틀 2">
             <a:extLst>
               <a:ext uri="{FF2B5EF4-FFF2-40B4-BE49-F238E27FC236}">
-                <a16:creationId xmlns:a16="http://schemas.microsoft.com/office/drawing/2014/main" id="{B54D5AEA-F684-B1EE-1ECC-E0C4856C847B}"/>
+                <a16:creationId xmlns:a16="http://schemas.microsoft.com/office/drawing/2014/main" id="{F3E0445D-6120-B7A6-8C93-5DFA859689ED}"/>
               </a:ext>
             </a:extLst>
           </p:cNvPr>
-          <p:cNvSpPr/>
-          <p:nvPr/>
+          <p:cNvSpPr>
+            <a:spLocks noGrp="1"/>
+          </p:cNvSpPr>
+          <p:nvPr>
+            <p:ph idx="1"/>
+          </p:nvPr>
         </p:nvSpPr>
         <p:spPr>
           <a:xfrm>
-            <a:off x="4352925" y="492919"/>
-            <a:ext cx="3486150" cy="928687"/>
+            <a:off x="1313243" y="2248604"/>
+            <a:ext cx="4889983" cy="1180396"/>
           </a:xfrm>
-          <a:prstGeom prst="roundRect">
-            <a:avLst/>
-          </a:prstGeom>
-          <a:ln w="38100"/>
-        </p:spPr>
-        <p:style>
-          <a:lnRef idx="2">
-            <a:schemeClr val="dk1"/>
-          </a:lnRef>
-          <a:fillRef idx="1">
-            <a:schemeClr val="lt1"/>
-          </a:fillRef>
-          <a:effectRef idx="0">
-            <a:schemeClr val="dk1"/>
-          </a:effectRef>
-          <a:fontRef idx="minor">
-            <a:schemeClr val="dk1"/>
-          </a:fontRef>
-        </p:style>
-        <p:txBody>
-          <a:bodyPr rtlCol="0" anchor="ctr"/>
-          <a:lstStyle/>
-          <a:p>
-            <a:pPr algn="ctr"/>
-            <a:r>
-              <a:rPr lang="ko-KR" altLang="en-US"/>
-              <a:t>메인화면</a:t>
-            </a:r>
-          </a:p>
-        </p:txBody>
-      </p:sp>
-      <p:sp>
-        <p:nvSpPr>
-          <p:cNvPr id="9" name="사각형: 둥근 모서리 8">
-            <a:extLst>
-              <a:ext uri="{FF2B5EF4-FFF2-40B4-BE49-F238E27FC236}">
-                <a16:creationId xmlns:a16="http://schemas.microsoft.com/office/drawing/2014/main" id="{F9E12F1E-69C5-1AA7-32F4-769722E17D6C}"/>
-              </a:ext>
-            </a:extLst>
-          </p:cNvPr>
-          <p:cNvSpPr/>
-          <p:nvPr/>
-        </p:nvSpPr>
-        <p:spPr>
-          <a:xfrm>
-            <a:off x="1071561" y="2071685"/>
-            <a:ext cx="4343400" cy="4021931"/>
-          </a:xfrm>
-          <a:prstGeom prst="roundRect">
-            <a:avLst/>
-          </a:prstGeom>
-          <a:ln w="31750"/>
-        </p:spPr>
-        <p:style>
-          <a:lnRef idx="2">
-            <a:schemeClr val="dk1"/>
-          </a:lnRef>
-          <a:fillRef idx="1">
-            <a:schemeClr val="lt1"/>
-          </a:fillRef>
-          <a:effectRef idx="0">
-            <a:schemeClr val="dk1"/>
-          </a:effectRef>
-          <a:fontRef idx="minor">
-            <a:schemeClr val="dk1"/>
-          </a:fontRef>
-        </p:style>
-        <p:txBody>
-          <a:bodyPr rtlCol="0" anchor="ctr"/>
-          <a:lstStyle/>
-          <a:p>
-            <a:pPr algn="ctr"/>
-            <a:endParaRPr lang="ko-KR" altLang="en-US" sz="1600"/>
-          </a:p>
-        </p:txBody>
-      </p:sp>
-      <p:sp>
-        <p:nvSpPr>
-          <p:cNvPr id="10" name="사각형: 둥근 모서리 9">
-            <a:extLst>
-              <a:ext uri="{FF2B5EF4-FFF2-40B4-BE49-F238E27FC236}">
-                <a16:creationId xmlns:a16="http://schemas.microsoft.com/office/drawing/2014/main" id="{F8926075-C96C-7699-70AE-99C8072AFF72}"/>
-              </a:ext>
-            </a:extLst>
-          </p:cNvPr>
-          <p:cNvSpPr/>
-          <p:nvPr/>
-        </p:nvSpPr>
-        <p:spPr>
-          <a:xfrm>
-            <a:off x="6777040" y="2071686"/>
-            <a:ext cx="4343400" cy="4021931"/>
-          </a:xfrm>
-          <a:prstGeom prst="roundRect">
-            <a:avLst/>
-          </a:prstGeom>
-          <a:ln w="31750"/>
-        </p:spPr>
-        <p:style>
-          <a:lnRef idx="2">
-            <a:schemeClr val="dk1"/>
-          </a:lnRef>
-          <a:fillRef idx="1">
-            <a:schemeClr val="lt1"/>
-          </a:fillRef>
-          <a:effectRef idx="0">
-            <a:schemeClr val="dk1"/>
-          </a:effectRef>
-          <a:fontRef idx="minor">
-            <a:schemeClr val="dk1"/>
-          </a:fontRef>
-        </p:style>
-        <p:txBody>
-          <a:bodyPr rtlCol="0" anchor="ctr"/>
-          <a:lstStyle/>
-          <a:p>
-            <a:pPr algn="ctr"/>
-            <a:endParaRPr lang="ko-KR" altLang="en-US" sz="1600"/>
-          </a:p>
-        </p:txBody>
-      </p:sp>
-      <p:sp>
-        <p:nvSpPr>
-          <p:cNvPr id="15" name="TextBox 14">
-            <a:extLst>
-              <a:ext uri="{FF2B5EF4-FFF2-40B4-BE49-F238E27FC236}">
-                <a16:creationId xmlns:a16="http://schemas.microsoft.com/office/drawing/2014/main" id="{12B46771-DA3E-FF0F-FB97-43CEF4E9B016}"/>
-              </a:ext>
-            </a:extLst>
-          </p:cNvPr>
-          <p:cNvSpPr txBox="1"/>
-          <p:nvPr/>
-        </p:nvSpPr>
-        <p:spPr>
-          <a:xfrm>
-            <a:off x="2180628" y="2787134"/>
-            <a:ext cx="2125266" cy="369332"/>
-          </a:xfrm>
-          <a:prstGeom prst="rect">
-            <a:avLst/>
-          </a:prstGeom>
-          <a:noFill/>
         </p:spPr>
         <p:txBody>
-          <a:bodyPr wrap="square" rtlCol="0">
-            <a:spAutoFit/>
+          <a:bodyPr>
+            <a:normAutofit/>
           </a:bodyPr>
           <a:lstStyle/>
           <a:p>
-            <a:r>
-              <a:rPr lang="ko-KR" altLang="en-US"/>
-              <a:t>이상지질혈증 예측</a:t>
-            </a:r>
-          </a:p>
-        </p:txBody>
-      </p:sp>
-      <p:sp>
-        <p:nvSpPr>
-          <p:cNvPr id="16" name="TextBox 15">
-            <a:extLst>
-              <a:ext uri="{FF2B5EF4-FFF2-40B4-BE49-F238E27FC236}">
-                <a16:creationId xmlns:a16="http://schemas.microsoft.com/office/drawing/2014/main" id="{4F3FF0E5-4599-7B45-EA8D-BD8E37AB5B07}"/>
-              </a:ext>
-            </a:extLst>
-          </p:cNvPr>
-          <p:cNvSpPr txBox="1"/>
-          <p:nvPr/>
-        </p:nvSpPr>
-        <p:spPr>
-          <a:xfrm>
-            <a:off x="7621112" y="2762309"/>
-            <a:ext cx="2655255" cy="646331"/>
-          </a:xfrm>
-          <a:prstGeom prst="rect">
-            <a:avLst/>
-          </a:prstGeom>
-          <a:noFill/>
-        </p:spPr>
-        <p:txBody>
-          <a:bodyPr wrap="square" rtlCol="0">
-            <a:spAutoFit/>
-          </a:bodyPr>
-          <a:lstStyle/>
-          <a:p>
-            <a:r>
-              <a:rPr lang="ko-KR" altLang="en-US" sz="1800"/>
-              <a:t>맞춤 식습관 개선 가이드</a:t>
-            </a:r>
-          </a:p>
-          <a:p>
-            <a:endParaRPr lang="ko-KR" altLang="en-US"/>
+            <a:pPr marL="0" indent="0" algn="l">
+              <a:lnSpc>
+                <a:spcPct val="100000"/>
+              </a:lnSpc>
+              <a:buNone/>
+            </a:pPr>
+            <a:r>
+              <a:rPr lang="ko-KR" altLang="en-US" sz="1800" b="1" i="0">
+                <a:effectLst/>
+                <a:latin typeface="Noto Sans KR"/>
+              </a:rPr>
+              <a:t>현대인 식생활 문제 심화</a:t>
+            </a:r>
+          </a:p>
+          <a:p>
+            <a:pPr marL="0" indent="0">
+              <a:lnSpc>
+                <a:spcPct val="150000"/>
+              </a:lnSpc>
+              <a:buNone/>
+            </a:pPr>
+            <a:r>
+              <a:rPr lang="ko-KR" altLang="en-US" sz="1400" b="0" i="0">
+                <a:solidFill>
+                  <a:schemeClr val="tx1">
+                    <a:lumMod val="75000"/>
+                    <a:lumOff val="25000"/>
+                  </a:schemeClr>
+                </a:solidFill>
+                <a:effectLst/>
+                <a:latin typeface="Noto Sans KR"/>
+              </a:rPr>
+              <a:t>외식 및 가공식품 섭취로</a:t>
+            </a:r>
+            <a:r>
+              <a:rPr lang="ko-KR" altLang="en-US" sz="1400" b="1" i="0">
+                <a:solidFill>
+                  <a:schemeClr val="tx1">
+                    <a:lumMod val="75000"/>
+                    <a:lumOff val="25000"/>
+                  </a:schemeClr>
+                </a:solidFill>
+                <a:effectLst/>
+                <a:latin typeface="Noto Sans KR"/>
+              </a:rPr>
+              <a:t> </a:t>
+            </a:r>
+            <a:r>
+              <a:rPr lang="ko-KR" altLang="en-US" sz="1600" b="1" i="0">
+                <a:effectLst/>
+                <a:latin typeface="Noto Sans KR"/>
+              </a:rPr>
+              <a:t>지방</a:t>
+            </a:r>
+            <a:r>
+              <a:rPr lang="en-US" altLang="ko-KR" sz="1600" b="1" i="0">
+                <a:effectLst/>
+                <a:latin typeface="Noto Sans KR"/>
+              </a:rPr>
+              <a:t>, </a:t>
+            </a:r>
+            <a:r>
+              <a:rPr lang="ko-KR" altLang="en-US" sz="1600" b="1" i="0">
+                <a:effectLst/>
+                <a:latin typeface="Noto Sans KR"/>
+              </a:rPr>
+              <a:t>당류</a:t>
+            </a:r>
+            <a:r>
+              <a:rPr lang="en-US" altLang="ko-KR" sz="1600" b="1" i="0">
+                <a:effectLst/>
+                <a:latin typeface="Noto Sans KR"/>
+              </a:rPr>
+              <a:t>, </a:t>
+            </a:r>
+            <a:r>
+              <a:rPr lang="ko-KR" altLang="en-US" sz="1600" b="1" i="0">
+                <a:effectLst/>
+                <a:latin typeface="Noto Sans KR"/>
+              </a:rPr>
+              <a:t>나트륨의 과잉 섭취</a:t>
+            </a:r>
+            <a:r>
+              <a:rPr lang="ko-KR" altLang="en-US" sz="1400" i="0">
+                <a:solidFill>
+                  <a:schemeClr val="tx1">
+                    <a:lumMod val="75000"/>
+                    <a:lumOff val="25000"/>
+                  </a:schemeClr>
+                </a:solidFill>
+                <a:effectLst/>
+                <a:latin typeface="Noto Sans KR"/>
+              </a:rPr>
+              <a:t>가</a:t>
+            </a:r>
+            <a:r>
+              <a:rPr lang="ko-KR" altLang="en-US" sz="1400" b="1" i="0">
+                <a:solidFill>
+                  <a:schemeClr val="tx1">
+                    <a:lumMod val="75000"/>
+                    <a:lumOff val="25000"/>
+                  </a:schemeClr>
+                </a:solidFill>
+                <a:effectLst/>
+                <a:latin typeface="Noto Sans KR"/>
+              </a:rPr>
+              <a:t> </a:t>
+            </a:r>
+            <a:r>
+              <a:rPr lang="ko-KR" altLang="en-US" sz="1400" b="0" i="0">
+                <a:solidFill>
+                  <a:schemeClr val="tx1">
+                    <a:lumMod val="75000"/>
+                    <a:lumOff val="25000"/>
+                  </a:schemeClr>
+                </a:solidFill>
+                <a:effectLst/>
+                <a:latin typeface="Noto Sans KR"/>
+              </a:rPr>
+              <a:t>일상화되어 심각한 영양 불균형 초래</a:t>
+            </a:r>
+            <a:endParaRPr lang="ko-KR" altLang="en-US" sz="1400">
+              <a:solidFill>
+                <a:schemeClr val="tx1">
+                  <a:lumMod val="75000"/>
+                  <a:lumOff val="25000"/>
+                </a:schemeClr>
+              </a:solidFill>
+            </a:endParaRPr>
           </a:p>
         </p:txBody>
       </p:sp>
       <p:pic>
         <p:nvPicPr>
-          <p:cNvPr id="19" name="그림 18" descr="블랙, 어둠이(가) 표시된 사진&#10;&#10;AI가 생성한 콘텐츠는 부정확할 수 있습니다.">
+          <p:cNvPr id="10" name="그림 9" descr="블랙, 어둠이(가) 표시된 사진&#10;&#10;AI가 생성한 콘텐츠는 부정확할 수 있습니다.">
             <a:extLst>
               <a:ext uri="{FF2B5EF4-FFF2-40B4-BE49-F238E27FC236}">
-                <a16:creationId xmlns:a16="http://schemas.microsoft.com/office/drawing/2014/main" id="{B9F69A32-4C7D-D2B0-4B46-E9271635B8FD}"/>
+                <a16:creationId xmlns:a16="http://schemas.microsoft.com/office/drawing/2014/main" id="{C0E1470B-2FAA-6645-115D-938C838B9EC8}"/>
               </a:ext>
             </a:extLst>
           </p:cNvPr>
@@ -6648,21 +7224,715 @@
           </a:stretch>
         </p:blipFill>
         <p:spPr>
-          <a:xfrm rot="10800000">
-            <a:off x="8588739" y="4417441"/>
-            <a:ext cx="720000" cy="720000"/>
+          <a:xfrm>
+            <a:off x="603253" y="2497142"/>
+            <a:ext cx="468000" cy="468000"/>
+          </a:xfrm>
+          <a:prstGeom prst="rect">
+            <a:avLst/>
+          </a:prstGeom>
+          <a:ln w="12700" cap="rnd">
+            <a:noFill/>
+            <a:prstDash val="solid"/>
+            <a:round/>
+            <a:extLst>
+              <a:ext uri="{C807C97D-BFC1-408E-A445-0C87EB9F89A2}">
+                <ask:lineSketchStyleProps xmlns:ask="http://schemas.microsoft.com/office/drawing/2018/sketchyshapes" sd="1219033472">
+                  <a:custGeom>
+                    <a:avLst/>
+                    <a:gdLst>
+                      <a:gd name="connsiteX0" fmla="*/ 0 w 4161662"/>
+                      <a:gd name="connsiteY0" fmla="*/ 0 h 4161662"/>
+                      <a:gd name="connsiteX1" fmla="*/ 677756 w 4161662"/>
+                      <a:gd name="connsiteY1" fmla="*/ 0 h 4161662"/>
+                      <a:gd name="connsiteX2" fmla="*/ 1355513 w 4161662"/>
+                      <a:gd name="connsiteY2" fmla="*/ 0 h 4161662"/>
+                      <a:gd name="connsiteX3" fmla="*/ 1950036 w 4161662"/>
+                      <a:gd name="connsiteY3" fmla="*/ 0 h 4161662"/>
+                      <a:gd name="connsiteX4" fmla="*/ 2586176 w 4161662"/>
+                      <a:gd name="connsiteY4" fmla="*/ 0 h 4161662"/>
+                      <a:gd name="connsiteX5" fmla="*/ 3139082 w 4161662"/>
+                      <a:gd name="connsiteY5" fmla="*/ 0 h 4161662"/>
+                      <a:gd name="connsiteX6" fmla="*/ 4161662 w 4161662"/>
+                      <a:gd name="connsiteY6" fmla="*/ 0 h 4161662"/>
+                      <a:gd name="connsiteX7" fmla="*/ 4161662 w 4161662"/>
+                      <a:gd name="connsiteY7" fmla="*/ 677756 h 4161662"/>
+                      <a:gd name="connsiteX8" fmla="*/ 4161662 w 4161662"/>
+                      <a:gd name="connsiteY8" fmla="*/ 1189046 h 4161662"/>
+                      <a:gd name="connsiteX9" fmla="*/ 4161662 w 4161662"/>
+                      <a:gd name="connsiteY9" fmla="*/ 1658720 h 4161662"/>
+                      <a:gd name="connsiteX10" fmla="*/ 4161662 w 4161662"/>
+                      <a:gd name="connsiteY10" fmla="*/ 2170009 h 4161662"/>
+                      <a:gd name="connsiteX11" fmla="*/ 4161662 w 4161662"/>
+                      <a:gd name="connsiteY11" fmla="*/ 2722916 h 4161662"/>
+                      <a:gd name="connsiteX12" fmla="*/ 4161662 w 4161662"/>
+                      <a:gd name="connsiteY12" fmla="*/ 3317439 h 4161662"/>
+                      <a:gd name="connsiteX13" fmla="*/ 4161662 w 4161662"/>
+                      <a:gd name="connsiteY13" fmla="*/ 4161662 h 4161662"/>
+                      <a:gd name="connsiteX14" fmla="*/ 3483906 w 4161662"/>
+                      <a:gd name="connsiteY14" fmla="*/ 4161662 h 4161662"/>
+                      <a:gd name="connsiteX15" fmla="*/ 2889382 w 4161662"/>
+                      <a:gd name="connsiteY15" fmla="*/ 4161662 h 4161662"/>
+                      <a:gd name="connsiteX16" fmla="*/ 2294859 w 4161662"/>
+                      <a:gd name="connsiteY16" fmla="*/ 4161662 h 4161662"/>
+                      <a:gd name="connsiteX17" fmla="*/ 1700336 w 4161662"/>
+                      <a:gd name="connsiteY17" fmla="*/ 4161662 h 4161662"/>
+                      <a:gd name="connsiteX18" fmla="*/ 1105813 w 4161662"/>
+                      <a:gd name="connsiteY18" fmla="*/ 4161662 h 4161662"/>
+                      <a:gd name="connsiteX19" fmla="*/ 552907 w 4161662"/>
+                      <a:gd name="connsiteY19" fmla="*/ 4161662 h 4161662"/>
+                      <a:gd name="connsiteX20" fmla="*/ 0 w 4161662"/>
+                      <a:gd name="connsiteY20" fmla="*/ 4161662 h 4161662"/>
+                      <a:gd name="connsiteX21" fmla="*/ 0 w 4161662"/>
+                      <a:gd name="connsiteY21" fmla="*/ 3567139 h 4161662"/>
+                      <a:gd name="connsiteX22" fmla="*/ 0 w 4161662"/>
+                      <a:gd name="connsiteY22" fmla="*/ 2930999 h 4161662"/>
+                      <a:gd name="connsiteX23" fmla="*/ 0 w 4161662"/>
+                      <a:gd name="connsiteY23" fmla="*/ 2294859 h 4161662"/>
+                      <a:gd name="connsiteX24" fmla="*/ 0 w 4161662"/>
+                      <a:gd name="connsiteY24" fmla="*/ 1617103 h 4161662"/>
+                      <a:gd name="connsiteX25" fmla="*/ 0 w 4161662"/>
+                      <a:gd name="connsiteY25" fmla="*/ 1022580 h 4161662"/>
+                      <a:gd name="connsiteX26" fmla="*/ 0 w 4161662"/>
+                      <a:gd name="connsiteY26" fmla="*/ 0 h 4161662"/>
+                    </a:gdLst>
+                    <a:ahLst/>
+                    <a:cxnLst>
+                      <a:cxn ang="0">
+                        <a:pos x="connsiteX0" y="connsiteY0"/>
+                      </a:cxn>
+                      <a:cxn ang="0">
+                        <a:pos x="connsiteX1" y="connsiteY1"/>
+                      </a:cxn>
+                      <a:cxn ang="0">
+                        <a:pos x="connsiteX2" y="connsiteY2"/>
+                      </a:cxn>
+                      <a:cxn ang="0">
+                        <a:pos x="connsiteX3" y="connsiteY3"/>
+                      </a:cxn>
+                      <a:cxn ang="0">
+                        <a:pos x="connsiteX4" y="connsiteY4"/>
+                      </a:cxn>
+                      <a:cxn ang="0">
+                        <a:pos x="connsiteX5" y="connsiteY5"/>
+                      </a:cxn>
+                      <a:cxn ang="0">
+                        <a:pos x="connsiteX6" y="connsiteY6"/>
+                      </a:cxn>
+                      <a:cxn ang="0">
+                        <a:pos x="connsiteX7" y="connsiteY7"/>
+                      </a:cxn>
+                      <a:cxn ang="0">
+                        <a:pos x="connsiteX8" y="connsiteY8"/>
+                      </a:cxn>
+                      <a:cxn ang="0">
+                        <a:pos x="connsiteX9" y="connsiteY9"/>
+                      </a:cxn>
+                      <a:cxn ang="0">
+                        <a:pos x="connsiteX10" y="connsiteY10"/>
+                      </a:cxn>
+                      <a:cxn ang="0">
+                        <a:pos x="connsiteX11" y="connsiteY11"/>
+                      </a:cxn>
+                      <a:cxn ang="0">
+                        <a:pos x="connsiteX12" y="connsiteY12"/>
+                      </a:cxn>
+                      <a:cxn ang="0">
+                        <a:pos x="connsiteX13" y="connsiteY13"/>
+                      </a:cxn>
+                      <a:cxn ang="0">
+                        <a:pos x="connsiteX14" y="connsiteY14"/>
+                      </a:cxn>
+                      <a:cxn ang="0">
+                        <a:pos x="connsiteX15" y="connsiteY15"/>
+                      </a:cxn>
+                      <a:cxn ang="0">
+                        <a:pos x="connsiteX16" y="connsiteY16"/>
+                      </a:cxn>
+                      <a:cxn ang="0">
+                        <a:pos x="connsiteX17" y="connsiteY17"/>
+                      </a:cxn>
+                      <a:cxn ang="0">
+                        <a:pos x="connsiteX18" y="connsiteY18"/>
+                      </a:cxn>
+                      <a:cxn ang="0">
+                        <a:pos x="connsiteX19" y="connsiteY19"/>
+                      </a:cxn>
+                      <a:cxn ang="0">
+                        <a:pos x="connsiteX20" y="connsiteY20"/>
+                      </a:cxn>
+                      <a:cxn ang="0">
+                        <a:pos x="connsiteX21" y="connsiteY21"/>
+                      </a:cxn>
+                      <a:cxn ang="0">
+                        <a:pos x="connsiteX22" y="connsiteY22"/>
+                      </a:cxn>
+                      <a:cxn ang="0">
+                        <a:pos x="connsiteX23" y="connsiteY23"/>
+                      </a:cxn>
+                      <a:cxn ang="0">
+                        <a:pos x="connsiteX24" y="connsiteY24"/>
+                      </a:cxn>
+                      <a:cxn ang="0">
+                        <a:pos x="connsiteX25" y="connsiteY25"/>
+                      </a:cxn>
+                      <a:cxn ang="0">
+                        <a:pos x="connsiteX26" y="connsiteY26"/>
+                      </a:cxn>
+                    </a:cxnLst>
+                    <a:rect l="l" t="t" r="r" b="b"/>
+                    <a:pathLst>
+                      <a:path w="4161662" h="4161662" fill="none" extrusionOk="0">
+                        <a:moveTo>
+                          <a:pt x="0" y="0"/>
+                        </a:moveTo>
+                        <a:cubicBezTo>
+                          <a:pt x="146926" y="-49179"/>
+                          <a:pt x="423112" y="76956"/>
+                          <a:pt x="677756" y="0"/>
+                        </a:cubicBezTo>
+                        <a:cubicBezTo>
+                          <a:pt x="932400" y="-76956"/>
+                          <a:pt x="1175110" y="63608"/>
+                          <a:pt x="1355513" y="0"/>
+                        </a:cubicBezTo>
+                        <a:cubicBezTo>
+                          <a:pt x="1535916" y="-63608"/>
+                          <a:pt x="1693715" y="59913"/>
+                          <a:pt x="1950036" y="0"/>
+                        </a:cubicBezTo>
+                        <a:cubicBezTo>
+                          <a:pt x="2206357" y="-59913"/>
+                          <a:pt x="2440393" y="51885"/>
+                          <a:pt x="2586176" y="0"/>
+                        </a:cubicBezTo>
+                        <a:cubicBezTo>
+                          <a:pt x="2731959" y="-51885"/>
+                          <a:pt x="2897339" y="11509"/>
+                          <a:pt x="3139082" y="0"/>
+                        </a:cubicBezTo>
+                        <a:cubicBezTo>
+                          <a:pt x="3380825" y="-11509"/>
+                          <a:pt x="3850267" y="92030"/>
+                          <a:pt x="4161662" y="0"/>
+                        </a:cubicBezTo>
+                        <a:cubicBezTo>
+                          <a:pt x="4193447" y="244183"/>
+                          <a:pt x="4113423" y="380579"/>
+                          <a:pt x="4161662" y="677756"/>
+                        </a:cubicBezTo>
+                        <a:cubicBezTo>
+                          <a:pt x="4209901" y="974933"/>
+                          <a:pt x="4133575" y="1077025"/>
+                          <a:pt x="4161662" y="1189046"/>
+                        </a:cubicBezTo>
+                        <a:cubicBezTo>
+                          <a:pt x="4189749" y="1301067"/>
+                          <a:pt x="4136844" y="1473854"/>
+                          <a:pt x="4161662" y="1658720"/>
+                        </a:cubicBezTo>
+                        <a:cubicBezTo>
+                          <a:pt x="4186480" y="1843586"/>
+                          <a:pt x="4102672" y="2024012"/>
+                          <a:pt x="4161662" y="2170009"/>
+                        </a:cubicBezTo>
+                        <a:cubicBezTo>
+                          <a:pt x="4220652" y="2316006"/>
+                          <a:pt x="4114940" y="2588273"/>
+                          <a:pt x="4161662" y="2722916"/>
+                        </a:cubicBezTo>
+                        <a:cubicBezTo>
+                          <a:pt x="4208384" y="2857559"/>
+                          <a:pt x="4135370" y="3085759"/>
+                          <a:pt x="4161662" y="3317439"/>
+                        </a:cubicBezTo>
+                        <a:cubicBezTo>
+                          <a:pt x="4187954" y="3549119"/>
+                          <a:pt x="4106061" y="3795915"/>
+                          <a:pt x="4161662" y="4161662"/>
+                        </a:cubicBezTo>
+                        <a:cubicBezTo>
+                          <a:pt x="4013904" y="4228695"/>
+                          <a:pt x="3630628" y="4080432"/>
+                          <a:pt x="3483906" y="4161662"/>
+                        </a:cubicBezTo>
+                        <a:cubicBezTo>
+                          <a:pt x="3337184" y="4242892"/>
+                          <a:pt x="3078083" y="4157000"/>
+                          <a:pt x="2889382" y="4161662"/>
+                        </a:cubicBezTo>
+                        <a:cubicBezTo>
+                          <a:pt x="2700681" y="4166324"/>
+                          <a:pt x="2475360" y="4157994"/>
+                          <a:pt x="2294859" y="4161662"/>
+                        </a:cubicBezTo>
+                        <a:cubicBezTo>
+                          <a:pt x="2114358" y="4165330"/>
+                          <a:pt x="1843668" y="4160905"/>
+                          <a:pt x="1700336" y="4161662"/>
+                        </a:cubicBezTo>
+                        <a:cubicBezTo>
+                          <a:pt x="1557004" y="4162419"/>
+                          <a:pt x="1243994" y="4154280"/>
+                          <a:pt x="1105813" y="4161662"/>
+                        </a:cubicBezTo>
+                        <a:cubicBezTo>
+                          <a:pt x="967632" y="4169044"/>
+                          <a:pt x="828129" y="4157753"/>
+                          <a:pt x="552907" y="4161662"/>
+                        </a:cubicBezTo>
+                        <a:cubicBezTo>
+                          <a:pt x="277685" y="4165571"/>
+                          <a:pt x="178676" y="4096086"/>
+                          <a:pt x="0" y="4161662"/>
+                        </a:cubicBezTo>
+                        <a:cubicBezTo>
+                          <a:pt x="-14981" y="3992741"/>
+                          <a:pt x="37689" y="3797757"/>
+                          <a:pt x="0" y="3567139"/>
+                        </a:cubicBezTo>
+                        <a:cubicBezTo>
+                          <a:pt x="-37689" y="3336521"/>
+                          <a:pt x="27091" y="3228718"/>
+                          <a:pt x="0" y="2930999"/>
+                        </a:cubicBezTo>
+                        <a:cubicBezTo>
+                          <a:pt x="-27091" y="2633280"/>
+                          <a:pt x="43696" y="2510108"/>
+                          <a:pt x="0" y="2294859"/>
+                        </a:cubicBezTo>
+                        <a:cubicBezTo>
+                          <a:pt x="-43696" y="2079610"/>
+                          <a:pt x="4052" y="1817541"/>
+                          <a:pt x="0" y="1617103"/>
+                        </a:cubicBezTo>
+                        <a:cubicBezTo>
+                          <a:pt x="-4052" y="1416665"/>
+                          <a:pt x="40187" y="1175011"/>
+                          <a:pt x="0" y="1022580"/>
+                        </a:cubicBezTo>
+                        <a:cubicBezTo>
+                          <a:pt x="-40187" y="870149"/>
+                          <a:pt x="26983" y="470975"/>
+                          <a:pt x="0" y="0"/>
+                        </a:cubicBezTo>
+                        <a:close/>
+                      </a:path>
+                      <a:path w="4161662" h="4161662" stroke="0" extrusionOk="0">
+                        <a:moveTo>
+                          <a:pt x="0" y="0"/>
+                        </a:moveTo>
+                        <a:cubicBezTo>
+                          <a:pt x="161768" y="-46457"/>
+                          <a:pt x="364502" y="48232"/>
+                          <a:pt x="552907" y="0"/>
+                        </a:cubicBezTo>
+                        <a:cubicBezTo>
+                          <a:pt x="741312" y="-48232"/>
+                          <a:pt x="901010" y="47903"/>
+                          <a:pt x="1022580" y="0"/>
+                        </a:cubicBezTo>
+                        <a:cubicBezTo>
+                          <a:pt x="1144150" y="-47903"/>
+                          <a:pt x="1425180" y="53507"/>
+                          <a:pt x="1700336" y="0"/>
+                        </a:cubicBezTo>
+                        <a:cubicBezTo>
+                          <a:pt x="1975492" y="-53507"/>
+                          <a:pt x="2028110" y="7650"/>
+                          <a:pt x="2253243" y="0"/>
+                        </a:cubicBezTo>
+                        <a:cubicBezTo>
+                          <a:pt x="2478376" y="-7650"/>
+                          <a:pt x="2628386" y="50070"/>
+                          <a:pt x="2806149" y="0"/>
+                        </a:cubicBezTo>
+                        <a:cubicBezTo>
+                          <a:pt x="2983912" y="-50070"/>
+                          <a:pt x="3193663" y="51605"/>
+                          <a:pt x="3483906" y="0"/>
+                        </a:cubicBezTo>
+                        <a:cubicBezTo>
+                          <a:pt x="3774149" y="-51605"/>
+                          <a:pt x="3855060" y="61047"/>
+                          <a:pt x="4161662" y="0"/>
+                        </a:cubicBezTo>
+                        <a:cubicBezTo>
+                          <a:pt x="4214231" y="324916"/>
+                          <a:pt x="4140513" y="417896"/>
+                          <a:pt x="4161662" y="677756"/>
+                        </a:cubicBezTo>
+                        <a:cubicBezTo>
+                          <a:pt x="4182811" y="937616"/>
+                          <a:pt x="4143716" y="959576"/>
+                          <a:pt x="4161662" y="1189046"/>
+                        </a:cubicBezTo>
+                        <a:cubicBezTo>
+                          <a:pt x="4179608" y="1418516"/>
+                          <a:pt x="4105787" y="1527198"/>
+                          <a:pt x="4161662" y="1700336"/>
+                        </a:cubicBezTo>
+                        <a:cubicBezTo>
+                          <a:pt x="4217537" y="1873474"/>
+                          <a:pt x="4155444" y="2157875"/>
+                          <a:pt x="4161662" y="2294859"/>
+                        </a:cubicBezTo>
+                        <a:cubicBezTo>
+                          <a:pt x="4167880" y="2431843"/>
+                          <a:pt x="4130736" y="2718138"/>
+                          <a:pt x="4161662" y="2930999"/>
+                        </a:cubicBezTo>
+                        <a:cubicBezTo>
+                          <a:pt x="4192588" y="3143860"/>
+                          <a:pt x="4160212" y="3219224"/>
+                          <a:pt x="4161662" y="3400672"/>
+                        </a:cubicBezTo>
+                        <a:cubicBezTo>
+                          <a:pt x="4163112" y="3582120"/>
+                          <a:pt x="4094120" y="3802505"/>
+                          <a:pt x="4161662" y="4161662"/>
+                        </a:cubicBezTo>
+                        <a:cubicBezTo>
+                          <a:pt x="3921811" y="4166974"/>
+                          <a:pt x="3722507" y="4142918"/>
+                          <a:pt x="3567139" y="4161662"/>
+                        </a:cubicBezTo>
+                        <a:cubicBezTo>
+                          <a:pt x="3411771" y="4180406"/>
+                          <a:pt x="3120016" y="4136184"/>
+                          <a:pt x="2972616" y="4161662"/>
+                        </a:cubicBezTo>
+                        <a:cubicBezTo>
+                          <a:pt x="2825216" y="4187140"/>
+                          <a:pt x="2543113" y="4110598"/>
+                          <a:pt x="2294859" y="4161662"/>
+                        </a:cubicBezTo>
+                        <a:cubicBezTo>
+                          <a:pt x="2046605" y="4212726"/>
+                          <a:pt x="1981969" y="4133006"/>
+                          <a:pt x="1700336" y="4161662"/>
+                        </a:cubicBezTo>
+                        <a:cubicBezTo>
+                          <a:pt x="1418703" y="4190318"/>
+                          <a:pt x="1354265" y="4106015"/>
+                          <a:pt x="1230663" y="4161662"/>
+                        </a:cubicBezTo>
+                        <a:cubicBezTo>
+                          <a:pt x="1107061" y="4217309"/>
+                          <a:pt x="957609" y="4118690"/>
+                          <a:pt x="719373" y="4161662"/>
+                        </a:cubicBezTo>
+                        <a:cubicBezTo>
+                          <a:pt x="481137" y="4204634"/>
+                          <a:pt x="167330" y="4156625"/>
+                          <a:pt x="0" y="4161662"/>
+                        </a:cubicBezTo>
+                        <a:cubicBezTo>
+                          <a:pt x="-65854" y="3896313"/>
+                          <a:pt x="16740" y="3726990"/>
+                          <a:pt x="0" y="3567139"/>
+                        </a:cubicBezTo>
+                        <a:cubicBezTo>
+                          <a:pt x="-16740" y="3407288"/>
+                          <a:pt x="21521" y="3243218"/>
+                          <a:pt x="0" y="2972616"/>
+                        </a:cubicBezTo>
+                        <a:cubicBezTo>
+                          <a:pt x="-21521" y="2702014"/>
+                          <a:pt x="8046" y="2679564"/>
+                          <a:pt x="0" y="2419709"/>
+                        </a:cubicBezTo>
+                        <a:cubicBezTo>
+                          <a:pt x="-8046" y="2159854"/>
+                          <a:pt x="4077" y="2143863"/>
+                          <a:pt x="0" y="1950036"/>
+                        </a:cubicBezTo>
+                        <a:cubicBezTo>
+                          <a:pt x="-4077" y="1756209"/>
+                          <a:pt x="49112" y="1658208"/>
+                          <a:pt x="0" y="1480363"/>
+                        </a:cubicBezTo>
+                        <a:cubicBezTo>
+                          <a:pt x="-49112" y="1302518"/>
+                          <a:pt x="59946" y="1077805"/>
+                          <a:pt x="0" y="844223"/>
+                        </a:cubicBezTo>
+                        <a:cubicBezTo>
+                          <a:pt x="-59946" y="610641"/>
+                          <a:pt x="86630" y="409246"/>
+                          <a:pt x="0" y="0"/>
+                        </a:cubicBezTo>
+                        <a:close/>
+                      </a:path>
+                    </a:pathLst>
+                  </a:custGeom>
+                  <ask:type>
+                    <ask:lineSketchNone/>
+                  </ask:type>
+                </ask:lineSketchStyleProps>
+              </a:ext>
+            </a:extLst>
+          </a:ln>
+        </p:spPr>
+      </p:pic>
+      <p:sp>
+        <p:nvSpPr>
+          <p:cNvPr id="12" name="내용 개체 틀 2">
+            <a:extLst>
+              <a:ext uri="{FF2B5EF4-FFF2-40B4-BE49-F238E27FC236}">
+                <a16:creationId xmlns:a16="http://schemas.microsoft.com/office/drawing/2014/main" id="{6F9FC355-108D-229C-8C47-754079D811C4}"/>
+              </a:ext>
+            </a:extLst>
+          </p:cNvPr>
+          <p:cNvSpPr txBox="1">
+            <a:spLocks/>
+          </p:cNvSpPr>
+          <p:nvPr/>
+        </p:nvSpPr>
+        <p:spPr>
+          <a:xfrm>
+            <a:off x="1313244" y="4813418"/>
+            <a:ext cx="4452226" cy="1375687"/>
           </a:xfrm>
           <a:prstGeom prst="rect">
             <a:avLst/>
           </a:prstGeom>
         </p:spPr>
-      </p:pic>
+        <p:txBody>
+          <a:bodyPr vert="horz" lIns="91440" tIns="45720" rIns="91440" bIns="45720" rtlCol="0">
+            <a:normAutofit/>
+          </a:bodyPr>
+          <a:lstStyle>
+            <a:lvl1pPr marL="228600" indent="-228600" algn="l" defTabSz="914400" rtl="0" eaLnBrk="1" latinLnBrk="1" hangingPunct="1">
+              <a:lnSpc>
+                <a:spcPct val="90000"/>
+              </a:lnSpc>
+              <a:spcBef>
+                <a:spcPts val="1000"/>
+              </a:spcBef>
+              <a:buFont typeface="Arial" panose="020B0604020202020204" pitchFamily="34" charset="0"/>
+              <a:buChar char="•"/>
+              <a:defRPr sz="2800" kern="1200">
+                <a:solidFill>
+                  <a:schemeClr val="tx1"/>
+                </a:solidFill>
+                <a:latin typeface="+mn-lt"/>
+                <a:ea typeface="+mn-ea"/>
+                <a:cs typeface="+mn-cs"/>
+              </a:defRPr>
+            </a:lvl1pPr>
+            <a:lvl2pPr marL="685800" indent="-228600" algn="l" defTabSz="914400" rtl="0" eaLnBrk="1" latinLnBrk="1" hangingPunct="1">
+              <a:lnSpc>
+                <a:spcPct val="90000"/>
+              </a:lnSpc>
+              <a:spcBef>
+                <a:spcPts val="500"/>
+              </a:spcBef>
+              <a:buFont typeface="Arial" panose="020B0604020202020204" pitchFamily="34" charset="0"/>
+              <a:buChar char="•"/>
+              <a:defRPr sz="2400" kern="1200">
+                <a:solidFill>
+                  <a:schemeClr val="tx1"/>
+                </a:solidFill>
+                <a:latin typeface="+mn-lt"/>
+                <a:ea typeface="+mn-ea"/>
+                <a:cs typeface="+mn-cs"/>
+              </a:defRPr>
+            </a:lvl2pPr>
+            <a:lvl3pPr marL="1143000" indent="-228600" algn="l" defTabSz="914400" rtl="0" eaLnBrk="1" latinLnBrk="1" hangingPunct="1">
+              <a:lnSpc>
+                <a:spcPct val="90000"/>
+              </a:lnSpc>
+              <a:spcBef>
+                <a:spcPts val="500"/>
+              </a:spcBef>
+              <a:buFont typeface="Arial" panose="020B0604020202020204" pitchFamily="34" charset="0"/>
+              <a:buChar char="•"/>
+              <a:defRPr sz="2000" kern="1200">
+                <a:solidFill>
+                  <a:schemeClr val="tx1"/>
+                </a:solidFill>
+                <a:latin typeface="+mn-lt"/>
+                <a:ea typeface="+mn-ea"/>
+                <a:cs typeface="+mn-cs"/>
+              </a:defRPr>
+            </a:lvl3pPr>
+            <a:lvl4pPr marL="1600200" indent="-228600" algn="l" defTabSz="914400" rtl="0" eaLnBrk="1" latinLnBrk="1" hangingPunct="1">
+              <a:lnSpc>
+                <a:spcPct val="90000"/>
+              </a:lnSpc>
+              <a:spcBef>
+                <a:spcPts val="500"/>
+              </a:spcBef>
+              <a:buFont typeface="Arial" panose="020B0604020202020204" pitchFamily="34" charset="0"/>
+              <a:buChar char="•"/>
+              <a:defRPr sz="1800" kern="1200">
+                <a:solidFill>
+                  <a:schemeClr val="tx1"/>
+                </a:solidFill>
+                <a:latin typeface="+mn-lt"/>
+                <a:ea typeface="+mn-ea"/>
+                <a:cs typeface="+mn-cs"/>
+              </a:defRPr>
+            </a:lvl4pPr>
+            <a:lvl5pPr marL="2057400" indent="-228600" algn="l" defTabSz="914400" rtl="0" eaLnBrk="1" latinLnBrk="1" hangingPunct="1">
+              <a:lnSpc>
+                <a:spcPct val="90000"/>
+              </a:lnSpc>
+              <a:spcBef>
+                <a:spcPts val="500"/>
+              </a:spcBef>
+              <a:buFont typeface="Arial" panose="020B0604020202020204" pitchFamily="34" charset="0"/>
+              <a:buChar char="•"/>
+              <a:defRPr sz="1800" kern="1200">
+                <a:solidFill>
+                  <a:schemeClr val="tx1"/>
+                </a:solidFill>
+                <a:latin typeface="+mn-lt"/>
+                <a:ea typeface="+mn-ea"/>
+                <a:cs typeface="+mn-cs"/>
+              </a:defRPr>
+            </a:lvl5pPr>
+            <a:lvl6pPr marL="2514600" indent="-228600" algn="l" defTabSz="914400" rtl="0" eaLnBrk="1" latinLnBrk="1" hangingPunct="1">
+              <a:lnSpc>
+                <a:spcPct val="90000"/>
+              </a:lnSpc>
+              <a:spcBef>
+                <a:spcPts val="500"/>
+              </a:spcBef>
+              <a:buFont typeface="Arial" panose="020B0604020202020204" pitchFamily="34" charset="0"/>
+              <a:buChar char="•"/>
+              <a:defRPr sz="1800" kern="1200">
+                <a:solidFill>
+                  <a:schemeClr val="tx1"/>
+                </a:solidFill>
+                <a:latin typeface="+mn-lt"/>
+                <a:ea typeface="+mn-ea"/>
+                <a:cs typeface="+mn-cs"/>
+              </a:defRPr>
+            </a:lvl6pPr>
+            <a:lvl7pPr marL="2971800" indent="-228600" algn="l" defTabSz="914400" rtl="0" eaLnBrk="1" latinLnBrk="1" hangingPunct="1">
+              <a:lnSpc>
+                <a:spcPct val="90000"/>
+              </a:lnSpc>
+              <a:spcBef>
+                <a:spcPts val="500"/>
+              </a:spcBef>
+              <a:buFont typeface="Arial" panose="020B0604020202020204" pitchFamily="34" charset="0"/>
+              <a:buChar char="•"/>
+              <a:defRPr sz="1800" kern="1200">
+                <a:solidFill>
+                  <a:schemeClr val="tx1"/>
+                </a:solidFill>
+                <a:latin typeface="+mn-lt"/>
+                <a:ea typeface="+mn-ea"/>
+                <a:cs typeface="+mn-cs"/>
+              </a:defRPr>
+            </a:lvl7pPr>
+            <a:lvl8pPr marL="3429000" indent="-228600" algn="l" defTabSz="914400" rtl="0" eaLnBrk="1" latinLnBrk="1" hangingPunct="1">
+              <a:lnSpc>
+                <a:spcPct val="90000"/>
+              </a:lnSpc>
+              <a:spcBef>
+                <a:spcPts val="500"/>
+              </a:spcBef>
+              <a:buFont typeface="Arial" panose="020B0604020202020204" pitchFamily="34" charset="0"/>
+              <a:buChar char="•"/>
+              <a:defRPr sz="1800" kern="1200">
+                <a:solidFill>
+                  <a:schemeClr val="tx1"/>
+                </a:solidFill>
+                <a:latin typeface="+mn-lt"/>
+                <a:ea typeface="+mn-ea"/>
+                <a:cs typeface="+mn-cs"/>
+              </a:defRPr>
+            </a:lvl8pPr>
+            <a:lvl9pPr marL="3886200" indent="-228600" algn="l" defTabSz="914400" rtl="0" eaLnBrk="1" latinLnBrk="1" hangingPunct="1">
+              <a:lnSpc>
+                <a:spcPct val="90000"/>
+              </a:lnSpc>
+              <a:spcBef>
+                <a:spcPts val="500"/>
+              </a:spcBef>
+              <a:buFont typeface="Arial" panose="020B0604020202020204" pitchFamily="34" charset="0"/>
+              <a:buChar char="•"/>
+              <a:defRPr sz="1800" kern="1200">
+                <a:solidFill>
+                  <a:schemeClr val="tx1"/>
+                </a:solidFill>
+                <a:latin typeface="+mn-lt"/>
+                <a:ea typeface="+mn-ea"/>
+                <a:cs typeface="+mn-cs"/>
+              </a:defRPr>
+            </a:lvl9pPr>
+          </a:lstStyle>
+          <a:p>
+            <a:pPr marL="0" indent="0">
+              <a:buFont typeface="Arial" panose="020B0604020202020204" pitchFamily="34" charset="0"/>
+              <a:buNone/>
+            </a:pPr>
+            <a:r>
+              <a:rPr lang="ko-KR" altLang="en-US" sz="1800" b="1">
+                <a:latin typeface="Noto Sans KR"/>
+              </a:rPr>
+              <a:t>만성질환 위험 증가</a:t>
+            </a:r>
+          </a:p>
+          <a:p>
+            <a:pPr marL="0" indent="0">
+              <a:lnSpc>
+                <a:spcPct val="150000"/>
+              </a:lnSpc>
+              <a:buFont typeface="Arial" panose="020B0604020202020204" pitchFamily="34" charset="0"/>
+              <a:buNone/>
+            </a:pPr>
+            <a:r>
+              <a:rPr lang="ko-KR" altLang="en-US" sz="1400">
+                <a:solidFill>
+                  <a:schemeClr val="tx1">
+                    <a:lumMod val="75000"/>
+                    <a:lumOff val="25000"/>
+                  </a:schemeClr>
+                </a:solidFill>
+                <a:latin typeface="Noto Sans KR"/>
+              </a:rPr>
+              <a:t>잘못된 식습관으로 인해 </a:t>
+            </a:r>
+            <a:r>
+              <a:rPr lang="ko-KR" altLang="en-US" sz="1400" b="1">
+                <a:latin typeface="Noto Sans KR"/>
+              </a:rPr>
+              <a:t>고콜레스테롤혈증</a:t>
+            </a:r>
+            <a:r>
+              <a:rPr lang="ko-KR" altLang="en-US" sz="1400">
+                <a:solidFill>
+                  <a:schemeClr val="tx1">
+                    <a:lumMod val="75000"/>
+                    <a:lumOff val="25000"/>
+                  </a:schemeClr>
+                </a:solidFill>
+                <a:latin typeface="Noto Sans KR"/>
+              </a:rPr>
+              <a:t> 만성질환 유병률 증가</a:t>
+            </a:r>
+            <a:endParaRPr lang="ko-KR" altLang="en-US" sz="1400">
+              <a:solidFill>
+                <a:schemeClr val="tx1">
+                  <a:lumMod val="75000"/>
+                  <a:lumOff val="25000"/>
+                </a:schemeClr>
+              </a:solidFill>
+            </a:endParaRPr>
+          </a:p>
+        </p:txBody>
+      </p:sp>
       <p:pic>
         <p:nvPicPr>
-          <p:cNvPr id="20" name="그림 19" descr="블랙, 어둠이(가) 표시된 사진&#10;&#10;AI가 생성한 콘텐츠는 부정확할 수 있습니다.">
+          <p:cNvPr id="17" name="그림 16" descr="블랙, 어둠이(가) 표시된 사진&#10;&#10;AI가 생성한 콘텐츠는 부정확할 수 있습니다.">
             <a:extLst>
               <a:ext uri="{FF2B5EF4-FFF2-40B4-BE49-F238E27FC236}">
-                <a16:creationId xmlns:a16="http://schemas.microsoft.com/office/drawing/2014/main" id="{D44DA6F9-58FC-9741-E9F2-DEA6DE2F0D0C}"/>
+                <a16:creationId xmlns:a16="http://schemas.microsoft.com/office/drawing/2014/main" id="{2D4F120A-9945-AF4B-0051-06D1126780D8}"/>
               </a:ext>
             </a:extLst>
           </p:cNvPr>
@@ -6672,7 +7942,7 @@
           <p:nvPr/>
         </p:nvPicPr>
         <p:blipFill>
-          <a:blip r:embed="rId2">
+          <a:blip r:embed="rId3">
             <a:extLst>
               <a:ext uri="{28A0092B-C50C-407E-A947-70E740481C1C}">
                 <a14:useLocalDpi xmlns:a14="http://schemas.microsoft.com/office/drawing/2010/main" val="0"/>
@@ -6684,9 +7954,348 @@
           </a:stretch>
         </p:blipFill>
         <p:spPr>
-          <a:xfrm rot="10800000">
-            <a:off x="2883261" y="4417441"/>
-            <a:ext cx="720000" cy="720000"/>
+          <a:xfrm>
+            <a:off x="603253" y="5080397"/>
+            <a:ext cx="468000" cy="468000"/>
+          </a:xfrm>
+          <a:prstGeom prst="rect">
+            <a:avLst/>
+          </a:prstGeom>
+        </p:spPr>
+      </p:pic>
+      <p:sp>
+        <p:nvSpPr>
+          <p:cNvPr id="4" name="직사각형 3">
+            <a:extLst>
+              <a:ext uri="{FF2B5EF4-FFF2-40B4-BE49-F238E27FC236}">
+                <a16:creationId xmlns:a16="http://schemas.microsoft.com/office/drawing/2014/main" id="{9BD01A12-581E-B7EB-1FA7-940AA8F5F3A2}"/>
+              </a:ext>
+            </a:extLst>
+          </p:cNvPr>
+          <p:cNvSpPr/>
+          <p:nvPr/>
+        </p:nvSpPr>
+        <p:spPr>
+          <a:xfrm>
+            <a:off x="0" y="0"/>
+            <a:ext cx="12192000" cy="1180396"/>
+          </a:xfrm>
+          <a:prstGeom prst="rect">
+            <a:avLst/>
+          </a:prstGeom>
+          <a:solidFill>
+            <a:schemeClr val="dk1">
+              <a:alpha val="80000"/>
+            </a:schemeClr>
+          </a:solidFill>
+          <a:ln>
+            <a:noFill/>
+          </a:ln>
+        </p:spPr>
+        <p:style>
+          <a:lnRef idx="2">
+            <a:schemeClr val="dk1">
+              <a:shade val="15000"/>
+            </a:schemeClr>
+          </a:lnRef>
+          <a:fillRef idx="1">
+            <a:schemeClr val="dk1"/>
+          </a:fillRef>
+          <a:effectRef idx="0">
+            <a:schemeClr val="dk1"/>
+          </a:effectRef>
+          <a:fontRef idx="minor">
+            <a:schemeClr val="lt1"/>
+          </a:fontRef>
+        </p:style>
+        <p:txBody>
+          <a:bodyPr rtlCol="0" anchor="ctr"/>
+          <a:lstStyle/>
+          <a:p>
+            <a:endParaRPr lang="ko-KR" altLang="en-US"/>
+          </a:p>
+        </p:txBody>
+      </p:sp>
+      <p:sp>
+        <p:nvSpPr>
+          <p:cNvPr id="2" name="제목 1">
+            <a:extLst>
+              <a:ext uri="{FF2B5EF4-FFF2-40B4-BE49-F238E27FC236}">
+                <a16:creationId xmlns:a16="http://schemas.microsoft.com/office/drawing/2014/main" id="{3085BA4F-DA62-4ACF-71F5-86330591C96A}"/>
+              </a:ext>
+            </a:extLst>
+          </p:cNvPr>
+          <p:cNvSpPr>
+            <a:spLocks noGrp="1"/>
+          </p:cNvSpPr>
+          <p:nvPr>
+            <p:ph type="title"/>
+          </p:nvPr>
+        </p:nvSpPr>
+        <p:spPr>
+          <a:xfrm>
+            <a:off x="603253" y="234292"/>
+            <a:ext cx="2009318" cy="946104"/>
+          </a:xfrm>
+        </p:spPr>
+        <p:txBody>
+          <a:bodyPr>
+            <a:normAutofit/>
+          </a:bodyPr>
+          <a:lstStyle/>
+          <a:p>
+            <a:r>
+              <a:rPr lang="ko-KR" altLang="en-US" sz="3200" b="1">
+                <a:solidFill>
+                  <a:schemeClr val="bg1"/>
+                </a:solidFill>
+              </a:rPr>
+              <a:t>기획의도</a:t>
+            </a:r>
+            <a:br>
+              <a:rPr lang="en-US" altLang="ko-KR" sz="3200" b="1"/>
+            </a:br>
+            <a:r>
+              <a:rPr lang="en-US" altLang="ko-KR" sz="1400" b="0" i="0">
+                <a:solidFill>
+                  <a:schemeClr val="bg1">
+                    <a:lumMod val="75000"/>
+                  </a:schemeClr>
+                </a:solidFill>
+                <a:effectLst/>
+                <a:latin typeface="Noto Sans KR"/>
+              </a:rPr>
+              <a:t>Background &amp; Purpose</a:t>
+            </a:r>
+            <a:endParaRPr lang="ko-KR" altLang="en-US" sz="1400" b="1">
+              <a:solidFill>
+                <a:schemeClr val="bg1">
+                  <a:lumMod val="75000"/>
+                </a:schemeClr>
+              </a:solidFill>
+            </a:endParaRPr>
+          </a:p>
+        </p:txBody>
+      </p:sp>
+      <p:pic>
+        <p:nvPicPr>
+          <p:cNvPr id="1034" name="Picture 10">
+            <a:extLst>
+              <a:ext uri="{FF2B5EF4-FFF2-40B4-BE49-F238E27FC236}">
+                <a16:creationId xmlns:a16="http://schemas.microsoft.com/office/drawing/2014/main" id="{9CA5E893-BE61-1B2C-5561-000A6EBB97A8}"/>
+              </a:ext>
+            </a:extLst>
+          </p:cNvPr>
+          <p:cNvPicPr>
+            <a:picLocks noChangeAspect="1" noChangeArrowheads="1"/>
+          </p:cNvPicPr>
+          <p:nvPr/>
+        </p:nvPicPr>
+        <p:blipFill>
+          <a:blip r:embed="rId4">
+            <a:extLst>
+              <a:ext uri="{28A0092B-C50C-407E-A947-70E740481C1C}">
+                <a14:useLocalDpi xmlns:a14="http://schemas.microsoft.com/office/drawing/2010/main" val="0"/>
+              </a:ext>
+            </a:extLst>
+          </a:blip>
+          <a:srcRect/>
+          <a:stretch>
+            <a:fillRect/>
+          </a:stretch>
+        </p:blipFill>
+        <p:spPr bwMode="auto">
+          <a:xfrm rot="5400000">
+            <a:off x="3288358" y="3758025"/>
+            <a:ext cx="396000" cy="396000"/>
+          </a:xfrm>
+          <a:prstGeom prst="rect">
+            <a:avLst/>
+          </a:prstGeom>
+          <a:noFill/>
+          <a:extLst>
+            <a:ext uri="{909E8E84-426E-40DD-AFC4-6F175D3DCCD1}">
+              <a14:hiddenFill xmlns:a14="http://schemas.microsoft.com/office/drawing/2010/main">
+                <a:solidFill>
+                  <a:srgbClr val="FFFFFF"/>
+                </a:solidFill>
+              </a14:hiddenFill>
+            </a:ext>
+          </a:extLst>
+        </p:spPr>
+      </p:pic>
+      <p:pic>
+        <p:nvPicPr>
+          <p:cNvPr id="6" name="그림 5" descr="텍스트, 폰트, 스크린샷, 라인이(가) 표시된 사진&#10;&#10;AI가 생성한 콘텐츠는 부정확할 수 있습니다.">
+            <a:extLst>
+              <a:ext uri="{FF2B5EF4-FFF2-40B4-BE49-F238E27FC236}">
+                <a16:creationId xmlns:a16="http://schemas.microsoft.com/office/drawing/2014/main" id="{8ED0E3DF-A767-B1A3-C31A-CAA6D0ADDF38}"/>
+              </a:ext>
+            </a:extLst>
+          </p:cNvPr>
+          <p:cNvPicPr>
+            <a:picLocks noChangeAspect="1"/>
+          </p:cNvPicPr>
+          <p:nvPr/>
+        </p:nvPicPr>
+        <p:blipFill>
+          <a:blip r:embed="rId5">
+            <a:extLst>
+              <a:ext uri="{28A0092B-C50C-407E-A947-70E740481C1C}">
+                <a14:useLocalDpi xmlns:a14="http://schemas.microsoft.com/office/drawing/2010/main" val="0"/>
+              </a:ext>
+            </a:extLst>
+          </a:blip>
+          <a:stretch>
+            <a:fillRect/>
+          </a:stretch>
+        </p:blipFill>
+        <p:spPr>
+          <a:xfrm>
+            <a:off x="6511018" y="5501261"/>
+            <a:ext cx="5373738" cy="1056904"/>
+          </a:xfrm>
+          <a:prstGeom prst="rect">
+            <a:avLst/>
+          </a:prstGeom>
+        </p:spPr>
+      </p:pic>
+      <p:pic>
+        <p:nvPicPr>
+          <p:cNvPr id="8" name="그림 7" descr="텍스트, 스크린샷이(가) 표시된 사진&#10;&#10;AI가 생성한 콘텐츠는 부정확할 수 있습니다.">
+            <a:extLst>
+              <a:ext uri="{FF2B5EF4-FFF2-40B4-BE49-F238E27FC236}">
+                <a16:creationId xmlns:a16="http://schemas.microsoft.com/office/drawing/2014/main" id="{7C0D45A7-01FB-D98F-271F-4BABD3FAA698}"/>
+              </a:ext>
+            </a:extLst>
+          </p:cNvPr>
+          <p:cNvPicPr>
+            <a:picLocks noChangeAspect="1"/>
+          </p:cNvPicPr>
+          <p:nvPr/>
+        </p:nvPicPr>
+        <p:blipFill>
+          <a:blip r:embed="rId6">
+            <a:extLst>
+              <a:ext uri="{28A0092B-C50C-407E-A947-70E740481C1C}">
+                <a14:useLocalDpi xmlns:a14="http://schemas.microsoft.com/office/drawing/2010/main" val="0"/>
+              </a:ext>
+            </a:extLst>
+          </a:blip>
+          <a:stretch>
+            <a:fillRect/>
+          </a:stretch>
+        </p:blipFill>
+        <p:spPr>
+          <a:xfrm>
+            <a:off x="6512647" y="3955981"/>
+            <a:ext cx="5372109" cy="1575819"/>
+          </a:xfrm>
+          <a:prstGeom prst="rect">
+            <a:avLst/>
+          </a:prstGeom>
+        </p:spPr>
+      </p:pic>
+      <p:cxnSp>
+        <p:nvCxnSpPr>
+          <p:cNvPr id="16" name="직선 연결선 15">
+            <a:extLst>
+              <a:ext uri="{FF2B5EF4-FFF2-40B4-BE49-F238E27FC236}">
+                <a16:creationId xmlns:a16="http://schemas.microsoft.com/office/drawing/2014/main" id="{8ED8B41D-99E1-876D-2BFC-742037A8D708}"/>
+              </a:ext>
+            </a:extLst>
+          </p:cNvPr>
+          <p:cNvCxnSpPr>
+            <a:cxnSpLocks/>
+          </p:cNvCxnSpPr>
+          <p:nvPr/>
+        </p:nvCxnSpPr>
+        <p:spPr>
+          <a:xfrm>
+            <a:off x="6204857" y="1915525"/>
+            <a:ext cx="0" cy="4273580"/>
+          </a:xfrm>
+          <a:prstGeom prst="line">
+            <a:avLst/>
+          </a:prstGeom>
+          <a:ln>
+            <a:solidFill>
+              <a:schemeClr val="tx1">
+                <a:lumMod val="75000"/>
+                <a:lumOff val="25000"/>
+              </a:schemeClr>
+            </a:solidFill>
+          </a:ln>
+        </p:spPr>
+        <p:style>
+          <a:lnRef idx="2">
+            <a:schemeClr val="dk1"/>
+          </a:lnRef>
+          <a:fillRef idx="0">
+            <a:schemeClr val="dk1"/>
+          </a:fillRef>
+          <a:effectRef idx="1">
+            <a:schemeClr val="dk1"/>
+          </a:effectRef>
+          <a:fontRef idx="minor">
+            <a:schemeClr val="tx1"/>
+          </a:fontRef>
+        </p:style>
+      </p:cxnSp>
+      <p:pic>
+        <p:nvPicPr>
+          <p:cNvPr id="11" name="그림 10">
+            <a:extLst>
+              <a:ext uri="{FF2B5EF4-FFF2-40B4-BE49-F238E27FC236}">
+                <a16:creationId xmlns:a16="http://schemas.microsoft.com/office/drawing/2014/main" id="{D9147C75-3356-63BC-9412-754748EC52EC}"/>
+              </a:ext>
+            </a:extLst>
+          </p:cNvPr>
+          <p:cNvPicPr>
+            <a:picLocks noChangeAspect="1"/>
+          </p:cNvPicPr>
+          <p:nvPr/>
+        </p:nvPicPr>
+        <p:blipFill>
+          <a:blip r:embed="rId7"/>
+          <a:stretch>
+            <a:fillRect/>
+          </a:stretch>
+        </p:blipFill>
+        <p:spPr>
+          <a:xfrm>
+            <a:off x="6513461" y="2908102"/>
+            <a:ext cx="5373738" cy="1047879"/>
+          </a:xfrm>
+          <a:prstGeom prst="rect">
+            <a:avLst/>
+          </a:prstGeom>
+        </p:spPr>
+      </p:pic>
+      <p:pic>
+        <p:nvPicPr>
+          <p:cNvPr id="15" name="그림 14">
+            <a:extLst>
+              <a:ext uri="{FF2B5EF4-FFF2-40B4-BE49-F238E27FC236}">
+                <a16:creationId xmlns:a16="http://schemas.microsoft.com/office/drawing/2014/main" id="{EEC5012B-FC18-6B7D-F1D7-F7FC63B45BF2}"/>
+              </a:ext>
+            </a:extLst>
+          </p:cNvPr>
+          <p:cNvPicPr>
+            <a:picLocks noChangeAspect="1"/>
+          </p:cNvPicPr>
+          <p:nvPr/>
+        </p:nvPicPr>
+        <p:blipFill>
+          <a:blip r:embed="rId8"/>
+          <a:stretch>
+            <a:fillRect/>
+          </a:stretch>
+        </p:blipFill>
+        <p:spPr>
+          <a:xfrm>
+            <a:off x="6513462" y="1915525"/>
+            <a:ext cx="5372108" cy="1073364"/>
           </a:xfrm>
           <a:prstGeom prst="rect">
             <a:avLst/>
@@ -6696,7 +8305,7 @@
     </p:spTree>
     <p:extLst>
       <p:ext uri="{BB962C8B-B14F-4D97-AF65-F5344CB8AC3E}">
-        <p14:creationId xmlns:p14="http://schemas.microsoft.com/office/powerpoint/2010/main" val="2059532911"/>
+        <p14:creationId xmlns:p14="http://schemas.microsoft.com/office/powerpoint/2010/main" val="1356675482"/>
       </p:ext>
     </p:extLst>
   </p:cSld>
@@ -6725,10 +8334,10 @@
       </p:grpSpPr>
       <p:sp>
         <p:nvSpPr>
-          <p:cNvPr id="8" name="사각형: 둥근 모서리 7">
+          <p:cNvPr id="5" name="직사각형 4">
             <a:extLst>
               <a:ext uri="{FF2B5EF4-FFF2-40B4-BE49-F238E27FC236}">
-                <a16:creationId xmlns:a16="http://schemas.microsoft.com/office/drawing/2014/main" id="{B54D5AEA-F684-B1EE-1ECC-E0C4856C847B}"/>
+                <a16:creationId xmlns:a16="http://schemas.microsoft.com/office/drawing/2014/main" id="{C5F43BA5-0951-583E-766C-8FC261381A3D}"/>
               </a:ext>
             </a:extLst>
           </p:cNvPr>
@@ -6737,46 +8346,51 @@
         </p:nvSpPr>
         <p:spPr>
           <a:xfrm>
-            <a:off x="1142660" y="551831"/>
-            <a:ext cx="3486150" cy="1278731"/>
+            <a:off x="0" y="0"/>
+            <a:ext cx="12192000" cy="1180396"/>
           </a:xfrm>
-          <a:prstGeom prst="roundRect">
+          <a:prstGeom prst="rect">
             <a:avLst/>
           </a:prstGeom>
-          <a:ln w="38100"/>
+          <a:solidFill>
+            <a:schemeClr val="dk1">
+              <a:alpha val="80000"/>
+            </a:schemeClr>
+          </a:solidFill>
+          <a:ln>
+            <a:noFill/>
+          </a:ln>
         </p:spPr>
         <p:style>
           <a:lnRef idx="2">
-            <a:schemeClr val="dk1"/>
+            <a:schemeClr val="dk1">
+              <a:shade val="15000"/>
+            </a:schemeClr>
           </a:lnRef>
           <a:fillRef idx="1">
-            <a:schemeClr val="lt1"/>
+            <a:schemeClr val="dk1"/>
           </a:fillRef>
           <a:effectRef idx="0">
             <a:schemeClr val="dk1"/>
           </a:effectRef>
           <a:fontRef idx="minor">
-            <a:schemeClr val="dk1"/>
+            <a:schemeClr val="lt1"/>
           </a:fontRef>
         </p:style>
         <p:txBody>
           <a:bodyPr rtlCol="0" anchor="ctr"/>
           <a:lstStyle/>
           <a:p>
-            <a:pPr algn="ctr"/>
-            <a:r>
-              <a:rPr lang="ko-KR" altLang="en-US"/>
-              <a:t>이상지질혈증 예측</a:t>
-            </a:r>
+            <a:endParaRPr lang="ko-KR" altLang="en-US"/>
           </a:p>
         </p:txBody>
       </p:sp>
       <p:sp>
         <p:nvSpPr>
-          <p:cNvPr id="9" name="사각형: 둥근 모서리 8">
+          <p:cNvPr id="4" name="직사각형 3">
             <a:extLst>
               <a:ext uri="{FF2B5EF4-FFF2-40B4-BE49-F238E27FC236}">
-                <a16:creationId xmlns:a16="http://schemas.microsoft.com/office/drawing/2014/main" id="{F9E12F1E-69C5-1AA7-32F4-769722E17D6C}"/>
+                <a16:creationId xmlns:a16="http://schemas.microsoft.com/office/drawing/2014/main" id="{17C34BB3-C32B-9ADD-77C1-8351E456180D}"/>
               </a:ext>
             </a:extLst>
           </p:cNvPr>
@@ -6785,14 +8399,19 @@
         </p:nvSpPr>
         <p:spPr>
           <a:xfrm>
-            <a:off x="1142660" y="2057399"/>
-            <a:ext cx="3486150" cy="3793334"/>
+            <a:off x="6436585" y="1815151"/>
+            <a:ext cx="5441075" cy="4407900"/>
           </a:xfrm>
-          <a:prstGeom prst="roundRect">
+          <a:prstGeom prst="rect">
             <a:avLst/>
           </a:prstGeom>
-          <a:ln w="31750">
-            <a:miter lim="800000"/>
+          <a:solidFill>
+            <a:schemeClr val="tx1">
+              <a:alpha val="80000"/>
+            </a:schemeClr>
+          </a:solidFill>
+          <a:ln>
+            <a:noFill/>
           </a:ln>
         </p:spPr>
         <p:style>
@@ -6814,153 +8433,16 @@
           <a:lstStyle/>
           <a:p>
             <a:pPr algn="ctr"/>
-            <a:r>
-              <a:rPr lang="ko-KR" altLang="en-US" sz="1600"/>
-              <a:t>최근 식사 메뉴 </a:t>
-            </a:r>
-            <a:r>
-              <a:rPr lang="en-US" altLang="ko-KR" sz="1600"/>
-              <a:t>: </a:t>
-            </a:r>
-            <a:r>
-              <a:rPr lang="ko-KR" altLang="en-US" sz="1600"/>
-              <a:t>빅맥</a:t>
-            </a:r>
-            <a:endParaRPr lang="en-US" altLang="ko-KR" sz="1600"/>
-          </a:p>
-          <a:p>
-            <a:pPr algn="ctr"/>
-            <a:r>
-              <a:rPr lang="en-US" altLang="ko-KR" sz="1600"/>
-              <a:t>========</a:t>
-            </a:r>
-            <a:r>
-              <a:rPr lang="ko-KR" altLang="en-US" sz="1600"/>
-              <a:t>영양성분</a:t>
-            </a:r>
-            <a:r>
-              <a:rPr lang="en-US" altLang="ko-KR" sz="1600"/>
-              <a:t>========</a:t>
-            </a:r>
-          </a:p>
-          <a:p>
-            <a:pPr marL="285750" indent="-285750" algn="just">
-              <a:buFont typeface="Arial" panose="020B0604020202020204" pitchFamily="34" charset="0"/>
-              <a:buChar char="•"/>
-            </a:pPr>
-            <a:r>
-              <a:rPr lang="ko-KR" altLang="en-US" sz="1600"/>
-              <a:t>열량</a:t>
-            </a:r>
-            <a:r>
-              <a:rPr lang="en-US" altLang="ko-KR" sz="1600"/>
-              <a:t>			582kcal</a:t>
-            </a:r>
-          </a:p>
-          <a:p>
-            <a:pPr marL="285750" indent="-285750" algn="just">
-              <a:buFont typeface="Arial" panose="020B0604020202020204" pitchFamily="34" charset="0"/>
-              <a:buChar char="•"/>
-            </a:pPr>
-            <a:r>
-              <a:rPr lang="ko-KR" altLang="en-US" sz="1600"/>
-              <a:t>포화지방</a:t>
-            </a:r>
-            <a:r>
-              <a:rPr lang="en-US" altLang="ko-KR" sz="1600"/>
-              <a:t>		11g</a:t>
-            </a:r>
-          </a:p>
-          <a:p>
-            <a:pPr marL="285750" indent="-285750" algn="just">
-              <a:buFont typeface="Arial" panose="020B0604020202020204" pitchFamily="34" charset="0"/>
-              <a:buChar char="•"/>
-            </a:pPr>
-            <a:r>
-              <a:rPr lang="ko-KR" altLang="en-US" sz="1600"/>
-              <a:t>당</a:t>
-            </a:r>
-            <a:r>
-              <a:rPr lang="en-US" altLang="ko-KR" sz="1600"/>
-              <a:t>			8g</a:t>
-            </a:r>
-          </a:p>
-          <a:p>
-            <a:pPr marL="285750" indent="-285750" algn="just">
-              <a:buFont typeface="Arial" panose="020B0604020202020204" pitchFamily="34" charset="0"/>
-              <a:buChar char="•"/>
-            </a:pPr>
-            <a:r>
-              <a:rPr lang="ko-KR" altLang="en-US" sz="1600"/>
-              <a:t>단백질</a:t>
-            </a:r>
-            <a:r>
-              <a:rPr lang="en-US" altLang="ko-KR" sz="1600"/>
-              <a:t>			27g</a:t>
-            </a:r>
-          </a:p>
-          <a:p>
-            <a:pPr marL="285750" indent="-285750" algn="just">
-              <a:buFont typeface="Arial" panose="020B0604020202020204" pitchFamily="34" charset="0"/>
-              <a:buChar char="•"/>
-            </a:pPr>
-            <a:r>
-              <a:rPr lang="ko-KR" altLang="en-US" sz="1600"/>
-              <a:t>나트륨</a:t>
-            </a:r>
-            <a:r>
-              <a:rPr lang="en-US" altLang="ko-KR" sz="1600"/>
-              <a:t>			902mg</a:t>
-            </a:r>
-          </a:p>
-          <a:p>
-            <a:pPr algn="just"/>
-            <a:endParaRPr lang="ko-KR" altLang="en-US" sz="1600"/>
+            <a:endParaRPr lang="ko-KR" altLang="en-US"/>
           </a:p>
         </p:txBody>
       </p:sp>
-      <p:pic>
-        <p:nvPicPr>
-          <p:cNvPr id="3" name="그림 2" descr="블랙, 어둠이(가) 표시된 사진&#10;&#10;AI가 생성한 콘텐츠는 부정확할 수 있습니다.">
+      <p:sp>
+        <p:nvSpPr>
+          <p:cNvPr id="2" name="직사각형 1">
             <a:extLst>
               <a:ext uri="{FF2B5EF4-FFF2-40B4-BE49-F238E27FC236}">
-                <a16:creationId xmlns:a16="http://schemas.microsoft.com/office/drawing/2014/main" id="{ED59E9FC-A45D-48C9-6125-63D0EB58407C}"/>
-              </a:ext>
-            </a:extLst>
-          </p:cNvPr>
-          <p:cNvPicPr>
-            <a:picLocks noChangeAspect="1"/>
-          </p:cNvPicPr>
-          <p:nvPr/>
-        </p:nvPicPr>
-        <p:blipFill>
-          <a:blip r:embed="rId2">
-            <a:extLst>
-              <a:ext uri="{28A0092B-C50C-407E-A947-70E740481C1C}">
-                <a14:useLocalDpi xmlns:a14="http://schemas.microsoft.com/office/drawing/2010/main" val="0"/>
-              </a:ext>
-            </a:extLst>
-          </a:blip>
-          <a:stretch>
-            <a:fillRect/>
-          </a:stretch>
-        </p:blipFill>
-        <p:spPr>
-          <a:xfrm>
-            <a:off x="10686824" y="741197"/>
-            <a:ext cx="900000" cy="900000"/>
-          </a:xfrm>
-          <a:prstGeom prst="rect">
-            <a:avLst/>
-          </a:prstGeom>
-        </p:spPr>
-      </p:pic>
-      <p:sp>
-        <p:nvSpPr>
-          <p:cNvPr id="5" name="직사각형 4">
-            <a:extLst>
-              <a:ext uri="{FF2B5EF4-FFF2-40B4-BE49-F238E27FC236}">
-                <a16:creationId xmlns:a16="http://schemas.microsoft.com/office/drawing/2014/main" id="{8BFB0F93-F2DE-6FA7-5833-83DBB507C8D2}"/>
+                <a16:creationId xmlns:a16="http://schemas.microsoft.com/office/drawing/2014/main" id="{A6DA42CF-0839-AB13-9F4C-B1358EA1A49D}"/>
               </a:ext>
             </a:extLst>
           </p:cNvPr>
@@ -6969,12 +8451,20 @@
         </p:nvSpPr>
         <p:spPr>
           <a:xfrm>
-            <a:off x="5836444" y="551830"/>
-            <a:ext cx="3771900" cy="1278731"/>
+            <a:off x="314329" y="1815152"/>
+            <a:ext cx="5441087" cy="4407899"/>
           </a:xfrm>
           <a:prstGeom prst="rect">
             <a:avLst/>
           </a:prstGeom>
+          <a:solidFill>
+            <a:schemeClr val="tx1">
+              <a:alpha val="80000"/>
+            </a:schemeClr>
+          </a:solidFill>
+          <a:ln>
+            <a:noFill/>
+          </a:ln>
         </p:spPr>
         <p:style>
           <a:lnRef idx="2">
@@ -6995,197 +8485,932 @@
           <a:lstStyle/>
           <a:p>
             <a:pPr algn="ctr"/>
-            <a:r>
-              <a:rPr lang="ko-KR" altLang="en-US"/>
-              <a:t>이상지질혈증 위험도 </a:t>
-            </a:r>
-            <a:r>
-              <a:rPr lang="en-US" altLang="ko-KR"/>
-              <a:t>: 68%</a:t>
-            </a:r>
             <a:endParaRPr lang="ko-KR" altLang="en-US"/>
           </a:p>
         </p:txBody>
       </p:sp>
       <p:sp>
         <p:nvSpPr>
-          <p:cNvPr id="6" name="사각형: 둥근 모서리 5">
+          <p:cNvPr id="12" name="내용 개체 틀 2">
             <a:extLst>
               <a:ext uri="{FF2B5EF4-FFF2-40B4-BE49-F238E27FC236}">
-                <a16:creationId xmlns:a16="http://schemas.microsoft.com/office/drawing/2014/main" id="{CCA74EE7-A68D-74F2-D2F1-248FE23F2E25}"/>
+                <a16:creationId xmlns:a16="http://schemas.microsoft.com/office/drawing/2014/main" id="{6F9FC355-108D-229C-8C47-754079D811C4}"/>
               </a:ext>
             </a:extLst>
           </p:cNvPr>
-          <p:cNvSpPr/>
+          <p:cNvSpPr txBox="1">
+            <a:spLocks/>
+          </p:cNvSpPr>
           <p:nvPr/>
         </p:nvSpPr>
         <p:spPr>
           <a:xfrm>
-            <a:off x="5672138" y="2214563"/>
-            <a:ext cx="5136356" cy="1371600"/>
+            <a:off x="6609585" y="2242726"/>
+            <a:ext cx="5095073" cy="464871"/>
           </a:xfrm>
-          <a:prstGeom prst="roundRect">
+          <a:prstGeom prst="rect">
             <a:avLst/>
           </a:prstGeom>
+        </p:spPr>
+        <p:txBody>
+          <a:bodyPr vert="horz" lIns="91440" tIns="45720" rIns="91440" bIns="45720" rtlCol="0">
+            <a:noAutofit/>
+          </a:bodyPr>
+          <a:lstStyle>
+            <a:lvl1pPr marL="228600" indent="-228600" algn="l" defTabSz="914400" rtl="0" eaLnBrk="1" latinLnBrk="1" hangingPunct="1">
+              <a:lnSpc>
+                <a:spcPct val="90000"/>
+              </a:lnSpc>
+              <a:spcBef>
+                <a:spcPts val="1000"/>
+              </a:spcBef>
+              <a:buFont typeface="Arial" panose="020B0604020202020204" pitchFamily="34" charset="0"/>
+              <a:buChar char="•"/>
+              <a:defRPr sz="2800" kern="1200">
+                <a:solidFill>
+                  <a:schemeClr val="tx1"/>
+                </a:solidFill>
+                <a:latin typeface="+mn-lt"/>
+                <a:ea typeface="+mn-ea"/>
+                <a:cs typeface="+mn-cs"/>
+              </a:defRPr>
+            </a:lvl1pPr>
+            <a:lvl2pPr marL="685800" indent="-228600" algn="l" defTabSz="914400" rtl="0" eaLnBrk="1" latinLnBrk="1" hangingPunct="1">
+              <a:lnSpc>
+                <a:spcPct val="90000"/>
+              </a:lnSpc>
+              <a:spcBef>
+                <a:spcPts val="500"/>
+              </a:spcBef>
+              <a:buFont typeface="Arial" panose="020B0604020202020204" pitchFamily="34" charset="0"/>
+              <a:buChar char="•"/>
+              <a:defRPr sz="2400" kern="1200">
+                <a:solidFill>
+                  <a:schemeClr val="tx1"/>
+                </a:solidFill>
+                <a:latin typeface="+mn-lt"/>
+                <a:ea typeface="+mn-ea"/>
+                <a:cs typeface="+mn-cs"/>
+              </a:defRPr>
+            </a:lvl2pPr>
+            <a:lvl3pPr marL="1143000" indent="-228600" algn="l" defTabSz="914400" rtl="0" eaLnBrk="1" latinLnBrk="1" hangingPunct="1">
+              <a:lnSpc>
+                <a:spcPct val="90000"/>
+              </a:lnSpc>
+              <a:spcBef>
+                <a:spcPts val="500"/>
+              </a:spcBef>
+              <a:buFont typeface="Arial" panose="020B0604020202020204" pitchFamily="34" charset="0"/>
+              <a:buChar char="•"/>
+              <a:defRPr sz="2000" kern="1200">
+                <a:solidFill>
+                  <a:schemeClr val="tx1"/>
+                </a:solidFill>
+                <a:latin typeface="+mn-lt"/>
+                <a:ea typeface="+mn-ea"/>
+                <a:cs typeface="+mn-cs"/>
+              </a:defRPr>
+            </a:lvl3pPr>
+            <a:lvl4pPr marL="1600200" indent="-228600" algn="l" defTabSz="914400" rtl="0" eaLnBrk="1" latinLnBrk="1" hangingPunct="1">
+              <a:lnSpc>
+                <a:spcPct val="90000"/>
+              </a:lnSpc>
+              <a:spcBef>
+                <a:spcPts val="500"/>
+              </a:spcBef>
+              <a:buFont typeface="Arial" panose="020B0604020202020204" pitchFamily="34" charset="0"/>
+              <a:buChar char="•"/>
+              <a:defRPr sz="1800" kern="1200">
+                <a:solidFill>
+                  <a:schemeClr val="tx1"/>
+                </a:solidFill>
+                <a:latin typeface="+mn-lt"/>
+                <a:ea typeface="+mn-ea"/>
+                <a:cs typeface="+mn-cs"/>
+              </a:defRPr>
+            </a:lvl4pPr>
+            <a:lvl5pPr marL="2057400" indent="-228600" algn="l" defTabSz="914400" rtl="0" eaLnBrk="1" latinLnBrk="1" hangingPunct="1">
+              <a:lnSpc>
+                <a:spcPct val="90000"/>
+              </a:lnSpc>
+              <a:spcBef>
+                <a:spcPts val="500"/>
+              </a:spcBef>
+              <a:buFont typeface="Arial" panose="020B0604020202020204" pitchFamily="34" charset="0"/>
+              <a:buChar char="•"/>
+              <a:defRPr sz="1800" kern="1200">
+                <a:solidFill>
+                  <a:schemeClr val="tx1"/>
+                </a:solidFill>
+                <a:latin typeface="+mn-lt"/>
+                <a:ea typeface="+mn-ea"/>
+                <a:cs typeface="+mn-cs"/>
+              </a:defRPr>
+            </a:lvl5pPr>
+            <a:lvl6pPr marL="2514600" indent="-228600" algn="l" defTabSz="914400" rtl="0" eaLnBrk="1" latinLnBrk="1" hangingPunct="1">
+              <a:lnSpc>
+                <a:spcPct val="90000"/>
+              </a:lnSpc>
+              <a:spcBef>
+                <a:spcPts val="500"/>
+              </a:spcBef>
+              <a:buFont typeface="Arial" panose="020B0604020202020204" pitchFamily="34" charset="0"/>
+              <a:buChar char="•"/>
+              <a:defRPr sz="1800" kern="1200">
+                <a:solidFill>
+                  <a:schemeClr val="tx1"/>
+                </a:solidFill>
+                <a:latin typeface="+mn-lt"/>
+                <a:ea typeface="+mn-ea"/>
+                <a:cs typeface="+mn-cs"/>
+              </a:defRPr>
+            </a:lvl6pPr>
+            <a:lvl7pPr marL="2971800" indent="-228600" algn="l" defTabSz="914400" rtl="0" eaLnBrk="1" latinLnBrk="1" hangingPunct="1">
+              <a:lnSpc>
+                <a:spcPct val="90000"/>
+              </a:lnSpc>
+              <a:spcBef>
+                <a:spcPts val="500"/>
+              </a:spcBef>
+              <a:buFont typeface="Arial" panose="020B0604020202020204" pitchFamily="34" charset="0"/>
+              <a:buChar char="•"/>
+              <a:defRPr sz="1800" kern="1200">
+                <a:solidFill>
+                  <a:schemeClr val="tx1"/>
+                </a:solidFill>
+                <a:latin typeface="+mn-lt"/>
+                <a:ea typeface="+mn-ea"/>
+                <a:cs typeface="+mn-cs"/>
+              </a:defRPr>
+            </a:lvl7pPr>
+            <a:lvl8pPr marL="3429000" indent="-228600" algn="l" defTabSz="914400" rtl="0" eaLnBrk="1" latinLnBrk="1" hangingPunct="1">
+              <a:lnSpc>
+                <a:spcPct val="90000"/>
+              </a:lnSpc>
+              <a:spcBef>
+                <a:spcPts val="500"/>
+              </a:spcBef>
+              <a:buFont typeface="Arial" panose="020B0604020202020204" pitchFamily="34" charset="0"/>
+              <a:buChar char="•"/>
+              <a:defRPr sz="1800" kern="1200">
+                <a:solidFill>
+                  <a:schemeClr val="tx1"/>
+                </a:solidFill>
+                <a:latin typeface="+mn-lt"/>
+                <a:ea typeface="+mn-ea"/>
+                <a:cs typeface="+mn-cs"/>
+              </a:defRPr>
+            </a:lvl8pPr>
+            <a:lvl9pPr marL="3886200" indent="-228600" algn="l" defTabSz="914400" rtl="0" eaLnBrk="1" latinLnBrk="1" hangingPunct="1">
+              <a:lnSpc>
+                <a:spcPct val="90000"/>
+              </a:lnSpc>
+              <a:spcBef>
+                <a:spcPts val="500"/>
+              </a:spcBef>
+              <a:buFont typeface="Arial" panose="020B0604020202020204" pitchFamily="34" charset="0"/>
+              <a:buChar char="•"/>
+              <a:defRPr sz="1800" kern="1200">
+                <a:solidFill>
+                  <a:schemeClr val="tx1"/>
+                </a:solidFill>
+                <a:latin typeface="+mn-lt"/>
+                <a:ea typeface="+mn-ea"/>
+                <a:cs typeface="+mn-cs"/>
+              </a:defRPr>
+            </a:lvl9pPr>
+          </a:lstStyle>
+          <a:p>
+            <a:pPr marL="0" indent="0">
+              <a:lnSpc>
+                <a:spcPct val="150000"/>
+              </a:lnSpc>
+              <a:buFont typeface="Arial" panose="020B0604020202020204" pitchFamily="34" charset="0"/>
+              <a:buNone/>
+            </a:pPr>
+            <a:r>
+              <a:rPr lang="ko-KR" altLang="en-US" sz="1800" b="1">
+                <a:solidFill>
+                  <a:schemeClr val="bg1">
+                    <a:lumMod val="95000"/>
+                  </a:schemeClr>
+                </a:solidFill>
+                <a:latin typeface="Noto Sans KR"/>
+              </a:rPr>
+              <a:t>머신러닝 기반 콜레스테롤 위험도 예측 엔진 개발</a:t>
+            </a:r>
+            <a:endParaRPr lang="en-US" altLang="ko-KR" sz="1800" b="1">
+              <a:solidFill>
+                <a:schemeClr val="bg1">
+                  <a:lumMod val="95000"/>
+                </a:schemeClr>
+              </a:solidFill>
+              <a:latin typeface="Noto Sans KR"/>
+            </a:endParaRPr>
+          </a:p>
+        </p:txBody>
+      </p:sp>
+      <p:sp>
+        <p:nvSpPr>
+          <p:cNvPr id="9" name="TextBox 8">
+            <a:extLst>
+              <a:ext uri="{FF2B5EF4-FFF2-40B4-BE49-F238E27FC236}">
+                <a16:creationId xmlns:a16="http://schemas.microsoft.com/office/drawing/2014/main" id="{32372C32-8F73-FAB9-E521-1E48EB1C7047}"/>
+              </a:ext>
+            </a:extLst>
+          </p:cNvPr>
+          <p:cNvSpPr txBox="1"/>
+          <p:nvPr/>
+        </p:nvSpPr>
+        <p:spPr>
+          <a:xfrm>
+            <a:off x="6609585" y="2998112"/>
+            <a:ext cx="4920745" cy="2178225"/>
+          </a:xfrm>
+          <a:prstGeom prst="rect">
+            <a:avLst/>
+          </a:prstGeom>
+          <a:noFill/>
+        </p:spPr>
+        <p:txBody>
+          <a:bodyPr wrap="square" rtlCol="0">
+            <a:spAutoFit/>
+          </a:bodyPr>
+          <a:lstStyle/>
+          <a:p>
+            <a:pPr marL="285750" indent="-285750">
+              <a:lnSpc>
+                <a:spcPct val="200000"/>
+              </a:lnSpc>
+              <a:buFont typeface="Arial" panose="020B0604020202020204" pitchFamily="34" charset="0"/>
+              <a:buChar char="•"/>
+            </a:pPr>
+            <a:r>
+              <a:rPr lang="ko-KR" altLang="en-US" sz="1400">
+                <a:solidFill>
+                  <a:schemeClr val="bg1">
+                    <a:lumMod val="85000"/>
+                  </a:schemeClr>
+                </a:solidFill>
+                <a:latin typeface="+mn-ea"/>
+              </a:rPr>
+              <a:t>통합 데이터셋 기반 </a:t>
+            </a:r>
+            <a:r>
+              <a:rPr lang="ko-KR" altLang="en-US" sz="1400" b="1">
+                <a:solidFill>
+                  <a:schemeClr val="bg1">
+                    <a:lumMod val="85000"/>
+                  </a:schemeClr>
+                </a:solidFill>
+                <a:latin typeface="+mn-ea"/>
+              </a:rPr>
+              <a:t>고콜레스테롤</a:t>
+            </a:r>
+            <a:r>
+              <a:rPr lang="en-US" altLang="ko-KR" sz="1400" b="1">
+                <a:solidFill>
+                  <a:schemeClr val="bg1">
+                    <a:lumMod val="85000"/>
+                  </a:schemeClr>
+                </a:solidFill>
+                <a:latin typeface="+mn-ea"/>
+              </a:rPr>
+              <a:t> </a:t>
+            </a:r>
+            <a:r>
+              <a:rPr lang="ko-KR" altLang="en-US" sz="1400" b="1">
+                <a:solidFill>
+                  <a:schemeClr val="bg1">
+                    <a:lumMod val="85000"/>
+                  </a:schemeClr>
+                </a:solidFill>
+                <a:latin typeface="+mn-ea"/>
+              </a:rPr>
+              <a:t>발생 위험도 산출 지도학습 모델</a:t>
+            </a:r>
+            <a:r>
+              <a:rPr lang="ko-KR" altLang="en-US" sz="1400">
+                <a:solidFill>
+                  <a:schemeClr val="bg1">
+                    <a:lumMod val="85000"/>
+                  </a:schemeClr>
+                </a:solidFill>
+                <a:latin typeface="+mn-ea"/>
+              </a:rPr>
+              <a:t> 개발</a:t>
+            </a:r>
+            <a:endParaRPr lang="en-US" altLang="ko-KR" sz="1400">
+              <a:solidFill>
+                <a:schemeClr val="bg1">
+                  <a:lumMod val="85000"/>
+                </a:schemeClr>
+              </a:solidFill>
+              <a:latin typeface="+mn-ea"/>
+            </a:endParaRPr>
+          </a:p>
+          <a:p>
+            <a:pPr marL="285750" indent="-285750">
+              <a:lnSpc>
+                <a:spcPct val="200000"/>
+              </a:lnSpc>
+              <a:buFont typeface="Arial" panose="020B0604020202020204" pitchFamily="34" charset="0"/>
+              <a:buChar char="•"/>
+            </a:pPr>
+            <a:r>
+              <a:rPr lang="ko-KR" altLang="en-US" sz="1400">
+                <a:solidFill>
+                  <a:schemeClr val="bg1">
+                    <a:lumMod val="85000"/>
+                  </a:schemeClr>
+                </a:solidFill>
+                <a:latin typeface="+mn-ea"/>
+              </a:rPr>
+              <a:t>개별 요인의 위험도 및 영향도를 정량적으로 분석</a:t>
+            </a:r>
+            <a:endParaRPr lang="en-US" altLang="ko-KR" sz="1400">
+              <a:solidFill>
+                <a:schemeClr val="bg1">
+                  <a:lumMod val="85000"/>
+                </a:schemeClr>
+              </a:solidFill>
+              <a:latin typeface="+mn-ea"/>
+            </a:endParaRPr>
+          </a:p>
+          <a:p>
+            <a:pPr marL="285750" indent="-285750">
+              <a:lnSpc>
+                <a:spcPct val="200000"/>
+              </a:lnSpc>
+              <a:buFont typeface="Arial" panose="020B0604020202020204" pitchFamily="34" charset="0"/>
+              <a:buChar char="•"/>
+            </a:pPr>
+            <a:r>
+              <a:rPr lang="ko-KR" altLang="en-US" sz="1400">
+                <a:solidFill>
+                  <a:schemeClr val="bg1">
+                    <a:lumMod val="85000"/>
+                  </a:schemeClr>
+                </a:solidFill>
+                <a:latin typeface="+mn-ea"/>
+              </a:rPr>
+              <a:t>분석된 데이터에서 고콜레스테롤 위험 요인과 수치를 직관적인 인포그래픽으로 시각화</a:t>
+            </a:r>
+            <a:endParaRPr lang="en-US" altLang="ko-KR" sz="1400">
+              <a:solidFill>
+                <a:schemeClr val="bg1">
+                  <a:lumMod val="85000"/>
+                </a:schemeClr>
+              </a:solidFill>
+              <a:latin typeface="+mn-ea"/>
+            </a:endParaRPr>
+          </a:p>
+        </p:txBody>
+      </p:sp>
+      <p:sp>
+        <p:nvSpPr>
+          <p:cNvPr id="13" name="제목 1">
+            <a:extLst>
+              <a:ext uri="{FF2B5EF4-FFF2-40B4-BE49-F238E27FC236}">
+                <a16:creationId xmlns:a16="http://schemas.microsoft.com/office/drawing/2014/main" id="{408675D1-E235-486E-65AD-299E40A1A0DE}"/>
+              </a:ext>
+            </a:extLst>
+          </p:cNvPr>
+          <p:cNvSpPr txBox="1">
+            <a:spLocks/>
+          </p:cNvSpPr>
+          <p:nvPr/>
+        </p:nvSpPr>
+        <p:spPr>
+          <a:xfrm>
+            <a:off x="603252" y="232090"/>
+            <a:ext cx="2110259" cy="946104"/>
+          </a:xfrm>
+          <a:prstGeom prst="rect">
+            <a:avLst/>
+          </a:prstGeom>
+        </p:spPr>
+        <p:txBody>
+          <a:bodyPr vert="horz" lIns="91440" tIns="45720" rIns="91440" bIns="45720" rtlCol="0" anchor="ctr">
+            <a:normAutofit/>
+          </a:bodyPr>
+          <a:lstStyle>
+            <a:lvl1pPr algn="l" defTabSz="914400" rtl="0" eaLnBrk="1" latinLnBrk="1" hangingPunct="1">
+              <a:lnSpc>
+                <a:spcPct val="90000"/>
+              </a:lnSpc>
+              <a:spcBef>
+                <a:spcPct val="0"/>
+              </a:spcBef>
+              <a:buNone/>
+              <a:defRPr sz="4400" kern="1200">
+                <a:solidFill>
+                  <a:schemeClr val="tx1"/>
+                </a:solidFill>
+                <a:latin typeface="+mj-lt"/>
+                <a:ea typeface="+mj-ea"/>
+                <a:cs typeface="+mj-cs"/>
+              </a:defRPr>
+            </a:lvl1pPr>
+          </a:lstStyle>
+          <a:p>
+            <a:r>
+              <a:rPr lang="ko-KR" altLang="en-US" sz="3200" b="1">
+                <a:solidFill>
+                  <a:schemeClr val="bg1"/>
+                </a:solidFill>
+              </a:rPr>
+              <a:t>개발목표</a:t>
+            </a:r>
+            <a:br>
+              <a:rPr lang="en-US" altLang="ko-KR" sz="3200" b="1"/>
+            </a:br>
+            <a:r>
+              <a:rPr lang="en-US" altLang="ko-KR" sz="1400" b="0" i="0">
+                <a:solidFill>
+                  <a:schemeClr val="bg1">
+                    <a:lumMod val="75000"/>
+                  </a:schemeClr>
+                </a:solidFill>
+                <a:effectLst/>
+                <a:latin typeface="Noto Sans KR"/>
+              </a:rPr>
+              <a:t>Development Objectives</a:t>
+            </a:r>
+            <a:endParaRPr lang="ko-KR" altLang="en-US" sz="1400" b="1">
+              <a:solidFill>
+                <a:schemeClr val="bg1">
+                  <a:lumMod val="75000"/>
+                </a:schemeClr>
+              </a:solidFill>
+            </a:endParaRPr>
+          </a:p>
+        </p:txBody>
+      </p:sp>
+      <p:cxnSp>
+        <p:nvCxnSpPr>
+          <p:cNvPr id="3" name="직선 연결선 2">
+            <a:extLst>
+              <a:ext uri="{FF2B5EF4-FFF2-40B4-BE49-F238E27FC236}">
+                <a16:creationId xmlns:a16="http://schemas.microsoft.com/office/drawing/2014/main" id="{517963F5-4548-6EE0-0AF0-5D28ADF07127}"/>
+              </a:ext>
+            </a:extLst>
+          </p:cNvPr>
+          <p:cNvCxnSpPr>
+            <a:cxnSpLocks/>
+          </p:cNvCxnSpPr>
+          <p:nvPr/>
+        </p:nvCxnSpPr>
+        <p:spPr>
+          <a:xfrm>
+            <a:off x="6096000" y="1908000"/>
+            <a:ext cx="0" cy="4214194"/>
+          </a:xfrm>
+          <a:prstGeom prst="line">
+            <a:avLst/>
+          </a:prstGeom>
+          <a:ln>
+            <a:solidFill>
+              <a:schemeClr val="dk1">
+                <a:alpha val="80000"/>
+              </a:schemeClr>
+            </a:solidFill>
+          </a:ln>
         </p:spPr>
         <p:style>
           <a:lnRef idx="2">
             <a:schemeClr val="dk1"/>
           </a:lnRef>
-          <a:fillRef idx="1">
-            <a:schemeClr val="lt1"/>
+          <a:fillRef idx="0">
+            <a:schemeClr val="dk1"/>
           </a:fillRef>
-          <a:effectRef idx="0">
+          <a:effectRef idx="1">
             <a:schemeClr val="dk1"/>
           </a:effectRef>
           <a:fontRef idx="minor">
-            <a:schemeClr val="dk1"/>
+            <a:schemeClr val="tx1"/>
           </a:fontRef>
         </p:style>
+      </p:cxnSp>
+      <p:sp>
+        <p:nvSpPr>
+          <p:cNvPr id="7" name="TextBox 6">
+            <a:extLst>
+              <a:ext uri="{FF2B5EF4-FFF2-40B4-BE49-F238E27FC236}">
+                <a16:creationId xmlns:a16="http://schemas.microsoft.com/office/drawing/2014/main" id="{37E11CF9-6752-0478-C4EE-7AFF12AF853A}"/>
+              </a:ext>
+            </a:extLst>
+          </p:cNvPr>
+          <p:cNvSpPr txBox="1"/>
+          <p:nvPr/>
+        </p:nvSpPr>
+        <p:spPr>
+          <a:xfrm>
+            <a:off x="603252" y="2998112"/>
+            <a:ext cx="4972211" cy="3039999"/>
+          </a:xfrm>
+          <a:prstGeom prst="rect">
+            <a:avLst/>
+          </a:prstGeom>
+          <a:noFill/>
+        </p:spPr>
         <p:txBody>
-          <a:bodyPr rtlCol="0" anchor="ctr"/>
+          <a:bodyPr wrap="square" rtlCol="0">
+            <a:spAutoFit/>
+          </a:bodyPr>
           <a:lstStyle/>
           <a:p>
-            <a:pPr algn="ctr"/>
-            <a:r>
-              <a:rPr lang="ko-KR" altLang="en-US"/>
-              <a:t>최근 섭취한 음식</a:t>
-            </a:r>
-            <a:endParaRPr lang="en-US" altLang="ko-KR"/>
-          </a:p>
-          <a:p>
-            <a:pPr algn="ctr"/>
-            <a:endParaRPr lang="en-US" altLang="ko-KR"/>
-          </a:p>
-          <a:p>
-            <a:pPr algn="ctr"/>
-            <a:endParaRPr lang="ko-KR" altLang="en-US"/>
+            <a:pPr marL="285750" indent="-285750">
+              <a:lnSpc>
+                <a:spcPct val="200000"/>
+              </a:lnSpc>
+              <a:buFont typeface="Arial" panose="020B0604020202020204" pitchFamily="34" charset="0"/>
+              <a:buChar char="•"/>
+            </a:pPr>
+            <a:r>
+              <a:rPr lang="ko-KR" altLang="en-US" sz="1400">
+                <a:solidFill>
+                  <a:schemeClr val="bg1">
+                    <a:lumMod val="85000"/>
+                  </a:schemeClr>
+                </a:solidFill>
+                <a:latin typeface="+mn-ea"/>
+              </a:rPr>
+              <a:t>국민건강영양조사 식품섭취조사 데이터 활용</a:t>
+            </a:r>
+            <a:r>
+              <a:rPr lang="en-US" altLang="ko-KR" sz="1400">
+                <a:solidFill>
+                  <a:schemeClr val="bg1">
+                    <a:lumMod val="85000"/>
+                  </a:schemeClr>
+                </a:solidFill>
+                <a:latin typeface="+mn-ea"/>
+              </a:rPr>
+              <a:t>, </a:t>
+            </a:r>
+            <a:r>
+              <a:rPr lang="ko-KR" altLang="en-US" sz="1400" b="1">
+                <a:solidFill>
+                  <a:schemeClr val="bg1">
+                    <a:lumMod val="85000"/>
+                  </a:schemeClr>
+                </a:solidFill>
+                <a:latin typeface="+mn-ea"/>
+              </a:rPr>
+              <a:t>개인별 </a:t>
+            </a:r>
+            <a:r>
+              <a:rPr lang="en-US" altLang="ko-KR" sz="1400" b="1">
+                <a:solidFill>
+                  <a:schemeClr val="bg1">
+                    <a:lumMod val="85000"/>
+                  </a:schemeClr>
+                </a:solidFill>
+                <a:latin typeface="+mn-ea"/>
+              </a:rPr>
+              <a:t>1</a:t>
+            </a:r>
+            <a:r>
+              <a:rPr lang="ko-KR" altLang="en-US" sz="1400" b="1">
+                <a:solidFill>
+                  <a:schemeClr val="bg1">
+                    <a:lumMod val="85000"/>
+                  </a:schemeClr>
+                </a:solidFill>
+                <a:latin typeface="+mn-ea"/>
+              </a:rPr>
+              <a:t>일 영양소 섭취량 산출 체계</a:t>
+            </a:r>
+            <a:r>
+              <a:rPr lang="ko-KR" altLang="en-US" sz="1400">
+                <a:solidFill>
+                  <a:schemeClr val="bg1">
+                    <a:lumMod val="85000"/>
+                  </a:schemeClr>
+                </a:solidFill>
+                <a:latin typeface="+mn-ea"/>
+              </a:rPr>
+              <a:t> 수립</a:t>
+            </a:r>
+          </a:p>
+          <a:p>
+            <a:pPr marL="285750" indent="-285750">
+              <a:lnSpc>
+                <a:spcPct val="200000"/>
+              </a:lnSpc>
+              <a:buFont typeface="Arial" panose="020B0604020202020204" pitchFamily="34" charset="0"/>
+              <a:buChar char="•"/>
+            </a:pPr>
+            <a:r>
+              <a:rPr lang="ko-KR" altLang="en-US" sz="1400">
+                <a:solidFill>
+                  <a:schemeClr val="bg1">
+                    <a:lumMod val="85000"/>
+                  </a:schemeClr>
+                </a:solidFill>
+                <a:latin typeface="+mn-ea"/>
+              </a:rPr>
+              <a:t>연령</a:t>
+            </a:r>
+            <a:r>
+              <a:rPr lang="en-US" altLang="ko-KR" sz="1400">
+                <a:solidFill>
+                  <a:schemeClr val="bg1">
+                    <a:lumMod val="85000"/>
+                  </a:schemeClr>
+                </a:solidFill>
+                <a:latin typeface="+mn-ea"/>
+              </a:rPr>
+              <a:t>/</a:t>
+            </a:r>
+            <a:r>
+              <a:rPr lang="ko-KR" altLang="en-US" sz="1400">
+                <a:solidFill>
+                  <a:schemeClr val="bg1">
+                    <a:lumMod val="85000"/>
+                  </a:schemeClr>
+                </a:solidFill>
+                <a:latin typeface="+mn-ea"/>
+              </a:rPr>
+              <a:t>성별 표준 섭취량 대비 비율 및 섭취 균형도를 수치화한 </a:t>
+            </a:r>
+            <a:r>
+              <a:rPr lang="ko-KR" altLang="en-US" sz="1400" b="1">
+                <a:solidFill>
+                  <a:schemeClr val="bg1">
+                    <a:lumMod val="85000"/>
+                  </a:schemeClr>
+                </a:solidFill>
+                <a:latin typeface="+mn-ea"/>
+              </a:rPr>
+              <a:t>영양 패턴 지표</a:t>
+            </a:r>
+            <a:r>
+              <a:rPr lang="en-US" altLang="ko-KR" sz="1400" b="1">
+                <a:solidFill>
+                  <a:schemeClr val="bg1">
+                    <a:lumMod val="85000"/>
+                  </a:schemeClr>
+                </a:solidFill>
+                <a:latin typeface="+mn-ea"/>
+              </a:rPr>
+              <a:t> </a:t>
+            </a:r>
+            <a:r>
+              <a:rPr lang="ko-KR" altLang="en-US" sz="1400">
+                <a:solidFill>
+                  <a:schemeClr val="bg1">
+                    <a:lumMod val="85000"/>
+                  </a:schemeClr>
+                </a:solidFill>
+                <a:latin typeface="+mn-ea"/>
+              </a:rPr>
+              <a:t>생성</a:t>
+            </a:r>
+            <a:endParaRPr lang="en-US" altLang="ko-KR" sz="1400">
+              <a:solidFill>
+                <a:schemeClr val="bg1">
+                  <a:lumMod val="85000"/>
+                </a:schemeClr>
+              </a:solidFill>
+              <a:latin typeface="+mn-ea"/>
+            </a:endParaRPr>
+          </a:p>
+          <a:p>
+            <a:pPr marL="285750" indent="-285750">
+              <a:lnSpc>
+                <a:spcPct val="200000"/>
+              </a:lnSpc>
+              <a:buFont typeface="Arial" panose="020B0604020202020204" pitchFamily="34" charset="0"/>
+              <a:buChar char="•"/>
+            </a:pPr>
+            <a:r>
+              <a:rPr lang="ko-KR" altLang="en-US" sz="1400">
+                <a:solidFill>
+                  <a:schemeClr val="bg1">
+                    <a:lumMod val="85000"/>
+                  </a:schemeClr>
+                </a:solidFill>
+                <a:latin typeface="+mn-ea"/>
+              </a:rPr>
+              <a:t>식습관 정보에 인구사회학적 요소</a:t>
+            </a:r>
+            <a:r>
+              <a:rPr lang="en-US" altLang="ko-KR" sz="1400">
+                <a:solidFill>
+                  <a:schemeClr val="bg1">
+                    <a:lumMod val="85000"/>
+                  </a:schemeClr>
+                </a:solidFill>
+                <a:latin typeface="+mn-ea"/>
+              </a:rPr>
+              <a:t>(</a:t>
+            </a:r>
+            <a:r>
+              <a:rPr lang="ko-KR" altLang="en-US" sz="1400">
+                <a:solidFill>
+                  <a:schemeClr val="bg1">
+                    <a:lumMod val="85000"/>
+                  </a:schemeClr>
+                </a:solidFill>
+                <a:latin typeface="+mn-ea"/>
+              </a:rPr>
+              <a:t>소득</a:t>
+            </a:r>
+            <a:r>
+              <a:rPr lang="en-US" altLang="ko-KR" sz="1400">
+                <a:solidFill>
+                  <a:schemeClr val="bg1">
+                    <a:lumMod val="85000"/>
+                  </a:schemeClr>
+                </a:solidFill>
+                <a:latin typeface="+mn-ea"/>
+              </a:rPr>
+              <a:t>·</a:t>
+            </a:r>
+            <a:r>
+              <a:rPr lang="ko-KR" altLang="en-US" sz="1400">
+                <a:solidFill>
+                  <a:schemeClr val="bg1">
+                    <a:lumMod val="85000"/>
+                  </a:schemeClr>
+                </a:solidFill>
+                <a:latin typeface="+mn-ea"/>
+              </a:rPr>
+              <a:t>교육 등</a:t>
+            </a:r>
+            <a:r>
+              <a:rPr lang="en-US" altLang="ko-KR" sz="1400">
+                <a:solidFill>
+                  <a:schemeClr val="bg1">
+                    <a:lumMod val="85000"/>
+                  </a:schemeClr>
+                </a:solidFill>
+                <a:latin typeface="+mn-ea"/>
+              </a:rPr>
+              <a:t>), </a:t>
+            </a:r>
+            <a:r>
+              <a:rPr lang="ko-KR" altLang="en-US" sz="1400">
+                <a:solidFill>
+                  <a:schemeClr val="bg1">
+                    <a:lumMod val="85000"/>
+                  </a:schemeClr>
+                </a:solidFill>
+                <a:latin typeface="+mn-ea"/>
+              </a:rPr>
+              <a:t>생활습관</a:t>
+            </a:r>
+            <a:r>
+              <a:rPr lang="en-US" altLang="ko-KR" sz="1400">
+                <a:solidFill>
+                  <a:schemeClr val="bg1">
+                    <a:lumMod val="85000"/>
+                  </a:schemeClr>
+                </a:solidFill>
+                <a:latin typeface="+mn-ea"/>
+              </a:rPr>
+              <a:t>(</a:t>
+            </a:r>
+            <a:r>
+              <a:rPr lang="ko-KR" altLang="en-US" sz="1400">
+                <a:solidFill>
+                  <a:schemeClr val="bg1">
+                    <a:lumMod val="85000"/>
+                  </a:schemeClr>
+                </a:solidFill>
+                <a:latin typeface="+mn-ea"/>
+              </a:rPr>
+              <a:t>운동</a:t>
+            </a:r>
+            <a:r>
+              <a:rPr lang="en-US" altLang="ko-KR" sz="1400">
+                <a:solidFill>
+                  <a:schemeClr val="bg1">
+                    <a:lumMod val="85000"/>
+                  </a:schemeClr>
+                </a:solidFill>
+                <a:latin typeface="+mn-ea"/>
+              </a:rPr>
+              <a:t>·</a:t>
+            </a:r>
+            <a:r>
+              <a:rPr lang="ko-KR" altLang="en-US" sz="1400">
+                <a:solidFill>
+                  <a:schemeClr val="bg1">
+                    <a:lumMod val="85000"/>
+                  </a:schemeClr>
+                </a:solidFill>
+                <a:latin typeface="+mn-ea"/>
+              </a:rPr>
+              <a:t>흡연 등</a:t>
+            </a:r>
+            <a:r>
+              <a:rPr lang="en-US" altLang="ko-KR" sz="1400">
+                <a:solidFill>
+                  <a:schemeClr val="bg1">
+                    <a:lumMod val="85000"/>
+                  </a:schemeClr>
+                </a:solidFill>
+                <a:latin typeface="+mn-ea"/>
+              </a:rPr>
+              <a:t>)</a:t>
+            </a:r>
+            <a:r>
+              <a:rPr lang="ko-KR" altLang="en-US" sz="1400">
+                <a:solidFill>
+                  <a:schemeClr val="bg1">
+                    <a:lumMod val="85000"/>
+                  </a:schemeClr>
+                </a:solidFill>
+                <a:latin typeface="+mn-ea"/>
+              </a:rPr>
+              <a:t>을 결합하여 분석 데이터의 </a:t>
+            </a:r>
+            <a:r>
+              <a:rPr lang="ko-KR" altLang="en-US" sz="1400" b="1">
+                <a:solidFill>
+                  <a:schemeClr val="bg1">
+                    <a:lumMod val="85000"/>
+                  </a:schemeClr>
+                </a:solidFill>
+                <a:latin typeface="+mn-ea"/>
+              </a:rPr>
+              <a:t>상관관계 </a:t>
+            </a:r>
+            <a:r>
+              <a:rPr lang="ko-KR" altLang="en-US" sz="1400">
+                <a:solidFill>
+                  <a:schemeClr val="bg1">
+                    <a:lumMod val="85000"/>
+                  </a:schemeClr>
+                </a:solidFill>
+                <a:latin typeface="+mn-ea"/>
+              </a:rPr>
+              <a:t>분석</a:t>
+            </a:r>
           </a:p>
         </p:txBody>
       </p:sp>
       <p:sp>
         <p:nvSpPr>
-          <p:cNvPr id="7" name="직사각형 6">
+          <p:cNvPr id="11" name="TextBox 10">
             <a:extLst>
               <a:ext uri="{FF2B5EF4-FFF2-40B4-BE49-F238E27FC236}">
-                <a16:creationId xmlns:a16="http://schemas.microsoft.com/office/drawing/2014/main" id="{D0CB8238-DBF9-888B-0708-357583643553}"/>
+                <a16:creationId xmlns:a16="http://schemas.microsoft.com/office/drawing/2014/main" id="{EB79F87A-CFA9-9020-A18E-9860BACEC567}"/>
               </a:ext>
             </a:extLst>
           </p:cNvPr>
-          <p:cNvSpPr/>
+          <p:cNvSpPr txBox="1"/>
           <p:nvPr/>
         </p:nvSpPr>
         <p:spPr>
           <a:xfrm>
-            <a:off x="6029325" y="2993230"/>
-            <a:ext cx="4500563" cy="435769"/>
+            <a:off x="773222" y="2242726"/>
+            <a:ext cx="4523296" cy="464871"/>
           </a:xfrm>
           <a:prstGeom prst="rect">
             <a:avLst/>
           </a:prstGeom>
+          <a:noFill/>
         </p:spPr>
-        <p:style>
-          <a:lnRef idx="2">
-            <a:schemeClr val="dk1"/>
-          </a:lnRef>
-          <a:fillRef idx="1">
-            <a:schemeClr val="lt1"/>
-          </a:fillRef>
-          <a:effectRef idx="0">
-            <a:schemeClr val="dk1"/>
-          </a:effectRef>
-          <a:fontRef idx="minor">
-            <a:schemeClr val="dk1"/>
-          </a:fontRef>
-        </p:style>
         <p:txBody>
-          <a:bodyPr rtlCol="0" anchor="ctr"/>
+          <a:bodyPr wrap="square" rtlCol="0">
+            <a:spAutoFit/>
+          </a:bodyPr>
           <a:lstStyle/>
           <a:p>
-            <a:r>
-              <a:rPr lang="en-US" altLang="ko-KR"/>
-              <a:t>__</a:t>
-            </a:r>
-            <a:endParaRPr lang="ko-KR" altLang="en-US"/>
+            <a:pPr>
+              <a:lnSpc>
+                <a:spcPct val="150000"/>
+              </a:lnSpc>
+            </a:pPr>
+            <a:r>
+              <a:rPr lang="ko-KR" altLang="en-US" b="1">
+                <a:solidFill>
+                  <a:schemeClr val="bg1">
+                    <a:lumMod val="95000"/>
+                  </a:schemeClr>
+                </a:solidFill>
+                <a:latin typeface="Noto Sans KR"/>
+              </a:rPr>
+              <a:t>다차원 복합 요인 기반 정밀 데이터셋 구축</a:t>
+            </a:r>
+            <a:endParaRPr lang="ko-KR" altLang="en-US" b="1">
+              <a:solidFill>
+                <a:schemeClr val="bg1">
+                  <a:lumMod val="95000"/>
+                </a:schemeClr>
+              </a:solidFill>
+            </a:endParaRPr>
           </a:p>
         </p:txBody>
       </p:sp>
-      <p:pic>
-        <p:nvPicPr>
-          <p:cNvPr id="14" name="그림 13" descr="블랙, 어둠이(가) 표시된 사진&#10;&#10;AI가 생성한 콘텐츠는 부정확할 수 있습니다.">
-            <a:extLst>
-              <a:ext uri="{FF2B5EF4-FFF2-40B4-BE49-F238E27FC236}">
-                <a16:creationId xmlns:a16="http://schemas.microsoft.com/office/drawing/2014/main" id="{8BDB247F-9ACD-BE77-A496-91958AEEE88D}"/>
-              </a:ext>
-            </a:extLst>
-          </p:cNvPr>
-          <p:cNvPicPr>
-            <a:picLocks noChangeAspect="1"/>
-          </p:cNvPicPr>
-          <p:nvPr/>
-        </p:nvPicPr>
-        <p:blipFill>
-          <a:blip r:embed="rId3">
-            <a:extLst>
-              <a:ext uri="{28A0092B-C50C-407E-A947-70E740481C1C}">
-                <a14:useLocalDpi xmlns:a14="http://schemas.microsoft.com/office/drawing/2010/main" val="0"/>
-              </a:ext>
-            </a:extLst>
-          </a:blip>
-          <a:stretch>
-            <a:fillRect/>
-          </a:stretch>
-        </p:blipFill>
-        <p:spPr>
-          <a:xfrm>
-            <a:off x="8888344" y="4364830"/>
-            <a:ext cx="720000" cy="720000"/>
-          </a:xfrm>
-          <a:prstGeom prst="rect">
-            <a:avLst/>
-          </a:prstGeom>
-        </p:spPr>
-      </p:pic>
-      <p:pic>
-        <p:nvPicPr>
-          <p:cNvPr id="20" name="그림 19" descr="블랙, 어둠이(가) 표시된 사진&#10;&#10;AI가 생성한 콘텐츠는 부정확할 수 있습니다.">
-            <a:extLst>
-              <a:ext uri="{FF2B5EF4-FFF2-40B4-BE49-F238E27FC236}">
-                <a16:creationId xmlns:a16="http://schemas.microsoft.com/office/drawing/2014/main" id="{8385672D-6CB9-B405-A10F-7E4948795132}"/>
-              </a:ext>
-            </a:extLst>
-          </p:cNvPr>
-          <p:cNvPicPr>
-            <a:picLocks noChangeAspect="1"/>
-          </p:cNvPicPr>
-          <p:nvPr/>
-        </p:nvPicPr>
-        <p:blipFill>
-          <a:blip r:embed="rId4">
-            <a:extLst>
-              <a:ext uri="{28A0092B-C50C-407E-A947-70E740481C1C}">
-                <a14:useLocalDpi xmlns:a14="http://schemas.microsoft.com/office/drawing/2010/main" val="0"/>
-              </a:ext>
-            </a:extLst>
-          </a:blip>
-          <a:stretch>
-            <a:fillRect/>
-          </a:stretch>
-        </p:blipFill>
-        <p:spPr>
-          <a:xfrm>
-            <a:off x="6632577" y="4418830"/>
-            <a:ext cx="612000" cy="612000"/>
-          </a:xfrm>
-          <a:prstGeom prst="rect">
-            <a:avLst/>
-          </a:prstGeom>
-        </p:spPr>
-      </p:pic>
     </p:spTree>
     <p:extLst>
       <p:ext uri="{BB962C8B-B14F-4D97-AF65-F5344CB8AC3E}">
-        <p14:creationId xmlns:p14="http://schemas.microsoft.com/office/powerpoint/2010/main" val="1979815448"/>
+        <p14:creationId xmlns:p14="http://schemas.microsoft.com/office/powerpoint/2010/main" val="3630005275"/>
       </p:ext>
     </p:extLst>
   </p:cSld>
@@ -7212,12 +9437,145 @@
           <a:chExt cx="0" cy="0"/>
         </a:xfrm>
       </p:grpSpPr>
+      <p:sp>
+        <p:nvSpPr>
+          <p:cNvPr id="4" name="직사각형 3">
+            <a:extLst>
+              <a:ext uri="{FF2B5EF4-FFF2-40B4-BE49-F238E27FC236}">
+                <a16:creationId xmlns:a16="http://schemas.microsoft.com/office/drawing/2014/main" id="{9EFBB337-B530-64AE-493F-26C1184D6BC6}"/>
+              </a:ext>
+            </a:extLst>
+          </p:cNvPr>
+          <p:cNvSpPr/>
+          <p:nvPr/>
+        </p:nvSpPr>
+        <p:spPr>
+          <a:xfrm>
+            <a:off x="0" y="0"/>
+            <a:ext cx="12192000" cy="1180396"/>
+          </a:xfrm>
+          <a:prstGeom prst="rect">
+            <a:avLst/>
+          </a:prstGeom>
+          <a:solidFill>
+            <a:schemeClr val="dk1">
+              <a:alpha val="80000"/>
+            </a:schemeClr>
+          </a:solidFill>
+          <a:ln>
+            <a:noFill/>
+          </a:ln>
+        </p:spPr>
+        <p:style>
+          <a:lnRef idx="2">
+            <a:schemeClr val="dk1">
+              <a:shade val="15000"/>
+            </a:schemeClr>
+          </a:lnRef>
+          <a:fillRef idx="1">
+            <a:schemeClr val="dk1"/>
+          </a:fillRef>
+          <a:effectRef idx="0">
+            <a:schemeClr val="dk1"/>
+          </a:effectRef>
+          <a:fontRef idx="minor">
+            <a:schemeClr val="lt1"/>
+          </a:fontRef>
+        </p:style>
+        <p:txBody>
+          <a:bodyPr rtlCol="0" anchor="ctr"/>
+          <a:lstStyle/>
+          <a:p>
+            <a:endParaRPr lang="ko-KR" altLang="en-US"/>
+          </a:p>
+        </p:txBody>
+      </p:sp>
+      <p:sp>
+        <p:nvSpPr>
+          <p:cNvPr id="5" name="제목 1">
+            <a:extLst>
+              <a:ext uri="{FF2B5EF4-FFF2-40B4-BE49-F238E27FC236}">
+                <a16:creationId xmlns:a16="http://schemas.microsoft.com/office/drawing/2014/main" id="{E6B21E77-88D1-0F37-CAD7-BE7EC7FC1682}"/>
+              </a:ext>
+            </a:extLst>
+          </p:cNvPr>
+          <p:cNvSpPr txBox="1">
+            <a:spLocks/>
+          </p:cNvSpPr>
+          <p:nvPr/>
+        </p:nvSpPr>
+        <p:spPr>
+          <a:xfrm>
+            <a:off x="603253" y="234000"/>
+            <a:ext cx="2883105" cy="946104"/>
+          </a:xfrm>
+          <a:prstGeom prst="rect">
+            <a:avLst/>
+          </a:prstGeom>
+        </p:spPr>
+        <p:txBody>
+          <a:bodyPr vert="horz" lIns="91440" tIns="45720" rIns="91440" bIns="45720" rtlCol="0" anchor="ctr">
+            <a:normAutofit/>
+          </a:bodyPr>
+          <a:lstStyle>
+            <a:lvl1pPr algn="l" defTabSz="914400" rtl="0" eaLnBrk="1" latinLnBrk="1" hangingPunct="1">
+              <a:lnSpc>
+                <a:spcPct val="90000"/>
+              </a:lnSpc>
+              <a:spcBef>
+                <a:spcPct val="0"/>
+              </a:spcBef>
+              <a:buNone/>
+              <a:defRPr sz="4400" kern="1200">
+                <a:solidFill>
+                  <a:schemeClr val="tx1"/>
+                </a:solidFill>
+                <a:latin typeface="+mj-lt"/>
+                <a:ea typeface="+mj-ea"/>
+                <a:cs typeface="+mj-cs"/>
+              </a:defRPr>
+            </a:lvl1pPr>
+          </a:lstStyle>
+          <a:p>
+            <a:r>
+              <a:rPr lang="ko-KR" altLang="en-US" sz="3200" b="1">
+                <a:solidFill>
+                  <a:schemeClr val="bg1"/>
+                </a:solidFill>
+              </a:rPr>
+              <a:t>개발 스케줄</a:t>
+            </a:r>
+            <a:br>
+              <a:rPr lang="en-US" altLang="ko-KR" sz="3200" b="1"/>
+            </a:br>
+            <a:r>
+              <a:rPr lang="en-US" altLang="ko-KR" sz="1400" b="0" i="0">
+                <a:solidFill>
+                  <a:schemeClr val="bg1">
+                    <a:lumMod val="75000"/>
+                  </a:schemeClr>
+                </a:solidFill>
+                <a:effectLst/>
+                <a:latin typeface="Noto Sans KR"/>
+              </a:rPr>
+              <a:t>Development Schedule</a:t>
+            </a:r>
+            <a:endParaRPr lang="ko-KR" altLang="en-US" sz="1400" b="1">
+              <a:solidFill>
+                <a:schemeClr val="bg1">
+                  <a:lumMod val="75000"/>
+                </a:schemeClr>
+              </a:solidFill>
+            </a:endParaRPr>
+          </a:p>
+        </p:txBody>
+      </p:sp>
       <p:pic>
         <p:nvPicPr>
-          <p:cNvPr id="4" name="그림 3" descr="블랙, 어둠이(가) 표시된 사진&#10;&#10;AI가 생성한 콘텐츠는 부정확할 수 있습니다.">
+          <p:cNvPr id="13" name="그림 12">
             <a:extLst>
               <a:ext uri="{FF2B5EF4-FFF2-40B4-BE49-F238E27FC236}">
-                <a16:creationId xmlns:a16="http://schemas.microsoft.com/office/drawing/2014/main" id="{2B1CE314-FC37-31B7-C567-E31311784380}"/>
+                <a16:creationId xmlns:a16="http://schemas.microsoft.com/office/drawing/2014/main" id="{C3E47092-7530-6E9D-2551-F0A4B2C8907D}"/>
               </a:ext>
             </a:extLst>
           </p:cNvPr>
@@ -7227,33 +9585,57 @@
           <p:nvPr/>
         </p:nvPicPr>
         <p:blipFill>
-          <a:blip r:embed="rId2">
-            <a:extLst>
-              <a:ext uri="{28A0092B-C50C-407E-A947-70E740481C1C}">
-                <a14:useLocalDpi xmlns:a14="http://schemas.microsoft.com/office/drawing/2010/main" val="0"/>
-              </a:ext>
-            </a:extLst>
-          </a:blip>
+          <a:blip r:embed="rId2"/>
           <a:stretch>
             <a:fillRect/>
           </a:stretch>
         </p:blipFill>
         <p:spPr>
           <a:xfrm>
-            <a:off x="10686824" y="741197"/>
-            <a:ext cx="900000" cy="900000"/>
+            <a:off x="250825" y="2189341"/>
+            <a:ext cx="11690350" cy="3540723"/>
           </a:xfrm>
           <a:prstGeom prst="rect">
             <a:avLst/>
           </a:prstGeom>
         </p:spPr>
       </p:pic>
+    </p:spTree>
+    <p:extLst>
+      <p:ext uri="{BB962C8B-B14F-4D97-AF65-F5344CB8AC3E}">
+        <p14:creationId xmlns:p14="http://schemas.microsoft.com/office/powerpoint/2010/main" val="2563103981"/>
+      </p:ext>
+    </p:extLst>
+  </p:cSld>
+  <p:clrMapOvr>
+    <a:masterClrMapping/>
+  </p:clrMapOvr>
+</p:sld>
+</file>
+
+<file path=ppt/slides/slide8.xml><?xml version="1.0" encoding="utf-8"?>
+<p:sld xmlns:a="http://schemas.openxmlformats.org/drawingml/2006/main" xmlns:r="http://schemas.openxmlformats.org/officeDocument/2006/relationships" xmlns:p="http://schemas.openxmlformats.org/presentationml/2006/main">
+  <p:cSld>
+    <p:spTree>
+      <p:nvGrpSpPr>
+        <p:cNvPr id="1" name=""/>
+        <p:cNvGrpSpPr/>
+        <p:nvPr/>
+      </p:nvGrpSpPr>
+      <p:grpSpPr>
+        <a:xfrm>
+          <a:off x="0" y="0"/>
+          <a:ext cx="0" cy="0"/>
+          <a:chOff x="0" y="0"/>
+          <a:chExt cx="0" cy="0"/>
+        </a:xfrm>
+      </p:grpSpPr>
       <p:sp>
         <p:nvSpPr>
-          <p:cNvPr id="8" name="사각형: 둥근 모서리 7">
+          <p:cNvPr id="2" name="직사각형 1">
             <a:extLst>
               <a:ext uri="{FF2B5EF4-FFF2-40B4-BE49-F238E27FC236}">
-                <a16:creationId xmlns:a16="http://schemas.microsoft.com/office/drawing/2014/main" id="{B54D5AEA-F684-B1EE-1ECC-E0C4856C847B}"/>
+                <a16:creationId xmlns:a16="http://schemas.microsoft.com/office/drawing/2014/main" id="{0E71911F-795E-955F-950B-60464C6202D5}"/>
               </a:ext>
             </a:extLst>
           </p:cNvPr>
@@ -7262,49 +9644,161 @@
         </p:nvSpPr>
         <p:spPr>
           <a:xfrm>
-            <a:off x="4352925" y="585366"/>
-            <a:ext cx="3486150" cy="1278731"/>
+            <a:off x="0" y="0"/>
+            <a:ext cx="12192000" cy="1180396"/>
           </a:xfrm>
-          <a:prstGeom prst="roundRect">
+          <a:prstGeom prst="rect">
             <a:avLst/>
           </a:prstGeom>
-          <a:ln w="38100"/>
+          <a:solidFill>
+            <a:schemeClr val="dk1">
+              <a:alpha val="80000"/>
+            </a:schemeClr>
+          </a:solidFill>
+          <a:ln>
+            <a:noFill/>
+          </a:ln>
         </p:spPr>
         <p:style>
           <a:lnRef idx="2">
-            <a:schemeClr val="dk1"/>
+            <a:schemeClr val="dk1">
+              <a:shade val="15000"/>
+            </a:schemeClr>
           </a:lnRef>
           <a:fillRef idx="1">
-            <a:schemeClr val="lt1"/>
+            <a:schemeClr val="dk1"/>
           </a:fillRef>
           <a:effectRef idx="0">
             <a:schemeClr val="dk1"/>
           </a:effectRef>
           <a:fontRef idx="minor">
-            <a:schemeClr val="dk1"/>
+            <a:schemeClr val="lt1"/>
           </a:fontRef>
         </p:style>
         <p:txBody>
           <a:bodyPr rtlCol="0" anchor="ctr"/>
           <a:lstStyle/>
           <a:p>
-            <a:pPr algn="ctr"/>
-            <a:r>
-              <a:rPr lang="ko-KR" altLang="en-US">
-                <a:latin typeface="+mj-ea"/>
-                <a:ea typeface="+mj-ea"/>
-              </a:rPr>
-              <a:t>맞춤 식습관 개선 가이드</a:t>
-            </a:r>
+            <a:endParaRPr lang="ko-KR" altLang="en-US"/>
           </a:p>
         </p:txBody>
       </p:sp>
       <p:sp>
         <p:nvSpPr>
-          <p:cNvPr id="6" name="사각형: 둥근 모서리 5">
+          <p:cNvPr id="5" name="제목 1">
             <a:extLst>
               <a:ext uri="{FF2B5EF4-FFF2-40B4-BE49-F238E27FC236}">
-                <a16:creationId xmlns:a16="http://schemas.microsoft.com/office/drawing/2014/main" id="{CCA74EE7-A68D-74F2-D2F1-248FE23F2E25}"/>
+                <a16:creationId xmlns:a16="http://schemas.microsoft.com/office/drawing/2014/main" id="{E6B21E77-88D1-0F37-CAD7-BE7EC7FC1682}"/>
+              </a:ext>
+            </a:extLst>
+          </p:cNvPr>
+          <p:cNvSpPr txBox="1">
+            <a:spLocks/>
+          </p:cNvSpPr>
+          <p:nvPr/>
+        </p:nvSpPr>
+        <p:spPr>
+          <a:xfrm>
+            <a:off x="603253" y="234000"/>
+            <a:ext cx="2883105" cy="946104"/>
+          </a:xfrm>
+          <a:prstGeom prst="rect">
+            <a:avLst/>
+          </a:prstGeom>
+        </p:spPr>
+        <p:txBody>
+          <a:bodyPr vert="horz" lIns="91440" tIns="45720" rIns="91440" bIns="45720" rtlCol="0" anchor="ctr">
+            <a:normAutofit/>
+          </a:bodyPr>
+          <a:lstStyle>
+            <a:lvl1pPr algn="l" defTabSz="914400" rtl="0" eaLnBrk="1" latinLnBrk="1" hangingPunct="1">
+              <a:lnSpc>
+                <a:spcPct val="90000"/>
+              </a:lnSpc>
+              <a:spcBef>
+                <a:spcPct val="0"/>
+              </a:spcBef>
+              <a:buNone/>
+              <a:defRPr sz="4400" kern="1200">
+                <a:solidFill>
+                  <a:schemeClr val="tx1"/>
+                </a:solidFill>
+                <a:latin typeface="+mj-lt"/>
+                <a:ea typeface="+mj-ea"/>
+                <a:cs typeface="+mj-cs"/>
+              </a:defRPr>
+            </a:lvl1pPr>
+          </a:lstStyle>
+          <a:p>
+            <a:r>
+              <a:rPr lang="ko-KR" altLang="en-US" sz="3200" b="1">
+                <a:solidFill>
+                  <a:schemeClr val="bg1"/>
+                </a:solidFill>
+              </a:rPr>
+              <a:t>화면 설계서</a:t>
+            </a:r>
+            <a:br>
+              <a:rPr lang="en-US" altLang="ko-KR" sz="3200" b="1"/>
+            </a:br>
+            <a:r>
+              <a:rPr lang="en-US" altLang="ko-KR" sz="1400" b="0" i="0">
+                <a:solidFill>
+                  <a:schemeClr val="bg1">
+                    <a:lumMod val="75000"/>
+                  </a:schemeClr>
+                </a:solidFill>
+                <a:effectLst/>
+                <a:latin typeface="Noto Sans KR"/>
+              </a:rPr>
+              <a:t>Wireframe</a:t>
+            </a:r>
+            <a:endParaRPr lang="ko-KR" altLang="en-US" sz="1400" b="1">
+              <a:solidFill>
+                <a:schemeClr val="bg1">
+                  <a:lumMod val="75000"/>
+                </a:schemeClr>
+              </a:solidFill>
+            </a:endParaRPr>
+          </a:p>
+        </p:txBody>
+      </p:sp>
+    </p:spTree>
+    <p:extLst>
+      <p:ext uri="{BB962C8B-B14F-4D97-AF65-F5344CB8AC3E}">
+        <p14:creationId xmlns:p14="http://schemas.microsoft.com/office/powerpoint/2010/main" val="4241073865"/>
+      </p:ext>
+    </p:extLst>
+  </p:cSld>
+  <p:clrMapOvr>
+    <a:masterClrMapping/>
+  </p:clrMapOvr>
+</p:sld>
+</file>
+
+<file path=ppt/slides/slide9.xml><?xml version="1.0" encoding="utf-8"?>
+<p:sld xmlns:a="http://schemas.openxmlformats.org/drawingml/2006/main" xmlns:r="http://schemas.openxmlformats.org/officeDocument/2006/relationships" xmlns:p="http://schemas.openxmlformats.org/presentationml/2006/main">
+  <p:cSld>
+    <p:spTree>
+      <p:nvGrpSpPr>
+        <p:cNvPr id="1" name=""/>
+        <p:cNvGrpSpPr/>
+        <p:nvPr/>
+      </p:nvGrpSpPr>
+      <p:grpSpPr>
+        <a:xfrm>
+          <a:off x="0" y="0"/>
+          <a:ext cx="0" cy="0"/>
+          <a:chOff x="0" y="0"/>
+          <a:chExt cx="0" cy="0"/>
+        </a:xfrm>
+      </p:grpSpPr>
+      <p:sp>
+        <p:nvSpPr>
+          <p:cNvPr id="2" name="직사각형 1">
+            <a:extLst>
+              <a:ext uri="{FF2B5EF4-FFF2-40B4-BE49-F238E27FC236}">
+                <a16:creationId xmlns:a16="http://schemas.microsoft.com/office/drawing/2014/main" id="{0E71911F-795E-955F-950B-60464C6202D5}"/>
               </a:ext>
             </a:extLst>
           </p:cNvPr>
@@ -7313,327 +9807,129 @@
         </p:nvSpPr>
         <p:spPr>
           <a:xfrm>
-            <a:off x="5450681" y="2214561"/>
-            <a:ext cx="5807869" cy="4007643"/>
+            <a:off x="0" y="0"/>
+            <a:ext cx="12192000" cy="1180396"/>
           </a:xfrm>
-          <a:prstGeom prst="roundRect">
+          <a:prstGeom prst="rect">
             <a:avLst/>
           </a:prstGeom>
+          <a:solidFill>
+            <a:schemeClr val="dk1">
+              <a:alpha val="80000"/>
+            </a:schemeClr>
+          </a:solidFill>
+          <a:ln>
+            <a:noFill/>
+          </a:ln>
         </p:spPr>
         <p:style>
           <a:lnRef idx="2">
-            <a:schemeClr val="dk1"/>
+            <a:schemeClr val="dk1">
+              <a:shade val="15000"/>
+            </a:schemeClr>
           </a:lnRef>
           <a:fillRef idx="1">
-            <a:schemeClr val="lt1"/>
+            <a:schemeClr val="dk1"/>
           </a:fillRef>
           <a:effectRef idx="0">
             <a:schemeClr val="dk1"/>
           </a:effectRef>
           <a:fontRef idx="minor">
-            <a:schemeClr val="dk1"/>
+            <a:schemeClr val="lt1"/>
           </a:fontRef>
         </p:style>
         <p:txBody>
           <a:bodyPr rtlCol="0" anchor="ctr"/>
           <a:lstStyle/>
           <a:p>
-            <a:pPr algn="ctr"/>
-            <a:endParaRPr lang="en-US" altLang="ko-KR"/>
+            <a:endParaRPr lang="ko-KR" altLang="en-US"/>
           </a:p>
         </p:txBody>
       </p:sp>
       <p:sp>
         <p:nvSpPr>
-          <p:cNvPr id="10" name="직사각형 9">
+          <p:cNvPr id="5" name="제목 1">
             <a:extLst>
               <a:ext uri="{FF2B5EF4-FFF2-40B4-BE49-F238E27FC236}">
-                <a16:creationId xmlns:a16="http://schemas.microsoft.com/office/drawing/2014/main" id="{21678077-69F8-BC8B-32BD-58E656A35492}"/>
+                <a16:creationId xmlns:a16="http://schemas.microsoft.com/office/drawing/2014/main" id="{E6B21E77-88D1-0F37-CAD7-BE7EC7FC1682}"/>
               </a:ext>
             </a:extLst>
           </p:cNvPr>
-          <p:cNvSpPr/>
+          <p:cNvSpPr txBox="1">
+            <a:spLocks/>
+          </p:cNvSpPr>
           <p:nvPr/>
         </p:nvSpPr>
         <p:spPr>
           <a:xfrm>
-            <a:off x="933450" y="2214561"/>
-            <a:ext cx="3938588" cy="4007644"/>
+            <a:off x="603253" y="234000"/>
+            <a:ext cx="2883105" cy="946104"/>
           </a:xfrm>
           <a:prstGeom prst="rect">
             <a:avLst/>
           </a:prstGeom>
         </p:spPr>
-        <p:style>
-          <a:lnRef idx="2">
-            <a:schemeClr val="dk1"/>
-          </a:lnRef>
-          <a:fillRef idx="1">
-            <a:schemeClr val="lt1"/>
-          </a:fillRef>
-          <a:effectRef idx="0">
-            <a:schemeClr val="dk1"/>
-          </a:effectRef>
-          <a:fontRef idx="minor">
-            <a:schemeClr val="dk1"/>
-          </a:fontRef>
-        </p:style>
         <p:txBody>
-          <a:bodyPr rtlCol="0" anchor="ctr"/>
-          <a:lstStyle/>
-          <a:p>
-            <a:pPr algn="ctr">
+          <a:bodyPr vert="horz" lIns="91440" tIns="45720" rIns="91440" bIns="45720" rtlCol="0" anchor="ctr">
+            <a:normAutofit/>
+          </a:bodyPr>
+          <a:lstStyle>
+            <a:lvl1pPr algn="l" defTabSz="914400" rtl="0" eaLnBrk="1" latinLnBrk="1" hangingPunct="1">
               <a:lnSpc>
-                <a:spcPct val="150000"/>
+                <a:spcPct val="90000"/>
               </a:lnSpc>
-            </a:pPr>
-            <a:r>
-              <a:rPr lang="en-US" altLang="ko-KR"/>
-              <a:t>Test</a:t>
-            </a:r>
-            <a:r>
-              <a:rPr lang="ko-KR" altLang="en-US"/>
-              <a:t>님의 영양 상태는</a:t>
-            </a:r>
-            <a:endParaRPr lang="en-US" altLang="ko-KR"/>
-          </a:p>
-          <a:p>
-            <a:pPr algn="ctr"/>
-            <a:r>
-              <a:rPr lang="ko-KR" altLang="en-US" sz="2800" b="1" u="sng"/>
-              <a:t>저위험</a:t>
-            </a:r>
-            <a:r>
-              <a:rPr lang="ko-KR" altLang="en-US"/>
-              <a:t> 입니다</a:t>
-            </a:r>
-            <a:r>
-              <a:rPr lang="en-US" altLang="ko-KR"/>
-              <a:t>.</a:t>
-            </a:r>
-          </a:p>
-          <a:p>
-            <a:pPr algn="ctr"/>
-            <a:r>
-              <a:rPr lang="en-US" altLang="ko-KR"/>
-              <a:t>=========================</a:t>
-            </a:r>
-          </a:p>
-          <a:p>
-            <a:pPr algn="ctr">
-              <a:lnSpc>
-                <a:spcPct val="150000"/>
-              </a:lnSpc>
-            </a:pPr>
-            <a:r>
-              <a:rPr lang="ko-KR" altLang="en-US"/>
-              <a:t>적정 수치보다 조금 높습니다</a:t>
-            </a:r>
-            <a:r>
-              <a:rPr lang="en-US" altLang="ko-KR"/>
-              <a:t>.</a:t>
-            </a:r>
-          </a:p>
-          <a:p>
-            <a:pPr algn="ctr">
-              <a:lnSpc>
-                <a:spcPct val="150000"/>
-              </a:lnSpc>
-            </a:pPr>
-            <a:r>
-              <a:rPr lang="ko-KR" altLang="en-US"/>
-              <a:t>일시적일 수 있지만 지속되는 경우 위험도가 높아질 수 있습니다</a:t>
-            </a:r>
-            <a:r>
-              <a:rPr lang="en-US" altLang="ko-KR"/>
-              <a:t>.</a:t>
-            </a:r>
-          </a:p>
-        </p:txBody>
-      </p:sp>
-      <p:sp>
-        <p:nvSpPr>
-          <p:cNvPr id="11" name="TextBox 10">
-            <a:extLst>
-              <a:ext uri="{FF2B5EF4-FFF2-40B4-BE49-F238E27FC236}">
-                <a16:creationId xmlns:a16="http://schemas.microsoft.com/office/drawing/2014/main" id="{E2CAA89E-C9F2-E3F5-4823-24C82D8AF025}"/>
-              </a:ext>
-            </a:extLst>
-          </p:cNvPr>
-          <p:cNvSpPr txBox="1"/>
-          <p:nvPr/>
-        </p:nvSpPr>
-        <p:spPr>
-          <a:xfrm>
-            <a:off x="5913237" y="2800350"/>
-            <a:ext cx="4882755" cy="369332"/>
-          </a:xfrm>
-          <a:prstGeom prst="rect">
-            <a:avLst/>
-          </a:prstGeom>
-          <a:noFill/>
-        </p:spPr>
-        <p:txBody>
-          <a:bodyPr wrap="square" rtlCol="0">
-            <a:spAutoFit/>
-          </a:bodyPr>
-          <a:lstStyle/>
-          <a:p>
-            <a:r>
-              <a:rPr lang="ko-KR" altLang="en-US"/>
-              <a:t>건강습관 개선 가이드</a:t>
-            </a:r>
-            <a:endParaRPr lang="en-US" altLang="ko-KR"/>
-          </a:p>
-        </p:txBody>
-      </p:sp>
-      <p:sp>
-        <p:nvSpPr>
-          <p:cNvPr id="12" name="TextBox 11">
-            <a:extLst>
-              <a:ext uri="{FF2B5EF4-FFF2-40B4-BE49-F238E27FC236}">
-                <a16:creationId xmlns:a16="http://schemas.microsoft.com/office/drawing/2014/main" id="{EF03A818-D813-EC8F-12AF-798B038C2B06}"/>
-              </a:ext>
-            </a:extLst>
-          </p:cNvPr>
-          <p:cNvSpPr txBox="1"/>
-          <p:nvPr/>
-        </p:nvSpPr>
-        <p:spPr>
-          <a:xfrm>
-            <a:off x="5754289" y="3429000"/>
-            <a:ext cx="2600325" cy="2031325"/>
-          </a:xfrm>
-          <a:prstGeom prst="rect">
-            <a:avLst/>
-          </a:prstGeom>
-          <a:noFill/>
-          <a:ln>
-            <a:noFill/>
-          </a:ln>
-        </p:spPr>
-        <p:txBody>
-          <a:bodyPr wrap="square" rtlCol="0">
-            <a:spAutoFit/>
-          </a:bodyPr>
-          <a:lstStyle/>
-          <a:p>
-            <a:pPr algn="ctr"/>
-            <a:r>
-              <a:rPr lang="ko-KR" altLang="en-US"/>
-              <a:t>음식</a:t>
-            </a:r>
-            <a:endParaRPr lang="en-US" altLang="ko-KR"/>
-          </a:p>
-          <a:p>
-            <a:pPr algn="ctr"/>
-            <a:endParaRPr lang="en-US" altLang="ko-KR"/>
-          </a:p>
-          <a:p>
-            <a:r>
-              <a:rPr lang="ko-KR" altLang="en-US"/>
-              <a:t>현재 나트륨과 지방이 많은 식단이 유지되고 있습니다</a:t>
-            </a:r>
-            <a:r>
-              <a:rPr lang="en-US" altLang="ko-KR"/>
-              <a:t>.</a:t>
-            </a:r>
-          </a:p>
-          <a:p>
-            <a:r>
-              <a:rPr lang="ko-KR" altLang="en-US"/>
-              <a:t>유제품과 채소류 섭취량 증가를 추천합니다</a:t>
-            </a:r>
-            <a:r>
-              <a:rPr lang="en-US" altLang="ko-KR"/>
-              <a:t>.</a:t>
-            </a:r>
-            <a:endParaRPr lang="ko-KR" altLang="en-US"/>
-          </a:p>
-        </p:txBody>
-      </p:sp>
-      <p:sp>
-        <p:nvSpPr>
-          <p:cNvPr id="15" name="TextBox 14">
-            <a:extLst>
-              <a:ext uri="{FF2B5EF4-FFF2-40B4-BE49-F238E27FC236}">
-                <a16:creationId xmlns:a16="http://schemas.microsoft.com/office/drawing/2014/main" id="{ADCECA87-BC08-61DD-4EBC-07ACA1CD644B}"/>
-              </a:ext>
-            </a:extLst>
-          </p:cNvPr>
-          <p:cNvSpPr txBox="1"/>
-          <p:nvPr/>
-        </p:nvSpPr>
-        <p:spPr>
-          <a:xfrm>
-            <a:off x="8354614" y="3429000"/>
-            <a:ext cx="2600325" cy="2308324"/>
-          </a:xfrm>
-          <a:prstGeom prst="rect">
-            <a:avLst/>
-          </a:prstGeom>
-          <a:noFill/>
-          <a:ln>
-            <a:noFill/>
-          </a:ln>
-        </p:spPr>
-        <p:txBody>
-          <a:bodyPr wrap="square" rtlCol="0">
-            <a:spAutoFit/>
-          </a:bodyPr>
-          <a:lstStyle/>
-          <a:p>
-            <a:pPr algn="ctr"/>
-            <a:r>
-              <a:rPr lang="ko-KR" altLang="en-US"/>
-              <a:t>운동</a:t>
-            </a:r>
-            <a:endParaRPr lang="en-US" altLang="ko-KR"/>
-          </a:p>
-          <a:p>
-            <a:pPr algn="ctr"/>
-            <a:endParaRPr lang="en-US" altLang="ko-KR"/>
-          </a:p>
-          <a:p>
-            <a:r>
-              <a:rPr lang="ko-KR" altLang="en-US"/>
-              <a:t>활동량이 적어 골격근량 저하와 체지방 증가가 우려됩니다</a:t>
-            </a:r>
-            <a:r>
-              <a:rPr lang="en-US" altLang="ko-KR"/>
-              <a:t>. </a:t>
-            </a:r>
-            <a:r>
-              <a:rPr lang="ko-KR" altLang="en-US"/>
-              <a:t>하루 </a:t>
-            </a:r>
-            <a:r>
-              <a:rPr lang="en-US" altLang="ko-KR"/>
-              <a:t>30</a:t>
-            </a:r>
-            <a:r>
-              <a:rPr lang="ko-KR" altLang="en-US"/>
-              <a:t>분 내외의 가벼운 유산소와 일주일에 </a:t>
-            </a:r>
-            <a:r>
-              <a:rPr lang="en-US" altLang="ko-KR"/>
-              <a:t>3</a:t>
-            </a:r>
-            <a:r>
-              <a:rPr lang="ko-KR" altLang="en-US"/>
-              <a:t>번 근력운동을 추천합니다</a:t>
-            </a:r>
-            <a:r>
-              <a:rPr lang="en-US" altLang="ko-KR"/>
-              <a:t>.</a:t>
-            </a:r>
+              <a:spcBef>
+                <a:spcPct val="0"/>
+              </a:spcBef>
+              <a:buNone/>
+              <a:defRPr sz="4400" kern="1200">
+                <a:solidFill>
+                  <a:schemeClr val="tx1"/>
+                </a:solidFill>
+                <a:latin typeface="+mj-lt"/>
+                <a:ea typeface="+mj-ea"/>
+                <a:cs typeface="+mj-cs"/>
+              </a:defRPr>
+            </a:lvl1pPr>
+          </a:lstStyle>
+          <a:p>
+            <a:r>
+              <a:rPr lang="ko-KR" altLang="en-US" sz="3200" b="1">
+                <a:solidFill>
+                  <a:schemeClr val="bg1"/>
+                </a:solidFill>
+              </a:rPr>
+              <a:t>화면 설계서</a:t>
+            </a:r>
+            <a:br>
+              <a:rPr lang="en-US" altLang="ko-KR" sz="3200" b="1"/>
+            </a:br>
+            <a:r>
+              <a:rPr lang="en-US" altLang="ko-KR" sz="1400" b="0" i="0">
+                <a:solidFill>
+                  <a:schemeClr val="bg1">
+                    <a:lumMod val="75000"/>
+                  </a:schemeClr>
+                </a:solidFill>
+                <a:effectLst/>
+                <a:latin typeface="Noto Sans KR"/>
+              </a:rPr>
+              <a:t>Wireframe</a:t>
+            </a:r>
+            <a:endParaRPr lang="ko-KR" altLang="en-US" sz="1400" b="1">
+              <a:solidFill>
+                <a:schemeClr val="bg1">
+                  <a:lumMod val="75000"/>
+                </a:schemeClr>
+              </a:solidFill>
+            </a:endParaRPr>
           </a:p>
         </p:txBody>
       </p:sp>
     </p:spTree>
     <p:extLst>
       <p:ext uri="{BB962C8B-B14F-4D97-AF65-F5344CB8AC3E}">
-        <p14:creationId xmlns:p14="http://schemas.microsoft.com/office/powerpoint/2010/main" val="2116927993"/>
+        <p14:creationId xmlns:p14="http://schemas.microsoft.com/office/powerpoint/2010/main" val="2991159526"/>
       </p:ext>
     </p:extLst>
   </p:cSld>

--- a/1차 프로젝트/기획서.pptx
+++ b/1차 프로젝트/기획서.pptx
@@ -164,29 +164,6 @@
 </p188:authorLst>
 </file>
 
-<file path=ppt/comments/modernComment_105_475D2187.xml><?xml version="1.0" encoding="utf-8"?>
-<p188:cmLst xmlns:a="http://schemas.openxmlformats.org/drawingml/2006/main" xmlns:r="http://schemas.openxmlformats.org/officeDocument/2006/relationships" xmlns:p188="http://schemas.microsoft.com/office/powerpoint/2018/8/main">
-  <p188:cm id="{4C81EC46-816F-4E82-9DAA-8FF4D1E45057}" authorId="{D5143AD7-E749-5E1E-371D-A585C0C727CD}" created="2026-03-19T08:14:17.691">
-    <ac:deMkLst xmlns:ac="http://schemas.microsoft.com/office/drawing/2013/main/command">
-      <pc:docMk xmlns:pc="http://schemas.microsoft.com/office/powerpoint/2013/main/command"/>
-      <pc:sldMk xmlns:pc="http://schemas.microsoft.com/office/powerpoint/2013/main/command" cId="1197285767" sldId="261"/>
-      <ac:spMk id="3" creationId="{F3E0445D-6120-B7A6-8C93-5DFA859689ED}"/>
-    </ac:deMkLst>
-    <p188:txBody>
-      <a:bodyPr/>
-      <a:lstStyle/>
-      <a:p>
-        <a:r>
-          <a:rPr lang="ko-KR" altLang="en-US"/>
-          <a:t>기획 의도 근거자료 영역 확대하고 4가지 흐름으로 진행
-외식, 가공식품 섭취 증가 - 지방,</a:t>
-        </a:r>
-      </a:p>
-    </p188:txBody>
-  </p188:cm>
-</p188:cmLst>
-</file>
-
 <file path=ppt/notesMasters/notesMaster1.xml><?xml version="1.0" encoding="utf-8"?>
 <p:notesMaster xmlns:a="http://schemas.openxmlformats.org/drawingml/2006/main" xmlns:r="http://schemas.openxmlformats.org/officeDocument/2006/relationships" xmlns:p="http://schemas.openxmlformats.org/presentationml/2006/main">
   <p:cSld>
@@ -269,7 +246,7 @@
           <a:p>
             <a:fld id="{C29A2857-52EE-4322-B040-F7AE6E3FFBF0}" type="datetimeFigureOut">
               <a:rPr lang="ko-KR" altLang="en-US" smtClean="0"/>
-              <a:t>2026-03-20</a:t>
+              <a:t>03-20(Fri)</a:t>
             </a:fld>
             <a:endParaRPr lang="ko-KR" altLang="en-US"/>
           </a:p>
@@ -667,7 +644,7 @@
           <a:p>
             <a:fld id="{D71FF700-8BFB-4C30-A2B6-F509E51DF773}" type="datetimeFigureOut">
               <a:rPr lang="ko-KR" altLang="en-US" smtClean="0"/>
-              <a:t>2026-03-20</a:t>
+              <a:t>03-20(Fri)</a:t>
             </a:fld>
             <a:endParaRPr lang="ko-KR" altLang="en-US"/>
           </a:p>
@@ -837,7 +814,7 @@
           <a:p>
             <a:fld id="{D71FF700-8BFB-4C30-A2B6-F509E51DF773}" type="datetimeFigureOut">
               <a:rPr lang="ko-KR" altLang="en-US" smtClean="0"/>
-              <a:t>2026-03-20</a:t>
+              <a:t>03-20(Fri)</a:t>
             </a:fld>
             <a:endParaRPr lang="ko-KR" altLang="en-US"/>
           </a:p>
@@ -1017,7 +994,7 @@
           <a:p>
             <a:fld id="{D71FF700-8BFB-4C30-A2B6-F509E51DF773}" type="datetimeFigureOut">
               <a:rPr lang="ko-KR" altLang="en-US" smtClean="0"/>
-              <a:t>2026-03-20</a:t>
+              <a:t>03-20(Fri)</a:t>
             </a:fld>
             <a:endParaRPr lang="ko-KR" altLang="en-US"/>
           </a:p>
@@ -1187,7 +1164,7 @@
           <a:p>
             <a:fld id="{D71FF700-8BFB-4C30-A2B6-F509E51DF773}" type="datetimeFigureOut">
               <a:rPr lang="ko-KR" altLang="en-US" smtClean="0"/>
-              <a:t>2026-03-20</a:t>
+              <a:t>03-20(Fri)</a:t>
             </a:fld>
             <a:endParaRPr lang="ko-KR" altLang="en-US"/>
           </a:p>
@@ -1433,7 +1410,7 @@
           <a:p>
             <a:fld id="{D71FF700-8BFB-4C30-A2B6-F509E51DF773}" type="datetimeFigureOut">
               <a:rPr lang="ko-KR" altLang="en-US" smtClean="0"/>
-              <a:t>2026-03-20</a:t>
+              <a:t>03-20(Fri)</a:t>
             </a:fld>
             <a:endParaRPr lang="ko-KR" altLang="en-US"/>
           </a:p>
@@ -1665,7 +1642,7 @@
           <a:p>
             <a:fld id="{D71FF700-8BFB-4C30-A2B6-F509E51DF773}" type="datetimeFigureOut">
               <a:rPr lang="ko-KR" altLang="en-US" smtClean="0"/>
-              <a:t>2026-03-20</a:t>
+              <a:t>03-20(Fri)</a:t>
             </a:fld>
             <a:endParaRPr lang="ko-KR" altLang="en-US"/>
           </a:p>
@@ -2032,7 +2009,7 @@
           <a:p>
             <a:fld id="{D71FF700-8BFB-4C30-A2B6-F509E51DF773}" type="datetimeFigureOut">
               <a:rPr lang="ko-KR" altLang="en-US" smtClean="0"/>
-              <a:t>2026-03-20</a:t>
+              <a:t>03-20(Fri)</a:t>
             </a:fld>
             <a:endParaRPr lang="ko-KR" altLang="en-US"/>
           </a:p>
@@ -2150,7 +2127,7 @@
           <a:p>
             <a:fld id="{D71FF700-8BFB-4C30-A2B6-F509E51DF773}" type="datetimeFigureOut">
               <a:rPr lang="ko-KR" altLang="en-US" smtClean="0"/>
-              <a:t>2026-03-20</a:t>
+              <a:t>03-20(Fri)</a:t>
             </a:fld>
             <a:endParaRPr lang="ko-KR" altLang="en-US"/>
           </a:p>
@@ -2245,7 +2222,7 @@
           <a:p>
             <a:fld id="{D71FF700-8BFB-4C30-A2B6-F509E51DF773}" type="datetimeFigureOut">
               <a:rPr lang="ko-KR" altLang="en-US" smtClean="0"/>
-              <a:t>2026-03-20</a:t>
+              <a:t>03-20(Fri)</a:t>
             </a:fld>
             <a:endParaRPr lang="ko-KR" altLang="en-US"/>
           </a:p>
@@ -2522,7 +2499,7 @@
           <a:p>
             <a:fld id="{D71FF700-8BFB-4C30-A2B6-F509E51DF773}" type="datetimeFigureOut">
               <a:rPr lang="ko-KR" altLang="en-US" smtClean="0"/>
-              <a:t>2026-03-20</a:t>
+              <a:t>03-20(Fri)</a:t>
             </a:fld>
             <a:endParaRPr lang="ko-KR" altLang="en-US"/>
           </a:p>
@@ -2779,7 +2756,7 @@
           <a:p>
             <a:fld id="{D71FF700-8BFB-4C30-A2B6-F509E51DF773}" type="datetimeFigureOut">
               <a:rPr lang="ko-KR" altLang="en-US" smtClean="0"/>
-              <a:t>2026-03-20</a:t>
+              <a:t>03-20(Fri)</a:t>
             </a:fld>
             <a:endParaRPr lang="ko-KR" altLang="en-US"/>
           </a:p>
@@ -2992,7 +2969,7 @@
           <a:p>
             <a:fld id="{D71FF700-8BFB-4C30-A2B6-F509E51DF773}" type="datetimeFigureOut">
               <a:rPr lang="ko-KR" altLang="en-US" smtClean="0"/>
-              <a:t>2026-03-20</a:t>
+              <a:t>03-20(Fri)</a:t>
             </a:fld>
             <a:endParaRPr lang="ko-KR" altLang="en-US"/>
           </a:p>
@@ -3471,8 +3448,8 @@
         </p:nvSpPr>
         <p:spPr>
           <a:xfrm>
-            <a:off x="3459853" y="1462917"/>
-            <a:ext cx="5272290" cy="1277604"/>
+            <a:off x="3624039" y="1462917"/>
+            <a:ext cx="4943918" cy="1277604"/>
           </a:xfrm>
         </p:spPr>
         <p:txBody>
@@ -3487,26 +3464,46 @@
               </a:lnSpc>
             </a:pPr>
             <a:r>
-              <a:rPr lang="ko-KR" altLang="en-US" sz="2400" b="1" i="0">
+              <a:rPr lang="ko-KR" altLang="en-US" sz="2000" b="1" i="0" dirty="0">
                 <a:solidFill>
                   <a:schemeClr val="bg1"/>
                 </a:solidFill>
                 <a:effectLst/>
                 <a:latin typeface="Noto Sans KR"/>
               </a:rPr>
-              <a:t>영양소 섭취 기반 고콜레스테롤혈증 위험도 예측 및</a:t>
-            </a:r>
-            <a:br>
-              <a:rPr lang="ko-KR" altLang="en-US" sz="2800" b="1" i="0">
+              <a:t>영양소 섭취 기반 </a:t>
+            </a:r>
+            <a:r>
+              <a:rPr lang="ko-KR" altLang="en-US" sz="2000" b="1" i="0" dirty="0" err="1">
                 <a:solidFill>
                   <a:schemeClr val="bg1"/>
                 </a:solidFill>
                 <a:effectLst/>
                 <a:latin typeface="Noto Sans KR"/>
               </a:rPr>
+              <a:t>고콜레스테롤혈증</a:t>
+            </a:r>
+            <a:r>
+              <a:rPr lang="ko-KR" altLang="en-US" sz="2000" b="1" i="0" dirty="0">
+                <a:solidFill>
+                  <a:schemeClr val="bg1"/>
+                </a:solidFill>
+                <a:effectLst/>
+                <a:latin typeface="Noto Sans KR"/>
+              </a:rPr>
+              <a:t> 위험도 예측 및</a:t>
+            </a:r>
+            <a:br>
+              <a:rPr lang="ko-KR" altLang="en-US" sz="2000" b="1" i="0" dirty="0">
+                <a:solidFill>
+                  <a:schemeClr val="bg1"/>
+                </a:solidFill>
+                <a:effectLst/>
+                <a:latin typeface="Noto Sans KR"/>
+              </a:rPr>
             </a:br>
             <a:r>
-              <a:rPr lang="ko-KR" altLang="en-US" sz="2400" b="1" i="0">
+              <a:rPr lang="ko-KR" altLang="en-US" sz="2000" b="1" i="0" dirty="0">
                 <a:solidFill>
                   <a:schemeClr val="bg1"/>
                 </a:solidFill>
@@ -3817,24 +3814,9 @@
         </p:spPr>
         <p:txBody>
           <a:bodyPr>
-            <a:normAutofit lnSpcReduction="10000"/>
+            <a:normAutofit/>
           </a:bodyPr>
           <a:lstStyle/>
-          <a:p>
-            <a:pPr marL="0" indent="0" algn="l">
-              <a:lnSpc>
-                <a:spcPct val="100000"/>
-              </a:lnSpc>
-              <a:buNone/>
-            </a:pPr>
-            <a:r>
-              <a:rPr lang="ko-KR" altLang="en-US" sz="1800" b="1" i="0">
-                <a:effectLst/>
-                <a:latin typeface="Noto Sans KR"/>
-              </a:rPr>
-              <a:t>현대인 식생활 문제 심화</a:t>
-            </a:r>
-          </a:p>
           <a:p>
             <a:pPr marL="0" indent="0">
               <a:lnSpc>
@@ -3843,7 +3825,7 @@
               <a:buNone/>
             </a:pPr>
             <a:r>
-              <a:rPr lang="ko-KR" altLang="en-US" sz="1400" b="0" i="0">
+              <a:rPr lang="ko-KR" altLang="en-US" sz="1400" b="0" i="0" dirty="0">
                 <a:solidFill>
                   <a:schemeClr val="tx1">
                     <a:lumMod val="75000"/>
@@ -3856,7 +3838,7 @@
               <a:t>외식 및 가공식품 섭취로</a:t>
             </a:r>
             <a:r>
-              <a:rPr lang="ko-KR" altLang="en-US" sz="1400" b="1" i="0">
+              <a:rPr lang="ko-KR" altLang="en-US" sz="1400" b="1" i="0" dirty="0">
                 <a:solidFill>
                   <a:schemeClr val="tx1">
                     <a:lumMod val="75000"/>
@@ -3869,42 +3851,42 @@
               <a:t> </a:t>
             </a:r>
             <a:r>
-              <a:rPr lang="ko-KR" altLang="en-US" sz="1600" b="1" i="0">
+              <a:rPr lang="ko-KR" altLang="en-US" sz="1600" b="1" i="0" dirty="0">
                 <a:effectLst/>
                 <a:latin typeface="Noto Sans KR"/>
               </a:rPr>
               <a:t>지방</a:t>
             </a:r>
             <a:r>
-              <a:rPr lang="en-US" altLang="ko-KR" sz="1600" b="1" i="0">
+              <a:rPr lang="en-US" altLang="ko-KR" sz="1600" b="1" i="0" dirty="0">
                 <a:effectLst/>
                 <a:latin typeface="Noto Sans KR"/>
               </a:rPr>
               <a:t>, </a:t>
             </a:r>
             <a:r>
-              <a:rPr lang="ko-KR" altLang="en-US" sz="1600" b="1" i="0">
+              <a:rPr lang="ko-KR" altLang="en-US" sz="1600" b="1" i="0" dirty="0">
                 <a:effectLst/>
                 <a:latin typeface="Noto Sans KR"/>
               </a:rPr>
               <a:t>당류</a:t>
             </a:r>
             <a:r>
-              <a:rPr lang="en-US" altLang="ko-KR" sz="1600" b="1" i="0">
+              <a:rPr lang="en-US" altLang="ko-KR" sz="1600" b="1" i="0" dirty="0">
                 <a:effectLst/>
                 <a:latin typeface="Noto Sans KR"/>
               </a:rPr>
               <a:t>, </a:t>
             </a:r>
             <a:r>
-              <a:rPr lang="ko-KR" altLang="en-US" sz="1600" b="1" i="0">
+              <a:rPr lang="ko-KR" altLang="en-US" sz="1600" b="1" i="0" dirty="0">
                 <a:effectLst/>
                 <a:latin typeface="Noto Sans KR"/>
               </a:rPr>
               <a:t>나트륨의 과잉 섭취</a:t>
             </a:r>
             <a:r>
-              <a:rPr lang="ko-KR" altLang="en-US" sz="1400" i="0">
+              <a:rPr lang="ko-KR" altLang="en-US" sz="1400" i="0" dirty="0">
                 <a:solidFill>
                   <a:schemeClr val="tx1">
                     <a:lumMod val="75000"/>
@@ -3917,7 +3899,7 @@
               <a:t>가</a:t>
             </a:r>
             <a:r>
-              <a:rPr lang="ko-KR" altLang="en-US" sz="1400" b="1" i="0">
+              <a:rPr lang="ko-KR" altLang="en-US" sz="1400" b="1" i="0" dirty="0">
                 <a:solidFill>
                   <a:schemeClr val="tx1">
                     <a:lumMod val="75000"/>
@@ -3930,7 +3912,7 @@
               <a:t> </a:t>
             </a:r>
             <a:r>
-              <a:rPr lang="ko-KR" altLang="en-US" sz="1400" b="0" i="0">
+              <a:rPr lang="ko-KR" altLang="en-US" sz="1400" b="0" i="0" dirty="0">
                 <a:solidFill>
                   <a:schemeClr val="tx1">
                     <a:lumMod val="75000"/>
@@ -3942,7 +3924,7 @@
               </a:rPr>
               <a:t>일상화되어 심각한 영양 불균형 초래</a:t>
             </a:r>
-            <a:endParaRPr lang="ko-KR" altLang="en-US" sz="1400">
+            <a:endParaRPr lang="ko-KR" altLang="en-US" sz="1400" dirty="0">
               <a:solidFill>
                 <a:schemeClr val="tx1">
                   <a:lumMod val="75000"/>
@@ -4146,18 +4128,6 @@
           </a:lstStyle>
           <a:p>
             <a:pPr marL="0" indent="0">
-              <a:buFont typeface="Arial" panose="020B0604020202020204" pitchFamily="34" charset="0"/>
-              <a:buNone/>
-            </a:pPr>
-            <a:r>
-              <a:rPr lang="ko-KR" altLang="en-US" sz="1800" b="1">
-                <a:latin typeface="Noto Sans KR"/>
-              </a:rPr>
-              <a:t>만성질환 위험 증가</a:t>
-            </a:r>
-          </a:p>
-          <a:p>
-            <a:pPr marL="0" indent="0">
               <a:lnSpc>
                 <a:spcPct val="150000"/>
               </a:lnSpc>
@@ -4165,7 +4135,7 @@
               <a:buNone/>
             </a:pPr>
             <a:r>
-              <a:rPr lang="ko-KR" altLang="en-US" sz="1400">
+              <a:rPr lang="ko-KR" altLang="en-US" sz="1400" dirty="0">
                 <a:solidFill>
                   <a:schemeClr val="tx1">
                     <a:lumMod val="75000"/>
@@ -4177,13 +4147,13 @@
               <a:t>잘못된 식습관으로 인해 </a:t>
             </a:r>
             <a:r>
-              <a:rPr lang="ko-KR" altLang="en-US" sz="1400" b="1">
+              <a:rPr lang="ko-KR" altLang="en-US" sz="1400" b="1" dirty="0" err="1">
                 <a:latin typeface="Noto Sans KR"/>
               </a:rPr>
               <a:t>고콜레스테롤혈증</a:t>
             </a:r>
             <a:r>
-              <a:rPr lang="ko-KR" altLang="en-US" sz="1400">
+              <a:rPr lang="ko-KR" altLang="en-US" sz="1400" dirty="0">
                 <a:solidFill>
                   <a:schemeClr val="tx1">
                     <a:lumMod val="75000"/>
@@ -4194,7 +4164,7 @@
               </a:rPr>
               <a:t> 만성질환 유병률 증가</a:t>
             </a:r>
-            <a:endParaRPr lang="ko-KR" altLang="en-US" sz="1400">
+            <a:endParaRPr lang="ko-KR" altLang="en-US" sz="1400" dirty="0">
               <a:solidFill>
                 <a:schemeClr val="tx1">
                   <a:lumMod val="75000"/>
@@ -4334,7 +4304,7 @@
           <p:nvPr/>
         </p:nvPicPr>
         <p:blipFill>
-          <a:blip r:embed="rId3">
+          <a:blip r:embed="rId2">
             <a:extLst>
               <a:ext uri="{28A0092B-C50C-407E-A947-70E740481C1C}">
                 <a14:useLocalDpi xmlns:a14="http://schemas.microsoft.com/office/drawing/2010/main" val="0"/>
@@ -4412,6 +4382,188 @@
           </a:fontRef>
         </p:style>
       </p:cxnSp>
+      <p:sp>
+        <p:nvSpPr>
+          <p:cNvPr id="5" name="TextBox 4">
+            <a:extLst>
+              <a:ext uri="{FF2B5EF4-FFF2-40B4-BE49-F238E27FC236}">
+                <a16:creationId xmlns:a16="http://schemas.microsoft.com/office/drawing/2014/main" id="{84A4700A-5957-3AE6-6B83-8230CE3053BF}"/>
+              </a:ext>
+            </a:extLst>
+          </p:cNvPr>
+          <p:cNvSpPr txBox="1"/>
+          <p:nvPr/>
+        </p:nvSpPr>
+        <p:spPr>
+          <a:xfrm>
+            <a:off x="5364480" y="1741714"/>
+            <a:ext cx="6708888" cy="1200329"/>
+          </a:xfrm>
+          <a:prstGeom prst="rect">
+            <a:avLst/>
+          </a:prstGeom>
+          <a:noFill/>
+        </p:spPr>
+        <p:txBody>
+          <a:bodyPr wrap="none" rtlCol="0">
+            <a:spAutoFit/>
+          </a:bodyPr>
+          <a:lstStyle/>
+          <a:p>
+            <a:r>
+              <a:rPr lang="ko-KR" altLang="en-US" sz="1800" dirty="0">
+                <a:effectLst/>
+                <a:latin typeface="Malgun Gothic" panose="020B0503020000020004" pitchFamily="50" charset="-127"/>
+                <a:ea typeface="Malgun Gothic" panose="020B0503020000020004" pitchFamily="50" charset="-127"/>
+              </a:rPr>
+              <a:t>기획 의도 근거자료 영역 확대하고 </a:t>
+            </a:r>
+            <a:r>
+              <a:rPr lang="en-US" altLang="ko-KR" sz="1800" dirty="0">
+                <a:effectLst/>
+                <a:latin typeface="Malgun Gothic" panose="020B0503020000020004" pitchFamily="50" charset="-127"/>
+                <a:ea typeface="Malgun Gothic" panose="020B0503020000020004" pitchFamily="50" charset="-127"/>
+              </a:rPr>
+              <a:t>4</a:t>
+            </a:r>
+            <a:r>
+              <a:rPr lang="ko-KR" altLang="en-US" sz="1800" dirty="0">
+                <a:effectLst/>
+                <a:latin typeface="Malgun Gothic" panose="020B0503020000020004" pitchFamily="50" charset="-127"/>
+                <a:ea typeface="Malgun Gothic" panose="020B0503020000020004" pitchFamily="50" charset="-127"/>
+              </a:rPr>
+              <a:t>가지 흐름으로 진행</a:t>
+            </a:r>
+            <a:br>
+              <a:rPr lang="ko-KR" altLang="en-US" sz="1800" dirty="0">
+                <a:effectLst/>
+                <a:latin typeface="Malgun Gothic" panose="020B0503020000020004" pitchFamily="50" charset="-127"/>
+                <a:ea typeface="Malgun Gothic" panose="020B0503020000020004" pitchFamily="50" charset="-127"/>
+              </a:rPr>
+            </a:br>
+            <a:r>
+              <a:rPr lang="ko-KR" altLang="en-US" sz="1800" dirty="0">
+                <a:effectLst/>
+                <a:latin typeface="Malgun Gothic" panose="020B0503020000020004" pitchFamily="50" charset="-127"/>
+                <a:ea typeface="Malgun Gothic" panose="020B0503020000020004" pitchFamily="50" charset="-127"/>
+              </a:rPr>
+              <a:t>외식</a:t>
+            </a:r>
+            <a:r>
+              <a:rPr lang="en-US" altLang="ko-KR" sz="1800" dirty="0">
+                <a:effectLst/>
+                <a:latin typeface="Malgun Gothic" panose="020B0503020000020004" pitchFamily="50" charset="-127"/>
+                <a:ea typeface="Malgun Gothic" panose="020B0503020000020004" pitchFamily="50" charset="-127"/>
+              </a:rPr>
+              <a:t>, </a:t>
+            </a:r>
+            <a:r>
+              <a:rPr lang="ko-KR" altLang="en-US" sz="1800" dirty="0">
+                <a:effectLst/>
+                <a:latin typeface="Malgun Gothic" panose="020B0503020000020004" pitchFamily="50" charset="-127"/>
+                <a:ea typeface="Malgun Gothic" panose="020B0503020000020004" pitchFamily="50" charset="-127"/>
+              </a:rPr>
+              <a:t>가공식품 섭취 증가 </a:t>
+            </a:r>
+            <a:r>
+              <a:rPr lang="en-US" altLang="ko-KR" sz="1800" dirty="0">
+                <a:effectLst/>
+                <a:latin typeface="Malgun Gothic" panose="020B0503020000020004" pitchFamily="50" charset="-127"/>
+                <a:ea typeface="Malgun Gothic" panose="020B0503020000020004" pitchFamily="50" charset="-127"/>
+              </a:rPr>
+              <a:t>- </a:t>
+            </a:r>
+            <a:r>
+              <a:rPr lang="ko-KR" altLang="en-US" sz="1800" dirty="0">
+                <a:effectLst/>
+                <a:latin typeface="Malgun Gothic" panose="020B0503020000020004" pitchFamily="50" charset="-127"/>
+                <a:ea typeface="Malgun Gothic" panose="020B0503020000020004" pitchFamily="50" charset="-127"/>
+              </a:rPr>
+              <a:t>지방</a:t>
+            </a:r>
+            <a:r>
+              <a:rPr lang="en-US" altLang="ko-KR" sz="1800" dirty="0">
+                <a:effectLst/>
+                <a:latin typeface="Malgun Gothic" panose="020B0503020000020004" pitchFamily="50" charset="-127"/>
+                <a:ea typeface="Malgun Gothic" panose="020B0503020000020004" pitchFamily="50" charset="-127"/>
+              </a:rPr>
+              <a:t>, </a:t>
+            </a:r>
+            <a:r>
+              <a:rPr lang="ko-KR" altLang="en-US" sz="1800" dirty="0">
+                <a:effectLst/>
+                <a:latin typeface="Malgun Gothic" panose="020B0503020000020004" pitchFamily="50" charset="-127"/>
+                <a:ea typeface="Malgun Gothic" panose="020B0503020000020004" pitchFamily="50" charset="-127"/>
+              </a:rPr>
+              <a:t>나트륨</a:t>
+            </a:r>
+            <a:r>
+              <a:rPr lang="en-US" altLang="ko-KR" sz="1800" dirty="0">
+                <a:effectLst/>
+                <a:latin typeface="Malgun Gothic" panose="020B0503020000020004" pitchFamily="50" charset="-127"/>
+                <a:ea typeface="Malgun Gothic" panose="020B0503020000020004" pitchFamily="50" charset="-127"/>
+              </a:rPr>
+              <a:t>, </a:t>
+            </a:r>
+            <a:r>
+              <a:rPr lang="ko-KR" altLang="en-US" sz="1800" dirty="0">
+                <a:effectLst/>
+                <a:latin typeface="Malgun Gothic" panose="020B0503020000020004" pitchFamily="50" charset="-127"/>
+                <a:ea typeface="Malgun Gothic" panose="020B0503020000020004" pitchFamily="50" charset="-127"/>
+              </a:rPr>
+              <a:t>당류 과잉섭취 일상화</a:t>
+            </a:r>
+            <a:endParaRPr lang="en-US" altLang="ko-KR" sz="1800" dirty="0">
+              <a:effectLst/>
+              <a:latin typeface="Malgun Gothic" panose="020B0503020000020004" pitchFamily="50" charset="-127"/>
+              <a:ea typeface="Malgun Gothic" panose="020B0503020000020004" pitchFamily="50" charset="-127"/>
+            </a:endParaRPr>
+          </a:p>
+          <a:p>
+            <a:r>
+              <a:rPr lang="ko-KR" altLang="en-US" sz="1800" dirty="0">
+                <a:effectLst/>
+                <a:latin typeface="Arial" panose="020B0604020202020204" pitchFamily="34" charset="0"/>
+              </a:rPr>
+              <a:t>잘못된 식습관으로 만성질환 유병률 증가 </a:t>
+            </a:r>
+            <a:endParaRPr lang="en-US" altLang="ko-KR" sz="1800" dirty="0">
+              <a:effectLst/>
+              <a:latin typeface="Arial" panose="020B0604020202020204" pitchFamily="34" charset="0"/>
+            </a:endParaRPr>
+          </a:p>
+          <a:p>
+            <a:r>
+              <a:rPr lang="en-US" altLang="ko-KR" sz="1800" dirty="0">
+                <a:effectLst/>
+                <a:latin typeface="Arial" panose="020B0604020202020204" pitchFamily="34" charset="0"/>
+              </a:rPr>
+              <a:t>– </a:t>
+            </a:r>
+            <a:r>
+              <a:rPr lang="ko-KR" altLang="en-US" sz="1800" dirty="0">
+                <a:effectLst/>
+                <a:latin typeface="Arial" panose="020B0604020202020204" pitchFamily="34" charset="0"/>
+              </a:rPr>
+              <a:t>건강검진 주기가 길어서 제때 체크 못함 </a:t>
+            </a:r>
+            <a:r>
+              <a:rPr lang="en-US" altLang="ko-KR" sz="1800" dirty="0">
+                <a:effectLst/>
+                <a:latin typeface="Arial" panose="020B0604020202020204" pitchFamily="34" charset="0"/>
+              </a:rPr>
+              <a:t>– </a:t>
+            </a:r>
+            <a:r>
+              <a:rPr lang="ko-KR" altLang="en-US" sz="1800" dirty="0">
+                <a:effectLst/>
+                <a:latin typeface="Arial" panose="020B0604020202020204" pitchFamily="34" charset="0"/>
+              </a:rPr>
+              <a:t>개인별 맞춤 가이드</a:t>
+            </a:r>
+          </a:p>
+        </p:txBody>
+      </p:sp>
     </p:spTree>
     <p:extLst>
       <p:ext uri="{BB962C8B-B14F-4D97-AF65-F5344CB8AC3E}">
@@ -4422,11 +4574,6 @@
   <p:clrMapOvr>
     <a:masterClrMapping/>
   </p:clrMapOvr>
-  <p:extLst>
-    <p:ext uri="{6950BFC3-D8DA-4A85-94F7-54DA5524770B}">
-      <p188:commentRel xmlns:p188="http://schemas.microsoft.com/office/powerpoint/2018/8/main" r:id="rId2"/>
-    </p:ext>
-  </p:extLst>
 </p:sld>
 </file>
 
@@ -4482,7 +4629,7 @@
               <a:buNone/>
             </a:pPr>
             <a:r>
-              <a:rPr lang="ko-KR" altLang="en-US" sz="1800" b="1" i="0">
+              <a:rPr lang="ko-KR" altLang="en-US" sz="1800" b="1" i="0" dirty="0">
                 <a:effectLst/>
                 <a:latin typeface="Noto Sans KR"/>
               </a:rPr>
@@ -4497,7 +4644,7 @@
               <a:buNone/>
             </a:pPr>
             <a:r>
-              <a:rPr lang="ko-KR" altLang="en-US" sz="1400" b="0" i="0">
+              <a:rPr lang="ko-KR" altLang="en-US" sz="1400" b="0" i="0" dirty="0">
                 <a:solidFill>
                   <a:schemeClr val="tx1">
                     <a:lumMod val="75000"/>
@@ -4510,7 +4657,7 @@
               <a:t>외식 및 가공식품 섭취로</a:t>
             </a:r>
             <a:r>
-              <a:rPr lang="ko-KR" altLang="en-US" sz="1400" b="1" i="0">
+              <a:rPr lang="ko-KR" altLang="en-US" sz="1400" b="1" i="0" dirty="0">
                 <a:solidFill>
                   <a:schemeClr val="tx1">
                     <a:lumMod val="75000"/>
@@ -4523,42 +4670,42 @@
               <a:t> </a:t>
             </a:r>
             <a:r>
-              <a:rPr lang="ko-KR" altLang="en-US" sz="1600" b="1" i="0">
+              <a:rPr lang="ko-KR" altLang="en-US" sz="1600" b="1" i="0" dirty="0">
                 <a:effectLst/>
                 <a:latin typeface="Noto Sans KR"/>
               </a:rPr>
               <a:t>지방</a:t>
             </a:r>
             <a:r>
-              <a:rPr lang="en-US" altLang="ko-KR" sz="1600" b="1" i="0">
+              <a:rPr lang="en-US" altLang="ko-KR" sz="1600" b="1" i="0" dirty="0">
                 <a:effectLst/>
                 <a:latin typeface="Noto Sans KR"/>
               </a:rPr>
               <a:t>, </a:t>
             </a:r>
             <a:r>
-              <a:rPr lang="ko-KR" altLang="en-US" sz="1600" b="1" i="0">
+              <a:rPr lang="ko-KR" altLang="en-US" sz="1600" b="1" i="0" dirty="0">
                 <a:effectLst/>
                 <a:latin typeface="Noto Sans KR"/>
               </a:rPr>
               <a:t>당류</a:t>
             </a:r>
             <a:r>
-              <a:rPr lang="en-US" altLang="ko-KR" sz="1600" b="1" i="0">
+              <a:rPr lang="en-US" altLang="ko-KR" sz="1600" b="1" i="0" dirty="0">
                 <a:effectLst/>
                 <a:latin typeface="Noto Sans KR"/>
               </a:rPr>
               <a:t>, </a:t>
             </a:r>
             <a:r>
-              <a:rPr lang="ko-KR" altLang="en-US" sz="1600" b="1" i="0">
+              <a:rPr lang="ko-KR" altLang="en-US" sz="1600" b="1" i="0" dirty="0">
                 <a:effectLst/>
                 <a:latin typeface="Noto Sans KR"/>
               </a:rPr>
               <a:t>나트륨의 과잉 섭취</a:t>
             </a:r>
             <a:r>
-              <a:rPr lang="ko-KR" altLang="en-US" sz="1400" i="0">
+              <a:rPr lang="ko-KR" altLang="en-US" sz="1400" i="0" dirty="0">
                 <a:solidFill>
                   <a:schemeClr val="tx1">
                     <a:lumMod val="75000"/>
@@ -4571,7 +4718,7 @@
               <a:t>가</a:t>
             </a:r>
             <a:r>
-              <a:rPr lang="ko-KR" altLang="en-US" sz="1400" b="1" i="0">
+              <a:rPr lang="ko-KR" altLang="en-US" sz="1400" b="1" i="0" dirty="0">
                 <a:solidFill>
                   <a:schemeClr val="tx1">
                     <a:lumMod val="75000"/>
@@ -4584,7 +4731,7 @@
               <a:t> </a:t>
             </a:r>
             <a:r>
-              <a:rPr lang="ko-KR" altLang="en-US" sz="1400" b="0" i="0">
+              <a:rPr lang="ko-KR" altLang="en-US" sz="1400" b="0" i="0" dirty="0">
                 <a:solidFill>
                   <a:schemeClr val="tx1">
                     <a:lumMod val="75000"/>
@@ -4596,7 +4743,7 @@
               </a:rPr>
               <a:t>일상화되어 심각한 영양 불균형 초래</a:t>
             </a:r>
-            <a:endParaRPr lang="ko-KR" altLang="en-US" sz="1400">
+            <a:endParaRPr lang="ko-KR" altLang="en-US" sz="1400" dirty="0">
               <a:solidFill>
                 <a:schemeClr val="tx1">
                   <a:lumMod val="75000"/>

--- a/1차 프로젝트/기획서.pptx
+++ b/1차 프로젝트/기획서.pptx
@@ -5,19 +5,14 @@
     <p:sldMasterId id="2147483672" r:id="rId1"/>
   </p:sldMasterIdLst>
   <p:notesMasterIdLst>
-    <p:notesMasterId r:id="rId12"/>
+    <p:notesMasterId r:id="rId7"/>
   </p:notesMasterIdLst>
   <p:sldIdLst>
     <p:sldId id="256" r:id="rId2"/>
     <p:sldId id="261" r:id="rId3"/>
-    <p:sldId id="271" r:id="rId4"/>
-    <p:sldId id="275" r:id="rId5"/>
-    <p:sldId id="274" r:id="rId6"/>
-    <p:sldId id="270" r:id="rId7"/>
-    <p:sldId id="259" r:id="rId8"/>
-    <p:sldId id="267" r:id="rId9"/>
-    <p:sldId id="272" r:id="rId10"/>
-    <p:sldId id="273" r:id="rId11"/>
+    <p:sldId id="277" r:id="rId4"/>
+    <p:sldId id="270" r:id="rId5"/>
+    <p:sldId id="259" r:id="rId6"/>
   </p:sldIdLst>
   <p:sldSz cx="12192000" cy="6858000"/>
   <p:notesSz cx="6858000" cy="9144000"/>
@@ -127,9 +122,7 @@
         <p14:section name="기획의도" id="{5776D462-103A-4A94-B329-79D7A809B440}">
           <p14:sldIdLst>
             <p14:sldId id="261"/>
-            <p14:sldId id="271"/>
-            <p14:sldId id="275"/>
-            <p14:sldId id="274"/>
+            <p14:sldId id="277"/>
           </p14:sldIdLst>
         </p14:section>
         <p14:section name="개발목표" id="{68215A09-B176-47FD-B779-768E16B11801}">
@@ -143,11 +136,7 @@
           </p14:sldIdLst>
         </p14:section>
         <p14:section name="화면설계서" id="{E4806D9E-3AD0-4089-A3C6-C15EABD6A583}">
-          <p14:sldIdLst>
-            <p14:sldId id="267"/>
-            <p14:sldId id="272"/>
-            <p14:sldId id="273"/>
-          </p14:sldIdLst>
+          <p14:sldIdLst/>
         </p14:section>
       </p14:sectionLst>
     </p:ext>
@@ -246,7 +235,7 @@
           <a:p>
             <a:fld id="{C29A2857-52EE-4322-B040-F7AE6E3FFBF0}" type="datetimeFigureOut">
               <a:rPr lang="ko-KR" altLang="en-US" smtClean="0"/>
-              <a:t>03-20(Fri)</a:t>
+              <a:t>2026-03-20</a:t>
             </a:fld>
             <a:endParaRPr lang="ko-KR" altLang="en-US"/>
           </a:p>
@@ -644,7 +633,7 @@
           <a:p>
             <a:fld id="{D71FF700-8BFB-4C30-A2B6-F509E51DF773}" type="datetimeFigureOut">
               <a:rPr lang="ko-KR" altLang="en-US" smtClean="0"/>
-              <a:t>03-20(Fri)</a:t>
+              <a:t>2026-03-20</a:t>
             </a:fld>
             <a:endParaRPr lang="ko-KR" altLang="en-US"/>
           </a:p>
@@ -814,7 +803,7 @@
           <a:p>
             <a:fld id="{D71FF700-8BFB-4C30-A2B6-F509E51DF773}" type="datetimeFigureOut">
               <a:rPr lang="ko-KR" altLang="en-US" smtClean="0"/>
-              <a:t>03-20(Fri)</a:t>
+              <a:t>2026-03-20</a:t>
             </a:fld>
             <a:endParaRPr lang="ko-KR" altLang="en-US"/>
           </a:p>
@@ -994,7 +983,7 @@
           <a:p>
             <a:fld id="{D71FF700-8BFB-4C30-A2B6-F509E51DF773}" type="datetimeFigureOut">
               <a:rPr lang="ko-KR" altLang="en-US" smtClean="0"/>
-              <a:t>03-20(Fri)</a:t>
+              <a:t>2026-03-20</a:t>
             </a:fld>
             <a:endParaRPr lang="ko-KR" altLang="en-US"/>
           </a:p>
@@ -1164,7 +1153,7 @@
           <a:p>
             <a:fld id="{D71FF700-8BFB-4C30-A2B6-F509E51DF773}" type="datetimeFigureOut">
               <a:rPr lang="ko-KR" altLang="en-US" smtClean="0"/>
-              <a:t>03-20(Fri)</a:t>
+              <a:t>2026-03-20</a:t>
             </a:fld>
             <a:endParaRPr lang="ko-KR" altLang="en-US"/>
           </a:p>
@@ -1410,7 +1399,7 @@
           <a:p>
             <a:fld id="{D71FF700-8BFB-4C30-A2B6-F509E51DF773}" type="datetimeFigureOut">
               <a:rPr lang="ko-KR" altLang="en-US" smtClean="0"/>
-              <a:t>03-20(Fri)</a:t>
+              <a:t>2026-03-20</a:t>
             </a:fld>
             <a:endParaRPr lang="ko-KR" altLang="en-US"/>
           </a:p>
@@ -1642,7 +1631,7 @@
           <a:p>
             <a:fld id="{D71FF700-8BFB-4C30-A2B6-F509E51DF773}" type="datetimeFigureOut">
               <a:rPr lang="ko-KR" altLang="en-US" smtClean="0"/>
-              <a:t>03-20(Fri)</a:t>
+              <a:t>2026-03-20</a:t>
             </a:fld>
             <a:endParaRPr lang="ko-KR" altLang="en-US"/>
           </a:p>
@@ -2009,7 +1998,7 @@
           <a:p>
             <a:fld id="{D71FF700-8BFB-4C30-A2B6-F509E51DF773}" type="datetimeFigureOut">
               <a:rPr lang="ko-KR" altLang="en-US" smtClean="0"/>
-              <a:t>03-20(Fri)</a:t>
+              <a:t>2026-03-20</a:t>
             </a:fld>
             <a:endParaRPr lang="ko-KR" altLang="en-US"/>
           </a:p>
@@ -2127,7 +2116,7 @@
           <a:p>
             <a:fld id="{D71FF700-8BFB-4C30-A2B6-F509E51DF773}" type="datetimeFigureOut">
               <a:rPr lang="ko-KR" altLang="en-US" smtClean="0"/>
-              <a:t>03-20(Fri)</a:t>
+              <a:t>2026-03-20</a:t>
             </a:fld>
             <a:endParaRPr lang="ko-KR" altLang="en-US"/>
           </a:p>
@@ -2222,7 +2211,7 @@
           <a:p>
             <a:fld id="{D71FF700-8BFB-4C30-A2B6-F509E51DF773}" type="datetimeFigureOut">
               <a:rPr lang="ko-KR" altLang="en-US" smtClean="0"/>
-              <a:t>03-20(Fri)</a:t>
+              <a:t>2026-03-20</a:t>
             </a:fld>
             <a:endParaRPr lang="ko-KR" altLang="en-US"/>
           </a:p>
@@ -2499,7 +2488,7 @@
           <a:p>
             <a:fld id="{D71FF700-8BFB-4C30-A2B6-F509E51DF773}" type="datetimeFigureOut">
               <a:rPr lang="ko-KR" altLang="en-US" smtClean="0"/>
-              <a:t>03-20(Fri)</a:t>
+              <a:t>2026-03-20</a:t>
             </a:fld>
             <a:endParaRPr lang="ko-KR" altLang="en-US"/>
           </a:p>
@@ -2756,7 +2745,7 @@
           <a:p>
             <a:fld id="{D71FF700-8BFB-4C30-A2B6-F509E51DF773}" type="datetimeFigureOut">
               <a:rPr lang="ko-KR" altLang="en-US" smtClean="0"/>
-              <a:t>03-20(Fri)</a:t>
+              <a:t>2026-03-20</a:t>
             </a:fld>
             <a:endParaRPr lang="ko-KR" altLang="en-US"/>
           </a:p>
@@ -2969,7 +2958,7 @@
           <a:p>
             <a:fld id="{D71FF700-8BFB-4C30-A2B6-F509E51DF773}" type="datetimeFigureOut">
               <a:rPr lang="ko-KR" altLang="en-US" smtClean="0"/>
-              <a:t>03-20(Fri)</a:t>
+              <a:t>2026-03-20</a:t>
             </a:fld>
             <a:endParaRPr lang="ko-KR" altLang="en-US"/>
           </a:p>
@@ -3610,7 +3599,7 @@
 </p:sld>
 </file>
 
-<file path=ppt/slides/slide10.xml><?xml version="1.0" encoding="utf-8"?>
+<file path=ppt/slides/slide2.xml><?xml version="1.0" encoding="utf-8"?>
 <p:sld xmlns:a="http://schemas.openxmlformats.org/drawingml/2006/main" xmlns:r="http://schemas.openxmlformats.org/officeDocument/2006/relationships" xmlns:p="http://schemas.openxmlformats.org/presentationml/2006/main">
   <p:cSld>
     <p:spTree>
@@ -3629,10 +3618,403 @@
       </p:grpSpPr>
       <p:sp>
         <p:nvSpPr>
-          <p:cNvPr id="2" name="직사각형 1">
+          <p:cNvPr id="3" name="내용 개체 틀 2">
             <a:extLst>
               <a:ext uri="{FF2B5EF4-FFF2-40B4-BE49-F238E27FC236}">
-                <a16:creationId xmlns:a16="http://schemas.microsoft.com/office/drawing/2014/main" id="{0E71911F-795E-955F-950B-60464C6202D5}"/>
+                <a16:creationId xmlns:a16="http://schemas.microsoft.com/office/drawing/2014/main" id="{F3E0445D-6120-B7A6-8C93-5DFA859689ED}"/>
+              </a:ext>
+            </a:extLst>
+          </p:cNvPr>
+          <p:cNvSpPr>
+            <a:spLocks noGrp="1"/>
+          </p:cNvSpPr>
+          <p:nvPr>
+            <p:ph idx="1"/>
+          </p:nvPr>
+        </p:nvSpPr>
+        <p:spPr>
+          <a:xfrm>
+            <a:off x="917780" y="2334957"/>
+            <a:ext cx="3389582" cy="798000"/>
+          </a:xfrm>
+        </p:spPr>
+        <p:txBody>
+          <a:bodyPr>
+            <a:normAutofit/>
+          </a:bodyPr>
+          <a:lstStyle/>
+          <a:p>
+            <a:pPr marL="0" indent="0">
+              <a:lnSpc>
+                <a:spcPct val="100000"/>
+              </a:lnSpc>
+              <a:buNone/>
+            </a:pPr>
+            <a:r>
+              <a:rPr lang="ko-KR" altLang="en-US" sz="1400" b="0" i="0">
+                <a:solidFill>
+                  <a:schemeClr val="tx1">
+                    <a:lumMod val="65000"/>
+                    <a:lumOff val="35000"/>
+                  </a:schemeClr>
+                </a:solidFill>
+                <a:effectLst/>
+                <a:latin typeface="Noto Sans KR"/>
+              </a:rPr>
+              <a:t>외식 및 가공식품 섭취 빈도 증가</a:t>
+            </a:r>
+            <a:r>
+              <a:rPr lang="ko-KR" altLang="en-US" sz="1400" b="0" i="0">
+                <a:solidFill>
+                  <a:schemeClr val="tx1">
+                    <a:lumMod val="75000"/>
+                    <a:lumOff val="25000"/>
+                  </a:schemeClr>
+                </a:solidFill>
+                <a:effectLst/>
+                <a:latin typeface="Noto Sans KR"/>
+              </a:rPr>
+              <a:t> </a:t>
+            </a:r>
+            <a:endParaRPr lang="en-US" altLang="ko-KR" sz="1400" b="0" i="0">
+              <a:solidFill>
+                <a:schemeClr val="tx1">
+                  <a:lumMod val="75000"/>
+                  <a:lumOff val="25000"/>
+                </a:schemeClr>
+              </a:solidFill>
+              <a:effectLst/>
+              <a:latin typeface="Noto Sans KR"/>
+            </a:endParaRPr>
+          </a:p>
+          <a:p>
+            <a:pPr marL="0" indent="0">
+              <a:lnSpc>
+                <a:spcPct val="100000"/>
+              </a:lnSpc>
+              <a:buNone/>
+            </a:pPr>
+            <a:r>
+              <a:rPr lang="ko-KR" altLang="en-US" sz="1600" b="1" i="0">
+                <a:solidFill>
+                  <a:schemeClr val="tx1">
+                    <a:lumMod val="75000"/>
+                    <a:lumOff val="25000"/>
+                  </a:schemeClr>
+                </a:solidFill>
+                <a:effectLst/>
+                <a:latin typeface="Noto Sans KR"/>
+              </a:rPr>
+              <a:t>지방</a:t>
+            </a:r>
+            <a:r>
+              <a:rPr lang="en-US" altLang="ko-KR" sz="1600" b="1" i="0">
+                <a:solidFill>
+                  <a:schemeClr val="tx1">
+                    <a:lumMod val="75000"/>
+                    <a:lumOff val="25000"/>
+                  </a:schemeClr>
+                </a:solidFill>
+                <a:effectLst/>
+                <a:latin typeface="Noto Sans KR"/>
+              </a:rPr>
+              <a:t>, </a:t>
+            </a:r>
+            <a:r>
+              <a:rPr lang="ko-KR" altLang="en-US" sz="1600" b="1" i="0">
+                <a:solidFill>
+                  <a:schemeClr val="tx1">
+                    <a:lumMod val="75000"/>
+                    <a:lumOff val="25000"/>
+                  </a:schemeClr>
+                </a:solidFill>
+                <a:effectLst/>
+                <a:latin typeface="Noto Sans KR"/>
+              </a:rPr>
+              <a:t>나트륨</a:t>
+            </a:r>
+            <a:r>
+              <a:rPr lang="en-US" altLang="ko-KR" sz="1600" b="1" i="0">
+                <a:solidFill>
+                  <a:schemeClr val="tx1">
+                    <a:lumMod val="75000"/>
+                    <a:lumOff val="25000"/>
+                  </a:schemeClr>
+                </a:solidFill>
+                <a:effectLst/>
+                <a:latin typeface="Noto Sans KR"/>
+              </a:rPr>
+              <a:t>, </a:t>
+            </a:r>
+            <a:r>
+              <a:rPr lang="ko-KR" altLang="en-US" sz="1600" b="1" i="0">
+                <a:solidFill>
+                  <a:schemeClr val="tx1">
+                    <a:lumMod val="75000"/>
+                    <a:lumOff val="25000"/>
+                  </a:schemeClr>
+                </a:solidFill>
+                <a:effectLst/>
+                <a:latin typeface="Noto Sans KR"/>
+              </a:rPr>
+              <a:t>당류 과잉섭취 일상화</a:t>
+            </a:r>
+            <a:endParaRPr lang="ko-KR" altLang="en-US" sz="1400" b="1" dirty="0">
+              <a:solidFill>
+                <a:schemeClr val="tx1">
+                  <a:lumMod val="75000"/>
+                  <a:lumOff val="25000"/>
+                </a:schemeClr>
+              </a:solidFill>
+            </a:endParaRPr>
+          </a:p>
+        </p:txBody>
+      </p:sp>
+      <p:sp>
+        <p:nvSpPr>
+          <p:cNvPr id="12" name="내용 개체 틀 2">
+            <a:extLst>
+              <a:ext uri="{FF2B5EF4-FFF2-40B4-BE49-F238E27FC236}">
+                <a16:creationId xmlns:a16="http://schemas.microsoft.com/office/drawing/2014/main" id="{6F9FC355-108D-229C-8C47-754079D811C4}"/>
+              </a:ext>
+            </a:extLst>
+          </p:cNvPr>
+          <p:cNvSpPr txBox="1">
+            <a:spLocks/>
+          </p:cNvSpPr>
+          <p:nvPr/>
+        </p:nvSpPr>
+        <p:spPr>
+          <a:xfrm>
+            <a:off x="687460" y="4670106"/>
+            <a:ext cx="3850221" cy="798000"/>
+          </a:xfrm>
+          <a:prstGeom prst="rect">
+            <a:avLst/>
+          </a:prstGeom>
+        </p:spPr>
+        <p:txBody>
+          <a:bodyPr vert="horz" lIns="91440" tIns="45720" rIns="91440" bIns="45720" rtlCol="0">
+            <a:normAutofit/>
+          </a:bodyPr>
+          <a:lstStyle>
+            <a:lvl1pPr marL="228600" indent="-228600" algn="l" defTabSz="914400" rtl="0" eaLnBrk="1" latinLnBrk="1" hangingPunct="1">
+              <a:lnSpc>
+                <a:spcPct val="90000"/>
+              </a:lnSpc>
+              <a:spcBef>
+                <a:spcPts val="1000"/>
+              </a:spcBef>
+              <a:buFont typeface="Arial" panose="020B0604020202020204" pitchFamily="34" charset="0"/>
+              <a:buChar char="•"/>
+              <a:defRPr sz="2800" kern="1200">
+                <a:solidFill>
+                  <a:schemeClr val="tx1"/>
+                </a:solidFill>
+                <a:latin typeface="+mn-lt"/>
+                <a:ea typeface="+mn-ea"/>
+                <a:cs typeface="+mn-cs"/>
+              </a:defRPr>
+            </a:lvl1pPr>
+            <a:lvl2pPr marL="685800" indent="-228600" algn="l" defTabSz="914400" rtl="0" eaLnBrk="1" latinLnBrk="1" hangingPunct="1">
+              <a:lnSpc>
+                <a:spcPct val="90000"/>
+              </a:lnSpc>
+              <a:spcBef>
+                <a:spcPts val="500"/>
+              </a:spcBef>
+              <a:buFont typeface="Arial" panose="020B0604020202020204" pitchFamily="34" charset="0"/>
+              <a:buChar char="•"/>
+              <a:defRPr sz="2400" kern="1200">
+                <a:solidFill>
+                  <a:schemeClr val="tx1"/>
+                </a:solidFill>
+                <a:latin typeface="+mn-lt"/>
+                <a:ea typeface="+mn-ea"/>
+                <a:cs typeface="+mn-cs"/>
+              </a:defRPr>
+            </a:lvl2pPr>
+            <a:lvl3pPr marL="1143000" indent="-228600" algn="l" defTabSz="914400" rtl="0" eaLnBrk="1" latinLnBrk="1" hangingPunct="1">
+              <a:lnSpc>
+                <a:spcPct val="90000"/>
+              </a:lnSpc>
+              <a:spcBef>
+                <a:spcPts val="500"/>
+              </a:spcBef>
+              <a:buFont typeface="Arial" panose="020B0604020202020204" pitchFamily="34" charset="0"/>
+              <a:buChar char="•"/>
+              <a:defRPr sz="2000" kern="1200">
+                <a:solidFill>
+                  <a:schemeClr val="tx1"/>
+                </a:solidFill>
+                <a:latin typeface="+mn-lt"/>
+                <a:ea typeface="+mn-ea"/>
+                <a:cs typeface="+mn-cs"/>
+              </a:defRPr>
+            </a:lvl3pPr>
+            <a:lvl4pPr marL="1600200" indent="-228600" algn="l" defTabSz="914400" rtl="0" eaLnBrk="1" latinLnBrk="1" hangingPunct="1">
+              <a:lnSpc>
+                <a:spcPct val="90000"/>
+              </a:lnSpc>
+              <a:spcBef>
+                <a:spcPts val="500"/>
+              </a:spcBef>
+              <a:buFont typeface="Arial" panose="020B0604020202020204" pitchFamily="34" charset="0"/>
+              <a:buChar char="•"/>
+              <a:defRPr sz="1800" kern="1200">
+                <a:solidFill>
+                  <a:schemeClr val="tx1"/>
+                </a:solidFill>
+                <a:latin typeface="+mn-lt"/>
+                <a:ea typeface="+mn-ea"/>
+                <a:cs typeface="+mn-cs"/>
+              </a:defRPr>
+            </a:lvl4pPr>
+            <a:lvl5pPr marL="2057400" indent="-228600" algn="l" defTabSz="914400" rtl="0" eaLnBrk="1" latinLnBrk="1" hangingPunct="1">
+              <a:lnSpc>
+                <a:spcPct val="90000"/>
+              </a:lnSpc>
+              <a:spcBef>
+                <a:spcPts val="500"/>
+              </a:spcBef>
+              <a:buFont typeface="Arial" panose="020B0604020202020204" pitchFamily="34" charset="0"/>
+              <a:buChar char="•"/>
+              <a:defRPr sz="1800" kern="1200">
+                <a:solidFill>
+                  <a:schemeClr val="tx1"/>
+                </a:solidFill>
+                <a:latin typeface="+mn-lt"/>
+                <a:ea typeface="+mn-ea"/>
+                <a:cs typeface="+mn-cs"/>
+              </a:defRPr>
+            </a:lvl5pPr>
+            <a:lvl6pPr marL="2514600" indent="-228600" algn="l" defTabSz="914400" rtl="0" eaLnBrk="1" latinLnBrk="1" hangingPunct="1">
+              <a:lnSpc>
+                <a:spcPct val="90000"/>
+              </a:lnSpc>
+              <a:spcBef>
+                <a:spcPts val="500"/>
+              </a:spcBef>
+              <a:buFont typeface="Arial" panose="020B0604020202020204" pitchFamily="34" charset="0"/>
+              <a:buChar char="•"/>
+              <a:defRPr sz="1800" kern="1200">
+                <a:solidFill>
+                  <a:schemeClr val="tx1"/>
+                </a:solidFill>
+                <a:latin typeface="+mn-lt"/>
+                <a:ea typeface="+mn-ea"/>
+                <a:cs typeface="+mn-cs"/>
+              </a:defRPr>
+            </a:lvl6pPr>
+            <a:lvl7pPr marL="2971800" indent="-228600" algn="l" defTabSz="914400" rtl="0" eaLnBrk="1" latinLnBrk="1" hangingPunct="1">
+              <a:lnSpc>
+                <a:spcPct val="90000"/>
+              </a:lnSpc>
+              <a:spcBef>
+                <a:spcPts val="500"/>
+              </a:spcBef>
+              <a:buFont typeface="Arial" panose="020B0604020202020204" pitchFamily="34" charset="0"/>
+              <a:buChar char="•"/>
+              <a:defRPr sz="1800" kern="1200">
+                <a:solidFill>
+                  <a:schemeClr val="tx1"/>
+                </a:solidFill>
+                <a:latin typeface="+mn-lt"/>
+                <a:ea typeface="+mn-ea"/>
+                <a:cs typeface="+mn-cs"/>
+              </a:defRPr>
+            </a:lvl7pPr>
+            <a:lvl8pPr marL="3429000" indent="-228600" algn="l" defTabSz="914400" rtl="0" eaLnBrk="1" latinLnBrk="1" hangingPunct="1">
+              <a:lnSpc>
+                <a:spcPct val="90000"/>
+              </a:lnSpc>
+              <a:spcBef>
+                <a:spcPts val="500"/>
+              </a:spcBef>
+              <a:buFont typeface="Arial" panose="020B0604020202020204" pitchFamily="34" charset="0"/>
+              <a:buChar char="•"/>
+              <a:defRPr sz="1800" kern="1200">
+                <a:solidFill>
+                  <a:schemeClr val="tx1"/>
+                </a:solidFill>
+                <a:latin typeface="+mn-lt"/>
+                <a:ea typeface="+mn-ea"/>
+                <a:cs typeface="+mn-cs"/>
+              </a:defRPr>
+            </a:lvl8pPr>
+            <a:lvl9pPr marL="3886200" indent="-228600" algn="l" defTabSz="914400" rtl="0" eaLnBrk="1" latinLnBrk="1" hangingPunct="1">
+              <a:lnSpc>
+                <a:spcPct val="90000"/>
+              </a:lnSpc>
+              <a:spcBef>
+                <a:spcPts val="500"/>
+              </a:spcBef>
+              <a:buFont typeface="Arial" panose="020B0604020202020204" pitchFamily="34" charset="0"/>
+              <a:buChar char="•"/>
+              <a:defRPr sz="1800" kern="1200">
+                <a:solidFill>
+                  <a:schemeClr val="tx1"/>
+                </a:solidFill>
+                <a:latin typeface="+mn-lt"/>
+                <a:ea typeface="+mn-ea"/>
+                <a:cs typeface="+mn-cs"/>
+              </a:defRPr>
+            </a:lvl9pPr>
+          </a:lstStyle>
+          <a:p>
+            <a:pPr marL="0" indent="0">
+              <a:lnSpc>
+                <a:spcPct val="100000"/>
+              </a:lnSpc>
+              <a:buFont typeface="Arial" panose="020B0604020202020204" pitchFamily="34" charset="0"/>
+              <a:buNone/>
+            </a:pPr>
+            <a:r>
+              <a:rPr lang="ko-KR" altLang="en-US" sz="1400">
+                <a:solidFill>
+                  <a:schemeClr val="tx1">
+                    <a:lumMod val="65000"/>
+                    <a:lumOff val="35000"/>
+                  </a:schemeClr>
+                </a:solidFill>
+                <a:latin typeface="Noto Sans KR"/>
+              </a:rPr>
+              <a:t>잘못된 식습관으로 인한</a:t>
+            </a:r>
+            <a:endParaRPr lang="en-US" altLang="ko-KR" sz="1400">
+              <a:solidFill>
+                <a:schemeClr val="tx1">
+                  <a:lumMod val="65000"/>
+                  <a:lumOff val="35000"/>
+                </a:schemeClr>
+              </a:solidFill>
+              <a:latin typeface="Noto Sans KR"/>
+            </a:endParaRPr>
+          </a:p>
+          <a:p>
+            <a:pPr marL="0" indent="0">
+              <a:lnSpc>
+                <a:spcPct val="100000"/>
+              </a:lnSpc>
+              <a:buFont typeface="Arial" panose="020B0604020202020204" pitchFamily="34" charset="0"/>
+              <a:buNone/>
+            </a:pPr>
+            <a:r>
+              <a:rPr lang="ko-KR" altLang="en-US" sz="1600" b="1">
+                <a:latin typeface="Noto Sans KR"/>
+              </a:rPr>
+              <a:t>고콜레스테롤혈증 만성질환 유병률 증가</a:t>
+            </a:r>
+            <a:endParaRPr lang="ko-KR" altLang="en-US" sz="1400" b="1" dirty="0"/>
+          </a:p>
+        </p:txBody>
+      </p:sp>
+      <p:sp>
+        <p:nvSpPr>
+          <p:cNvPr id="4" name="직사각형 3">
+            <a:extLst>
+              <a:ext uri="{FF2B5EF4-FFF2-40B4-BE49-F238E27FC236}">
+                <a16:creationId xmlns:a16="http://schemas.microsoft.com/office/drawing/2014/main" id="{9BD01A12-581E-B7EB-1FA7-940AA8F5F3A2}"/>
               </a:ext>
             </a:extLst>
           </p:cNvPr>
@@ -3682,554 +4064,6 @@
       </p:sp>
       <p:sp>
         <p:nvSpPr>
-          <p:cNvPr id="5" name="제목 1">
-            <a:extLst>
-              <a:ext uri="{FF2B5EF4-FFF2-40B4-BE49-F238E27FC236}">
-                <a16:creationId xmlns:a16="http://schemas.microsoft.com/office/drawing/2014/main" id="{E6B21E77-88D1-0F37-CAD7-BE7EC7FC1682}"/>
-              </a:ext>
-            </a:extLst>
-          </p:cNvPr>
-          <p:cNvSpPr txBox="1">
-            <a:spLocks/>
-          </p:cNvSpPr>
-          <p:nvPr/>
-        </p:nvSpPr>
-        <p:spPr>
-          <a:xfrm>
-            <a:off x="603253" y="234000"/>
-            <a:ext cx="2883105" cy="946104"/>
-          </a:xfrm>
-          <a:prstGeom prst="rect">
-            <a:avLst/>
-          </a:prstGeom>
-        </p:spPr>
-        <p:txBody>
-          <a:bodyPr vert="horz" lIns="91440" tIns="45720" rIns="91440" bIns="45720" rtlCol="0" anchor="ctr">
-            <a:normAutofit/>
-          </a:bodyPr>
-          <a:lstStyle>
-            <a:lvl1pPr algn="l" defTabSz="914400" rtl="0" eaLnBrk="1" latinLnBrk="1" hangingPunct="1">
-              <a:lnSpc>
-                <a:spcPct val="90000"/>
-              </a:lnSpc>
-              <a:spcBef>
-                <a:spcPct val="0"/>
-              </a:spcBef>
-              <a:buNone/>
-              <a:defRPr sz="4400" kern="1200">
-                <a:solidFill>
-                  <a:schemeClr val="tx1"/>
-                </a:solidFill>
-                <a:latin typeface="+mj-lt"/>
-                <a:ea typeface="+mj-ea"/>
-                <a:cs typeface="+mj-cs"/>
-              </a:defRPr>
-            </a:lvl1pPr>
-          </a:lstStyle>
-          <a:p>
-            <a:r>
-              <a:rPr lang="ko-KR" altLang="en-US" sz="3200" b="1">
-                <a:solidFill>
-                  <a:schemeClr val="bg1"/>
-                </a:solidFill>
-              </a:rPr>
-              <a:t>화면 설계서</a:t>
-            </a:r>
-            <a:br>
-              <a:rPr lang="en-US" altLang="ko-KR" sz="3200" b="1"/>
-            </a:br>
-            <a:r>
-              <a:rPr lang="en-US" altLang="ko-KR" sz="1400" b="0" i="0">
-                <a:solidFill>
-                  <a:schemeClr val="bg1">
-                    <a:lumMod val="75000"/>
-                  </a:schemeClr>
-                </a:solidFill>
-                <a:effectLst/>
-                <a:latin typeface="Noto Sans KR"/>
-              </a:rPr>
-              <a:t>Wireframe</a:t>
-            </a:r>
-            <a:endParaRPr lang="ko-KR" altLang="en-US" sz="1400" b="1">
-              <a:solidFill>
-                <a:schemeClr val="bg1">
-                  <a:lumMod val="75000"/>
-                </a:schemeClr>
-              </a:solidFill>
-            </a:endParaRPr>
-          </a:p>
-        </p:txBody>
-      </p:sp>
-    </p:spTree>
-    <p:extLst>
-      <p:ext uri="{BB962C8B-B14F-4D97-AF65-F5344CB8AC3E}">
-        <p14:creationId xmlns:p14="http://schemas.microsoft.com/office/powerpoint/2010/main" val="2501084304"/>
-      </p:ext>
-    </p:extLst>
-  </p:cSld>
-  <p:clrMapOvr>
-    <a:masterClrMapping/>
-  </p:clrMapOvr>
-</p:sld>
-</file>
-
-<file path=ppt/slides/slide2.xml><?xml version="1.0" encoding="utf-8"?>
-<p:sld xmlns:a="http://schemas.openxmlformats.org/drawingml/2006/main" xmlns:r="http://schemas.openxmlformats.org/officeDocument/2006/relationships" xmlns:p="http://schemas.openxmlformats.org/presentationml/2006/main">
-  <p:cSld>
-    <p:spTree>
-      <p:nvGrpSpPr>
-        <p:cNvPr id="1" name=""/>
-        <p:cNvGrpSpPr/>
-        <p:nvPr/>
-      </p:nvGrpSpPr>
-      <p:grpSpPr>
-        <a:xfrm>
-          <a:off x="0" y="0"/>
-          <a:ext cx="0" cy="0"/>
-          <a:chOff x="0" y="0"/>
-          <a:chExt cx="0" cy="0"/>
-        </a:xfrm>
-      </p:grpSpPr>
-      <p:sp>
-        <p:nvSpPr>
-          <p:cNvPr id="3" name="내용 개체 틀 2">
-            <a:extLst>
-              <a:ext uri="{FF2B5EF4-FFF2-40B4-BE49-F238E27FC236}">
-                <a16:creationId xmlns:a16="http://schemas.microsoft.com/office/drawing/2014/main" id="{F3E0445D-6120-B7A6-8C93-5DFA859689ED}"/>
-              </a:ext>
-            </a:extLst>
-          </p:cNvPr>
-          <p:cNvSpPr>
-            <a:spLocks noGrp="1"/>
-          </p:cNvSpPr>
-          <p:nvPr>
-            <p:ph idx="1"/>
-          </p:nvPr>
-        </p:nvSpPr>
-        <p:spPr>
-          <a:xfrm>
-            <a:off x="304800" y="2319204"/>
-            <a:ext cx="4428000" cy="1180396"/>
-          </a:xfrm>
-        </p:spPr>
-        <p:txBody>
-          <a:bodyPr>
-            <a:normAutofit/>
-          </a:bodyPr>
-          <a:lstStyle/>
-          <a:p>
-            <a:pPr marL="0" indent="0">
-              <a:lnSpc>
-                <a:spcPct val="150000"/>
-              </a:lnSpc>
-              <a:buNone/>
-            </a:pPr>
-            <a:r>
-              <a:rPr lang="ko-KR" altLang="en-US" sz="1400" b="0" i="0" dirty="0">
-                <a:solidFill>
-                  <a:schemeClr val="tx1">
-                    <a:lumMod val="75000"/>
-                    <a:lumOff val="25000"/>
-                  </a:schemeClr>
-                </a:solidFill>
-                <a:effectLst/>
-                <a:latin typeface="Noto Sans KR"/>
-              </a:rPr>
-              <a:t>외식 및 가공식품 섭취로</a:t>
-            </a:r>
-            <a:r>
-              <a:rPr lang="ko-KR" altLang="en-US" sz="1400" b="1" i="0" dirty="0">
-                <a:solidFill>
-                  <a:schemeClr val="tx1">
-                    <a:lumMod val="75000"/>
-                    <a:lumOff val="25000"/>
-                  </a:schemeClr>
-                </a:solidFill>
-                <a:effectLst/>
-                <a:latin typeface="Noto Sans KR"/>
-              </a:rPr>
-              <a:t> </a:t>
-            </a:r>
-            <a:r>
-              <a:rPr lang="ko-KR" altLang="en-US" sz="1600" b="1" i="0" dirty="0">
-                <a:effectLst/>
-                <a:latin typeface="Noto Sans KR"/>
-              </a:rPr>
-              <a:t>지방</a:t>
-            </a:r>
-            <a:r>
-              <a:rPr lang="en-US" altLang="ko-KR" sz="1600" b="1" i="0" dirty="0">
-                <a:effectLst/>
-                <a:latin typeface="Noto Sans KR"/>
-              </a:rPr>
-              <a:t>, </a:t>
-            </a:r>
-            <a:r>
-              <a:rPr lang="ko-KR" altLang="en-US" sz="1600" b="1" i="0" dirty="0">
-                <a:effectLst/>
-                <a:latin typeface="Noto Sans KR"/>
-              </a:rPr>
-              <a:t>당류</a:t>
-            </a:r>
-            <a:r>
-              <a:rPr lang="en-US" altLang="ko-KR" sz="1600" b="1" i="0" dirty="0">
-                <a:effectLst/>
-                <a:latin typeface="Noto Sans KR"/>
-              </a:rPr>
-              <a:t>, </a:t>
-            </a:r>
-            <a:r>
-              <a:rPr lang="ko-KR" altLang="en-US" sz="1600" b="1" i="0" dirty="0">
-                <a:effectLst/>
-                <a:latin typeface="Noto Sans KR"/>
-              </a:rPr>
-              <a:t>나트륨의 과잉 섭취</a:t>
-            </a:r>
-            <a:r>
-              <a:rPr lang="ko-KR" altLang="en-US" sz="1400" i="0" dirty="0">
-                <a:solidFill>
-                  <a:schemeClr val="tx1">
-                    <a:lumMod val="75000"/>
-                    <a:lumOff val="25000"/>
-                  </a:schemeClr>
-                </a:solidFill>
-                <a:effectLst/>
-                <a:latin typeface="Noto Sans KR"/>
-              </a:rPr>
-              <a:t>가</a:t>
-            </a:r>
-            <a:r>
-              <a:rPr lang="ko-KR" altLang="en-US" sz="1400" b="1" i="0" dirty="0">
-                <a:solidFill>
-                  <a:schemeClr val="tx1">
-                    <a:lumMod val="75000"/>
-                    <a:lumOff val="25000"/>
-                  </a:schemeClr>
-                </a:solidFill>
-                <a:effectLst/>
-                <a:latin typeface="Noto Sans KR"/>
-              </a:rPr>
-              <a:t> </a:t>
-            </a:r>
-            <a:r>
-              <a:rPr lang="ko-KR" altLang="en-US" sz="1400" b="0" i="0" dirty="0">
-                <a:solidFill>
-                  <a:schemeClr val="tx1">
-                    <a:lumMod val="75000"/>
-                    <a:lumOff val="25000"/>
-                  </a:schemeClr>
-                </a:solidFill>
-                <a:effectLst/>
-                <a:latin typeface="Noto Sans KR"/>
-              </a:rPr>
-              <a:t>일상화되어 심각한 영양 불균형 초래</a:t>
-            </a:r>
-            <a:endParaRPr lang="ko-KR" altLang="en-US" sz="1400" dirty="0">
-              <a:solidFill>
-                <a:schemeClr val="tx1">
-                  <a:lumMod val="75000"/>
-                  <a:lumOff val="25000"/>
-                </a:schemeClr>
-              </a:solidFill>
-            </a:endParaRPr>
-          </a:p>
-        </p:txBody>
-      </p:sp>
-      <p:sp>
-        <p:nvSpPr>
-          <p:cNvPr id="12" name="내용 개체 틀 2">
-            <a:extLst>
-              <a:ext uri="{FF2B5EF4-FFF2-40B4-BE49-F238E27FC236}">
-                <a16:creationId xmlns:a16="http://schemas.microsoft.com/office/drawing/2014/main" id="{6F9FC355-108D-229C-8C47-754079D811C4}"/>
-              </a:ext>
-            </a:extLst>
-          </p:cNvPr>
-          <p:cNvSpPr txBox="1">
-            <a:spLocks/>
-          </p:cNvSpPr>
-          <p:nvPr/>
-        </p:nvSpPr>
-        <p:spPr>
-          <a:xfrm>
-            <a:off x="304800" y="4638409"/>
-            <a:ext cx="4428000" cy="1180396"/>
-          </a:xfrm>
-          <a:prstGeom prst="rect">
-            <a:avLst/>
-          </a:prstGeom>
-        </p:spPr>
-        <p:txBody>
-          <a:bodyPr vert="horz" lIns="91440" tIns="45720" rIns="91440" bIns="45720" rtlCol="0">
-            <a:normAutofit/>
-          </a:bodyPr>
-          <a:lstStyle>
-            <a:lvl1pPr marL="228600" indent="-228600" algn="l" defTabSz="914400" rtl="0" eaLnBrk="1" latinLnBrk="1" hangingPunct="1">
-              <a:lnSpc>
-                <a:spcPct val="90000"/>
-              </a:lnSpc>
-              <a:spcBef>
-                <a:spcPts val="1000"/>
-              </a:spcBef>
-              <a:buFont typeface="Arial" panose="020B0604020202020204" pitchFamily="34" charset="0"/>
-              <a:buChar char="•"/>
-              <a:defRPr sz="2800" kern="1200">
-                <a:solidFill>
-                  <a:schemeClr val="tx1"/>
-                </a:solidFill>
-                <a:latin typeface="+mn-lt"/>
-                <a:ea typeface="+mn-ea"/>
-                <a:cs typeface="+mn-cs"/>
-              </a:defRPr>
-            </a:lvl1pPr>
-            <a:lvl2pPr marL="685800" indent="-228600" algn="l" defTabSz="914400" rtl="0" eaLnBrk="1" latinLnBrk="1" hangingPunct="1">
-              <a:lnSpc>
-                <a:spcPct val="90000"/>
-              </a:lnSpc>
-              <a:spcBef>
-                <a:spcPts val="500"/>
-              </a:spcBef>
-              <a:buFont typeface="Arial" panose="020B0604020202020204" pitchFamily="34" charset="0"/>
-              <a:buChar char="•"/>
-              <a:defRPr sz="2400" kern="1200">
-                <a:solidFill>
-                  <a:schemeClr val="tx1"/>
-                </a:solidFill>
-                <a:latin typeface="+mn-lt"/>
-                <a:ea typeface="+mn-ea"/>
-                <a:cs typeface="+mn-cs"/>
-              </a:defRPr>
-            </a:lvl2pPr>
-            <a:lvl3pPr marL="1143000" indent="-228600" algn="l" defTabSz="914400" rtl="0" eaLnBrk="1" latinLnBrk="1" hangingPunct="1">
-              <a:lnSpc>
-                <a:spcPct val="90000"/>
-              </a:lnSpc>
-              <a:spcBef>
-                <a:spcPts val="500"/>
-              </a:spcBef>
-              <a:buFont typeface="Arial" panose="020B0604020202020204" pitchFamily="34" charset="0"/>
-              <a:buChar char="•"/>
-              <a:defRPr sz="2000" kern="1200">
-                <a:solidFill>
-                  <a:schemeClr val="tx1"/>
-                </a:solidFill>
-                <a:latin typeface="+mn-lt"/>
-                <a:ea typeface="+mn-ea"/>
-                <a:cs typeface="+mn-cs"/>
-              </a:defRPr>
-            </a:lvl3pPr>
-            <a:lvl4pPr marL="1600200" indent="-228600" algn="l" defTabSz="914400" rtl="0" eaLnBrk="1" latinLnBrk="1" hangingPunct="1">
-              <a:lnSpc>
-                <a:spcPct val="90000"/>
-              </a:lnSpc>
-              <a:spcBef>
-                <a:spcPts val="500"/>
-              </a:spcBef>
-              <a:buFont typeface="Arial" panose="020B0604020202020204" pitchFamily="34" charset="0"/>
-              <a:buChar char="•"/>
-              <a:defRPr sz="1800" kern="1200">
-                <a:solidFill>
-                  <a:schemeClr val="tx1"/>
-                </a:solidFill>
-                <a:latin typeface="+mn-lt"/>
-                <a:ea typeface="+mn-ea"/>
-                <a:cs typeface="+mn-cs"/>
-              </a:defRPr>
-            </a:lvl4pPr>
-            <a:lvl5pPr marL="2057400" indent="-228600" algn="l" defTabSz="914400" rtl="0" eaLnBrk="1" latinLnBrk="1" hangingPunct="1">
-              <a:lnSpc>
-                <a:spcPct val="90000"/>
-              </a:lnSpc>
-              <a:spcBef>
-                <a:spcPts val="500"/>
-              </a:spcBef>
-              <a:buFont typeface="Arial" panose="020B0604020202020204" pitchFamily="34" charset="0"/>
-              <a:buChar char="•"/>
-              <a:defRPr sz="1800" kern="1200">
-                <a:solidFill>
-                  <a:schemeClr val="tx1"/>
-                </a:solidFill>
-                <a:latin typeface="+mn-lt"/>
-                <a:ea typeface="+mn-ea"/>
-                <a:cs typeface="+mn-cs"/>
-              </a:defRPr>
-            </a:lvl5pPr>
-            <a:lvl6pPr marL="2514600" indent="-228600" algn="l" defTabSz="914400" rtl="0" eaLnBrk="1" latinLnBrk="1" hangingPunct="1">
-              <a:lnSpc>
-                <a:spcPct val="90000"/>
-              </a:lnSpc>
-              <a:spcBef>
-                <a:spcPts val="500"/>
-              </a:spcBef>
-              <a:buFont typeface="Arial" panose="020B0604020202020204" pitchFamily="34" charset="0"/>
-              <a:buChar char="•"/>
-              <a:defRPr sz="1800" kern="1200">
-                <a:solidFill>
-                  <a:schemeClr val="tx1"/>
-                </a:solidFill>
-                <a:latin typeface="+mn-lt"/>
-                <a:ea typeface="+mn-ea"/>
-                <a:cs typeface="+mn-cs"/>
-              </a:defRPr>
-            </a:lvl6pPr>
-            <a:lvl7pPr marL="2971800" indent="-228600" algn="l" defTabSz="914400" rtl="0" eaLnBrk="1" latinLnBrk="1" hangingPunct="1">
-              <a:lnSpc>
-                <a:spcPct val="90000"/>
-              </a:lnSpc>
-              <a:spcBef>
-                <a:spcPts val="500"/>
-              </a:spcBef>
-              <a:buFont typeface="Arial" panose="020B0604020202020204" pitchFamily="34" charset="0"/>
-              <a:buChar char="•"/>
-              <a:defRPr sz="1800" kern="1200">
-                <a:solidFill>
-                  <a:schemeClr val="tx1"/>
-                </a:solidFill>
-                <a:latin typeface="+mn-lt"/>
-                <a:ea typeface="+mn-ea"/>
-                <a:cs typeface="+mn-cs"/>
-              </a:defRPr>
-            </a:lvl7pPr>
-            <a:lvl8pPr marL="3429000" indent="-228600" algn="l" defTabSz="914400" rtl="0" eaLnBrk="1" latinLnBrk="1" hangingPunct="1">
-              <a:lnSpc>
-                <a:spcPct val="90000"/>
-              </a:lnSpc>
-              <a:spcBef>
-                <a:spcPts val="500"/>
-              </a:spcBef>
-              <a:buFont typeface="Arial" panose="020B0604020202020204" pitchFamily="34" charset="0"/>
-              <a:buChar char="•"/>
-              <a:defRPr sz="1800" kern="1200">
-                <a:solidFill>
-                  <a:schemeClr val="tx1"/>
-                </a:solidFill>
-                <a:latin typeface="+mn-lt"/>
-                <a:ea typeface="+mn-ea"/>
-                <a:cs typeface="+mn-cs"/>
-              </a:defRPr>
-            </a:lvl8pPr>
-            <a:lvl9pPr marL="3886200" indent="-228600" algn="l" defTabSz="914400" rtl="0" eaLnBrk="1" latinLnBrk="1" hangingPunct="1">
-              <a:lnSpc>
-                <a:spcPct val="90000"/>
-              </a:lnSpc>
-              <a:spcBef>
-                <a:spcPts val="500"/>
-              </a:spcBef>
-              <a:buFont typeface="Arial" panose="020B0604020202020204" pitchFamily="34" charset="0"/>
-              <a:buChar char="•"/>
-              <a:defRPr sz="1800" kern="1200">
-                <a:solidFill>
-                  <a:schemeClr val="tx1"/>
-                </a:solidFill>
-                <a:latin typeface="+mn-lt"/>
-                <a:ea typeface="+mn-ea"/>
-                <a:cs typeface="+mn-cs"/>
-              </a:defRPr>
-            </a:lvl9pPr>
-          </a:lstStyle>
-          <a:p>
-            <a:pPr marL="0" indent="0">
-              <a:lnSpc>
-                <a:spcPct val="150000"/>
-              </a:lnSpc>
-              <a:buFont typeface="Arial" panose="020B0604020202020204" pitchFamily="34" charset="0"/>
-              <a:buNone/>
-            </a:pPr>
-            <a:r>
-              <a:rPr lang="ko-KR" altLang="en-US" sz="1400" dirty="0">
-                <a:solidFill>
-                  <a:schemeClr val="tx1">
-                    <a:lumMod val="75000"/>
-                    <a:lumOff val="25000"/>
-                  </a:schemeClr>
-                </a:solidFill>
-                <a:latin typeface="Noto Sans KR"/>
-              </a:rPr>
-              <a:t>잘못된 식습관으로 인해 </a:t>
-            </a:r>
-            <a:r>
-              <a:rPr lang="ko-KR" altLang="en-US" sz="1400" b="1" dirty="0" err="1">
-                <a:latin typeface="Noto Sans KR"/>
-              </a:rPr>
-              <a:t>고콜레스테롤혈증</a:t>
-            </a:r>
-            <a:r>
-              <a:rPr lang="ko-KR" altLang="en-US" sz="1400" dirty="0">
-                <a:solidFill>
-                  <a:schemeClr val="tx1">
-                    <a:lumMod val="75000"/>
-                    <a:lumOff val="25000"/>
-                  </a:schemeClr>
-                </a:solidFill>
-                <a:latin typeface="Noto Sans KR"/>
-              </a:rPr>
-              <a:t> 만성질환 유병률 증가</a:t>
-            </a:r>
-            <a:endParaRPr lang="ko-KR" altLang="en-US" sz="1400" dirty="0">
-              <a:solidFill>
-                <a:schemeClr val="tx1">
-                  <a:lumMod val="75000"/>
-                  <a:lumOff val="25000"/>
-                </a:schemeClr>
-              </a:solidFill>
-            </a:endParaRPr>
-          </a:p>
-        </p:txBody>
-      </p:sp>
-      <p:sp>
-        <p:nvSpPr>
-          <p:cNvPr id="4" name="직사각형 3">
-            <a:extLst>
-              <a:ext uri="{FF2B5EF4-FFF2-40B4-BE49-F238E27FC236}">
-                <a16:creationId xmlns:a16="http://schemas.microsoft.com/office/drawing/2014/main" id="{9BD01A12-581E-B7EB-1FA7-940AA8F5F3A2}"/>
-              </a:ext>
-            </a:extLst>
-          </p:cNvPr>
-          <p:cNvSpPr/>
-          <p:nvPr/>
-        </p:nvSpPr>
-        <p:spPr>
-          <a:xfrm>
-            <a:off x="0" y="0"/>
-            <a:ext cx="12192000" cy="1180396"/>
-          </a:xfrm>
-          <a:prstGeom prst="rect">
-            <a:avLst/>
-          </a:prstGeom>
-          <a:solidFill>
-            <a:schemeClr val="dk1">
-              <a:alpha val="80000"/>
-            </a:schemeClr>
-          </a:solidFill>
-          <a:ln>
-            <a:noFill/>
-          </a:ln>
-        </p:spPr>
-        <p:style>
-          <a:lnRef idx="2">
-            <a:schemeClr val="dk1">
-              <a:shade val="15000"/>
-            </a:schemeClr>
-          </a:lnRef>
-          <a:fillRef idx="1">
-            <a:schemeClr val="dk1"/>
-          </a:fillRef>
-          <a:effectRef idx="0">
-            <a:schemeClr val="dk1"/>
-          </a:effectRef>
-          <a:fontRef idx="minor">
-            <a:schemeClr val="lt1"/>
-          </a:fontRef>
-        </p:style>
-        <p:txBody>
-          <a:bodyPr rtlCol="0" anchor="ctr"/>
-          <a:lstStyle/>
-          <a:p>
-            <a:endParaRPr lang="ko-KR" altLang="en-US"/>
-          </a:p>
-        </p:txBody>
-      </p:sp>
-      <p:sp>
-        <p:nvSpPr>
           <p:cNvPr id="2" name="제목 1">
             <a:extLst>
               <a:ext uri="{FF2B5EF4-FFF2-40B4-BE49-F238E27FC236}">
@@ -4318,7 +4152,7 @@
         </p:blipFill>
         <p:spPr bwMode="auto">
           <a:xfrm rot="5400000">
-            <a:off x="2320800" y="3854315"/>
+            <a:off x="2414571" y="3656315"/>
             <a:ext cx="396000" cy="396000"/>
           </a:xfrm>
           <a:prstGeom prst="rect">
@@ -4382,188 +4216,150 @@
           </a:fontRef>
         </p:style>
       </p:cxnSp>
-      <p:sp>
-        <p:nvSpPr>
-          <p:cNvPr id="5" name="TextBox 4">
+      <p:pic>
+        <p:nvPicPr>
+          <p:cNvPr id="7" name="그림 6" descr="텍스트, 폰트, 스크린샷, 라인이(가) 표시된 사진&#10;&#10;AI가 생성한 콘텐츠는 부정확할 수 있습니다.">
             <a:extLst>
               <a:ext uri="{FF2B5EF4-FFF2-40B4-BE49-F238E27FC236}">
-                <a16:creationId xmlns:a16="http://schemas.microsoft.com/office/drawing/2014/main" id="{84A4700A-5957-3AE6-6B83-8230CE3053BF}"/>
+                <a16:creationId xmlns:a16="http://schemas.microsoft.com/office/drawing/2014/main" id="{B5911AD8-7656-D881-A124-7493626DDB31}"/>
               </a:ext>
             </a:extLst>
           </p:cNvPr>
-          <p:cNvSpPr txBox="1"/>
+          <p:cNvPicPr>
+            <a:picLocks noChangeAspect="1"/>
+          </p:cNvPicPr>
           <p:nvPr/>
-        </p:nvSpPr>
+        </p:nvPicPr>
+        <p:blipFill>
+          <a:blip r:embed="rId3">
+            <a:extLst>
+              <a:ext uri="{28A0092B-C50C-407E-A947-70E740481C1C}">
+                <a14:useLocalDpi xmlns:a14="http://schemas.microsoft.com/office/drawing/2010/main" val="0"/>
+              </a:ext>
+            </a:extLst>
+          </a:blip>
+          <a:stretch>
+            <a:fillRect/>
+          </a:stretch>
+        </p:blipFill>
         <p:spPr>
           <a:xfrm>
-            <a:off x="5364480" y="1741714"/>
-            <a:ext cx="6708888" cy="1200329"/>
+            <a:off x="5674884" y="5468106"/>
+            <a:ext cx="5968686" cy="1193737"/>
           </a:xfrm>
           <a:prstGeom prst="rect">
             <a:avLst/>
           </a:prstGeom>
-          <a:noFill/>
         </p:spPr>
-        <p:txBody>
-          <a:bodyPr wrap="none" rtlCol="0">
-            <a:spAutoFit/>
-          </a:bodyPr>
-          <a:lstStyle/>
-          <a:p>
-            <a:r>
-              <a:rPr lang="ko-KR" altLang="en-US" sz="1800" dirty="0">
-                <a:effectLst/>
-                <a:latin typeface="Malgun Gothic" panose="020B0503020000020004" pitchFamily="50" charset="-127"/>
-                <a:ea typeface="Malgun Gothic" panose="020B0503020000020004" pitchFamily="50" charset="-127"/>
-              </a:rPr>
-              <a:t>기획 의도 근거자료 영역 확대하고 </a:t>
-            </a:r>
-            <a:r>
-              <a:rPr lang="en-US" altLang="ko-KR" sz="1800" dirty="0">
-                <a:effectLst/>
-                <a:latin typeface="Malgun Gothic" panose="020B0503020000020004" pitchFamily="50" charset="-127"/>
-                <a:ea typeface="Malgun Gothic" panose="020B0503020000020004" pitchFamily="50" charset="-127"/>
-              </a:rPr>
-              <a:t>4</a:t>
-            </a:r>
-            <a:r>
-              <a:rPr lang="ko-KR" altLang="en-US" sz="1800" dirty="0">
-                <a:effectLst/>
-                <a:latin typeface="Malgun Gothic" panose="020B0503020000020004" pitchFamily="50" charset="-127"/>
-                <a:ea typeface="Malgun Gothic" panose="020B0503020000020004" pitchFamily="50" charset="-127"/>
-              </a:rPr>
-              <a:t>가지 흐름으로 진행</a:t>
-            </a:r>
-            <a:br>
-              <a:rPr lang="ko-KR" altLang="en-US" sz="1800" dirty="0">
-                <a:effectLst/>
-                <a:latin typeface="Malgun Gothic" panose="020B0503020000020004" pitchFamily="50" charset="-127"/>
-                <a:ea typeface="Malgun Gothic" panose="020B0503020000020004" pitchFamily="50" charset="-127"/>
-              </a:rPr>
-            </a:br>
-            <a:r>
-              <a:rPr lang="ko-KR" altLang="en-US" sz="1800" dirty="0">
-                <a:effectLst/>
-                <a:latin typeface="Malgun Gothic" panose="020B0503020000020004" pitchFamily="50" charset="-127"/>
-                <a:ea typeface="Malgun Gothic" panose="020B0503020000020004" pitchFamily="50" charset="-127"/>
-              </a:rPr>
-              <a:t>외식</a:t>
-            </a:r>
-            <a:r>
-              <a:rPr lang="en-US" altLang="ko-KR" sz="1800" dirty="0">
-                <a:effectLst/>
-                <a:latin typeface="Malgun Gothic" panose="020B0503020000020004" pitchFamily="50" charset="-127"/>
-                <a:ea typeface="Malgun Gothic" panose="020B0503020000020004" pitchFamily="50" charset="-127"/>
-              </a:rPr>
-              <a:t>, </a:t>
-            </a:r>
-            <a:r>
-              <a:rPr lang="ko-KR" altLang="en-US" sz="1800" dirty="0">
-                <a:effectLst/>
-                <a:latin typeface="Malgun Gothic" panose="020B0503020000020004" pitchFamily="50" charset="-127"/>
-                <a:ea typeface="Malgun Gothic" panose="020B0503020000020004" pitchFamily="50" charset="-127"/>
-              </a:rPr>
-              <a:t>가공식품 섭취 증가 </a:t>
-            </a:r>
-            <a:r>
-              <a:rPr lang="en-US" altLang="ko-KR" sz="1800" dirty="0">
-                <a:effectLst/>
-                <a:latin typeface="Malgun Gothic" panose="020B0503020000020004" pitchFamily="50" charset="-127"/>
-                <a:ea typeface="Malgun Gothic" panose="020B0503020000020004" pitchFamily="50" charset="-127"/>
-              </a:rPr>
-              <a:t>- </a:t>
-            </a:r>
-            <a:r>
-              <a:rPr lang="ko-KR" altLang="en-US" sz="1800" dirty="0">
-                <a:effectLst/>
-                <a:latin typeface="Malgun Gothic" panose="020B0503020000020004" pitchFamily="50" charset="-127"/>
-                <a:ea typeface="Malgun Gothic" panose="020B0503020000020004" pitchFamily="50" charset="-127"/>
-              </a:rPr>
-              <a:t>지방</a:t>
-            </a:r>
-            <a:r>
-              <a:rPr lang="en-US" altLang="ko-KR" sz="1800" dirty="0">
-                <a:effectLst/>
-                <a:latin typeface="Malgun Gothic" panose="020B0503020000020004" pitchFamily="50" charset="-127"/>
-                <a:ea typeface="Malgun Gothic" panose="020B0503020000020004" pitchFamily="50" charset="-127"/>
-              </a:rPr>
-              <a:t>, </a:t>
-            </a:r>
-            <a:r>
-              <a:rPr lang="ko-KR" altLang="en-US" sz="1800" dirty="0">
-                <a:effectLst/>
-                <a:latin typeface="Malgun Gothic" panose="020B0503020000020004" pitchFamily="50" charset="-127"/>
-                <a:ea typeface="Malgun Gothic" panose="020B0503020000020004" pitchFamily="50" charset="-127"/>
-              </a:rPr>
-              <a:t>나트륨</a:t>
-            </a:r>
-            <a:r>
-              <a:rPr lang="en-US" altLang="ko-KR" sz="1800" dirty="0">
-                <a:effectLst/>
-                <a:latin typeface="Malgun Gothic" panose="020B0503020000020004" pitchFamily="50" charset="-127"/>
-                <a:ea typeface="Malgun Gothic" panose="020B0503020000020004" pitchFamily="50" charset="-127"/>
-              </a:rPr>
-              <a:t>, </a:t>
-            </a:r>
-            <a:r>
-              <a:rPr lang="ko-KR" altLang="en-US" sz="1800" dirty="0">
-                <a:effectLst/>
-                <a:latin typeface="Malgun Gothic" panose="020B0503020000020004" pitchFamily="50" charset="-127"/>
-                <a:ea typeface="Malgun Gothic" panose="020B0503020000020004" pitchFamily="50" charset="-127"/>
-              </a:rPr>
-              <a:t>당류 과잉섭취 일상화</a:t>
-            </a:r>
-            <a:endParaRPr lang="en-US" altLang="ko-KR" sz="1800" dirty="0">
-              <a:effectLst/>
-              <a:latin typeface="Malgun Gothic" panose="020B0503020000020004" pitchFamily="50" charset="-127"/>
-              <a:ea typeface="Malgun Gothic" panose="020B0503020000020004" pitchFamily="50" charset="-127"/>
-            </a:endParaRPr>
-          </a:p>
-          <a:p>
-            <a:r>
-              <a:rPr lang="ko-KR" altLang="en-US" sz="1800" dirty="0">
-                <a:effectLst/>
-                <a:latin typeface="Arial" panose="020B0604020202020204" pitchFamily="34" charset="0"/>
-              </a:rPr>
-              <a:t>잘못된 식습관으로 만성질환 유병률 증가 </a:t>
-            </a:r>
-            <a:endParaRPr lang="en-US" altLang="ko-KR" sz="1800" dirty="0">
-              <a:effectLst/>
-              <a:latin typeface="Arial" panose="020B0604020202020204" pitchFamily="34" charset="0"/>
-            </a:endParaRPr>
-          </a:p>
-          <a:p>
-            <a:r>
-              <a:rPr lang="en-US" altLang="ko-KR" sz="1800" dirty="0">
-                <a:effectLst/>
-                <a:latin typeface="Arial" panose="020B0604020202020204" pitchFamily="34" charset="0"/>
-              </a:rPr>
-              <a:t>– </a:t>
-            </a:r>
-            <a:r>
-              <a:rPr lang="ko-KR" altLang="en-US" sz="1800" dirty="0">
-                <a:effectLst/>
-                <a:latin typeface="Arial" panose="020B0604020202020204" pitchFamily="34" charset="0"/>
-              </a:rPr>
-              <a:t>건강검진 주기가 길어서 제때 체크 못함 </a:t>
-            </a:r>
-            <a:r>
-              <a:rPr lang="en-US" altLang="ko-KR" sz="1800" dirty="0">
-                <a:effectLst/>
-                <a:latin typeface="Arial" panose="020B0604020202020204" pitchFamily="34" charset="0"/>
-              </a:rPr>
-              <a:t>– </a:t>
-            </a:r>
-            <a:r>
-              <a:rPr lang="ko-KR" altLang="en-US" sz="1800" dirty="0">
-                <a:effectLst/>
-                <a:latin typeface="Arial" panose="020B0604020202020204" pitchFamily="34" charset="0"/>
-              </a:rPr>
-              <a:t>개인별 맞춤 가이드</a:t>
-            </a:r>
-          </a:p>
-        </p:txBody>
-      </p:sp>
+      </p:pic>
+      <p:pic>
+        <p:nvPicPr>
+          <p:cNvPr id="9" name="그림 8" descr="텍스트, 스크린샷이(가) 표시된 사진&#10;&#10;AI가 생성한 콘텐츠는 부정확할 수 있습니다.">
+            <a:extLst>
+              <a:ext uri="{FF2B5EF4-FFF2-40B4-BE49-F238E27FC236}">
+                <a16:creationId xmlns:a16="http://schemas.microsoft.com/office/drawing/2014/main" id="{3591396A-9BEA-DDB6-E92C-B999E1AB0E46}"/>
+              </a:ext>
+            </a:extLst>
+          </p:cNvPr>
+          <p:cNvPicPr>
+            <a:picLocks noChangeAspect="1"/>
+          </p:cNvPicPr>
+          <p:nvPr/>
+        </p:nvPicPr>
+        <p:blipFill>
+          <a:blip r:embed="rId4">
+            <a:extLst>
+              <a:ext uri="{28A0092B-C50C-407E-A947-70E740481C1C}">
+                <a14:useLocalDpi xmlns:a14="http://schemas.microsoft.com/office/drawing/2010/main" val="0"/>
+              </a:ext>
+            </a:extLst>
+          </a:blip>
+          <a:stretch>
+            <a:fillRect/>
+          </a:stretch>
+        </p:blipFill>
+        <p:spPr>
+          <a:xfrm>
+            <a:off x="5674884" y="3690022"/>
+            <a:ext cx="5974567" cy="1752540"/>
+          </a:xfrm>
+          <a:prstGeom prst="rect">
+            <a:avLst/>
+          </a:prstGeom>
+        </p:spPr>
+      </p:pic>
+      <p:pic>
+        <p:nvPicPr>
+          <p:cNvPr id="11" name="그림 10" descr="텍스트, 스크린샷, 폰트, 라인이(가) 표시된 사진&#10;&#10;AI가 생성한 콘텐츠는 부정확할 수 있습니다.">
+            <a:extLst>
+              <a:ext uri="{FF2B5EF4-FFF2-40B4-BE49-F238E27FC236}">
+                <a16:creationId xmlns:a16="http://schemas.microsoft.com/office/drawing/2014/main" id="{14A37FBE-1B79-0C8E-CCFC-8E9EDC22DC2D}"/>
+              </a:ext>
+            </a:extLst>
+          </p:cNvPr>
+          <p:cNvPicPr>
+            <a:picLocks noChangeAspect="1"/>
+          </p:cNvPicPr>
+          <p:nvPr/>
+        </p:nvPicPr>
+        <p:blipFill>
+          <a:blip r:embed="rId5">
+            <a:extLst>
+              <a:ext uri="{28A0092B-C50C-407E-A947-70E740481C1C}">
+                <a14:useLocalDpi xmlns:a14="http://schemas.microsoft.com/office/drawing/2010/main" val="0"/>
+              </a:ext>
+            </a:extLst>
+          </a:blip>
+          <a:stretch>
+            <a:fillRect/>
+          </a:stretch>
+        </p:blipFill>
+        <p:spPr>
+          <a:xfrm>
+            <a:off x="5674884" y="2576966"/>
+            <a:ext cx="5974566" cy="1193737"/>
+          </a:xfrm>
+          <a:prstGeom prst="rect">
+            <a:avLst/>
+          </a:prstGeom>
+        </p:spPr>
+      </p:pic>
+      <p:pic>
+        <p:nvPicPr>
+          <p:cNvPr id="19" name="그림 18" descr="텍스트, 폰트, 스크린샷, 라인이(가) 표시된 사진&#10;&#10;AI가 생성한 콘텐츠는 부정확할 수 있습니다.">
+            <a:extLst>
+              <a:ext uri="{FF2B5EF4-FFF2-40B4-BE49-F238E27FC236}">
+                <a16:creationId xmlns:a16="http://schemas.microsoft.com/office/drawing/2014/main" id="{107E56B8-2817-C9FE-115E-B032A85950C0}"/>
+              </a:ext>
+            </a:extLst>
+          </p:cNvPr>
+          <p:cNvPicPr>
+            <a:picLocks noChangeAspect="1"/>
+          </p:cNvPicPr>
+          <p:nvPr/>
+        </p:nvPicPr>
+        <p:blipFill>
+          <a:blip r:embed="rId6">
+            <a:extLst>
+              <a:ext uri="{28A0092B-C50C-407E-A947-70E740481C1C}">
+                <a14:useLocalDpi xmlns:a14="http://schemas.microsoft.com/office/drawing/2010/main" val="0"/>
+              </a:ext>
+            </a:extLst>
+          </a:blip>
+          <a:stretch>
+            <a:fillRect/>
+          </a:stretch>
+        </p:blipFill>
+        <p:spPr>
+          <a:xfrm>
+            <a:off x="5674885" y="1492335"/>
+            <a:ext cx="5974565" cy="1084631"/>
+          </a:xfrm>
+          <a:prstGeom prst="rect">
+            <a:avLst/>
+          </a:prstGeom>
+        </p:spPr>
+      </p:pic>
     </p:spTree>
     <p:extLst>
       <p:ext uri="{BB962C8B-B14F-4D97-AF65-F5344CB8AC3E}">
@@ -4612,8 +4408,8 @@
         </p:nvSpPr>
         <p:spPr>
           <a:xfrm>
-            <a:off x="1313243" y="2248604"/>
-            <a:ext cx="4889983" cy="1180396"/>
+            <a:off x="917780" y="2331482"/>
+            <a:ext cx="3389582" cy="798000"/>
           </a:xfrm>
         </p:spPr>
         <p:txBody>
@@ -4622,128 +4418,110 @@
           </a:bodyPr>
           <a:lstStyle/>
           <a:p>
-            <a:pPr marL="0" indent="0" algn="l">
+            <a:pPr marL="0" indent="0">
               <a:lnSpc>
                 <a:spcPct val="100000"/>
               </a:lnSpc>
               <a:buNone/>
             </a:pPr>
             <a:r>
-              <a:rPr lang="ko-KR" altLang="en-US" sz="1800" b="1" i="0" dirty="0">
+              <a:rPr lang="ko-KR" altLang="en-US" sz="1400" b="0" i="0">
+                <a:solidFill>
+                  <a:schemeClr val="tx1">
+                    <a:lumMod val="65000"/>
+                    <a:lumOff val="35000"/>
+                  </a:schemeClr>
+                </a:solidFill>
                 <a:effectLst/>
                 <a:latin typeface="Noto Sans KR"/>
               </a:rPr>
-              <a:t>현대인 식생활 문제 심화</a:t>
+              <a:t>이상지질혈증 검사주기 </a:t>
+            </a:r>
+            <a:r>
+              <a:rPr lang="en-US" altLang="ko-KR" sz="1400" b="0" i="0">
+                <a:solidFill>
+                  <a:schemeClr val="tx1">
+                    <a:lumMod val="65000"/>
+                    <a:lumOff val="35000"/>
+                  </a:schemeClr>
+                </a:solidFill>
+                <a:effectLst/>
+                <a:latin typeface="Noto Sans KR"/>
+              </a:rPr>
+              <a:t>4</a:t>
+            </a:r>
+            <a:r>
+              <a:rPr lang="ko-KR" altLang="en-US" sz="1400" b="0" i="0">
+                <a:solidFill>
+                  <a:schemeClr val="tx1">
+                    <a:lumMod val="65000"/>
+                    <a:lumOff val="35000"/>
+                  </a:schemeClr>
+                </a:solidFill>
+                <a:effectLst/>
+                <a:latin typeface="Noto Sans KR"/>
+              </a:rPr>
+              <a:t>년</a:t>
+            </a:r>
+            <a:r>
+              <a:rPr lang="en-US" altLang="ko-KR" sz="1400" b="0" i="0">
+                <a:solidFill>
+                  <a:schemeClr val="tx1">
+                    <a:lumMod val="65000"/>
+                    <a:lumOff val="35000"/>
+                  </a:schemeClr>
+                </a:solidFill>
+                <a:effectLst/>
+                <a:latin typeface="Noto Sans KR"/>
+              </a:rPr>
+              <a:t>(2018</a:t>
+            </a:r>
+            <a:r>
+              <a:rPr lang="ko-KR" altLang="en-US" sz="1400" b="0" i="0">
+                <a:solidFill>
+                  <a:schemeClr val="tx1">
+                    <a:lumMod val="65000"/>
+                    <a:lumOff val="35000"/>
+                  </a:schemeClr>
+                </a:solidFill>
+                <a:effectLst/>
+                <a:latin typeface="Noto Sans KR"/>
+              </a:rPr>
+              <a:t>년 조정</a:t>
+            </a:r>
+            <a:r>
+              <a:rPr lang="en-US" altLang="ko-KR" sz="1400" b="0" i="0">
+                <a:solidFill>
+                  <a:schemeClr val="tx1">
+                    <a:lumMod val="65000"/>
+                    <a:lumOff val="35000"/>
+                  </a:schemeClr>
+                </a:solidFill>
+                <a:effectLst/>
+                <a:latin typeface="Noto Sans KR"/>
+              </a:rPr>
+              <a:t>)</a:t>
             </a:r>
           </a:p>
           <a:p>
             <a:pPr marL="0" indent="0">
               <a:lnSpc>
-                <a:spcPct val="150000"/>
+                <a:spcPct val="100000"/>
               </a:lnSpc>
               <a:buNone/>
             </a:pPr>
             <a:r>
-              <a:rPr lang="ko-KR" altLang="en-US" sz="1400" b="0" i="0" dirty="0">
+              <a:rPr lang="ko-KR" altLang="en-US" sz="1600" b="1">
                 <a:solidFill>
                   <a:schemeClr val="tx1">
                     <a:lumMod val="75000"/>
                     <a:lumOff val="25000"/>
                   </a:schemeClr>
                 </a:solidFill>
-                <a:effectLst/>
-                <a:latin typeface="Noto Sans KR"/>
-              </a:rPr>
-              <a:t>외식 및 가공식품 섭취로</a:t>
-            </a:r>
-            <a:r>
-              <a:rPr lang="ko-KR" altLang="en-US" sz="1400" b="1" i="0" dirty="0">
-                <a:solidFill>
-                  <a:schemeClr val="tx1">
-                    <a:lumMod val="75000"/>
-                    <a:lumOff val="25000"/>
-                  </a:schemeClr>
-                </a:solidFill>
-                <a:effectLst/>
-                <a:latin typeface="Noto Sans KR"/>
-              </a:rPr>
-              <a:t> </a:t>
-            </a:r>
-            <a:r>
-              <a:rPr lang="ko-KR" altLang="en-US" sz="1600" b="1" i="0" dirty="0">
-                <a:effectLst/>
-                <a:latin typeface="Noto Sans KR"/>
-              </a:rPr>
-              <a:t>지방</a:t>
-            </a:r>
-            <a:r>
-              <a:rPr lang="en-US" altLang="ko-KR" sz="1600" b="1" i="0" dirty="0">
-                <a:effectLst/>
-                <a:latin typeface="Noto Sans KR"/>
-              </a:rPr>
-              <a:t>, </a:t>
-            </a:r>
-            <a:r>
-              <a:rPr lang="ko-KR" altLang="en-US" sz="1600" b="1" i="0" dirty="0">
-                <a:effectLst/>
-                <a:latin typeface="Noto Sans KR"/>
-              </a:rPr>
-              <a:t>당류</a:t>
-            </a:r>
-            <a:r>
-              <a:rPr lang="en-US" altLang="ko-KR" sz="1600" b="1" i="0" dirty="0">
-                <a:effectLst/>
-                <a:latin typeface="Noto Sans KR"/>
-              </a:rPr>
-              <a:t>, </a:t>
-            </a:r>
-            <a:r>
-              <a:rPr lang="ko-KR" altLang="en-US" sz="1600" b="1" i="0" dirty="0">
-                <a:effectLst/>
-                <a:latin typeface="Noto Sans KR"/>
-              </a:rPr>
-              <a:t>나트륨의 과잉 섭취</a:t>
-            </a:r>
-            <a:r>
-              <a:rPr lang="ko-KR" altLang="en-US" sz="1400" i="0" dirty="0">
-                <a:solidFill>
-                  <a:schemeClr val="tx1">
-                    <a:lumMod val="75000"/>
-                    <a:lumOff val="25000"/>
-                  </a:schemeClr>
-                </a:solidFill>
-                <a:effectLst/>
-                <a:latin typeface="Noto Sans KR"/>
-              </a:rPr>
-              <a:t>가</a:t>
-            </a:r>
-            <a:r>
-              <a:rPr lang="ko-KR" altLang="en-US" sz="1400" b="1" i="0" dirty="0">
-                <a:solidFill>
-                  <a:schemeClr val="tx1">
-                    <a:lumMod val="75000"/>
-                    <a:lumOff val="25000"/>
-                  </a:schemeClr>
-                </a:solidFill>
-                <a:effectLst/>
-                <a:latin typeface="Noto Sans KR"/>
-              </a:rPr>
-              <a:t> </a:t>
-            </a:r>
-            <a:r>
-              <a:rPr lang="ko-KR" altLang="en-US" sz="1400" b="0" i="0" dirty="0">
-                <a:solidFill>
-                  <a:schemeClr val="tx1">
-                    <a:lumMod val="75000"/>
-                    <a:lumOff val="25000"/>
-                  </a:schemeClr>
-                </a:solidFill>
-                <a:effectLst/>
-                <a:latin typeface="Noto Sans KR"/>
-              </a:rPr>
-              <a:t>일상화되어 심각한 영양 불균형 초래</a:t>
-            </a:r>
-            <a:endParaRPr lang="ko-KR" altLang="en-US" sz="1400" dirty="0">
+              </a:rPr>
+              <a:t>검사주기가 길어 조기 발견 어려움</a:t>
+            </a:r>
+            <a:endParaRPr lang="ko-KR" altLang="en-US" sz="1600" b="1" dirty="0">
               <a:solidFill>
                 <a:schemeClr val="tx1">
                   <a:lumMod val="75000"/>
@@ -4754,484 +4532,6 @@
           </a:p>
         </p:txBody>
       </p:sp>
-      <p:pic>
-        <p:nvPicPr>
-          <p:cNvPr id="10" name="그림 9" descr="블랙, 어둠이(가) 표시된 사진&#10;&#10;AI가 생성한 콘텐츠는 부정확할 수 있습니다.">
-            <a:extLst>
-              <a:ext uri="{FF2B5EF4-FFF2-40B4-BE49-F238E27FC236}">
-                <a16:creationId xmlns:a16="http://schemas.microsoft.com/office/drawing/2014/main" id="{C0E1470B-2FAA-6645-115D-938C838B9EC8}"/>
-              </a:ext>
-            </a:extLst>
-          </p:cNvPr>
-          <p:cNvPicPr>
-            <a:picLocks noChangeAspect="1"/>
-          </p:cNvPicPr>
-          <p:nvPr/>
-        </p:nvPicPr>
-        <p:blipFill>
-          <a:blip r:embed="rId2">
-            <a:extLst>
-              <a:ext uri="{28A0092B-C50C-407E-A947-70E740481C1C}">
-                <a14:useLocalDpi xmlns:a14="http://schemas.microsoft.com/office/drawing/2010/main" val="0"/>
-              </a:ext>
-            </a:extLst>
-          </a:blip>
-          <a:stretch>
-            <a:fillRect/>
-          </a:stretch>
-        </p:blipFill>
-        <p:spPr>
-          <a:xfrm>
-            <a:off x="603253" y="2497142"/>
-            <a:ext cx="468000" cy="468000"/>
-          </a:xfrm>
-          <a:prstGeom prst="rect">
-            <a:avLst/>
-          </a:prstGeom>
-          <a:ln w="12700" cap="rnd">
-            <a:noFill/>
-            <a:prstDash val="solid"/>
-            <a:round/>
-            <a:extLst>
-              <a:ext uri="{C807C97D-BFC1-408E-A445-0C87EB9F89A2}">
-                <ask:lineSketchStyleProps xmlns:ask="http://schemas.microsoft.com/office/drawing/2018/sketchyshapes" sd="1219033472">
-                  <a:custGeom>
-                    <a:avLst/>
-                    <a:gdLst>
-                      <a:gd name="connsiteX0" fmla="*/ 0 w 4161662"/>
-                      <a:gd name="connsiteY0" fmla="*/ 0 h 4161662"/>
-                      <a:gd name="connsiteX1" fmla="*/ 677756 w 4161662"/>
-                      <a:gd name="connsiteY1" fmla="*/ 0 h 4161662"/>
-                      <a:gd name="connsiteX2" fmla="*/ 1355513 w 4161662"/>
-                      <a:gd name="connsiteY2" fmla="*/ 0 h 4161662"/>
-                      <a:gd name="connsiteX3" fmla="*/ 1950036 w 4161662"/>
-                      <a:gd name="connsiteY3" fmla="*/ 0 h 4161662"/>
-                      <a:gd name="connsiteX4" fmla="*/ 2586176 w 4161662"/>
-                      <a:gd name="connsiteY4" fmla="*/ 0 h 4161662"/>
-                      <a:gd name="connsiteX5" fmla="*/ 3139082 w 4161662"/>
-                      <a:gd name="connsiteY5" fmla="*/ 0 h 4161662"/>
-                      <a:gd name="connsiteX6" fmla="*/ 4161662 w 4161662"/>
-                      <a:gd name="connsiteY6" fmla="*/ 0 h 4161662"/>
-                      <a:gd name="connsiteX7" fmla="*/ 4161662 w 4161662"/>
-                      <a:gd name="connsiteY7" fmla="*/ 677756 h 4161662"/>
-                      <a:gd name="connsiteX8" fmla="*/ 4161662 w 4161662"/>
-                      <a:gd name="connsiteY8" fmla="*/ 1189046 h 4161662"/>
-                      <a:gd name="connsiteX9" fmla="*/ 4161662 w 4161662"/>
-                      <a:gd name="connsiteY9" fmla="*/ 1658720 h 4161662"/>
-                      <a:gd name="connsiteX10" fmla="*/ 4161662 w 4161662"/>
-                      <a:gd name="connsiteY10" fmla="*/ 2170009 h 4161662"/>
-                      <a:gd name="connsiteX11" fmla="*/ 4161662 w 4161662"/>
-                      <a:gd name="connsiteY11" fmla="*/ 2722916 h 4161662"/>
-                      <a:gd name="connsiteX12" fmla="*/ 4161662 w 4161662"/>
-                      <a:gd name="connsiteY12" fmla="*/ 3317439 h 4161662"/>
-                      <a:gd name="connsiteX13" fmla="*/ 4161662 w 4161662"/>
-                      <a:gd name="connsiteY13" fmla="*/ 4161662 h 4161662"/>
-                      <a:gd name="connsiteX14" fmla="*/ 3483906 w 4161662"/>
-                      <a:gd name="connsiteY14" fmla="*/ 4161662 h 4161662"/>
-                      <a:gd name="connsiteX15" fmla="*/ 2889382 w 4161662"/>
-                      <a:gd name="connsiteY15" fmla="*/ 4161662 h 4161662"/>
-                      <a:gd name="connsiteX16" fmla="*/ 2294859 w 4161662"/>
-                      <a:gd name="connsiteY16" fmla="*/ 4161662 h 4161662"/>
-                      <a:gd name="connsiteX17" fmla="*/ 1700336 w 4161662"/>
-                      <a:gd name="connsiteY17" fmla="*/ 4161662 h 4161662"/>
-                      <a:gd name="connsiteX18" fmla="*/ 1105813 w 4161662"/>
-                      <a:gd name="connsiteY18" fmla="*/ 4161662 h 4161662"/>
-                      <a:gd name="connsiteX19" fmla="*/ 552907 w 4161662"/>
-                      <a:gd name="connsiteY19" fmla="*/ 4161662 h 4161662"/>
-                      <a:gd name="connsiteX20" fmla="*/ 0 w 4161662"/>
-                      <a:gd name="connsiteY20" fmla="*/ 4161662 h 4161662"/>
-                      <a:gd name="connsiteX21" fmla="*/ 0 w 4161662"/>
-                      <a:gd name="connsiteY21" fmla="*/ 3567139 h 4161662"/>
-                      <a:gd name="connsiteX22" fmla="*/ 0 w 4161662"/>
-                      <a:gd name="connsiteY22" fmla="*/ 2930999 h 4161662"/>
-                      <a:gd name="connsiteX23" fmla="*/ 0 w 4161662"/>
-                      <a:gd name="connsiteY23" fmla="*/ 2294859 h 4161662"/>
-                      <a:gd name="connsiteX24" fmla="*/ 0 w 4161662"/>
-                      <a:gd name="connsiteY24" fmla="*/ 1617103 h 4161662"/>
-                      <a:gd name="connsiteX25" fmla="*/ 0 w 4161662"/>
-                      <a:gd name="connsiteY25" fmla="*/ 1022580 h 4161662"/>
-                      <a:gd name="connsiteX26" fmla="*/ 0 w 4161662"/>
-                      <a:gd name="connsiteY26" fmla="*/ 0 h 4161662"/>
-                    </a:gdLst>
-                    <a:ahLst/>
-                    <a:cxnLst>
-                      <a:cxn ang="0">
-                        <a:pos x="connsiteX0" y="connsiteY0"/>
-                      </a:cxn>
-                      <a:cxn ang="0">
-                        <a:pos x="connsiteX1" y="connsiteY1"/>
-                      </a:cxn>
-                      <a:cxn ang="0">
-                        <a:pos x="connsiteX2" y="connsiteY2"/>
-                      </a:cxn>
-                      <a:cxn ang="0">
-                        <a:pos x="connsiteX3" y="connsiteY3"/>
-                      </a:cxn>
-                      <a:cxn ang="0">
-                        <a:pos x="connsiteX4" y="connsiteY4"/>
-                      </a:cxn>
-                      <a:cxn ang="0">
-                        <a:pos x="connsiteX5" y="connsiteY5"/>
-                      </a:cxn>
-                      <a:cxn ang="0">
-                        <a:pos x="connsiteX6" y="connsiteY6"/>
-                      </a:cxn>
-                      <a:cxn ang="0">
-                        <a:pos x="connsiteX7" y="connsiteY7"/>
-                      </a:cxn>
-                      <a:cxn ang="0">
-                        <a:pos x="connsiteX8" y="connsiteY8"/>
-                      </a:cxn>
-                      <a:cxn ang="0">
-                        <a:pos x="connsiteX9" y="connsiteY9"/>
-                      </a:cxn>
-                      <a:cxn ang="0">
-                        <a:pos x="connsiteX10" y="connsiteY10"/>
-                      </a:cxn>
-                      <a:cxn ang="0">
-                        <a:pos x="connsiteX11" y="connsiteY11"/>
-                      </a:cxn>
-                      <a:cxn ang="0">
-                        <a:pos x="connsiteX12" y="connsiteY12"/>
-                      </a:cxn>
-                      <a:cxn ang="0">
-                        <a:pos x="connsiteX13" y="connsiteY13"/>
-                      </a:cxn>
-                      <a:cxn ang="0">
-                        <a:pos x="connsiteX14" y="connsiteY14"/>
-                      </a:cxn>
-                      <a:cxn ang="0">
-                        <a:pos x="connsiteX15" y="connsiteY15"/>
-                      </a:cxn>
-                      <a:cxn ang="0">
-                        <a:pos x="connsiteX16" y="connsiteY16"/>
-                      </a:cxn>
-                      <a:cxn ang="0">
-                        <a:pos x="connsiteX17" y="connsiteY17"/>
-                      </a:cxn>
-                      <a:cxn ang="0">
-                        <a:pos x="connsiteX18" y="connsiteY18"/>
-                      </a:cxn>
-                      <a:cxn ang="0">
-                        <a:pos x="connsiteX19" y="connsiteY19"/>
-                      </a:cxn>
-                      <a:cxn ang="0">
-                        <a:pos x="connsiteX20" y="connsiteY20"/>
-                      </a:cxn>
-                      <a:cxn ang="0">
-                        <a:pos x="connsiteX21" y="connsiteY21"/>
-                      </a:cxn>
-                      <a:cxn ang="0">
-                        <a:pos x="connsiteX22" y="connsiteY22"/>
-                      </a:cxn>
-                      <a:cxn ang="0">
-                        <a:pos x="connsiteX23" y="connsiteY23"/>
-                      </a:cxn>
-                      <a:cxn ang="0">
-                        <a:pos x="connsiteX24" y="connsiteY24"/>
-                      </a:cxn>
-                      <a:cxn ang="0">
-                        <a:pos x="connsiteX25" y="connsiteY25"/>
-                      </a:cxn>
-                      <a:cxn ang="0">
-                        <a:pos x="connsiteX26" y="connsiteY26"/>
-                      </a:cxn>
-                    </a:cxnLst>
-                    <a:rect l="l" t="t" r="r" b="b"/>
-                    <a:pathLst>
-                      <a:path w="4161662" h="4161662" fill="none" extrusionOk="0">
-                        <a:moveTo>
-                          <a:pt x="0" y="0"/>
-                        </a:moveTo>
-                        <a:cubicBezTo>
-                          <a:pt x="146926" y="-49179"/>
-                          <a:pt x="423112" y="76956"/>
-                          <a:pt x="677756" y="0"/>
-                        </a:cubicBezTo>
-                        <a:cubicBezTo>
-                          <a:pt x="932400" y="-76956"/>
-                          <a:pt x="1175110" y="63608"/>
-                          <a:pt x="1355513" y="0"/>
-                        </a:cubicBezTo>
-                        <a:cubicBezTo>
-                          <a:pt x="1535916" y="-63608"/>
-                          <a:pt x="1693715" y="59913"/>
-                          <a:pt x="1950036" y="0"/>
-                        </a:cubicBezTo>
-                        <a:cubicBezTo>
-                          <a:pt x="2206357" y="-59913"/>
-                          <a:pt x="2440393" y="51885"/>
-                          <a:pt x="2586176" y="0"/>
-                        </a:cubicBezTo>
-                        <a:cubicBezTo>
-                          <a:pt x="2731959" y="-51885"/>
-                          <a:pt x="2897339" y="11509"/>
-                          <a:pt x="3139082" y="0"/>
-                        </a:cubicBezTo>
-                        <a:cubicBezTo>
-                          <a:pt x="3380825" y="-11509"/>
-                          <a:pt x="3850267" y="92030"/>
-                          <a:pt x="4161662" y="0"/>
-                        </a:cubicBezTo>
-                        <a:cubicBezTo>
-                          <a:pt x="4193447" y="244183"/>
-                          <a:pt x="4113423" y="380579"/>
-                          <a:pt x="4161662" y="677756"/>
-                        </a:cubicBezTo>
-                        <a:cubicBezTo>
-                          <a:pt x="4209901" y="974933"/>
-                          <a:pt x="4133575" y="1077025"/>
-                          <a:pt x="4161662" y="1189046"/>
-                        </a:cubicBezTo>
-                        <a:cubicBezTo>
-                          <a:pt x="4189749" y="1301067"/>
-                          <a:pt x="4136844" y="1473854"/>
-                          <a:pt x="4161662" y="1658720"/>
-                        </a:cubicBezTo>
-                        <a:cubicBezTo>
-                          <a:pt x="4186480" y="1843586"/>
-                          <a:pt x="4102672" y="2024012"/>
-                          <a:pt x="4161662" y="2170009"/>
-                        </a:cubicBezTo>
-                        <a:cubicBezTo>
-                          <a:pt x="4220652" y="2316006"/>
-                          <a:pt x="4114940" y="2588273"/>
-                          <a:pt x="4161662" y="2722916"/>
-                        </a:cubicBezTo>
-                        <a:cubicBezTo>
-                          <a:pt x="4208384" y="2857559"/>
-                          <a:pt x="4135370" y="3085759"/>
-                          <a:pt x="4161662" y="3317439"/>
-                        </a:cubicBezTo>
-                        <a:cubicBezTo>
-                          <a:pt x="4187954" y="3549119"/>
-                          <a:pt x="4106061" y="3795915"/>
-                          <a:pt x="4161662" y="4161662"/>
-                        </a:cubicBezTo>
-                        <a:cubicBezTo>
-                          <a:pt x="4013904" y="4228695"/>
-                          <a:pt x="3630628" y="4080432"/>
-                          <a:pt x="3483906" y="4161662"/>
-                        </a:cubicBezTo>
-                        <a:cubicBezTo>
-                          <a:pt x="3337184" y="4242892"/>
-                          <a:pt x="3078083" y="4157000"/>
-                          <a:pt x="2889382" y="4161662"/>
-                        </a:cubicBezTo>
-                        <a:cubicBezTo>
-                          <a:pt x="2700681" y="4166324"/>
-                          <a:pt x="2475360" y="4157994"/>
-                          <a:pt x="2294859" y="4161662"/>
-                        </a:cubicBezTo>
-                        <a:cubicBezTo>
-                          <a:pt x="2114358" y="4165330"/>
-                          <a:pt x="1843668" y="4160905"/>
-                          <a:pt x="1700336" y="4161662"/>
-                        </a:cubicBezTo>
-                        <a:cubicBezTo>
-                          <a:pt x="1557004" y="4162419"/>
-                          <a:pt x="1243994" y="4154280"/>
-                          <a:pt x="1105813" y="4161662"/>
-                        </a:cubicBezTo>
-                        <a:cubicBezTo>
-                          <a:pt x="967632" y="4169044"/>
-                          <a:pt x="828129" y="4157753"/>
-                          <a:pt x="552907" y="4161662"/>
-                        </a:cubicBezTo>
-                        <a:cubicBezTo>
-                          <a:pt x="277685" y="4165571"/>
-                          <a:pt x="178676" y="4096086"/>
-                          <a:pt x="0" y="4161662"/>
-                        </a:cubicBezTo>
-                        <a:cubicBezTo>
-                          <a:pt x="-14981" y="3992741"/>
-                          <a:pt x="37689" y="3797757"/>
-                          <a:pt x="0" y="3567139"/>
-                        </a:cubicBezTo>
-                        <a:cubicBezTo>
-                          <a:pt x="-37689" y="3336521"/>
-                          <a:pt x="27091" y="3228718"/>
-                          <a:pt x="0" y="2930999"/>
-                        </a:cubicBezTo>
-                        <a:cubicBezTo>
-                          <a:pt x="-27091" y="2633280"/>
-                          <a:pt x="43696" y="2510108"/>
-                          <a:pt x="0" y="2294859"/>
-                        </a:cubicBezTo>
-                        <a:cubicBezTo>
-                          <a:pt x="-43696" y="2079610"/>
-                          <a:pt x="4052" y="1817541"/>
-                          <a:pt x="0" y="1617103"/>
-                        </a:cubicBezTo>
-                        <a:cubicBezTo>
-                          <a:pt x="-4052" y="1416665"/>
-                          <a:pt x="40187" y="1175011"/>
-                          <a:pt x="0" y="1022580"/>
-                        </a:cubicBezTo>
-                        <a:cubicBezTo>
-                          <a:pt x="-40187" y="870149"/>
-                          <a:pt x="26983" y="470975"/>
-                          <a:pt x="0" y="0"/>
-                        </a:cubicBezTo>
-                        <a:close/>
-                      </a:path>
-                      <a:path w="4161662" h="4161662" stroke="0" extrusionOk="0">
-                        <a:moveTo>
-                          <a:pt x="0" y="0"/>
-                        </a:moveTo>
-                        <a:cubicBezTo>
-                          <a:pt x="161768" y="-46457"/>
-                          <a:pt x="364502" y="48232"/>
-                          <a:pt x="552907" y="0"/>
-                        </a:cubicBezTo>
-                        <a:cubicBezTo>
-                          <a:pt x="741312" y="-48232"/>
-                          <a:pt x="901010" y="47903"/>
-                          <a:pt x="1022580" y="0"/>
-                        </a:cubicBezTo>
-                        <a:cubicBezTo>
-                          <a:pt x="1144150" y="-47903"/>
-                          <a:pt x="1425180" y="53507"/>
-                          <a:pt x="1700336" y="0"/>
-                        </a:cubicBezTo>
-                        <a:cubicBezTo>
-                          <a:pt x="1975492" y="-53507"/>
-                          <a:pt x="2028110" y="7650"/>
-                          <a:pt x="2253243" y="0"/>
-                        </a:cubicBezTo>
-                        <a:cubicBezTo>
-                          <a:pt x="2478376" y="-7650"/>
-                          <a:pt x="2628386" y="50070"/>
-                          <a:pt x="2806149" y="0"/>
-                        </a:cubicBezTo>
-                        <a:cubicBezTo>
-                          <a:pt x="2983912" y="-50070"/>
-                          <a:pt x="3193663" y="51605"/>
-                          <a:pt x="3483906" y="0"/>
-                        </a:cubicBezTo>
-                        <a:cubicBezTo>
-                          <a:pt x="3774149" y="-51605"/>
-                          <a:pt x="3855060" y="61047"/>
-                          <a:pt x="4161662" y="0"/>
-                        </a:cubicBezTo>
-                        <a:cubicBezTo>
-                          <a:pt x="4214231" y="324916"/>
-                          <a:pt x="4140513" y="417896"/>
-                          <a:pt x="4161662" y="677756"/>
-                        </a:cubicBezTo>
-                        <a:cubicBezTo>
-                          <a:pt x="4182811" y="937616"/>
-                          <a:pt x="4143716" y="959576"/>
-                          <a:pt x="4161662" y="1189046"/>
-                        </a:cubicBezTo>
-                        <a:cubicBezTo>
-                          <a:pt x="4179608" y="1418516"/>
-                          <a:pt x="4105787" y="1527198"/>
-                          <a:pt x="4161662" y="1700336"/>
-                        </a:cubicBezTo>
-                        <a:cubicBezTo>
-                          <a:pt x="4217537" y="1873474"/>
-                          <a:pt x="4155444" y="2157875"/>
-                          <a:pt x="4161662" y="2294859"/>
-                        </a:cubicBezTo>
-                        <a:cubicBezTo>
-                          <a:pt x="4167880" y="2431843"/>
-                          <a:pt x="4130736" y="2718138"/>
-                          <a:pt x="4161662" y="2930999"/>
-                        </a:cubicBezTo>
-                        <a:cubicBezTo>
-                          <a:pt x="4192588" y="3143860"/>
-                          <a:pt x="4160212" y="3219224"/>
-                          <a:pt x="4161662" y="3400672"/>
-                        </a:cubicBezTo>
-                        <a:cubicBezTo>
-                          <a:pt x="4163112" y="3582120"/>
-                          <a:pt x="4094120" y="3802505"/>
-                          <a:pt x="4161662" y="4161662"/>
-                        </a:cubicBezTo>
-                        <a:cubicBezTo>
-                          <a:pt x="3921811" y="4166974"/>
-                          <a:pt x="3722507" y="4142918"/>
-                          <a:pt x="3567139" y="4161662"/>
-                        </a:cubicBezTo>
-                        <a:cubicBezTo>
-                          <a:pt x="3411771" y="4180406"/>
-                          <a:pt x="3120016" y="4136184"/>
-                          <a:pt x="2972616" y="4161662"/>
-                        </a:cubicBezTo>
-                        <a:cubicBezTo>
-                          <a:pt x="2825216" y="4187140"/>
-                          <a:pt x="2543113" y="4110598"/>
-                          <a:pt x="2294859" y="4161662"/>
-                        </a:cubicBezTo>
-                        <a:cubicBezTo>
-                          <a:pt x="2046605" y="4212726"/>
-                          <a:pt x="1981969" y="4133006"/>
-                          <a:pt x="1700336" y="4161662"/>
-                        </a:cubicBezTo>
-                        <a:cubicBezTo>
-                          <a:pt x="1418703" y="4190318"/>
-                          <a:pt x="1354265" y="4106015"/>
-                          <a:pt x="1230663" y="4161662"/>
-                        </a:cubicBezTo>
-                        <a:cubicBezTo>
-                          <a:pt x="1107061" y="4217309"/>
-                          <a:pt x="957609" y="4118690"/>
-                          <a:pt x="719373" y="4161662"/>
-                        </a:cubicBezTo>
-                        <a:cubicBezTo>
-                          <a:pt x="481137" y="4204634"/>
-                          <a:pt x="167330" y="4156625"/>
-                          <a:pt x="0" y="4161662"/>
-                        </a:cubicBezTo>
-                        <a:cubicBezTo>
-                          <a:pt x="-65854" y="3896313"/>
-                          <a:pt x="16740" y="3726990"/>
-                          <a:pt x="0" y="3567139"/>
-                        </a:cubicBezTo>
-                        <a:cubicBezTo>
-                          <a:pt x="-16740" y="3407288"/>
-                          <a:pt x="21521" y="3243218"/>
-                          <a:pt x="0" y="2972616"/>
-                        </a:cubicBezTo>
-                        <a:cubicBezTo>
-                          <a:pt x="-21521" y="2702014"/>
-                          <a:pt x="8046" y="2679564"/>
-                          <a:pt x="0" y="2419709"/>
-                        </a:cubicBezTo>
-                        <a:cubicBezTo>
-                          <a:pt x="-8046" y="2159854"/>
-                          <a:pt x="4077" y="2143863"/>
-                          <a:pt x="0" y="1950036"/>
-                        </a:cubicBezTo>
-                        <a:cubicBezTo>
-                          <a:pt x="-4077" y="1756209"/>
-                          <a:pt x="49112" y="1658208"/>
-                          <a:pt x="0" y="1480363"/>
-                        </a:cubicBezTo>
-                        <a:cubicBezTo>
-                          <a:pt x="-49112" y="1302518"/>
-                          <a:pt x="59946" y="1077805"/>
-                          <a:pt x="0" y="844223"/>
-                        </a:cubicBezTo>
-                        <a:cubicBezTo>
-                          <a:pt x="-59946" y="610641"/>
-                          <a:pt x="86630" y="409246"/>
-                          <a:pt x="0" y="0"/>
-                        </a:cubicBezTo>
-                        <a:close/>
-                      </a:path>
-                    </a:pathLst>
-                  </a:custGeom>
-                  <ask:type>
-                    <ask:lineSketchNone/>
-                  </ask:type>
-                </ask:lineSketchStyleProps>
-              </a:ext>
-            </a:extLst>
-          </a:ln>
-        </p:spPr>
-      </p:pic>
       <p:sp>
         <p:nvSpPr>
           <p:cNvPr id="12" name="내용 개체 틀 2">
@@ -5248,8 +4548,8 @@
         </p:nvSpPr>
         <p:spPr>
           <a:xfrm>
-            <a:off x="1313244" y="4813418"/>
-            <a:ext cx="4452226" cy="1375687"/>
+            <a:off x="824750" y="4666629"/>
+            <a:ext cx="3575640" cy="798000"/>
           </a:xfrm>
           <a:prstGeom prst="rect">
             <a:avLst/>
@@ -5425,101 +4725,105 @@
           </a:lstStyle>
           <a:p>
             <a:pPr marL="0" indent="0">
+              <a:lnSpc>
+                <a:spcPct val="100000"/>
+              </a:lnSpc>
               <a:buFont typeface="Arial" panose="020B0604020202020204" pitchFamily="34" charset="0"/>
               <a:buNone/>
             </a:pPr>
             <a:r>
-              <a:rPr lang="ko-KR" altLang="en-US" sz="1800" b="1">
+              <a:rPr lang="ko-KR" altLang="en-US" sz="1400">
+                <a:solidFill>
+                  <a:schemeClr val="tx1">
+                    <a:lumMod val="65000"/>
+                    <a:lumOff val="35000"/>
+                  </a:schemeClr>
+                </a:solidFill>
                 <a:latin typeface="Noto Sans KR"/>
               </a:rPr>
-              <a:t>만성질환 위험 증가</a:t>
+              <a:t>개인마다 다른 관리 특성</a:t>
+            </a:r>
+            <a:r>
+              <a:rPr lang="en-US" altLang="ko-KR" sz="1400">
+                <a:solidFill>
+                  <a:schemeClr val="tx1">
+                    <a:lumMod val="65000"/>
+                    <a:lumOff val="35000"/>
+                  </a:schemeClr>
+                </a:solidFill>
+                <a:latin typeface="Noto Sans KR"/>
+              </a:rPr>
+              <a:t>(</a:t>
+            </a:r>
+            <a:r>
+              <a:rPr lang="ko-KR" altLang="en-US" sz="1400">
+                <a:solidFill>
+                  <a:schemeClr val="tx1">
+                    <a:lumMod val="65000"/>
+                    <a:lumOff val="35000"/>
+                  </a:schemeClr>
+                </a:solidFill>
+                <a:latin typeface="Noto Sans KR"/>
+              </a:rPr>
+              <a:t>성별</a:t>
+            </a:r>
+            <a:r>
+              <a:rPr lang="en-US" altLang="ko-KR" sz="1400">
+                <a:solidFill>
+                  <a:schemeClr val="tx1">
+                    <a:lumMod val="65000"/>
+                    <a:lumOff val="35000"/>
+                  </a:schemeClr>
+                </a:solidFill>
+                <a:latin typeface="Noto Sans KR"/>
+              </a:rPr>
+              <a:t>, </a:t>
+            </a:r>
+            <a:r>
+              <a:rPr lang="ko-KR" altLang="en-US" sz="1400">
+                <a:solidFill>
+                  <a:schemeClr val="tx1">
+                    <a:lumMod val="65000"/>
+                    <a:lumOff val="35000"/>
+                  </a:schemeClr>
+                </a:solidFill>
+                <a:latin typeface="Noto Sans KR"/>
+              </a:rPr>
+              <a:t>나이 등</a:t>
+            </a:r>
+            <a:r>
+              <a:rPr lang="en-US" altLang="ko-KR" sz="1400">
+                <a:solidFill>
+                  <a:schemeClr val="tx1">
+                    <a:lumMod val="65000"/>
+                    <a:lumOff val="35000"/>
+                  </a:schemeClr>
+                </a:solidFill>
+                <a:latin typeface="Noto Sans KR"/>
+              </a:rPr>
+              <a:t>)</a:t>
             </a:r>
           </a:p>
           <a:p>
             <a:pPr marL="0" indent="0">
               <a:lnSpc>
-                <a:spcPct val="150000"/>
+                <a:spcPct val="100000"/>
               </a:lnSpc>
               <a:buFont typeface="Arial" panose="020B0604020202020204" pitchFamily="34" charset="0"/>
               <a:buNone/>
             </a:pPr>
             <a:r>
-              <a:rPr lang="ko-KR" altLang="en-US" sz="1400">
-                <a:solidFill>
-                  <a:schemeClr val="tx1">
-                    <a:lumMod val="75000"/>
-                    <a:lumOff val="25000"/>
-                  </a:schemeClr>
-                </a:solidFill>
+              <a:rPr lang="ko-KR" altLang="en-US" sz="1600" b="1">
                 <a:latin typeface="Noto Sans KR"/>
               </a:rPr>
-              <a:t>잘못된 식습관으로 인해 </a:t>
-            </a:r>
-            <a:r>
-              <a:rPr lang="ko-KR" altLang="en-US" sz="1400" b="1">
-                <a:latin typeface="Noto Sans KR"/>
-              </a:rPr>
-              <a:t>고콜레스테롤혈증</a:t>
-            </a:r>
-            <a:r>
-              <a:rPr lang="ko-KR" altLang="en-US" sz="1400">
-                <a:solidFill>
-                  <a:schemeClr val="tx1">
-                    <a:lumMod val="75000"/>
-                    <a:lumOff val="25000"/>
-                  </a:schemeClr>
-                </a:solidFill>
-                <a:latin typeface="Noto Sans KR"/>
-              </a:rPr>
-              <a:t> 만성질환 유병률 증가</a:t>
-            </a:r>
-            <a:endParaRPr lang="ko-KR" altLang="en-US" sz="1400">
-              <a:solidFill>
-                <a:schemeClr val="tx1">
-                  <a:lumMod val="75000"/>
-                  <a:lumOff val="25000"/>
-                </a:schemeClr>
-              </a:solidFill>
+              <a:t>개인별 맞춤 관리 가이드 필요</a:t>
+            </a:r>
+            <a:endParaRPr lang="en-US" altLang="ko-KR" sz="1600" b="1">
+              <a:latin typeface="Noto Sans KR"/>
             </a:endParaRPr>
           </a:p>
         </p:txBody>
       </p:sp>
-      <p:pic>
-        <p:nvPicPr>
-          <p:cNvPr id="17" name="그림 16" descr="블랙, 어둠이(가) 표시된 사진&#10;&#10;AI가 생성한 콘텐츠는 부정확할 수 있습니다.">
-            <a:extLst>
-              <a:ext uri="{FF2B5EF4-FFF2-40B4-BE49-F238E27FC236}">
-                <a16:creationId xmlns:a16="http://schemas.microsoft.com/office/drawing/2014/main" id="{2D4F120A-9945-AF4B-0051-06D1126780D8}"/>
-              </a:ext>
-            </a:extLst>
-          </p:cNvPr>
-          <p:cNvPicPr>
-            <a:picLocks noChangeAspect="1"/>
-          </p:cNvPicPr>
-          <p:nvPr/>
-        </p:nvPicPr>
-        <p:blipFill>
-          <a:blip r:embed="rId3">
-            <a:extLst>
-              <a:ext uri="{28A0092B-C50C-407E-A947-70E740481C1C}">
-                <a14:useLocalDpi xmlns:a14="http://schemas.microsoft.com/office/drawing/2010/main" val="0"/>
-              </a:ext>
-            </a:extLst>
-          </a:blip>
-          <a:stretch>
-            <a:fillRect/>
-          </a:stretch>
-        </p:blipFill>
-        <p:spPr>
-          <a:xfrm>
-            <a:off x="603253" y="5080397"/>
-            <a:ext cx="468000" cy="468000"/>
-          </a:xfrm>
-          <a:prstGeom prst="rect">
-            <a:avLst/>
-          </a:prstGeom>
-        </p:spPr>
-      </p:pic>
       <p:sp>
         <p:nvSpPr>
           <p:cNvPr id="4" name="직사각형 3">
@@ -5634,125 +4938,6 @@
           </a:p>
         </p:txBody>
       </p:sp>
-      <p:pic>
-        <p:nvPicPr>
-          <p:cNvPr id="1034" name="Picture 10">
-            <a:extLst>
-              <a:ext uri="{FF2B5EF4-FFF2-40B4-BE49-F238E27FC236}">
-                <a16:creationId xmlns:a16="http://schemas.microsoft.com/office/drawing/2014/main" id="{9CA5E893-BE61-1B2C-5561-000A6EBB97A8}"/>
-              </a:ext>
-            </a:extLst>
-          </p:cNvPr>
-          <p:cNvPicPr>
-            <a:picLocks noChangeAspect="1" noChangeArrowheads="1"/>
-          </p:cNvPicPr>
-          <p:nvPr/>
-        </p:nvPicPr>
-        <p:blipFill>
-          <a:blip r:embed="rId4">
-            <a:extLst>
-              <a:ext uri="{28A0092B-C50C-407E-A947-70E740481C1C}">
-                <a14:useLocalDpi xmlns:a14="http://schemas.microsoft.com/office/drawing/2010/main" val="0"/>
-              </a:ext>
-            </a:extLst>
-          </a:blip>
-          <a:srcRect/>
-          <a:stretch>
-            <a:fillRect/>
-          </a:stretch>
-        </p:blipFill>
-        <p:spPr bwMode="auto">
-          <a:xfrm rot="5400000">
-            <a:off x="3288358" y="3758025"/>
-            <a:ext cx="396000" cy="396000"/>
-          </a:xfrm>
-          <a:prstGeom prst="rect">
-            <a:avLst/>
-          </a:prstGeom>
-          <a:noFill/>
-          <a:extLst>
-            <a:ext uri="{909E8E84-426E-40DD-AFC4-6F175D3DCCD1}">
-              <a14:hiddenFill xmlns:a14="http://schemas.microsoft.com/office/drawing/2010/main">
-                <a:solidFill>
-                  <a:srgbClr val="FFFFFF"/>
-                </a:solidFill>
-              </a14:hiddenFill>
-            </a:ext>
-          </a:extLst>
-        </p:spPr>
-      </p:pic>
-      <p:pic>
-        <p:nvPicPr>
-          <p:cNvPr id="6" name="그림 5" descr="텍스트, 폰트, 스크린샷, 라인이(가) 표시된 사진&#10;&#10;AI가 생성한 콘텐츠는 부정확할 수 있습니다.">
-            <a:extLst>
-              <a:ext uri="{FF2B5EF4-FFF2-40B4-BE49-F238E27FC236}">
-                <a16:creationId xmlns:a16="http://schemas.microsoft.com/office/drawing/2014/main" id="{8ED0E3DF-A767-B1A3-C31A-CAA6D0ADDF38}"/>
-              </a:ext>
-            </a:extLst>
-          </p:cNvPr>
-          <p:cNvPicPr>
-            <a:picLocks noChangeAspect="1"/>
-          </p:cNvPicPr>
-          <p:nvPr/>
-        </p:nvPicPr>
-        <p:blipFill>
-          <a:blip r:embed="rId5">
-            <a:extLst>
-              <a:ext uri="{28A0092B-C50C-407E-A947-70E740481C1C}">
-                <a14:useLocalDpi xmlns:a14="http://schemas.microsoft.com/office/drawing/2010/main" val="0"/>
-              </a:ext>
-            </a:extLst>
-          </a:blip>
-          <a:stretch>
-            <a:fillRect/>
-          </a:stretch>
-        </p:blipFill>
-        <p:spPr>
-          <a:xfrm>
-            <a:off x="6511018" y="5501261"/>
-            <a:ext cx="5373738" cy="1056904"/>
-          </a:xfrm>
-          <a:prstGeom prst="rect">
-            <a:avLst/>
-          </a:prstGeom>
-        </p:spPr>
-      </p:pic>
-      <p:pic>
-        <p:nvPicPr>
-          <p:cNvPr id="8" name="그림 7" descr="텍스트, 스크린샷이(가) 표시된 사진&#10;&#10;AI가 생성한 콘텐츠는 부정확할 수 있습니다.">
-            <a:extLst>
-              <a:ext uri="{FF2B5EF4-FFF2-40B4-BE49-F238E27FC236}">
-                <a16:creationId xmlns:a16="http://schemas.microsoft.com/office/drawing/2014/main" id="{7C0D45A7-01FB-D98F-271F-4BABD3FAA698}"/>
-              </a:ext>
-            </a:extLst>
-          </p:cNvPr>
-          <p:cNvPicPr>
-            <a:picLocks noChangeAspect="1"/>
-          </p:cNvPicPr>
-          <p:nvPr/>
-        </p:nvPicPr>
-        <p:blipFill>
-          <a:blip r:embed="rId6">
-            <a:extLst>
-              <a:ext uri="{28A0092B-C50C-407E-A947-70E740481C1C}">
-                <a14:useLocalDpi xmlns:a14="http://schemas.microsoft.com/office/drawing/2010/main" val="0"/>
-              </a:ext>
-            </a:extLst>
-          </a:blip>
-          <a:stretch>
-            <a:fillRect/>
-          </a:stretch>
-        </p:blipFill>
-        <p:spPr>
-          <a:xfrm>
-            <a:off x="6512647" y="3955981"/>
-            <a:ext cx="5372109" cy="1575819"/>
-          </a:xfrm>
-          <a:prstGeom prst="rect">
-            <a:avLst/>
-          </a:prstGeom>
-        </p:spPr>
-      </p:pic>
       <p:cxnSp>
         <p:nvCxnSpPr>
           <p:cNvPr id="16" name="직선 연결선 15">
@@ -5769,7 +4954,7 @@
         </p:nvCxnSpPr>
         <p:spPr>
           <a:xfrm>
-            <a:off x="6204857" y="1915525"/>
+            <a:off x="4874400" y="1915525"/>
             <a:ext cx="0" cy="4273580"/>
           </a:xfrm>
           <a:prstGeom prst="line">
@@ -5801,260 +4986,10 @@
       </p:cxnSp>
       <p:pic>
         <p:nvPicPr>
-          <p:cNvPr id="11" name="그림 10">
+          <p:cNvPr id="10" name="그림 9" descr="텍스트, 폰트, 스크린샷, 화이트이(가) 표시된 사진&#10;&#10;AI가 생성한 콘텐츠는 부정확할 수 있습니다.">
             <a:extLst>
               <a:ext uri="{FF2B5EF4-FFF2-40B4-BE49-F238E27FC236}">
-                <a16:creationId xmlns:a16="http://schemas.microsoft.com/office/drawing/2014/main" id="{D9147C75-3356-63BC-9412-754748EC52EC}"/>
-              </a:ext>
-            </a:extLst>
-          </p:cNvPr>
-          <p:cNvPicPr>
-            <a:picLocks noChangeAspect="1"/>
-          </p:cNvPicPr>
-          <p:nvPr/>
-        </p:nvPicPr>
-        <p:blipFill>
-          <a:blip r:embed="rId7"/>
-          <a:stretch>
-            <a:fillRect/>
-          </a:stretch>
-        </p:blipFill>
-        <p:spPr>
-          <a:xfrm>
-            <a:off x="6513461" y="2908102"/>
-            <a:ext cx="5373738" cy="1047879"/>
-          </a:xfrm>
-          <a:prstGeom prst="rect">
-            <a:avLst/>
-          </a:prstGeom>
-        </p:spPr>
-      </p:pic>
-      <p:pic>
-        <p:nvPicPr>
-          <p:cNvPr id="15" name="그림 14">
-            <a:extLst>
-              <a:ext uri="{FF2B5EF4-FFF2-40B4-BE49-F238E27FC236}">
-                <a16:creationId xmlns:a16="http://schemas.microsoft.com/office/drawing/2014/main" id="{EEC5012B-FC18-6B7D-F1D7-F7FC63B45BF2}"/>
-              </a:ext>
-            </a:extLst>
-          </p:cNvPr>
-          <p:cNvPicPr>
-            <a:picLocks noChangeAspect="1"/>
-          </p:cNvPicPr>
-          <p:nvPr/>
-        </p:nvPicPr>
-        <p:blipFill>
-          <a:blip r:embed="rId8"/>
-          <a:stretch>
-            <a:fillRect/>
-          </a:stretch>
-        </p:blipFill>
-        <p:spPr>
-          <a:xfrm>
-            <a:off x="6513462" y="1915525"/>
-            <a:ext cx="5372108" cy="1073364"/>
-          </a:xfrm>
-          <a:prstGeom prst="rect">
-            <a:avLst/>
-          </a:prstGeom>
-        </p:spPr>
-      </p:pic>
-    </p:spTree>
-    <p:extLst>
-      <p:ext uri="{BB962C8B-B14F-4D97-AF65-F5344CB8AC3E}">
-        <p14:creationId xmlns:p14="http://schemas.microsoft.com/office/powerpoint/2010/main" val="3993980935"/>
-      </p:ext>
-    </p:extLst>
-  </p:cSld>
-  <p:clrMapOvr>
-    <a:masterClrMapping/>
-  </p:clrMapOvr>
-</p:sld>
-</file>
-
-<file path=ppt/slides/slide4.xml><?xml version="1.0" encoding="utf-8"?>
-<p:sld xmlns:a="http://schemas.openxmlformats.org/drawingml/2006/main" xmlns:r="http://schemas.openxmlformats.org/officeDocument/2006/relationships" xmlns:p="http://schemas.openxmlformats.org/presentationml/2006/main" show="0">
-  <p:cSld>
-    <p:spTree>
-      <p:nvGrpSpPr>
-        <p:cNvPr id="1" name=""/>
-        <p:cNvGrpSpPr/>
-        <p:nvPr/>
-      </p:nvGrpSpPr>
-      <p:grpSpPr>
-        <a:xfrm>
-          <a:off x="0" y="0"/>
-          <a:ext cx="0" cy="0"/>
-          <a:chOff x="0" y="0"/>
-          <a:chExt cx="0" cy="0"/>
-        </a:xfrm>
-      </p:grpSpPr>
-      <p:sp>
-        <p:nvSpPr>
-          <p:cNvPr id="3" name="내용 개체 틀 2">
-            <a:extLst>
-              <a:ext uri="{FF2B5EF4-FFF2-40B4-BE49-F238E27FC236}">
-                <a16:creationId xmlns:a16="http://schemas.microsoft.com/office/drawing/2014/main" id="{F3E0445D-6120-B7A6-8C93-5DFA859689ED}"/>
-              </a:ext>
-            </a:extLst>
-          </p:cNvPr>
-          <p:cNvSpPr>
-            <a:spLocks noGrp="1"/>
-          </p:cNvSpPr>
-          <p:nvPr>
-            <p:ph idx="1"/>
-          </p:nvPr>
-        </p:nvSpPr>
-        <p:spPr>
-          <a:xfrm>
-            <a:off x="1313243" y="2248604"/>
-            <a:ext cx="4889983" cy="1180396"/>
-          </a:xfrm>
-        </p:spPr>
-        <p:txBody>
-          <a:bodyPr>
-            <a:normAutofit/>
-          </a:bodyPr>
-          <a:lstStyle/>
-          <a:p>
-            <a:pPr marL="0" indent="0" algn="l">
-              <a:lnSpc>
-                <a:spcPct val="100000"/>
-              </a:lnSpc>
-              <a:buNone/>
-            </a:pPr>
-            <a:r>
-              <a:rPr lang="ko-KR" altLang="en-US" sz="1800" b="1" i="0">
-                <a:effectLst/>
-                <a:latin typeface="Noto Sans KR"/>
-              </a:rPr>
-              <a:t>현대인 식생활 문제 심화</a:t>
-            </a:r>
-          </a:p>
-          <a:p>
-            <a:pPr marL="0" indent="0">
-              <a:lnSpc>
-                <a:spcPct val="150000"/>
-              </a:lnSpc>
-              <a:buNone/>
-            </a:pPr>
-            <a:r>
-              <a:rPr lang="ko-KR" altLang="en-US" sz="1400" b="0" i="0">
-                <a:solidFill>
-                  <a:schemeClr val="tx1">
-                    <a:lumMod val="75000"/>
-                    <a:lumOff val="25000"/>
-                  </a:schemeClr>
-                </a:solidFill>
-                <a:effectLst/>
-                <a:latin typeface="Noto Sans KR"/>
-              </a:rPr>
-              <a:t>외식 및 가공식품 섭취로</a:t>
-            </a:r>
-            <a:r>
-              <a:rPr lang="ko-KR" altLang="en-US" sz="1400" b="1" i="0">
-                <a:solidFill>
-                  <a:schemeClr val="tx1">
-                    <a:lumMod val="75000"/>
-                    <a:lumOff val="25000"/>
-                  </a:schemeClr>
-                </a:solidFill>
-                <a:effectLst/>
-                <a:latin typeface="Noto Sans KR"/>
-              </a:rPr>
-              <a:t> </a:t>
-            </a:r>
-            <a:r>
-              <a:rPr lang="ko-KR" altLang="en-US" sz="1600" b="1" i="0">
-                <a:effectLst/>
-                <a:latin typeface="Noto Sans KR"/>
-              </a:rPr>
-              <a:t>지방</a:t>
-            </a:r>
-            <a:r>
-              <a:rPr lang="en-US" altLang="ko-KR" sz="1600" b="1" i="0">
-                <a:effectLst/>
-                <a:latin typeface="Noto Sans KR"/>
-              </a:rPr>
-              <a:t>, </a:t>
-            </a:r>
-            <a:r>
-              <a:rPr lang="ko-KR" altLang="en-US" sz="1600" b="1" i="0">
-                <a:effectLst/>
-                <a:latin typeface="Noto Sans KR"/>
-              </a:rPr>
-              <a:t>당류</a:t>
-            </a:r>
-            <a:r>
-              <a:rPr lang="en-US" altLang="ko-KR" sz="1600" b="1" i="0">
-                <a:effectLst/>
-                <a:latin typeface="Noto Sans KR"/>
-              </a:rPr>
-              <a:t>, </a:t>
-            </a:r>
-            <a:r>
-              <a:rPr lang="ko-KR" altLang="en-US" sz="1600" b="1" i="0">
-                <a:effectLst/>
-                <a:latin typeface="Noto Sans KR"/>
-              </a:rPr>
-              <a:t>나트륨의 과잉 섭취</a:t>
-            </a:r>
-            <a:r>
-              <a:rPr lang="ko-KR" altLang="en-US" sz="1400" i="0">
-                <a:solidFill>
-                  <a:schemeClr val="tx1">
-                    <a:lumMod val="75000"/>
-                    <a:lumOff val="25000"/>
-                  </a:schemeClr>
-                </a:solidFill>
-                <a:effectLst/>
-                <a:latin typeface="Noto Sans KR"/>
-              </a:rPr>
-              <a:t>가</a:t>
-            </a:r>
-            <a:r>
-              <a:rPr lang="ko-KR" altLang="en-US" sz="1400" b="1" i="0">
-                <a:solidFill>
-                  <a:schemeClr val="tx1">
-                    <a:lumMod val="75000"/>
-                    <a:lumOff val="25000"/>
-                  </a:schemeClr>
-                </a:solidFill>
-                <a:effectLst/>
-                <a:latin typeface="Noto Sans KR"/>
-              </a:rPr>
-              <a:t> </a:t>
-            </a:r>
-            <a:r>
-              <a:rPr lang="ko-KR" altLang="en-US" sz="1400" b="0" i="0">
-                <a:solidFill>
-                  <a:schemeClr val="tx1">
-                    <a:lumMod val="75000"/>
-                    <a:lumOff val="25000"/>
-                  </a:schemeClr>
-                </a:solidFill>
-                <a:effectLst/>
-                <a:latin typeface="Noto Sans KR"/>
-              </a:rPr>
-              <a:t>일상화되어 심각한 영양 불균형 초래</a:t>
-            </a:r>
-            <a:endParaRPr lang="ko-KR" altLang="en-US" sz="1400">
-              <a:solidFill>
-                <a:schemeClr val="tx1">
-                  <a:lumMod val="75000"/>
-                  <a:lumOff val="25000"/>
-                </a:schemeClr>
-              </a:solidFill>
-            </a:endParaRPr>
-          </a:p>
-        </p:txBody>
-      </p:sp>
-      <p:pic>
-        <p:nvPicPr>
-          <p:cNvPr id="10" name="그림 9" descr="블랙, 어둠이(가) 표시된 사진&#10;&#10;AI가 생성한 콘텐츠는 부정확할 수 있습니다.">
-            <a:extLst>
-              <a:ext uri="{FF2B5EF4-FFF2-40B4-BE49-F238E27FC236}">
-                <a16:creationId xmlns:a16="http://schemas.microsoft.com/office/drawing/2014/main" id="{C0E1470B-2FAA-6645-115D-938C838B9EC8}"/>
+                <a16:creationId xmlns:a16="http://schemas.microsoft.com/office/drawing/2014/main" id="{9698F1AE-2535-C086-85FF-13648D650D9B}"/>
               </a:ext>
             </a:extLst>
           </p:cNvPr>
@@ -6077,714 +5012,20 @@
         </p:blipFill>
         <p:spPr>
           <a:xfrm>
-            <a:off x="603253" y="2497142"/>
-            <a:ext cx="468000" cy="468000"/>
-          </a:xfrm>
-          <a:prstGeom prst="rect">
-            <a:avLst/>
-          </a:prstGeom>
-          <a:ln w="12700" cap="rnd">
-            <a:noFill/>
-            <a:prstDash val="solid"/>
-            <a:round/>
-            <a:extLst>
-              <a:ext uri="{C807C97D-BFC1-408E-A445-0C87EB9F89A2}">
-                <ask:lineSketchStyleProps xmlns:ask="http://schemas.microsoft.com/office/drawing/2018/sketchyshapes" sd="1219033472">
-                  <a:custGeom>
-                    <a:avLst/>
-                    <a:gdLst>
-                      <a:gd name="connsiteX0" fmla="*/ 0 w 4161662"/>
-                      <a:gd name="connsiteY0" fmla="*/ 0 h 4161662"/>
-                      <a:gd name="connsiteX1" fmla="*/ 677756 w 4161662"/>
-                      <a:gd name="connsiteY1" fmla="*/ 0 h 4161662"/>
-                      <a:gd name="connsiteX2" fmla="*/ 1355513 w 4161662"/>
-                      <a:gd name="connsiteY2" fmla="*/ 0 h 4161662"/>
-                      <a:gd name="connsiteX3" fmla="*/ 1950036 w 4161662"/>
-                      <a:gd name="connsiteY3" fmla="*/ 0 h 4161662"/>
-                      <a:gd name="connsiteX4" fmla="*/ 2586176 w 4161662"/>
-                      <a:gd name="connsiteY4" fmla="*/ 0 h 4161662"/>
-                      <a:gd name="connsiteX5" fmla="*/ 3139082 w 4161662"/>
-                      <a:gd name="connsiteY5" fmla="*/ 0 h 4161662"/>
-                      <a:gd name="connsiteX6" fmla="*/ 4161662 w 4161662"/>
-                      <a:gd name="connsiteY6" fmla="*/ 0 h 4161662"/>
-                      <a:gd name="connsiteX7" fmla="*/ 4161662 w 4161662"/>
-                      <a:gd name="connsiteY7" fmla="*/ 677756 h 4161662"/>
-                      <a:gd name="connsiteX8" fmla="*/ 4161662 w 4161662"/>
-                      <a:gd name="connsiteY8" fmla="*/ 1189046 h 4161662"/>
-                      <a:gd name="connsiteX9" fmla="*/ 4161662 w 4161662"/>
-                      <a:gd name="connsiteY9" fmla="*/ 1658720 h 4161662"/>
-                      <a:gd name="connsiteX10" fmla="*/ 4161662 w 4161662"/>
-                      <a:gd name="connsiteY10" fmla="*/ 2170009 h 4161662"/>
-                      <a:gd name="connsiteX11" fmla="*/ 4161662 w 4161662"/>
-                      <a:gd name="connsiteY11" fmla="*/ 2722916 h 4161662"/>
-                      <a:gd name="connsiteX12" fmla="*/ 4161662 w 4161662"/>
-                      <a:gd name="connsiteY12" fmla="*/ 3317439 h 4161662"/>
-                      <a:gd name="connsiteX13" fmla="*/ 4161662 w 4161662"/>
-                      <a:gd name="connsiteY13" fmla="*/ 4161662 h 4161662"/>
-                      <a:gd name="connsiteX14" fmla="*/ 3483906 w 4161662"/>
-                      <a:gd name="connsiteY14" fmla="*/ 4161662 h 4161662"/>
-                      <a:gd name="connsiteX15" fmla="*/ 2889382 w 4161662"/>
-                      <a:gd name="connsiteY15" fmla="*/ 4161662 h 4161662"/>
-                      <a:gd name="connsiteX16" fmla="*/ 2294859 w 4161662"/>
-                      <a:gd name="connsiteY16" fmla="*/ 4161662 h 4161662"/>
-                      <a:gd name="connsiteX17" fmla="*/ 1700336 w 4161662"/>
-                      <a:gd name="connsiteY17" fmla="*/ 4161662 h 4161662"/>
-                      <a:gd name="connsiteX18" fmla="*/ 1105813 w 4161662"/>
-                      <a:gd name="connsiteY18" fmla="*/ 4161662 h 4161662"/>
-                      <a:gd name="connsiteX19" fmla="*/ 552907 w 4161662"/>
-                      <a:gd name="connsiteY19" fmla="*/ 4161662 h 4161662"/>
-                      <a:gd name="connsiteX20" fmla="*/ 0 w 4161662"/>
-                      <a:gd name="connsiteY20" fmla="*/ 4161662 h 4161662"/>
-                      <a:gd name="connsiteX21" fmla="*/ 0 w 4161662"/>
-                      <a:gd name="connsiteY21" fmla="*/ 3567139 h 4161662"/>
-                      <a:gd name="connsiteX22" fmla="*/ 0 w 4161662"/>
-                      <a:gd name="connsiteY22" fmla="*/ 2930999 h 4161662"/>
-                      <a:gd name="connsiteX23" fmla="*/ 0 w 4161662"/>
-                      <a:gd name="connsiteY23" fmla="*/ 2294859 h 4161662"/>
-                      <a:gd name="connsiteX24" fmla="*/ 0 w 4161662"/>
-                      <a:gd name="connsiteY24" fmla="*/ 1617103 h 4161662"/>
-                      <a:gd name="connsiteX25" fmla="*/ 0 w 4161662"/>
-                      <a:gd name="connsiteY25" fmla="*/ 1022580 h 4161662"/>
-                      <a:gd name="connsiteX26" fmla="*/ 0 w 4161662"/>
-                      <a:gd name="connsiteY26" fmla="*/ 0 h 4161662"/>
-                    </a:gdLst>
-                    <a:ahLst/>
-                    <a:cxnLst>
-                      <a:cxn ang="0">
-                        <a:pos x="connsiteX0" y="connsiteY0"/>
-                      </a:cxn>
-                      <a:cxn ang="0">
-                        <a:pos x="connsiteX1" y="connsiteY1"/>
-                      </a:cxn>
-                      <a:cxn ang="0">
-                        <a:pos x="connsiteX2" y="connsiteY2"/>
-                      </a:cxn>
-                      <a:cxn ang="0">
-                        <a:pos x="connsiteX3" y="connsiteY3"/>
-                      </a:cxn>
-                      <a:cxn ang="0">
-                        <a:pos x="connsiteX4" y="connsiteY4"/>
-                      </a:cxn>
-                      <a:cxn ang="0">
-                        <a:pos x="connsiteX5" y="connsiteY5"/>
-                      </a:cxn>
-                      <a:cxn ang="0">
-                        <a:pos x="connsiteX6" y="connsiteY6"/>
-                      </a:cxn>
-                      <a:cxn ang="0">
-                        <a:pos x="connsiteX7" y="connsiteY7"/>
-                      </a:cxn>
-                      <a:cxn ang="0">
-                        <a:pos x="connsiteX8" y="connsiteY8"/>
-                      </a:cxn>
-                      <a:cxn ang="0">
-                        <a:pos x="connsiteX9" y="connsiteY9"/>
-                      </a:cxn>
-                      <a:cxn ang="0">
-                        <a:pos x="connsiteX10" y="connsiteY10"/>
-                      </a:cxn>
-                      <a:cxn ang="0">
-                        <a:pos x="connsiteX11" y="connsiteY11"/>
-                      </a:cxn>
-                      <a:cxn ang="0">
-                        <a:pos x="connsiteX12" y="connsiteY12"/>
-                      </a:cxn>
-                      <a:cxn ang="0">
-                        <a:pos x="connsiteX13" y="connsiteY13"/>
-                      </a:cxn>
-                      <a:cxn ang="0">
-                        <a:pos x="connsiteX14" y="connsiteY14"/>
-                      </a:cxn>
-                      <a:cxn ang="0">
-                        <a:pos x="connsiteX15" y="connsiteY15"/>
-                      </a:cxn>
-                      <a:cxn ang="0">
-                        <a:pos x="connsiteX16" y="connsiteY16"/>
-                      </a:cxn>
-                      <a:cxn ang="0">
-                        <a:pos x="connsiteX17" y="connsiteY17"/>
-                      </a:cxn>
-                      <a:cxn ang="0">
-                        <a:pos x="connsiteX18" y="connsiteY18"/>
-                      </a:cxn>
-                      <a:cxn ang="0">
-                        <a:pos x="connsiteX19" y="connsiteY19"/>
-                      </a:cxn>
-                      <a:cxn ang="0">
-                        <a:pos x="connsiteX20" y="connsiteY20"/>
-                      </a:cxn>
-                      <a:cxn ang="0">
-                        <a:pos x="connsiteX21" y="connsiteY21"/>
-                      </a:cxn>
-                      <a:cxn ang="0">
-                        <a:pos x="connsiteX22" y="connsiteY22"/>
-                      </a:cxn>
-                      <a:cxn ang="0">
-                        <a:pos x="connsiteX23" y="connsiteY23"/>
-                      </a:cxn>
-                      <a:cxn ang="0">
-                        <a:pos x="connsiteX24" y="connsiteY24"/>
-                      </a:cxn>
-                      <a:cxn ang="0">
-                        <a:pos x="connsiteX25" y="connsiteY25"/>
-                      </a:cxn>
-                      <a:cxn ang="0">
-                        <a:pos x="connsiteX26" y="connsiteY26"/>
-                      </a:cxn>
-                    </a:cxnLst>
-                    <a:rect l="l" t="t" r="r" b="b"/>
-                    <a:pathLst>
-                      <a:path w="4161662" h="4161662" fill="none" extrusionOk="0">
-                        <a:moveTo>
-                          <a:pt x="0" y="0"/>
-                        </a:moveTo>
-                        <a:cubicBezTo>
-                          <a:pt x="146926" y="-49179"/>
-                          <a:pt x="423112" y="76956"/>
-                          <a:pt x="677756" y="0"/>
-                        </a:cubicBezTo>
-                        <a:cubicBezTo>
-                          <a:pt x="932400" y="-76956"/>
-                          <a:pt x="1175110" y="63608"/>
-                          <a:pt x="1355513" y="0"/>
-                        </a:cubicBezTo>
-                        <a:cubicBezTo>
-                          <a:pt x="1535916" y="-63608"/>
-                          <a:pt x="1693715" y="59913"/>
-                          <a:pt x="1950036" y="0"/>
-                        </a:cubicBezTo>
-                        <a:cubicBezTo>
-                          <a:pt x="2206357" y="-59913"/>
-                          <a:pt x="2440393" y="51885"/>
-                          <a:pt x="2586176" y="0"/>
-                        </a:cubicBezTo>
-                        <a:cubicBezTo>
-                          <a:pt x="2731959" y="-51885"/>
-                          <a:pt x="2897339" y="11509"/>
-                          <a:pt x="3139082" y="0"/>
-                        </a:cubicBezTo>
-                        <a:cubicBezTo>
-                          <a:pt x="3380825" y="-11509"/>
-                          <a:pt x="3850267" y="92030"/>
-                          <a:pt x="4161662" y="0"/>
-                        </a:cubicBezTo>
-                        <a:cubicBezTo>
-                          <a:pt x="4193447" y="244183"/>
-                          <a:pt x="4113423" y="380579"/>
-                          <a:pt x="4161662" y="677756"/>
-                        </a:cubicBezTo>
-                        <a:cubicBezTo>
-                          <a:pt x="4209901" y="974933"/>
-                          <a:pt x="4133575" y="1077025"/>
-                          <a:pt x="4161662" y="1189046"/>
-                        </a:cubicBezTo>
-                        <a:cubicBezTo>
-                          <a:pt x="4189749" y="1301067"/>
-                          <a:pt x="4136844" y="1473854"/>
-                          <a:pt x="4161662" y="1658720"/>
-                        </a:cubicBezTo>
-                        <a:cubicBezTo>
-                          <a:pt x="4186480" y="1843586"/>
-                          <a:pt x="4102672" y="2024012"/>
-                          <a:pt x="4161662" y="2170009"/>
-                        </a:cubicBezTo>
-                        <a:cubicBezTo>
-                          <a:pt x="4220652" y="2316006"/>
-                          <a:pt x="4114940" y="2588273"/>
-                          <a:pt x="4161662" y="2722916"/>
-                        </a:cubicBezTo>
-                        <a:cubicBezTo>
-                          <a:pt x="4208384" y="2857559"/>
-                          <a:pt x="4135370" y="3085759"/>
-                          <a:pt x="4161662" y="3317439"/>
-                        </a:cubicBezTo>
-                        <a:cubicBezTo>
-                          <a:pt x="4187954" y="3549119"/>
-                          <a:pt x="4106061" y="3795915"/>
-                          <a:pt x="4161662" y="4161662"/>
-                        </a:cubicBezTo>
-                        <a:cubicBezTo>
-                          <a:pt x="4013904" y="4228695"/>
-                          <a:pt x="3630628" y="4080432"/>
-                          <a:pt x="3483906" y="4161662"/>
-                        </a:cubicBezTo>
-                        <a:cubicBezTo>
-                          <a:pt x="3337184" y="4242892"/>
-                          <a:pt x="3078083" y="4157000"/>
-                          <a:pt x="2889382" y="4161662"/>
-                        </a:cubicBezTo>
-                        <a:cubicBezTo>
-                          <a:pt x="2700681" y="4166324"/>
-                          <a:pt x="2475360" y="4157994"/>
-                          <a:pt x="2294859" y="4161662"/>
-                        </a:cubicBezTo>
-                        <a:cubicBezTo>
-                          <a:pt x="2114358" y="4165330"/>
-                          <a:pt x="1843668" y="4160905"/>
-                          <a:pt x="1700336" y="4161662"/>
-                        </a:cubicBezTo>
-                        <a:cubicBezTo>
-                          <a:pt x="1557004" y="4162419"/>
-                          <a:pt x="1243994" y="4154280"/>
-                          <a:pt x="1105813" y="4161662"/>
-                        </a:cubicBezTo>
-                        <a:cubicBezTo>
-                          <a:pt x="967632" y="4169044"/>
-                          <a:pt x="828129" y="4157753"/>
-                          <a:pt x="552907" y="4161662"/>
-                        </a:cubicBezTo>
-                        <a:cubicBezTo>
-                          <a:pt x="277685" y="4165571"/>
-                          <a:pt x="178676" y="4096086"/>
-                          <a:pt x="0" y="4161662"/>
-                        </a:cubicBezTo>
-                        <a:cubicBezTo>
-                          <a:pt x="-14981" y="3992741"/>
-                          <a:pt x="37689" y="3797757"/>
-                          <a:pt x="0" y="3567139"/>
-                        </a:cubicBezTo>
-                        <a:cubicBezTo>
-                          <a:pt x="-37689" y="3336521"/>
-                          <a:pt x="27091" y="3228718"/>
-                          <a:pt x="0" y="2930999"/>
-                        </a:cubicBezTo>
-                        <a:cubicBezTo>
-                          <a:pt x="-27091" y="2633280"/>
-                          <a:pt x="43696" y="2510108"/>
-                          <a:pt x="0" y="2294859"/>
-                        </a:cubicBezTo>
-                        <a:cubicBezTo>
-                          <a:pt x="-43696" y="2079610"/>
-                          <a:pt x="4052" y="1817541"/>
-                          <a:pt x="0" y="1617103"/>
-                        </a:cubicBezTo>
-                        <a:cubicBezTo>
-                          <a:pt x="-4052" y="1416665"/>
-                          <a:pt x="40187" y="1175011"/>
-                          <a:pt x="0" y="1022580"/>
-                        </a:cubicBezTo>
-                        <a:cubicBezTo>
-                          <a:pt x="-40187" y="870149"/>
-                          <a:pt x="26983" y="470975"/>
-                          <a:pt x="0" y="0"/>
-                        </a:cubicBezTo>
-                        <a:close/>
-                      </a:path>
-                      <a:path w="4161662" h="4161662" stroke="0" extrusionOk="0">
-                        <a:moveTo>
-                          <a:pt x="0" y="0"/>
-                        </a:moveTo>
-                        <a:cubicBezTo>
-                          <a:pt x="161768" y="-46457"/>
-                          <a:pt x="364502" y="48232"/>
-                          <a:pt x="552907" y="0"/>
-                        </a:cubicBezTo>
-                        <a:cubicBezTo>
-                          <a:pt x="741312" y="-48232"/>
-                          <a:pt x="901010" y="47903"/>
-                          <a:pt x="1022580" y="0"/>
-                        </a:cubicBezTo>
-                        <a:cubicBezTo>
-                          <a:pt x="1144150" y="-47903"/>
-                          <a:pt x="1425180" y="53507"/>
-                          <a:pt x="1700336" y="0"/>
-                        </a:cubicBezTo>
-                        <a:cubicBezTo>
-                          <a:pt x="1975492" y="-53507"/>
-                          <a:pt x="2028110" y="7650"/>
-                          <a:pt x="2253243" y="0"/>
-                        </a:cubicBezTo>
-                        <a:cubicBezTo>
-                          <a:pt x="2478376" y="-7650"/>
-                          <a:pt x="2628386" y="50070"/>
-                          <a:pt x="2806149" y="0"/>
-                        </a:cubicBezTo>
-                        <a:cubicBezTo>
-                          <a:pt x="2983912" y="-50070"/>
-                          <a:pt x="3193663" y="51605"/>
-                          <a:pt x="3483906" y="0"/>
-                        </a:cubicBezTo>
-                        <a:cubicBezTo>
-                          <a:pt x="3774149" y="-51605"/>
-                          <a:pt x="3855060" y="61047"/>
-                          <a:pt x="4161662" y="0"/>
-                        </a:cubicBezTo>
-                        <a:cubicBezTo>
-                          <a:pt x="4214231" y="324916"/>
-                          <a:pt x="4140513" y="417896"/>
-                          <a:pt x="4161662" y="677756"/>
-                        </a:cubicBezTo>
-                        <a:cubicBezTo>
-                          <a:pt x="4182811" y="937616"/>
-                          <a:pt x="4143716" y="959576"/>
-                          <a:pt x="4161662" y="1189046"/>
-                        </a:cubicBezTo>
-                        <a:cubicBezTo>
-                          <a:pt x="4179608" y="1418516"/>
-                          <a:pt x="4105787" y="1527198"/>
-                          <a:pt x="4161662" y="1700336"/>
-                        </a:cubicBezTo>
-                        <a:cubicBezTo>
-                          <a:pt x="4217537" y="1873474"/>
-                          <a:pt x="4155444" y="2157875"/>
-                          <a:pt x="4161662" y="2294859"/>
-                        </a:cubicBezTo>
-                        <a:cubicBezTo>
-                          <a:pt x="4167880" y="2431843"/>
-                          <a:pt x="4130736" y="2718138"/>
-                          <a:pt x="4161662" y="2930999"/>
-                        </a:cubicBezTo>
-                        <a:cubicBezTo>
-                          <a:pt x="4192588" y="3143860"/>
-                          <a:pt x="4160212" y="3219224"/>
-                          <a:pt x="4161662" y="3400672"/>
-                        </a:cubicBezTo>
-                        <a:cubicBezTo>
-                          <a:pt x="4163112" y="3582120"/>
-                          <a:pt x="4094120" y="3802505"/>
-                          <a:pt x="4161662" y="4161662"/>
-                        </a:cubicBezTo>
-                        <a:cubicBezTo>
-                          <a:pt x="3921811" y="4166974"/>
-                          <a:pt x="3722507" y="4142918"/>
-                          <a:pt x="3567139" y="4161662"/>
-                        </a:cubicBezTo>
-                        <a:cubicBezTo>
-                          <a:pt x="3411771" y="4180406"/>
-                          <a:pt x="3120016" y="4136184"/>
-                          <a:pt x="2972616" y="4161662"/>
-                        </a:cubicBezTo>
-                        <a:cubicBezTo>
-                          <a:pt x="2825216" y="4187140"/>
-                          <a:pt x="2543113" y="4110598"/>
-                          <a:pt x="2294859" y="4161662"/>
-                        </a:cubicBezTo>
-                        <a:cubicBezTo>
-                          <a:pt x="2046605" y="4212726"/>
-                          <a:pt x="1981969" y="4133006"/>
-                          <a:pt x="1700336" y="4161662"/>
-                        </a:cubicBezTo>
-                        <a:cubicBezTo>
-                          <a:pt x="1418703" y="4190318"/>
-                          <a:pt x="1354265" y="4106015"/>
-                          <a:pt x="1230663" y="4161662"/>
-                        </a:cubicBezTo>
-                        <a:cubicBezTo>
-                          <a:pt x="1107061" y="4217309"/>
-                          <a:pt x="957609" y="4118690"/>
-                          <a:pt x="719373" y="4161662"/>
-                        </a:cubicBezTo>
-                        <a:cubicBezTo>
-                          <a:pt x="481137" y="4204634"/>
-                          <a:pt x="167330" y="4156625"/>
-                          <a:pt x="0" y="4161662"/>
-                        </a:cubicBezTo>
-                        <a:cubicBezTo>
-                          <a:pt x="-65854" y="3896313"/>
-                          <a:pt x="16740" y="3726990"/>
-                          <a:pt x="0" y="3567139"/>
-                        </a:cubicBezTo>
-                        <a:cubicBezTo>
-                          <a:pt x="-16740" y="3407288"/>
-                          <a:pt x="21521" y="3243218"/>
-                          <a:pt x="0" y="2972616"/>
-                        </a:cubicBezTo>
-                        <a:cubicBezTo>
-                          <a:pt x="-21521" y="2702014"/>
-                          <a:pt x="8046" y="2679564"/>
-                          <a:pt x="0" y="2419709"/>
-                        </a:cubicBezTo>
-                        <a:cubicBezTo>
-                          <a:pt x="-8046" y="2159854"/>
-                          <a:pt x="4077" y="2143863"/>
-                          <a:pt x="0" y="1950036"/>
-                        </a:cubicBezTo>
-                        <a:cubicBezTo>
-                          <a:pt x="-4077" y="1756209"/>
-                          <a:pt x="49112" y="1658208"/>
-                          <a:pt x="0" y="1480363"/>
-                        </a:cubicBezTo>
-                        <a:cubicBezTo>
-                          <a:pt x="-49112" y="1302518"/>
-                          <a:pt x="59946" y="1077805"/>
-                          <a:pt x="0" y="844223"/>
-                        </a:cubicBezTo>
-                        <a:cubicBezTo>
-                          <a:pt x="-59946" y="610641"/>
-                          <a:pt x="86630" y="409246"/>
-                          <a:pt x="0" y="0"/>
-                        </a:cubicBezTo>
-                        <a:close/>
-                      </a:path>
-                    </a:pathLst>
-                  </a:custGeom>
-                  <ask:type>
-                    <ask:lineSketchNone/>
-                  </ask:type>
-                </ask:lineSketchStyleProps>
-              </a:ext>
-            </a:extLst>
-          </a:ln>
-        </p:spPr>
-      </p:pic>
-      <p:sp>
-        <p:nvSpPr>
-          <p:cNvPr id="12" name="내용 개체 틀 2">
-            <a:extLst>
-              <a:ext uri="{FF2B5EF4-FFF2-40B4-BE49-F238E27FC236}">
-                <a16:creationId xmlns:a16="http://schemas.microsoft.com/office/drawing/2014/main" id="{6F9FC355-108D-229C-8C47-754079D811C4}"/>
-              </a:ext>
-            </a:extLst>
-          </p:cNvPr>
-          <p:cNvSpPr txBox="1">
-            <a:spLocks/>
-          </p:cNvSpPr>
-          <p:nvPr/>
-        </p:nvSpPr>
-        <p:spPr>
-          <a:xfrm>
-            <a:off x="1313244" y="4813418"/>
-            <a:ext cx="4452226" cy="1375687"/>
+            <a:off x="5768010" y="4805543"/>
+            <a:ext cx="5121554" cy="1392647"/>
           </a:xfrm>
           <a:prstGeom prst="rect">
             <a:avLst/>
           </a:prstGeom>
         </p:spPr>
-        <p:txBody>
-          <a:bodyPr vert="horz" lIns="91440" tIns="45720" rIns="91440" bIns="45720" rtlCol="0">
-            <a:normAutofit/>
-          </a:bodyPr>
-          <a:lstStyle>
-            <a:lvl1pPr marL="228600" indent="-228600" algn="l" defTabSz="914400" rtl="0" eaLnBrk="1" latinLnBrk="1" hangingPunct="1">
-              <a:lnSpc>
-                <a:spcPct val="90000"/>
-              </a:lnSpc>
-              <a:spcBef>
-                <a:spcPts val="1000"/>
-              </a:spcBef>
-              <a:buFont typeface="Arial" panose="020B0604020202020204" pitchFamily="34" charset="0"/>
-              <a:buChar char="•"/>
-              <a:defRPr sz="2800" kern="1200">
-                <a:solidFill>
-                  <a:schemeClr val="tx1"/>
-                </a:solidFill>
-                <a:latin typeface="+mn-lt"/>
-                <a:ea typeface="+mn-ea"/>
-                <a:cs typeface="+mn-cs"/>
-              </a:defRPr>
-            </a:lvl1pPr>
-            <a:lvl2pPr marL="685800" indent="-228600" algn="l" defTabSz="914400" rtl="0" eaLnBrk="1" latinLnBrk="1" hangingPunct="1">
-              <a:lnSpc>
-                <a:spcPct val="90000"/>
-              </a:lnSpc>
-              <a:spcBef>
-                <a:spcPts val="500"/>
-              </a:spcBef>
-              <a:buFont typeface="Arial" panose="020B0604020202020204" pitchFamily="34" charset="0"/>
-              <a:buChar char="•"/>
-              <a:defRPr sz="2400" kern="1200">
-                <a:solidFill>
-                  <a:schemeClr val="tx1"/>
-                </a:solidFill>
-                <a:latin typeface="+mn-lt"/>
-                <a:ea typeface="+mn-ea"/>
-                <a:cs typeface="+mn-cs"/>
-              </a:defRPr>
-            </a:lvl2pPr>
-            <a:lvl3pPr marL="1143000" indent="-228600" algn="l" defTabSz="914400" rtl="0" eaLnBrk="1" latinLnBrk="1" hangingPunct="1">
-              <a:lnSpc>
-                <a:spcPct val="90000"/>
-              </a:lnSpc>
-              <a:spcBef>
-                <a:spcPts val="500"/>
-              </a:spcBef>
-              <a:buFont typeface="Arial" panose="020B0604020202020204" pitchFamily="34" charset="0"/>
-              <a:buChar char="•"/>
-              <a:defRPr sz="2000" kern="1200">
-                <a:solidFill>
-                  <a:schemeClr val="tx1"/>
-                </a:solidFill>
-                <a:latin typeface="+mn-lt"/>
-                <a:ea typeface="+mn-ea"/>
-                <a:cs typeface="+mn-cs"/>
-              </a:defRPr>
-            </a:lvl3pPr>
-            <a:lvl4pPr marL="1600200" indent="-228600" algn="l" defTabSz="914400" rtl="0" eaLnBrk="1" latinLnBrk="1" hangingPunct="1">
-              <a:lnSpc>
-                <a:spcPct val="90000"/>
-              </a:lnSpc>
-              <a:spcBef>
-                <a:spcPts val="500"/>
-              </a:spcBef>
-              <a:buFont typeface="Arial" panose="020B0604020202020204" pitchFamily="34" charset="0"/>
-              <a:buChar char="•"/>
-              <a:defRPr sz="1800" kern="1200">
-                <a:solidFill>
-                  <a:schemeClr val="tx1"/>
-                </a:solidFill>
-                <a:latin typeface="+mn-lt"/>
-                <a:ea typeface="+mn-ea"/>
-                <a:cs typeface="+mn-cs"/>
-              </a:defRPr>
-            </a:lvl4pPr>
-            <a:lvl5pPr marL="2057400" indent="-228600" algn="l" defTabSz="914400" rtl="0" eaLnBrk="1" latinLnBrk="1" hangingPunct="1">
-              <a:lnSpc>
-                <a:spcPct val="90000"/>
-              </a:lnSpc>
-              <a:spcBef>
-                <a:spcPts val="500"/>
-              </a:spcBef>
-              <a:buFont typeface="Arial" panose="020B0604020202020204" pitchFamily="34" charset="0"/>
-              <a:buChar char="•"/>
-              <a:defRPr sz="1800" kern="1200">
-                <a:solidFill>
-                  <a:schemeClr val="tx1"/>
-                </a:solidFill>
-                <a:latin typeface="+mn-lt"/>
-                <a:ea typeface="+mn-ea"/>
-                <a:cs typeface="+mn-cs"/>
-              </a:defRPr>
-            </a:lvl5pPr>
-            <a:lvl6pPr marL="2514600" indent="-228600" algn="l" defTabSz="914400" rtl="0" eaLnBrk="1" latinLnBrk="1" hangingPunct="1">
-              <a:lnSpc>
-                <a:spcPct val="90000"/>
-              </a:lnSpc>
-              <a:spcBef>
-                <a:spcPts val="500"/>
-              </a:spcBef>
-              <a:buFont typeface="Arial" panose="020B0604020202020204" pitchFamily="34" charset="0"/>
-              <a:buChar char="•"/>
-              <a:defRPr sz="1800" kern="1200">
-                <a:solidFill>
-                  <a:schemeClr val="tx1"/>
-                </a:solidFill>
-                <a:latin typeface="+mn-lt"/>
-                <a:ea typeface="+mn-ea"/>
-                <a:cs typeface="+mn-cs"/>
-              </a:defRPr>
-            </a:lvl6pPr>
-            <a:lvl7pPr marL="2971800" indent="-228600" algn="l" defTabSz="914400" rtl="0" eaLnBrk="1" latinLnBrk="1" hangingPunct="1">
-              <a:lnSpc>
-                <a:spcPct val="90000"/>
-              </a:lnSpc>
-              <a:spcBef>
-                <a:spcPts val="500"/>
-              </a:spcBef>
-              <a:buFont typeface="Arial" panose="020B0604020202020204" pitchFamily="34" charset="0"/>
-              <a:buChar char="•"/>
-              <a:defRPr sz="1800" kern="1200">
-                <a:solidFill>
-                  <a:schemeClr val="tx1"/>
-                </a:solidFill>
-                <a:latin typeface="+mn-lt"/>
-                <a:ea typeface="+mn-ea"/>
-                <a:cs typeface="+mn-cs"/>
-              </a:defRPr>
-            </a:lvl7pPr>
-            <a:lvl8pPr marL="3429000" indent="-228600" algn="l" defTabSz="914400" rtl="0" eaLnBrk="1" latinLnBrk="1" hangingPunct="1">
-              <a:lnSpc>
-                <a:spcPct val="90000"/>
-              </a:lnSpc>
-              <a:spcBef>
-                <a:spcPts val="500"/>
-              </a:spcBef>
-              <a:buFont typeface="Arial" panose="020B0604020202020204" pitchFamily="34" charset="0"/>
-              <a:buChar char="•"/>
-              <a:defRPr sz="1800" kern="1200">
-                <a:solidFill>
-                  <a:schemeClr val="tx1"/>
-                </a:solidFill>
-                <a:latin typeface="+mn-lt"/>
-                <a:ea typeface="+mn-ea"/>
-                <a:cs typeface="+mn-cs"/>
-              </a:defRPr>
-            </a:lvl8pPr>
-            <a:lvl9pPr marL="3886200" indent="-228600" algn="l" defTabSz="914400" rtl="0" eaLnBrk="1" latinLnBrk="1" hangingPunct="1">
-              <a:lnSpc>
-                <a:spcPct val="90000"/>
-              </a:lnSpc>
-              <a:spcBef>
-                <a:spcPts val="500"/>
-              </a:spcBef>
-              <a:buFont typeface="Arial" panose="020B0604020202020204" pitchFamily="34" charset="0"/>
-              <a:buChar char="•"/>
-              <a:defRPr sz="1800" kern="1200">
-                <a:solidFill>
-                  <a:schemeClr val="tx1"/>
-                </a:solidFill>
-                <a:latin typeface="+mn-lt"/>
-                <a:ea typeface="+mn-ea"/>
-                <a:cs typeface="+mn-cs"/>
-              </a:defRPr>
-            </a:lvl9pPr>
-          </a:lstStyle>
-          <a:p>
-            <a:pPr marL="0" indent="0">
-              <a:buFont typeface="Arial" panose="020B0604020202020204" pitchFamily="34" charset="0"/>
-              <a:buNone/>
-            </a:pPr>
-            <a:r>
-              <a:rPr lang="ko-KR" altLang="en-US" sz="1800" b="1">
-                <a:latin typeface="Noto Sans KR"/>
-              </a:rPr>
-              <a:t>만성질환 위험 증가</a:t>
-            </a:r>
-          </a:p>
-          <a:p>
-            <a:pPr marL="0" indent="0">
-              <a:lnSpc>
-                <a:spcPct val="150000"/>
-              </a:lnSpc>
-              <a:buFont typeface="Arial" panose="020B0604020202020204" pitchFamily="34" charset="0"/>
-              <a:buNone/>
-            </a:pPr>
-            <a:r>
-              <a:rPr lang="ko-KR" altLang="en-US" sz="1400">
-                <a:solidFill>
-                  <a:schemeClr val="tx1">
-                    <a:lumMod val="75000"/>
-                    <a:lumOff val="25000"/>
-                  </a:schemeClr>
-                </a:solidFill>
-                <a:latin typeface="Noto Sans KR"/>
-              </a:rPr>
-              <a:t>잘못된 식습관으로 인해 </a:t>
-            </a:r>
-            <a:r>
-              <a:rPr lang="ko-KR" altLang="en-US" sz="1400" b="1">
-                <a:latin typeface="Noto Sans KR"/>
-              </a:rPr>
-              <a:t>고콜레스테롤혈증</a:t>
-            </a:r>
-            <a:r>
-              <a:rPr lang="ko-KR" altLang="en-US" sz="1400">
-                <a:solidFill>
-                  <a:schemeClr val="tx1">
-                    <a:lumMod val="75000"/>
-                    <a:lumOff val="25000"/>
-                  </a:schemeClr>
-                </a:solidFill>
-                <a:latin typeface="Noto Sans KR"/>
-              </a:rPr>
-              <a:t> 만성질환 유병률 증가</a:t>
-            </a:r>
-            <a:endParaRPr lang="ko-KR" altLang="en-US" sz="1400">
-              <a:solidFill>
-                <a:schemeClr val="tx1">
-                  <a:lumMod val="75000"/>
-                  <a:lumOff val="25000"/>
-                </a:schemeClr>
-              </a:solidFill>
-            </a:endParaRPr>
-          </a:p>
-        </p:txBody>
-      </p:sp>
+      </p:pic>
       <p:pic>
         <p:nvPicPr>
-          <p:cNvPr id="17" name="그림 16" descr="블랙, 어둠이(가) 표시된 사진&#10;&#10;AI가 생성한 콘텐츠는 부정확할 수 있습니다.">
+          <p:cNvPr id="14" name="그림 13" descr="텍스트, 폰트, 스크린샷, 대수학이(가) 표시된 사진&#10;&#10;AI가 생성한 콘텐츠는 부정확할 수 있습니다.">
             <a:extLst>
               <a:ext uri="{FF2B5EF4-FFF2-40B4-BE49-F238E27FC236}">
-                <a16:creationId xmlns:a16="http://schemas.microsoft.com/office/drawing/2014/main" id="{2D4F120A-9945-AF4B-0051-06D1126780D8}"/>
+                <a16:creationId xmlns:a16="http://schemas.microsoft.com/office/drawing/2014/main" id="{0E14F6A6-2746-F634-423E-B26B121875C2}"/>
               </a:ext>
             </a:extLst>
           </p:cNvPr>
@@ -6807,134 +5048,56 @@
         </p:blipFill>
         <p:spPr>
           <a:xfrm>
-            <a:off x="603253" y="5080397"/>
-            <a:ext cx="468000" cy="468000"/>
+            <a:off x="5768010" y="3324310"/>
+            <a:ext cx="5121553" cy="1481233"/>
           </a:xfrm>
           <a:prstGeom prst="rect">
             <a:avLst/>
           </a:prstGeom>
         </p:spPr>
       </p:pic>
-      <p:sp>
-        <p:nvSpPr>
-          <p:cNvPr id="4" name="직사각형 3">
+      <p:pic>
+        <p:nvPicPr>
+          <p:cNvPr id="17" name="그림 16" descr="텍스트, 폰트, 스크린샷이(가) 표시된 사진&#10;&#10;AI가 생성한 콘텐츠는 부정확할 수 있습니다.">
             <a:extLst>
               <a:ext uri="{FF2B5EF4-FFF2-40B4-BE49-F238E27FC236}">
-                <a16:creationId xmlns:a16="http://schemas.microsoft.com/office/drawing/2014/main" id="{9BD01A12-581E-B7EB-1FA7-940AA8F5F3A2}"/>
+                <a16:creationId xmlns:a16="http://schemas.microsoft.com/office/drawing/2014/main" id="{94026F65-1B13-3798-E2A4-D0BEE936F07C}"/>
               </a:ext>
             </a:extLst>
           </p:cNvPr>
-          <p:cNvSpPr/>
+          <p:cNvPicPr>
+            <a:picLocks noChangeAspect="1"/>
+          </p:cNvPicPr>
           <p:nvPr/>
-        </p:nvSpPr>
+        </p:nvPicPr>
+        <p:blipFill>
+          <a:blip r:embed="rId4">
+            <a:extLst>
+              <a:ext uri="{28A0092B-C50C-407E-A947-70E740481C1C}">
+                <a14:useLocalDpi xmlns:a14="http://schemas.microsoft.com/office/drawing/2010/main" val="0"/>
+              </a:ext>
+            </a:extLst>
+          </a:blip>
+          <a:stretch>
+            <a:fillRect/>
+          </a:stretch>
+        </p:blipFill>
         <p:spPr>
           <a:xfrm>
-            <a:off x="0" y="0"/>
-            <a:ext cx="12192000" cy="1180396"/>
+            <a:off x="5768011" y="1915525"/>
+            <a:ext cx="5121553" cy="1407757"/>
           </a:xfrm>
           <a:prstGeom prst="rect">
             <a:avLst/>
           </a:prstGeom>
-          <a:solidFill>
-            <a:schemeClr val="dk1">
-              <a:alpha val="80000"/>
-            </a:schemeClr>
-          </a:solidFill>
-          <a:ln>
-            <a:noFill/>
-          </a:ln>
         </p:spPr>
-        <p:style>
-          <a:lnRef idx="2">
-            <a:schemeClr val="dk1">
-              <a:shade val="15000"/>
-            </a:schemeClr>
-          </a:lnRef>
-          <a:fillRef idx="1">
-            <a:schemeClr val="dk1"/>
-          </a:fillRef>
-          <a:effectRef idx="0">
-            <a:schemeClr val="dk1"/>
-          </a:effectRef>
-          <a:fontRef idx="minor">
-            <a:schemeClr val="lt1"/>
-          </a:fontRef>
-        </p:style>
-        <p:txBody>
-          <a:bodyPr rtlCol="0" anchor="ctr"/>
-          <a:lstStyle/>
-          <a:p>
-            <a:endParaRPr lang="ko-KR" altLang="en-US"/>
-          </a:p>
-        </p:txBody>
-      </p:sp>
-      <p:sp>
-        <p:nvSpPr>
-          <p:cNvPr id="2" name="제목 1">
+      </p:pic>
+      <p:pic>
+        <p:nvPicPr>
+          <p:cNvPr id="1026" name="Picture 2">
             <a:extLst>
               <a:ext uri="{FF2B5EF4-FFF2-40B4-BE49-F238E27FC236}">
-                <a16:creationId xmlns:a16="http://schemas.microsoft.com/office/drawing/2014/main" id="{3085BA4F-DA62-4ACF-71F5-86330591C96A}"/>
-              </a:ext>
-            </a:extLst>
-          </p:cNvPr>
-          <p:cNvSpPr>
-            <a:spLocks noGrp="1"/>
-          </p:cNvSpPr>
-          <p:nvPr>
-            <p:ph type="title"/>
-          </p:nvPr>
-        </p:nvSpPr>
-        <p:spPr>
-          <a:xfrm>
-            <a:off x="603253" y="234292"/>
-            <a:ext cx="2009318" cy="946104"/>
-          </a:xfrm>
-        </p:spPr>
-        <p:txBody>
-          <a:bodyPr>
-            <a:normAutofit/>
-          </a:bodyPr>
-          <a:lstStyle/>
-          <a:p>
-            <a:r>
-              <a:rPr lang="ko-KR" altLang="en-US" sz="3200" b="1">
-                <a:solidFill>
-                  <a:schemeClr val="bg1"/>
-                </a:solidFill>
-              </a:rPr>
-              <a:t>기획의도</a:t>
-            </a:r>
-            <a:br>
-              <a:rPr lang="en-US" altLang="ko-KR" sz="3200" b="1"/>
-            </a:br>
-            <a:r>
-              <a:rPr lang="en-US" altLang="ko-KR" sz="1400" b="0" i="0">
-                <a:solidFill>
-                  <a:schemeClr val="bg1">
-                    <a:lumMod val="75000"/>
-                  </a:schemeClr>
-                </a:solidFill>
-                <a:effectLst/>
-                <a:latin typeface="Noto Sans KR"/>
-              </a:rPr>
-              <a:t>Background &amp; Purpose</a:t>
-            </a:r>
-            <a:endParaRPr lang="ko-KR" altLang="en-US" sz="1400" b="1">
-              <a:solidFill>
-                <a:schemeClr val="bg1">
-                  <a:lumMod val="75000"/>
-                </a:schemeClr>
-              </a:solidFill>
-            </a:endParaRPr>
-          </a:p>
-        </p:txBody>
-      </p:sp>
-      <p:pic>
-        <p:nvPicPr>
-          <p:cNvPr id="1034" name="Picture 10">
-            <a:extLst>
-              <a:ext uri="{FF2B5EF4-FFF2-40B4-BE49-F238E27FC236}">
-                <a16:creationId xmlns:a16="http://schemas.microsoft.com/office/drawing/2014/main" id="{9CA5E893-BE61-1B2C-5561-000A6EBB97A8}"/>
+                <a16:creationId xmlns:a16="http://schemas.microsoft.com/office/drawing/2014/main" id="{8D60B9FC-7435-EF43-5B54-C230574E2F1C}"/>
               </a:ext>
             </a:extLst>
           </p:cNvPr>
@@ -6944,7 +5107,7 @@
           <p:nvPr/>
         </p:nvPicPr>
         <p:blipFill>
-          <a:blip r:embed="rId4">
+          <a:blip r:embed="rId5">
             <a:extLst>
               <a:ext uri="{28A0092B-C50C-407E-A947-70E740481C1C}">
                 <a14:useLocalDpi xmlns:a14="http://schemas.microsoft.com/office/drawing/2010/main" val="0"/>
@@ -6958,8 +5121,8 @@
         </p:blipFill>
         <p:spPr bwMode="auto">
           <a:xfrm rot="5400000">
-            <a:off x="3288358" y="3758025"/>
-            <a:ext cx="396000" cy="396000"/>
+            <a:off x="2369057" y="3664056"/>
+            <a:ext cx="487026" cy="468000"/>
           </a:xfrm>
           <a:prstGeom prst="rect">
             <a:avLst/>
@@ -6976,188 +5139,10 @@
           </a:extLst>
         </p:spPr>
       </p:pic>
-      <p:pic>
-        <p:nvPicPr>
-          <p:cNvPr id="6" name="그림 5" descr="텍스트, 폰트, 스크린샷, 라인이(가) 표시된 사진&#10;&#10;AI가 생성한 콘텐츠는 부정확할 수 있습니다.">
-            <a:extLst>
-              <a:ext uri="{FF2B5EF4-FFF2-40B4-BE49-F238E27FC236}">
-                <a16:creationId xmlns:a16="http://schemas.microsoft.com/office/drawing/2014/main" id="{8ED0E3DF-A767-B1A3-C31A-CAA6D0ADDF38}"/>
-              </a:ext>
-            </a:extLst>
-          </p:cNvPr>
-          <p:cNvPicPr>
-            <a:picLocks noChangeAspect="1"/>
-          </p:cNvPicPr>
-          <p:nvPr/>
-        </p:nvPicPr>
-        <p:blipFill>
-          <a:blip r:embed="rId5">
-            <a:extLst>
-              <a:ext uri="{28A0092B-C50C-407E-A947-70E740481C1C}">
-                <a14:useLocalDpi xmlns:a14="http://schemas.microsoft.com/office/drawing/2010/main" val="0"/>
-              </a:ext>
-            </a:extLst>
-          </a:blip>
-          <a:stretch>
-            <a:fillRect/>
-          </a:stretch>
-        </p:blipFill>
-        <p:spPr>
-          <a:xfrm>
-            <a:off x="6511018" y="5501261"/>
-            <a:ext cx="5373738" cy="1056904"/>
-          </a:xfrm>
-          <a:prstGeom prst="rect">
-            <a:avLst/>
-          </a:prstGeom>
-        </p:spPr>
-      </p:pic>
-      <p:pic>
-        <p:nvPicPr>
-          <p:cNvPr id="8" name="그림 7" descr="텍스트, 스크린샷이(가) 표시된 사진&#10;&#10;AI가 생성한 콘텐츠는 부정확할 수 있습니다.">
-            <a:extLst>
-              <a:ext uri="{FF2B5EF4-FFF2-40B4-BE49-F238E27FC236}">
-                <a16:creationId xmlns:a16="http://schemas.microsoft.com/office/drawing/2014/main" id="{7C0D45A7-01FB-D98F-271F-4BABD3FAA698}"/>
-              </a:ext>
-            </a:extLst>
-          </p:cNvPr>
-          <p:cNvPicPr>
-            <a:picLocks noChangeAspect="1"/>
-          </p:cNvPicPr>
-          <p:nvPr/>
-        </p:nvPicPr>
-        <p:blipFill>
-          <a:blip r:embed="rId6">
-            <a:extLst>
-              <a:ext uri="{28A0092B-C50C-407E-A947-70E740481C1C}">
-                <a14:useLocalDpi xmlns:a14="http://schemas.microsoft.com/office/drawing/2010/main" val="0"/>
-              </a:ext>
-            </a:extLst>
-          </a:blip>
-          <a:stretch>
-            <a:fillRect/>
-          </a:stretch>
-        </p:blipFill>
-        <p:spPr>
-          <a:xfrm>
-            <a:off x="6512647" y="3955981"/>
-            <a:ext cx="5372109" cy="1575819"/>
-          </a:xfrm>
-          <a:prstGeom prst="rect">
-            <a:avLst/>
-          </a:prstGeom>
-        </p:spPr>
-      </p:pic>
-      <p:cxnSp>
-        <p:nvCxnSpPr>
-          <p:cNvPr id="16" name="직선 연결선 15">
-            <a:extLst>
-              <a:ext uri="{FF2B5EF4-FFF2-40B4-BE49-F238E27FC236}">
-                <a16:creationId xmlns:a16="http://schemas.microsoft.com/office/drawing/2014/main" id="{8ED8B41D-99E1-876D-2BFC-742037A8D708}"/>
-              </a:ext>
-            </a:extLst>
-          </p:cNvPr>
-          <p:cNvCxnSpPr>
-            <a:cxnSpLocks/>
-          </p:cNvCxnSpPr>
-          <p:nvPr/>
-        </p:nvCxnSpPr>
-        <p:spPr>
-          <a:xfrm>
-            <a:off x="6204857" y="1915525"/>
-            <a:ext cx="0" cy="4273580"/>
-          </a:xfrm>
-          <a:prstGeom prst="line">
-            <a:avLst/>
-          </a:prstGeom>
-          <a:ln>
-            <a:solidFill>
-              <a:schemeClr val="tx1">
-                <a:lumMod val="75000"/>
-                <a:lumOff val="25000"/>
-              </a:schemeClr>
-            </a:solidFill>
-          </a:ln>
-        </p:spPr>
-        <p:style>
-          <a:lnRef idx="2">
-            <a:schemeClr val="dk1"/>
-          </a:lnRef>
-          <a:fillRef idx="0">
-            <a:schemeClr val="dk1"/>
-          </a:fillRef>
-          <a:effectRef idx="1">
-            <a:schemeClr val="dk1"/>
-          </a:effectRef>
-          <a:fontRef idx="minor">
-            <a:schemeClr val="tx1"/>
-          </a:fontRef>
-        </p:style>
-      </p:cxnSp>
-      <p:pic>
-        <p:nvPicPr>
-          <p:cNvPr id="11" name="그림 10">
-            <a:extLst>
-              <a:ext uri="{FF2B5EF4-FFF2-40B4-BE49-F238E27FC236}">
-                <a16:creationId xmlns:a16="http://schemas.microsoft.com/office/drawing/2014/main" id="{D9147C75-3356-63BC-9412-754748EC52EC}"/>
-              </a:ext>
-            </a:extLst>
-          </p:cNvPr>
-          <p:cNvPicPr>
-            <a:picLocks noChangeAspect="1"/>
-          </p:cNvPicPr>
-          <p:nvPr/>
-        </p:nvPicPr>
-        <p:blipFill>
-          <a:blip r:embed="rId7"/>
-          <a:stretch>
-            <a:fillRect/>
-          </a:stretch>
-        </p:blipFill>
-        <p:spPr>
-          <a:xfrm>
-            <a:off x="6513461" y="2908102"/>
-            <a:ext cx="5373738" cy="1047879"/>
-          </a:xfrm>
-          <a:prstGeom prst="rect">
-            <a:avLst/>
-          </a:prstGeom>
-        </p:spPr>
-      </p:pic>
-      <p:pic>
-        <p:nvPicPr>
-          <p:cNvPr id="15" name="그림 14">
-            <a:extLst>
-              <a:ext uri="{FF2B5EF4-FFF2-40B4-BE49-F238E27FC236}">
-                <a16:creationId xmlns:a16="http://schemas.microsoft.com/office/drawing/2014/main" id="{EEC5012B-FC18-6B7D-F1D7-F7FC63B45BF2}"/>
-              </a:ext>
-            </a:extLst>
-          </p:cNvPr>
-          <p:cNvPicPr>
-            <a:picLocks noChangeAspect="1"/>
-          </p:cNvPicPr>
-          <p:nvPr/>
-        </p:nvPicPr>
-        <p:blipFill>
-          <a:blip r:embed="rId8"/>
-          <a:stretch>
-            <a:fillRect/>
-          </a:stretch>
-        </p:blipFill>
-        <p:spPr>
-          <a:xfrm>
-            <a:off x="6513462" y="1915525"/>
-            <a:ext cx="5372108" cy="1073364"/>
-          </a:xfrm>
-          <a:prstGeom prst="rect">
-            <a:avLst/>
-          </a:prstGeom>
-        </p:spPr>
-      </p:pic>
     </p:spTree>
     <p:extLst>
       <p:ext uri="{BB962C8B-B14F-4D97-AF65-F5344CB8AC3E}">
-        <p14:creationId xmlns:p14="http://schemas.microsoft.com/office/powerpoint/2010/main" val="3896962773"/>
+        <p14:creationId xmlns:p14="http://schemas.microsoft.com/office/powerpoint/2010/main" val="3491346053"/>
       </p:ext>
     </p:extLst>
   </p:cSld>
@@ -7167,1302 +5152,7 @@
 </p:sld>
 </file>
 
-<file path=ppt/slides/slide5.xml><?xml version="1.0" encoding="utf-8"?>
-<p:sld xmlns:a="http://schemas.openxmlformats.org/drawingml/2006/main" xmlns:r="http://schemas.openxmlformats.org/officeDocument/2006/relationships" xmlns:p="http://schemas.openxmlformats.org/presentationml/2006/main" show="0">
-  <p:cSld>
-    <p:spTree>
-      <p:nvGrpSpPr>
-        <p:cNvPr id="1" name=""/>
-        <p:cNvGrpSpPr/>
-        <p:nvPr/>
-      </p:nvGrpSpPr>
-      <p:grpSpPr>
-        <a:xfrm>
-          <a:off x="0" y="0"/>
-          <a:ext cx="0" cy="0"/>
-          <a:chOff x="0" y="0"/>
-          <a:chExt cx="0" cy="0"/>
-        </a:xfrm>
-      </p:grpSpPr>
-      <p:sp>
-        <p:nvSpPr>
-          <p:cNvPr id="3" name="내용 개체 틀 2">
-            <a:extLst>
-              <a:ext uri="{FF2B5EF4-FFF2-40B4-BE49-F238E27FC236}">
-                <a16:creationId xmlns:a16="http://schemas.microsoft.com/office/drawing/2014/main" id="{F3E0445D-6120-B7A6-8C93-5DFA859689ED}"/>
-              </a:ext>
-            </a:extLst>
-          </p:cNvPr>
-          <p:cNvSpPr>
-            <a:spLocks noGrp="1"/>
-          </p:cNvSpPr>
-          <p:nvPr>
-            <p:ph idx="1"/>
-          </p:nvPr>
-        </p:nvSpPr>
-        <p:spPr>
-          <a:xfrm>
-            <a:off x="1313243" y="2248604"/>
-            <a:ext cx="4889983" cy="1180396"/>
-          </a:xfrm>
-        </p:spPr>
-        <p:txBody>
-          <a:bodyPr>
-            <a:normAutofit/>
-          </a:bodyPr>
-          <a:lstStyle/>
-          <a:p>
-            <a:pPr marL="0" indent="0" algn="l">
-              <a:lnSpc>
-                <a:spcPct val="100000"/>
-              </a:lnSpc>
-              <a:buNone/>
-            </a:pPr>
-            <a:r>
-              <a:rPr lang="ko-KR" altLang="en-US" sz="1800" b="1" i="0">
-                <a:effectLst/>
-                <a:latin typeface="Noto Sans KR"/>
-              </a:rPr>
-              <a:t>현대인 식생활 문제 심화</a:t>
-            </a:r>
-          </a:p>
-          <a:p>
-            <a:pPr marL="0" indent="0">
-              <a:lnSpc>
-                <a:spcPct val="150000"/>
-              </a:lnSpc>
-              <a:buNone/>
-            </a:pPr>
-            <a:r>
-              <a:rPr lang="ko-KR" altLang="en-US" sz="1400" b="0" i="0">
-                <a:solidFill>
-                  <a:schemeClr val="tx1">
-                    <a:lumMod val="75000"/>
-                    <a:lumOff val="25000"/>
-                  </a:schemeClr>
-                </a:solidFill>
-                <a:effectLst/>
-                <a:latin typeface="Noto Sans KR"/>
-              </a:rPr>
-              <a:t>외식 및 가공식품 섭취로</a:t>
-            </a:r>
-            <a:r>
-              <a:rPr lang="ko-KR" altLang="en-US" sz="1400" b="1" i="0">
-                <a:solidFill>
-                  <a:schemeClr val="tx1">
-                    <a:lumMod val="75000"/>
-                    <a:lumOff val="25000"/>
-                  </a:schemeClr>
-                </a:solidFill>
-                <a:effectLst/>
-                <a:latin typeface="Noto Sans KR"/>
-              </a:rPr>
-              <a:t> </a:t>
-            </a:r>
-            <a:r>
-              <a:rPr lang="ko-KR" altLang="en-US" sz="1600" b="1" i="0">
-                <a:effectLst/>
-                <a:latin typeface="Noto Sans KR"/>
-              </a:rPr>
-              <a:t>지방</a:t>
-            </a:r>
-            <a:r>
-              <a:rPr lang="en-US" altLang="ko-KR" sz="1600" b="1" i="0">
-                <a:effectLst/>
-                <a:latin typeface="Noto Sans KR"/>
-              </a:rPr>
-              <a:t>, </a:t>
-            </a:r>
-            <a:r>
-              <a:rPr lang="ko-KR" altLang="en-US" sz="1600" b="1" i="0">
-                <a:effectLst/>
-                <a:latin typeface="Noto Sans KR"/>
-              </a:rPr>
-              <a:t>당류</a:t>
-            </a:r>
-            <a:r>
-              <a:rPr lang="en-US" altLang="ko-KR" sz="1600" b="1" i="0">
-                <a:effectLst/>
-                <a:latin typeface="Noto Sans KR"/>
-              </a:rPr>
-              <a:t>, </a:t>
-            </a:r>
-            <a:r>
-              <a:rPr lang="ko-KR" altLang="en-US" sz="1600" b="1" i="0">
-                <a:effectLst/>
-                <a:latin typeface="Noto Sans KR"/>
-              </a:rPr>
-              <a:t>나트륨의 과잉 섭취</a:t>
-            </a:r>
-            <a:r>
-              <a:rPr lang="ko-KR" altLang="en-US" sz="1400" i="0">
-                <a:solidFill>
-                  <a:schemeClr val="tx1">
-                    <a:lumMod val="75000"/>
-                    <a:lumOff val="25000"/>
-                  </a:schemeClr>
-                </a:solidFill>
-                <a:effectLst/>
-                <a:latin typeface="Noto Sans KR"/>
-              </a:rPr>
-              <a:t>가</a:t>
-            </a:r>
-            <a:r>
-              <a:rPr lang="ko-KR" altLang="en-US" sz="1400" b="1" i="0">
-                <a:solidFill>
-                  <a:schemeClr val="tx1">
-                    <a:lumMod val="75000"/>
-                    <a:lumOff val="25000"/>
-                  </a:schemeClr>
-                </a:solidFill>
-                <a:effectLst/>
-                <a:latin typeface="Noto Sans KR"/>
-              </a:rPr>
-              <a:t> </a:t>
-            </a:r>
-            <a:r>
-              <a:rPr lang="ko-KR" altLang="en-US" sz="1400" b="0" i="0">
-                <a:solidFill>
-                  <a:schemeClr val="tx1">
-                    <a:lumMod val="75000"/>
-                    <a:lumOff val="25000"/>
-                  </a:schemeClr>
-                </a:solidFill>
-                <a:effectLst/>
-                <a:latin typeface="Noto Sans KR"/>
-              </a:rPr>
-              <a:t>일상화되어 심각한 영양 불균형 초래</a:t>
-            </a:r>
-            <a:endParaRPr lang="ko-KR" altLang="en-US" sz="1400">
-              <a:solidFill>
-                <a:schemeClr val="tx1">
-                  <a:lumMod val="75000"/>
-                  <a:lumOff val="25000"/>
-                </a:schemeClr>
-              </a:solidFill>
-            </a:endParaRPr>
-          </a:p>
-        </p:txBody>
-      </p:sp>
-      <p:pic>
-        <p:nvPicPr>
-          <p:cNvPr id="10" name="그림 9" descr="블랙, 어둠이(가) 표시된 사진&#10;&#10;AI가 생성한 콘텐츠는 부정확할 수 있습니다.">
-            <a:extLst>
-              <a:ext uri="{FF2B5EF4-FFF2-40B4-BE49-F238E27FC236}">
-                <a16:creationId xmlns:a16="http://schemas.microsoft.com/office/drawing/2014/main" id="{C0E1470B-2FAA-6645-115D-938C838B9EC8}"/>
-              </a:ext>
-            </a:extLst>
-          </p:cNvPr>
-          <p:cNvPicPr>
-            <a:picLocks noChangeAspect="1"/>
-          </p:cNvPicPr>
-          <p:nvPr/>
-        </p:nvPicPr>
-        <p:blipFill>
-          <a:blip r:embed="rId2">
-            <a:extLst>
-              <a:ext uri="{28A0092B-C50C-407E-A947-70E740481C1C}">
-                <a14:useLocalDpi xmlns:a14="http://schemas.microsoft.com/office/drawing/2010/main" val="0"/>
-              </a:ext>
-            </a:extLst>
-          </a:blip>
-          <a:stretch>
-            <a:fillRect/>
-          </a:stretch>
-        </p:blipFill>
-        <p:spPr>
-          <a:xfrm>
-            <a:off x="603253" y="2497142"/>
-            <a:ext cx="468000" cy="468000"/>
-          </a:xfrm>
-          <a:prstGeom prst="rect">
-            <a:avLst/>
-          </a:prstGeom>
-          <a:ln w="12700" cap="rnd">
-            <a:noFill/>
-            <a:prstDash val="solid"/>
-            <a:round/>
-            <a:extLst>
-              <a:ext uri="{C807C97D-BFC1-408E-A445-0C87EB9F89A2}">
-                <ask:lineSketchStyleProps xmlns:ask="http://schemas.microsoft.com/office/drawing/2018/sketchyshapes" sd="1219033472">
-                  <a:custGeom>
-                    <a:avLst/>
-                    <a:gdLst>
-                      <a:gd name="connsiteX0" fmla="*/ 0 w 4161662"/>
-                      <a:gd name="connsiteY0" fmla="*/ 0 h 4161662"/>
-                      <a:gd name="connsiteX1" fmla="*/ 677756 w 4161662"/>
-                      <a:gd name="connsiteY1" fmla="*/ 0 h 4161662"/>
-                      <a:gd name="connsiteX2" fmla="*/ 1355513 w 4161662"/>
-                      <a:gd name="connsiteY2" fmla="*/ 0 h 4161662"/>
-                      <a:gd name="connsiteX3" fmla="*/ 1950036 w 4161662"/>
-                      <a:gd name="connsiteY3" fmla="*/ 0 h 4161662"/>
-                      <a:gd name="connsiteX4" fmla="*/ 2586176 w 4161662"/>
-                      <a:gd name="connsiteY4" fmla="*/ 0 h 4161662"/>
-                      <a:gd name="connsiteX5" fmla="*/ 3139082 w 4161662"/>
-                      <a:gd name="connsiteY5" fmla="*/ 0 h 4161662"/>
-                      <a:gd name="connsiteX6" fmla="*/ 4161662 w 4161662"/>
-                      <a:gd name="connsiteY6" fmla="*/ 0 h 4161662"/>
-                      <a:gd name="connsiteX7" fmla="*/ 4161662 w 4161662"/>
-                      <a:gd name="connsiteY7" fmla="*/ 677756 h 4161662"/>
-                      <a:gd name="connsiteX8" fmla="*/ 4161662 w 4161662"/>
-                      <a:gd name="connsiteY8" fmla="*/ 1189046 h 4161662"/>
-                      <a:gd name="connsiteX9" fmla="*/ 4161662 w 4161662"/>
-                      <a:gd name="connsiteY9" fmla="*/ 1658720 h 4161662"/>
-                      <a:gd name="connsiteX10" fmla="*/ 4161662 w 4161662"/>
-                      <a:gd name="connsiteY10" fmla="*/ 2170009 h 4161662"/>
-                      <a:gd name="connsiteX11" fmla="*/ 4161662 w 4161662"/>
-                      <a:gd name="connsiteY11" fmla="*/ 2722916 h 4161662"/>
-                      <a:gd name="connsiteX12" fmla="*/ 4161662 w 4161662"/>
-                      <a:gd name="connsiteY12" fmla="*/ 3317439 h 4161662"/>
-                      <a:gd name="connsiteX13" fmla="*/ 4161662 w 4161662"/>
-                      <a:gd name="connsiteY13" fmla="*/ 4161662 h 4161662"/>
-                      <a:gd name="connsiteX14" fmla="*/ 3483906 w 4161662"/>
-                      <a:gd name="connsiteY14" fmla="*/ 4161662 h 4161662"/>
-                      <a:gd name="connsiteX15" fmla="*/ 2889382 w 4161662"/>
-                      <a:gd name="connsiteY15" fmla="*/ 4161662 h 4161662"/>
-                      <a:gd name="connsiteX16" fmla="*/ 2294859 w 4161662"/>
-                      <a:gd name="connsiteY16" fmla="*/ 4161662 h 4161662"/>
-                      <a:gd name="connsiteX17" fmla="*/ 1700336 w 4161662"/>
-                      <a:gd name="connsiteY17" fmla="*/ 4161662 h 4161662"/>
-                      <a:gd name="connsiteX18" fmla="*/ 1105813 w 4161662"/>
-                      <a:gd name="connsiteY18" fmla="*/ 4161662 h 4161662"/>
-                      <a:gd name="connsiteX19" fmla="*/ 552907 w 4161662"/>
-                      <a:gd name="connsiteY19" fmla="*/ 4161662 h 4161662"/>
-                      <a:gd name="connsiteX20" fmla="*/ 0 w 4161662"/>
-                      <a:gd name="connsiteY20" fmla="*/ 4161662 h 4161662"/>
-                      <a:gd name="connsiteX21" fmla="*/ 0 w 4161662"/>
-                      <a:gd name="connsiteY21" fmla="*/ 3567139 h 4161662"/>
-                      <a:gd name="connsiteX22" fmla="*/ 0 w 4161662"/>
-                      <a:gd name="connsiteY22" fmla="*/ 2930999 h 4161662"/>
-                      <a:gd name="connsiteX23" fmla="*/ 0 w 4161662"/>
-                      <a:gd name="connsiteY23" fmla="*/ 2294859 h 4161662"/>
-                      <a:gd name="connsiteX24" fmla="*/ 0 w 4161662"/>
-                      <a:gd name="connsiteY24" fmla="*/ 1617103 h 4161662"/>
-                      <a:gd name="connsiteX25" fmla="*/ 0 w 4161662"/>
-                      <a:gd name="connsiteY25" fmla="*/ 1022580 h 4161662"/>
-                      <a:gd name="connsiteX26" fmla="*/ 0 w 4161662"/>
-                      <a:gd name="connsiteY26" fmla="*/ 0 h 4161662"/>
-                    </a:gdLst>
-                    <a:ahLst/>
-                    <a:cxnLst>
-                      <a:cxn ang="0">
-                        <a:pos x="connsiteX0" y="connsiteY0"/>
-                      </a:cxn>
-                      <a:cxn ang="0">
-                        <a:pos x="connsiteX1" y="connsiteY1"/>
-                      </a:cxn>
-                      <a:cxn ang="0">
-                        <a:pos x="connsiteX2" y="connsiteY2"/>
-                      </a:cxn>
-                      <a:cxn ang="0">
-                        <a:pos x="connsiteX3" y="connsiteY3"/>
-                      </a:cxn>
-                      <a:cxn ang="0">
-                        <a:pos x="connsiteX4" y="connsiteY4"/>
-                      </a:cxn>
-                      <a:cxn ang="0">
-                        <a:pos x="connsiteX5" y="connsiteY5"/>
-                      </a:cxn>
-                      <a:cxn ang="0">
-                        <a:pos x="connsiteX6" y="connsiteY6"/>
-                      </a:cxn>
-                      <a:cxn ang="0">
-                        <a:pos x="connsiteX7" y="connsiteY7"/>
-                      </a:cxn>
-                      <a:cxn ang="0">
-                        <a:pos x="connsiteX8" y="connsiteY8"/>
-                      </a:cxn>
-                      <a:cxn ang="0">
-                        <a:pos x="connsiteX9" y="connsiteY9"/>
-                      </a:cxn>
-                      <a:cxn ang="0">
-                        <a:pos x="connsiteX10" y="connsiteY10"/>
-                      </a:cxn>
-                      <a:cxn ang="0">
-                        <a:pos x="connsiteX11" y="connsiteY11"/>
-                      </a:cxn>
-                      <a:cxn ang="0">
-                        <a:pos x="connsiteX12" y="connsiteY12"/>
-                      </a:cxn>
-                      <a:cxn ang="0">
-                        <a:pos x="connsiteX13" y="connsiteY13"/>
-                      </a:cxn>
-                      <a:cxn ang="0">
-                        <a:pos x="connsiteX14" y="connsiteY14"/>
-                      </a:cxn>
-                      <a:cxn ang="0">
-                        <a:pos x="connsiteX15" y="connsiteY15"/>
-                      </a:cxn>
-                      <a:cxn ang="0">
-                        <a:pos x="connsiteX16" y="connsiteY16"/>
-                      </a:cxn>
-                      <a:cxn ang="0">
-                        <a:pos x="connsiteX17" y="connsiteY17"/>
-                      </a:cxn>
-                      <a:cxn ang="0">
-                        <a:pos x="connsiteX18" y="connsiteY18"/>
-                      </a:cxn>
-                      <a:cxn ang="0">
-                        <a:pos x="connsiteX19" y="connsiteY19"/>
-                      </a:cxn>
-                      <a:cxn ang="0">
-                        <a:pos x="connsiteX20" y="connsiteY20"/>
-                      </a:cxn>
-                      <a:cxn ang="0">
-                        <a:pos x="connsiteX21" y="connsiteY21"/>
-                      </a:cxn>
-                      <a:cxn ang="0">
-                        <a:pos x="connsiteX22" y="connsiteY22"/>
-                      </a:cxn>
-                      <a:cxn ang="0">
-                        <a:pos x="connsiteX23" y="connsiteY23"/>
-                      </a:cxn>
-                      <a:cxn ang="0">
-                        <a:pos x="connsiteX24" y="connsiteY24"/>
-                      </a:cxn>
-                      <a:cxn ang="0">
-                        <a:pos x="connsiteX25" y="connsiteY25"/>
-                      </a:cxn>
-                      <a:cxn ang="0">
-                        <a:pos x="connsiteX26" y="connsiteY26"/>
-                      </a:cxn>
-                    </a:cxnLst>
-                    <a:rect l="l" t="t" r="r" b="b"/>
-                    <a:pathLst>
-                      <a:path w="4161662" h="4161662" fill="none" extrusionOk="0">
-                        <a:moveTo>
-                          <a:pt x="0" y="0"/>
-                        </a:moveTo>
-                        <a:cubicBezTo>
-                          <a:pt x="146926" y="-49179"/>
-                          <a:pt x="423112" y="76956"/>
-                          <a:pt x="677756" y="0"/>
-                        </a:cubicBezTo>
-                        <a:cubicBezTo>
-                          <a:pt x="932400" y="-76956"/>
-                          <a:pt x="1175110" y="63608"/>
-                          <a:pt x="1355513" y="0"/>
-                        </a:cubicBezTo>
-                        <a:cubicBezTo>
-                          <a:pt x="1535916" y="-63608"/>
-                          <a:pt x="1693715" y="59913"/>
-                          <a:pt x="1950036" y="0"/>
-                        </a:cubicBezTo>
-                        <a:cubicBezTo>
-                          <a:pt x="2206357" y="-59913"/>
-                          <a:pt x="2440393" y="51885"/>
-                          <a:pt x="2586176" y="0"/>
-                        </a:cubicBezTo>
-                        <a:cubicBezTo>
-                          <a:pt x="2731959" y="-51885"/>
-                          <a:pt x="2897339" y="11509"/>
-                          <a:pt x="3139082" y="0"/>
-                        </a:cubicBezTo>
-                        <a:cubicBezTo>
-                          <a:pt x="3380825" y="-11509"/>
-                          <a:pt x="3850267" y="92030"/>
-                          <a:pt x="4161662" y="0"/>
-                        </a:cubicBezTo>
-                        <a:cubicBezTo>
-                          <a:pt x="4193447" y="244183"/>
-                          <a:pt x="4113423" y="380579"/>
-                          <a:pt x="4161662" y="677756"/>
-                        </a:cubicBezTo>
-                        <a:cubicBezTo>
-                          <a:pt x="4209901" y="974933"/>
-                          <a:pt x="4133575" y="1077025"/>
-                          <a:pt x="4161662" y="1189046"/>
-                        </a:cubicBezTo>
-                        <a:cubicBezTo>
-                          <a:pt x="4189749" y="1301067"/>
-                          <a:pt x="4136844" y="1473854"/>
-                          <a:pt x="4161662" y="1658720"/>
-                        </a:cubicBezTo>
-                        <a:cubicBezTo>
-                          <a:pt x="4186480" y="1843586"/>
-                          <a:pt x="4102672" y="2024012"/>
-                          <a:pt x="4161662" y="2170009"/>
-                        </a:cubicBezTo>
-                        <a:cubicBezTo>
-                          <a:pt x="4220652" y="2316006"/>
-                          <a:pt x="4114940" y="2588273"/>
-                          <a:pt x="4161662" y="2722916"/>
-                        </a:cubicBezTo>
-                        <a:cubicBezTo>
-                          <a:pt x="4208384" y="2857559"/>
-                          <a:pt x="4135370" y="3085759"/>
-                          <a:pt x="4161662" y="3317439"/>
-                        </a:cubicBezTo>
-                        <a:cubicBezTo>
-                          <a:pt x="4187954" y="3549119"/>
-                          <a:pt x="4106061" y="3795915"/>
-                          <a:pt x="4161662" y="4161662"/>
-                        </a:cubicBezTo>
-                        <a:cubicBezTo>
-                          <a:pt x="4013904" y="4228695"/>
-                          <a:pt x="3630628" y="4080432"/>
-                          <a:pt x="3483906" y="4161662"/>
-                        </a:cubicBezTo>
-                        <a:cubicBezTo>
-                          <a:pt x="3337184" y="4242892"/>
-                          <a:pt x="3078083" y="4157000"/>
-                          <a:pt x="2889382" y="4161662"/>
-                        </a:cubicBezTo>
-                        <a:cubicBezTo>
-                          <a:pt x="2700681" y="4166324"/>
-                          <a:pt x="2475360" y="4157994"/>
-                          <a:pt x="2294859" y="4161662"/>
-                        </a:cubicBezTo>
-                        <a:cubicBezTo>
-                          <a:pt x="2114358" y="4165330"/>
-                          <a:pt x="1843668" y="4160905"/>
-                          <a:pt x="1700336" y="4161662"/>
-                        </a:cubicBezTo>
-                        <a:cubicBezTo>
-                          <a:pt x="1557004" y="4162419"/>
-                          <a:pt x="1243994" y="4154280"/>
-                          <a:pt x="1105813" y="4161662"/>
-                        </a:cubicBezTo>
-                        <a:cubicBezTo>
-                          <a:pt x="967632" y="4169044"/>
-                          <a:pt x="828129" y="4157753"/>
-                          <a:pt x="552907" y="4161662"/>
-                        </a:cubicBezTo>
-                        <a:cubicBezTo>
-                          <a:pt x="277685" y="4165571"/>
-                          <a:pt x="178676" y="4096086"/>
-                          <a:pt x="0" y="4161662"/>
-                        </a:cubicBezTo>
-                        <a:cubicBezTo>
-                          <a:pt x="-14981" y="3992741"/>
-                          <a:pt x="37689" y="3797757"/>
-                          <a:pt x="0" y="3567139"/>
-                        </a:cubicBezTo>
-                        <a:cubicBezTo>
-                          <a:pt x="-37689" y="3336521"/>
-                          <a:pt x="27091" y="3228718"/>
-                          <a:pt x="0" y="2930999"/>
-                        </a:cubicBezTo>
-                        <a:cubicBezTo>
-                          <a:pt x="-27091" y="2633280"/>
-                          <a:pt x="43696" y="2510108"/>
-                          <a:pt x="0" y="2294859"/>
-                        </a:cubicBezTo>
-                        <a:cubicBezTo>
-                          <a:pt x="-43696" y="2079610"/>
-                          <a:pt x="4052" y="1817541"/>
-                          <a:pt x="0" y="1617103"/>
-                        </a:cubicBezTo>
-                        <a:cubicBezTo>
-                          <a:pt x="-4052" y="1416665"/>
-                          <a:pt x="40187" y="1175011"/>
-                          <a:pt x="0" y="1022580"/>
-                        </a:cubicBezTo>
-                        <a:cubicBezTo>
-                          <a:pt x="-40187" y="870149"/>
-                          <a:pt x="26983" y="470975"/>
-                          <a:pt x="0" y="0"/>
-                        </a:cubicBezTo>
-                        <a:close/>
-                      </a:path>
-                      <a:path w="4161662" h="4161662" stroke="0" extrusionOk="0">
-                        <a:moveTo>
-                          <a:pt x="0" y="0"/>
-                        </a:moveTo>
-                        <a:cubicBezTo>
-                          <a:pt x="161768" y="-46457"/>
-                          <a:pt x="364502" y="48232"/>
-                          <a:pt x="552907" y="0"/>
-                        </a:cubicBezTo>
-                        <a:cubicBezTo>
-                          <a:pt x="741312" y="-48232"/>
-                          <a:pt x="901010" y="47903"/>
-                          <a:pt x="1022580" y="0"/>
-                        </a:cubicBezTo>
-                        <a:cubicBezTo>
-                          <a:pt x="1144150" y="-47903"/>
-                          <a:pt x="1425180" y="53507"/>
-                          <a:pt x="1700336" y="0"/>
-                        </a:cubicBezTo>
-                        <a:cubicBezTo>
-                          <a:pt x="1975492" y="-53507"/>
-                          <a:pt x="2028110" y="7650"/>
-                          <a:pt x="2253243" y="0"/>
-                        </a:cubicBezTo>
-                        <a:cubicBezTo>
-                          <a:pt x="2478376" y="-7650"/>
-                          <a:pt x="2628386" y="50070"/>
-                          <a:pt x="2806149" y="0"/>
-                        </a:cubicBezTo>
-                        <a:cubicBezTo>
-                          <a:pt x="2983912" y="-50070"/>
-                          <a:pt x="3193663" y="51605"/>
-                          <a:pt x="3483906" y="0"/>
-                        </a:cubicBezTo>
-                        <a:cubicBezTo>
-                          <a:pt x="3774149" y="-51605"/>
-                          <a:pt x="3855060" y="61047"/>
-                          <a:pt x="4161662" y="0"/>
-                        </a:cubicBezTo>
-                        <a:cubicBezTo>
-                          <a:pt x="4214231" y="324916"/>
-                          <a:pt x="4140513" y="417896"/>
-                          <a:pt x="4161662" y="677756"/>
-                        </a:cubicBezTo>
-                        <a:cubicBezTo>
-                          <a:pt x="4182811" y="937616"/>
-                          <a:pt x="4143716" y="959576"/>
-                          <a:pt x="4161662" y="1189046"/>
-                        </a:cubicBezTo>
-                        <a:cubicBezTo>
-                          <a:pt x="4179608" y="1418516"/>
-                          <a:pt x="4105787" y="1527198"/>
-                          <a:pt x="4161662" y="1700336"/>
-                        </a:cubicBezTo>
-                        <a:cubicBezTo>
-                          <a:pt x="4217537" y="1873474"/>
-                          <a:pt x="4155444" y="2157875"/>
-                          <a:pt x="4161662" y="2294859"/>
-                        </a:cubicBezTo>
-                        <a:cubicBezTo>
-                          <a:pt x="4167880" y="2431843"/>
-                          <a:pt x="4130736" y="2718138"/>
-                          <a:pt x="4161662" y="2930999"/>
-                        </a:cubicBezTo>
-                        <a:cubicBezTo>
-                          <a:pt x="4192588" y="3143860"/>
-                          <a:pt x="4160212" y="3219224"/>
-                          <a:pt x="4161662" y="3400672"/>
-                        </a:cubicBezTo>
-                        <a:cubicBezTo>
-                          <a:pt x="4163112" y="3582120"/>
-                          <a:pt x="4094120" y="3802505"/>
-                          <a:pt x="4161662" y="4161662"/>
-                        </a:cubicBezTo>
-                        <a:cubicBezTo>
-                          <a:pt x="3921811" y="4166974"/>
-                          <a:pt x="3722507" y="4142918"/>
-                          <a:pt x="3567139" y="4161662"/>
-                        </a:cubicBezTo>
-                        <a:cubicBezTo>
-                          <a:pt x="3411771" y="4180406"/>
-                          <a:pt x="3120016" y="4136184"/>
-                          <a:pt x="2972616" y="4161662"/>
-                        </a:cubicBezTo>
-                        <a:cubicBezTo>
-                          <a:pt x="2825216" y="4187140"/>
-                          <a:pt x="2543113" y="4110598"/>
-                          <a:pt x="2294859" y="4161662"/>
-                        </a:cubicBezTo>
-                        <a:cubicBezTo>
-                          <a:pt x="2046605" y="4212726"/>
-                          <a:pt x="1981969" y="4133006"/>
-                          <a:pt x="1700336" y="4161662"/>
-                        </a:cubicBezTo>
-                        <a:cubicBezTo>
-                          <a:pt x="1418703" y="4190318"/>
-                          <a:pt x="1354265" y="4106015"/>
-                          <a:pt x="1230663" y="4161662"/>
-                        </a:cubicBezTo>
-                        <a:cubicBezTo>
-                          <a:pt x="1107061" y="4217309"/>
-                          <a:pt x="957609" y="4118690"/>
-                          <a:pt x="719373" y="4161662"/>
-                        </a:cubicBezTo>
-                        <a:cubicBezTo>
-                          <a:pt x="481137" y="4204634"/>
-                          <a:pt x="167330" y="4156625"/>
-                          <a:pt x="0" y="4161662"/>
-                        </a:cubicBezTo>
-                        <a:cubicBezTo>
-                          <a:pt x="-65854" y="3896313"/>
-                          <a:pt x="16740" y="3726990"/>
-                          <a:pt x="0" y="3567139"/>
-                        </a:cubicBezTo>
-                        <a:cubicBezTo>
-                          <a:pt x="-16740" y="3407288"/>
-                          <a:pt x="21521" y="3243218"/>
-                          <a:pt x="0" y="2972616"/>
-                        </a:cubicBezTo>
-                        <a:cubicBezTo>
-                          <a:pt x="-21521" y="2702014"/>
-                          <a:pt x="8046" y="2679564"/>
-                          <a:pt x="0" y="2419709"/>
-                        </a:cubicBezTo>
-                        <a:cubicBezTo>
-                          <a:pt x="-8046" y="2159854"/>
-                          <a:pt x="4077" y="2143863"/>
-                          <a:pt x="0" y="1950036"/>
-                        </a:cubicBezTo>
-                        <a:cubicBezTo>
-                          <a:pt x="-4077" y="1756209"/>
-                          <a:pt x="49112" y="1658208"/>
-                          <a:pt x="0" y="1480363"/>
-                        </a:cubicBezTo>
-                        <a:cubicBezTo>
-                          <a:pt x="-49112" y="1302518"/>
-                          <a:pt x="59946" y="1077805"/>
-                          <a:pt x="0" y="844223"/>
-                        </a:cubicBezTo>
-                        <a:cubicBezTo>
-                          <a:pt x="-59946" y="610641"/>
-                          <a:pt x="86630" y="409246"/>
-                          <a:pt x="0" y="0"/>
-                        </a:cubicBezTo>
-                        <a:close/>
-                      </a:path>
-                    </a:pathLst>
-                  </a:custGeom>
-                  <ask:type>
-                    <ask:lineSketchNone/>
-                  </ask:type>
-                </ask:lineSketchStyleProps>
-              </a:ext>
-            </a:extLst>
-          </a:ln>
-        </p:spPr>
-      </p:pic>
-      <p:sp>
-        <p:nvSpPr>
-          <p:cNvPr id="12" name="내용 개체 틀 2">
-            <a:extLst>
-              <a:ext uri="{FF2B5EF4-FFF2-40B4-BE49-F238E27FC236}">
-                <a16:creationId xmlns:a16="http://schemas.microsoft.com/office/drawing/2014/main" id="{6F9FC355-108D-229C-8C47-754079D811C4}"/>
-              </a:ext>
-            </a:extLst>
-          </p:cNvPr>
-          <p:cNvSpPr txBox="1">
-            <a:spLocks/>
-          </p:cNvSpPr>
-          <p:nvPr/>
-        </p:nvSpPr>
-        <p:spPr>
-          <a:xfrm>
-            <a:off x="1313244" y="4813418"/>
-            <a:ext cx="4452226" cy="1375687"/>
-          </a:xfrm>
-          <a:prstGeom prst="rect">
-            <a:avLst/>
-          </a:prstGeom>
-        </p:spPr>
-        <p:txBody>
-          <a:bodyPr vert="horz" lIns="91440" tIns="45720" rIns="91440" bIns="45720" rtlCol="0">
-            <a:normAutofit/>
-          </a:bodyPr>
-          <a:lstStyle>
-            <a:lvl1pPr marL="228600" indent="-228600" algn="l" defTabSz="914400" rtl="0" eaLnBrk="1" latinLnBrk="1" hangingPunct="1">
-              <a:lnSpc>
-                <a:spcPct val="90000"/>
-              </a:lnSpc>
-              <a:spcBef>
-                <a:spcPts val="1000"/>
-              </a:spcBef>
-              <a:buFont typeface="Arial" panose="020B0604020202020204" pitchFamily="34" charset="0"/>
-              <a:buChar char="•"/>
-              <a:defRPr sz="2800" kern="1200">
-                <a:solidFill>
-                  <a:schemeClr val="tx1"/>
-                </a:solidFill>
-                <a:latin typeface="+mn-lt"/>
-                <a:ea typeface="+mn-ea"/>
-                <a:cs typeface="+mn-cs"/>
-              </a:defRPr>
-            </a:lvl1pPr>
-            <a:lvl2pPr marL="685800" indent="-228600" algn="l" defTabSz="914400" rtl="0" eaLnBrk="1" latinLnBrk="1" hangingPunct="1">
-              <a:lnSpc>
-                <a:spcPct val="90000"/>
-              </a:lnSpc>
-              <a:spcBef>
-                <a:spcPts val="500"/>
-              </a:spcBef>
-              <a:buFont typeface="Arial" panose="020B0604020202020204" pitchFamily="34" charset="0"/>
-              <a:buChar char="•"/>
-              <a:defRPr sz="2400" kern="1200">
-                <a:solidFill>
-                  <a:schemeClr val="tx1"/>
-                </a:solidFill>
-                <a:latin typeface="+mn-lt"/>
-                <a:ea typeface="+mn-ea"/>
-                <a:cs typeface="+mn-cs"/>
-              </a:defRPr>
-            </a:lvl2pPr>
-            <a:lvl3pPr marL="1143000" indent="-228600" algn="l" defTabSz="914400" rtl="0" eaLnBrk="1" latinLnBrk="1" hangingPunct="1">
-              <a:lnSpc>
-                <a:spcPct val="90000"/>
-              </a:lnSpc>
-              <a:spcBef>
-                <a:spcPts val="500"/>
-              </a:spcBef>
-              <a:buFont typeface="Arial" panose="020B0604020202020204" pitchFamily="34" charset="0"/>
-              <a:buChar char="•"/>
-              <a:defRPr sz="2000" kern="1200">
-                <a:solidFill>
-                  <a:schemeClr val="tx1"/>
-                </a:solidFill>
-                <a:latin typeface="+mn-lt"/>
-                <a:ea typeface="+mn-ea"/>
-                <a:cs typeface="+mn-cs"/>
-              </a:defRPr>
-            </a:lvl3pPr>
-            <a:lvl4pPr marL="1600200" indent="-228600" algn="l" defTabSz="914400" rtl="0" eaLnBrk="1" latinLnBrk="1" hangingPunct="1">
-              <a:lnSpc>
-                <a:spcPct val="90000"/>
-              </a:lnSpc>
-              <a:spcBef>
-                <a:spcPts val="500"/>
-              </a:spcBef>
-              <a:buFont typeface="Arial" panose="020B0604020202020204" pitchFamily="34" charset="0"/>
-              <a:buChar char="•"/>
-              <a:defRPr sz="1800" kern="1200">
-                <a:solidFill>
-                  <a:schemeClr val="tx1"/>
-                </a:solidFill>
-                <a:latin typeface="+mn-lt"/>
-                <a:ea typeface="+mn-ea"/>
-                <a:cs typeface="+mn-cs"/>
-              </a:defRPr>
-            </a:lvl4pPr>
-            <a:lvl5pPr marL="2057400" indent="-228600" algn="l" defTabSz="914400" rtl="0" eaLnBrk="1" latinLnBrk="1" hangingPunct="1">
-              <a:lnSpc>
-                <a:spcPct val="90000"/>
-              </a:lnSpc>
-              <a:spcBef>
-                <a:spcPts val="500"/>
-              </a:spcBef>
-              <a:buFont typeface="Arial" panose="020B0604020202020204" pitchFamily="34" charset="0"/>
-              <a:buChar char="•"/>
-              <a:defRPr sz="1800" kern="1200">
-                <a:solidFill>
-                  <a:schemeClr val="tx1"/>
-                </a:solidFill>
-                <a:latin typeface="+mn-lt"/>
-                <a:ea typeface="+mn-ea"/>
-                <a:cs typeface="+mn-cs"/>
-              </a:defRPr>
-            </a:lvl5pPr>
-            <a:lvl6pPr marL="2514600" indent="-228600" algn="l" defTabSz="914400" rtl="0" eaLnBrk="1" latinLnBrk="1" hangingPunct="1">
-              <a:lnSpc>
-                <a:spcPct val="90000"/>
-              </a:lnSpc>
-              <a:spcBef>
-                <a:spcPts val="500"/>
-              </a:spcBef>
-              <a:buFont typeface="Arial" panose="020B0604020202020204" pitchFamily="34" charset="0"/>
-              <a:buChar char="•"/>
-              <a:defRPr sz="1800" kern="1200">
-                <a:solidFill>
-                  <a:schemeClr val="tx1"/>
-                </a:solidFill>
-                <a:latin typeface="+mn-lt"/>
-                <a:ea typeface="+mn-ea"/>
-                <a:cs typeface="+mn-cs"/>
-              </a:defRPr>
-            </a:lvl6pPr>
-            <a:lvl7pPr marL="2971800" indent="-228600" algn="l" defTabSz="914400" rtl="0" eaLnBrk="1" latinLnBrk="1" hangingPunct="1">
-              <a:lnSpc>
-                <a:spcPct val="90000"/>
-              </a:lnSpc>
-              <a:spcBef>
-                <a:spcPts val="500"/>
-              </a:spcBef>
-              <a:buFont typeface="Arial" panose="020B0604020202020204" pitchFamily="34" charset="0"/>
-              <a:buChar char="•"/>
-              <a:defRPr sz="1800" kern="1200">
-                <a:solidFill>
-                  <a:schemeClr val="tx1"/>
-                </a:solidFill>
-                <a:latin typeface="+mn-lt"/>
-                <a:ea typeface="+mn-ea"/>
-                <a:cs typeface="+mn-cs"/>
-              </a:defRPr>
-            </a:lvl7pPr>
-            <a:lvl8pPr marL="3429000" indent="-228600" algn="l" defTabSz="914400" rtl="0" eaLnBrk="1" latinLnBrk="1" hangingPunct="1">
-              <a:lnSpc>
-                <a:spcPct val="90000"/>
-              </a:lnSpc>
-              <a:spcBef>
-                <a:spcPts val="500"/>
-              </a:spcBef>
-              <a:buFont typeface="Arial" panose="020B0604020202020204" pitchFamily="34" charset="0"/>
-              <a:buChar char="•"/>
-              <a:defRPr sz="1800" kern="1200">
-                <a:solidFill>
-                  <a:schemeClr val="tx1"/>
-                </a:solidFill>
-                <a:latin typeface="+mn-lt"/>
-                <a:ea typeface="+mn-ea"/>
-                <a:cs typeface="+mn-cs"/>
-              </a:defRPr>
-            </a:lvl8pPr>
-            <a:lvl9pPr marL="3886200" indent="-228600" algn="l" defTabSz="914400" rtl="0" eaLnBrk="1" latinLnBrk="1" hangingPunct="1">
-              <a:lnSpc>
-                <a:spcPct val="90000"/>
-              </a:lnSpc>
-              <a:spcBef>
-                <a:spcPts val="500"/>
-              </a:spcBef>
-              <a:buFont typeface="Arial" panose="020B0604020202020204" pitchFamily="34" charset="0"/>
-              <a:buChar char="•"/>
-              <a:defRPr sz="1800" kern="1200">
-                <a:solidFill>
-                  <a:schemeClr val="tx1"/>
-                </a:solidFill>
-                <a:latin typeface="+mn-lt"/>
-                <a:ea typeface="+mn-ea"/>
-                <a:cs typeface="+mn-cs"/>
-              </a:defRPr>
-            </a:lvl9pPr>
-          </a:lstStyle>
-          <a:p>
-            <a:pPr marL="0" indent="0">
-              <a:buFont typeface="Arial" panose="020B0604020202020204" pitchFamily="34" charset="0"/>
-              <a:buNone/>
-            </a:pPr>
-            <a:r>
-              <a:rPr lang="ko-KR" altLang="en-US" sz="1800" b="1">
-                <a:latin typeface="Noto Sans KR"/>
-              </a:rPr>
-              <a:t>만성질환 위험 증가</a:t>
-            </a:r>
-          </a:p>
-          <a:p>
-            <a:pPr marL="0" indent="0">
-              <a:lnSpc>
-                <a:spcPct val="150000"/>
-              </a:lnSpc>
-              <a:buFont typeface="Arial" panose="020B0604020202020204" pitchFamily="34" charset="0"/>
-              <a:buNone/>
-            </a:pPr>
-            <a:r>
-              <a:rPr lang="ko-KR" altLang="en-US" sz="1400">
-                <a:solidFill>
-                  <a:schemeClr val="tx1">
-                    <a:lumMod val="75000"/>
-                    <a:lumOff val="25000"/>
-                  </a:schemeClr>
-                </a:solidFill>
-                <a:latin typeface="Noto Sans KR"/>
-              </a:rPr>
-              <a:t>잘못된 식습관으로 인해 </a:t>
-            </a:r>
-            <a:r>
-              <a:rPr lang="ko-KR" altLang="en-US" sz="1400" b="1">
-                <a:latin typeface="Noto Sans KR"/>
-              </a:rPr>
-              <a:t>고콜레스테롤혈증</a:t>
-            </a:r>
-            <a:r>
-              <a:rPr lang="ko-KR" altLang="en-US" sz="1400">
-                <a:solidFill>
-                  <a:schemeClr val="tx1">
-                    <a:lumMod val="75000"/>
-                    <a:lumOff val="25000"/>
-                  </a:schemeClr>
-                </a:solidFill>
-                <a:latin typeface="Noto Sans KR"/>
-              </a:rPr>
-              <a:t> 만성질환 유병률 증가</a:t>
-            </a:r>
-            <a:endParaRPr lang="ko-KR" altLang="en-US" sz="1400">
-              <a:solidFill>
-                <a:schemeClr val="tx1">
-                  <a:lumMod val="75000"/>
-                  <a:lumOff val="25000"/>
-                </a:schemeClr>
-              </a:solidFill>
-            </a:endParaRPr>
-          </a:p>
-        </p:txBody>
-      </p:sp>
-      <p:pic>
-        <p:nvPicPr>
-          <p:cNvPr id="17" name="그림 16" descr="블랙, 어둠이(가) 표시된 사진&#10;&#10;AI가 생성한 콘텐츠는 부정확할 수 있습니다.">
-            <a:extLst>
-              <a:ext uri="{FF2B5EF4-FFF2-40B4-BE49-F238E27FC236}">
-                <a16:creationId xmlns:a16="http://schemas.microsoft.com/office/drawing/2014/main" id="{2D4F120A-9945-AF4B-0051-06D1126780D8}"/>
-              </a:ext>
-            </a:extLst>
-          </p:cNvPr>
-          <p:cNvPicPr>
-            <a:picLocks noChangeAspect="1"/>
-          </p:cNvPicPr>
-          <p:nvPr/>
-        </p:nvPicPr>
-        <p:blipFill>
-          <a:blip r:embed="rId3">
-            <a:extLst>
-              <a:ext uri="{28A0092B-C50C-407E-A947-70E740481C1C}">
-                <a14:useLocalDpi xmlns:a14="http://schemas.microsoft.com/office/drawing/2010/main" val="0"/>
-              </a:ext>
-            </a:extLst>
-          </a:blip>
-          <a:stretch>
-            <a:fillRect/>
-          </a:stretch>
-        </p:blipFill>
-        <p:spPr>
-          <a:xfrm>
-            <a:off x="603253" y="5080397"/>
-            <a:ext cx="468000" cy="468000"/>
-          </a:xfrm>
-          <a:prstGeom prst="rect">
-            <a:avLst/>
-          </a:prstGeom>
-        </p:spPr>
-      </p:pic>
-      <p:sp>
-        <p:nvSpPr>
-          <p:cNvPr id="4" name="직사각형 3">
-            <a:extLst>
-              <a:ext uri="{FF2B5EF4-FFF2-40B4-BE49-F238E27FC236}">
-                <a16:creationId xmlns:a16="http://schemas.microsoft.com/office/drawing/2014/main" id="{9BD01A12-581E-B7EB-1FA7-940AA8F5F3A2}"/>
-              </a:ext>
-            </a:extLst>
-          </p:cNvPr>
-          <p:cNvSpPr/>
-          <p:nvPr/>
-        </p:nvSpPr>
-        <p:spPr>
-          <a:xfrm>
-            <a:off x="0" y="0"/>
-            <a:ext cx="12192000" cy="1180396"/>
-          </a:xfrm>
-          <a:prstGeom prst="rect">
-            <a:avLst/>
-          </a:prstGeom>
-          <a:solidFill>
-            <a:schemeClr val="dk1">
-              <a:alpha val="80000"/>
-            </a:schemeClr>
-          </a:solidFill>
-          <a:ln>
-            <a:noFill/>
-          </a:ln>
-        </p:spPr>
-        <p:style>
-          <a:lnRef idx="2">
-            <a:schemeClr val="dk1">
-              <a:shade val="15000"/>
-            </a:schemeClr>
-          </a:lnRef>
-          <a:fillRef idx="1">
-            <a:schemeClr val="dk1"/>
-          </a:fillRef>
-          <a:effectRef idx="0">
-            <a:schemeClr val="dk1"/>
-          </a:effectRef>
-          <a:fontRef idx="minor">
-            <a:schemeClr val="lt1"/>
-          </a:fontRef>
-        </p:style>
-        <p:txBody>
-          <a:bodyPr rtlCol="0" anchor="ctr"/>
-          <a:lstStyle/>
-          <a:p>
-            <a:endParaRPr lang="ko-KR" altLang="en-US"/>
-          </a:p>
-        </p:txBody>
-      </p:sp>
-      <p:sp>
-        <p:nvSpPr>
-          <p:cNvPr id="2" name="제목 1">
-            <a:extLst>
-              <a:ext uri="{FF2B5EF4-FFF2-40B4-BE49-F238E27FC236}">
-                <a16:creationId xmlns:a16="http://schemas.microsoft.com/office/drawing/2014/main" id="{3085BA4F-DA62-4ACF-71F5-86330591C96A}"/>
-              </a:ext>
-            </a:extLst>
-          </p:cNvPr>
-          <p:cNvSpPr>
-            <a:spLocks noGrp="1"/>
-          </p:cNvSpPr>
-          <p:nvPr>
-            <p:ph type="title"/>
-          </p:nvPr>
-        </p:nvSpPr>
-        <p:spPr>
-          <a:xfrm>
-            <a:off x="603253" y="234292"/>
-            <a:ext cx="2009318" cy="946104"/>
-          </a:xfrm>
-        </p:spPr>
-        <p:txBody>
-          <a:bodyPr>
-            <a:normAutofit/>
-          </a:bodyPr>
-          <a:lstStyle/>
-          <a:p>
-            <a:r>
-              <a:rPr lang="ko-KR" altLang="en-US" sz="3200" b="1">
-                <a:solidFill>
-                  <a:schemeClr val="bg1"/>
-                </a:solidFill>
-              </a:rPr>
-              <a:t>기획의도</a:t>
-            </a:r>
-            <a:br>
-              <a:rPr lang="en-US" altLang="ko-KR" sz="3200" b="1"/>
-            </a:br>
-            <a:r>
-              <a:rPr lang="en-US" altLang="ko-KR" sz="1400" b="0" i="0">
-                <a:solidFill>
-                  <a:schemeClr val="bg1">
-                    <a:lumMod val="75000"/>
-                  </a:schemeClr>
-                </a:solidFill>
-                <a:effectLst/>
-                <a:latin typeface="Noto Sans KR"/>
-              </a:rPr>
-              <a:t>Background &amp; Purpose</a:t>
-            </a:r>
-            <a:endParaRPr lang="ko-KR" altLang="en-US" sz="1400" b="1">
-              <a:solidFill>
-                <a:schemeClr val="bg1">
-                  <a:lumMod val="75000"/>
-                </a:schemeClr>
-              </a:solidFill>
-            </a:endParaRPr>
-          </a:p>
-        </p:txBody>
-      </p:sp>
-      <p:pic>
-        <p:nvPicPr>
-          <p:cNvPr id="1034" name="Picture 10">
-            <a:extLst>
-              <a:ext uri="{FF2B5EF4-FFF2-40B4-BE49-F238E27FC236}">
-                <a16:creationId xmlns:a16="http://schemas.microsoft.com/office/drawing/2014/main" id="{9CA5E893-BE61-1B2C-5561-000A6EBB97A8}"/>
-              </a:ext>
-            </a:extLst>
-          </p:cNvPr>
-          <p:cNvPicPr>
-            <a:picLocks noChangeAspect="1" noChangeArrowheads="1"/>
-          </p:cNvPicPr>
-          <p:nvPr/>
-        </p:nvPicPr>
-        <p:blipFill>
-          <a:blip r:embed="rId4">
-            <a:extLst>
-              <a:ext uri="{28A0092B-C50C-407E-A947-70E740481C1C}">
-                <a14:useLocalDpi xmlns:a14="http://schemas.microsoft.com/office/drawing/2010/main" val="0"/>
-              </a:ext>
-            </a:extLst>
-          </a:blip>
-          <a:srcRect/>
-          <a:stretch>
-            <a:fillRect/>
-          </a:stretch>
-        </p:blipFill>
-        <p:spPr bwMode="auto">
-          <a:xfrm rot="5400000">
-            <a:off x="3288358" y="3758025"/>
-            <a:ext cx="396000" cy="396000"/>
-          </a:xfrm>
-          <a:prstGeom prst="rect">
-            <a:avLst/>
-          </a:prstGeom>
-          <a:noFill/>
-          <a:extLst>
-            <a:ext uri="{909E8E84-426E-40DD-AFC4-6F175D3DCCD1}">
-              <a14:hiddenFill xmlns:a14="http://schemas.microsoft.com/office/drawing/2010/main">
-                <a:solidFill>
-                  <a:srgbClr val="FFFFFF"/>
-                </a:solidFill>
-              </a14:hiddenFill>
-            </a:ext>
-          </a:extLst>
-        </p:spPr>
-      </p:pic>
-      <p:pic>
-        <p:nvPicPr>
-          <p:cNvPr id="6" name="그림 5" descr="텍스트, 폰트, 스크린샷, 라인이(가) 표시된 사진&#10;&#10;AI가 생성한 콘텐츠는 부정확할 수 있습니다.">
-            <a:extLst>
-              <a:ext uri="{FF2B5EF4-FFF2-40B4-BE49-F238E27FC236}">
-                <a16:creationId xmlns:a16="http://schemas.microsoft.com/office/drawing/2014/main" id="{8ED0E3DF-A767-B1A3-C31A-CAA6D0ADDF38}"/>
-              </a:ext>
-            </a:extLst>
-          </p:cNvPr>
-          <p:cNvPicPr>
-            <a:picLocks noChangeAspect="1"/>
-          </p:cNvPicPr>
-          <p:nvPr/>
-        </p:nvPicPr>
-        <p:blipFill>
-          <a:blip r:embed="rId5">
-            <a:extLst>
-              <a:ext uri="{28A0092B-C50C-407E-A947-70E740481C1C}">
-                <a14:useLocalDpi xmlns:a14="http://schemas.microsoft.com/office/drawing/2010/main" val="0"/>
-              </a:ext>
-            </a:extLst>
-          </a:blip>
-          <a:stretch>
-            <a:fillRect/>
-          </a:stretch>
-        </p:blipFill>
-        <p:spPr>
-          <a:xfrm>
-            <a:off x="6511018" y="5501261"/>
-            <a:ext cx="5373738" cy="1056904"/>
-          </a:xfrm>
-          <a:prstGeom prst="rect">
-            <a:avLst/>
-          </a:prstGeom>
-        </p:spPr>
-      </p:pic>
-      <p:pic>
-        <p:nvPicPr>
-          <p:cNvPr id="8" name="그림 7" descr="텍스트, 스크린샷이(가) 표시된 사진&#10;&#10;AI가 생성한 콘텐츠는 부정확할 수 있습니다.">
-            <a:extLst>
-              <a:ext uri="{FF2B5EF4-FFF2-40B4-BE49-F238E27FC236}">
-                <a16:creationId xmlns:a16="http://schemas.microsoft.com/office/drawing/2014/main" id="{7C0D45A7-01FB-D98F-271F-4BABD3FAA698}"/>
-              </a:ext>
-            </a:extLst>
-          </p:cNvPr>
-          <p:cNvPicPr>
-            <a:picLocks noChangeAspect="1"/>
-          </p:cNvPicPr>
-          <p:nvPr/>
-        </p:nvPicPr>
-        <p:blipFill>
-          <a:blip r:embed="rId6">
-            <a:extLst>
-              <a:ext uri="{28A0092B-C50C-407E-A947-70E740481C1C}">
-                <a14:useLocalDpi xmlns:a14="http://schemas.microsoft.com/office/drawing/2010/main" val="0"/>
-              </a:ext>
-            </a:extLst>
-          </a:blip>
-          <a:stretch>
-            <a:fillRect/>
-          </a:stretch>
-        </p:blipFill>
-        <p:spPr>
-          <a:xfrm>
-            <a:off x="6512647" y="3955981"/>
-            <a:ext cx="5372109" cy="1575819"/>
-          </a:xfrm>
-          <a:prstGeom prst="rect">
-            <a:avLst/>
-          </a:prstGeom>
-        </p:spPr>
-      </p:pic>
-      <p:cxnSp>
-        <p:nvCxnSpPr>
-          <p:cNvPr id="16" name="직선 연결선 15">
-            <a:extLst>
-              <a:ext uri="{FF2B5EF4-FFF2-40B4-BE49-F238E27FC236}">
-                <a16:creationId xmlns:a16="http://schemas.microsoft.com/office/drawing/2014/main" id="{8ED8B41D-99E1-876D-2BFC-742037A8D708}"/>
-              </a:ext>
-            </a:extLst>
-          </p:cNvPr>
-          <p:cNvCxnSpPr>
-            <a:cxnSpLocks/>
-          </p:cNvCxnSpPr>
-          <p:nvPr/>
-        </p:nvCxnSpPr>
-        <p:spPr>
-          <a:xfrm>
-            <a:off x="6204857" y="1915525"/>
-            <a:ext cx="0" cy="4273580"/>
-          </a:xfrm>
-          <a:prstGeom prst="line">
-            <a:avLst/>
-          </a:prstGeom>
-          <a:ln>
-            <a:solidFill>
-              <a:schemeClr val="tx1">
-                <a:lumMod val="75000"/>
-                <a:lumOff val="25000"/>
-              </a:schemeClr>
-            </a:solidFill>
-          </a:ln>
-        </p:spPr>
-        <p:style>
-          <a:lnRef idx="2">
-            <a:schemeClr val="dk1"/>
-          </a:lnRef>
-          <a:fillRef idx="0">
-            <a:schemeClr val="dk1"/>
-          </a:fillRef>
-          <a:effectRef idx="1">
-            <a:schemeClr val="dk1"/>
-          </a:effectRef>
-          <a:fontRef idx="minor">
-            <a:schemeClr val="tx1"/>
-          </a:fontRef>
-        </p:style>
-      </p:cxnSp>
-      <p:pic>
-        <p:nvPicPr>
-          <p:cNvPr id="11" name="그림 10">
-            <a:extLst>
-              <a:ext uri="{FF2B5EF4-FFF2-40B4-BE49-F238E27FC236}">
-                <a16:creationId xmlns:a16="http://schemas.microsoft.com/office/drawing/2014/main" id="{D9147C75-3356-63BC-9412-754748EC52EC}"/>
-              </a:ext>
-            </a:extLst>
-          </p:cNvPr>
-          <p:cNvPicPr>
-            <a:picLocks noChangeAspect="1"/>
-          </p:cNvPicPr>
-          <p:nvPr/>
-        </p:nvPicPr>
-        <p:blipFill>
-          <a:blip r:embed="rId7"/>
-          <a:stretch>
-            <a:fillRect/>
-          </a:stretch>
-        </p:blipFill>
-        <p:spPr>
-          <a:xfrm>
-            <a:off x="6513461" y="2908102"/>
-            <a:ext cx="5373738" cy="1047879"/>
-          </a:xfrm>
-          <a:prstGeom prst="rect">
-            <a:avLst/>
-          </a:prstGeom>
-        </p:spPr>
-      </p:pic>
-      <p:pic>
-        <p:nvPicPr>
-          <p:cNvPr id="15" name="그림 14">
-            <a:extLst>
-              <a:ext uri="{FF2B5EF4-FFF2-40B4-BE49-F238E27FC236}">
-                <a16:creationId xmlns:a16="http://schemas.microsoft.com/office/drawing/2014/main" id="{EEC5012B-FC18-6B7D-F1D7-F7FC63B45BF2}"/>
-              </a:ext>
-            </a:extLst>
-          </p:cNvPr>
-          <p:cNvPicPr>
-            <a:picLocks noChangeAspect="1"/>
-          </p:cNvPicPr>
-          <p:nvPr/>
-        </p:nvPicPr>
-        <p:blipFill>
-          <a:blip r:embed="rId8"/>
-          <a:stretch>
-            <a:fillRect/>
-          </a:stretch>
-        </p:blipFill>
-        <p:spPr>
-          <a:xfrm>
-            <a:off x="6513462" y="1915525"/>
-            <a:ext cx="5372108" cy="1073364"/>
-          </a:xfrm>
-          <a:prstGeom prst="rect">
-            <a:avLst/>
-          </a:prstGeom>
-        </p:spPr>
-      </p:pic>
-    </p:spTree>
-    <p:extLst>
-      <p:ext uri="{BB962C8B-B14F-4D97-AF65-F5344CB8AC3E}">
-        <p14:creationId xmlns:p14="http://schemas.microsoft.com/office/powerpoint/2010/main" val="1356675482"/>
-      </p:ext>
-    </p:extLst>
-  </p:cSld>
-  <p:clrMapOvr>
-    <a:masterClrMapping/>
-  </p:clrMapOvr>
-</p:sld>
-</file>
-
-<file path=ppt/slides/slide6.xml><?xml version="1.0" encoding="utf-8"?>
+<file path=ppt/slides/slide4.xml><?xml version="1.0" encoding="utf-8"?>
 <p:sld xmlns:a="http://schemas.openxmlformats.org/drawingml/2006/main" xmlns:r="http://schemas.openxmlformats.org/officeDocument/2006/relationships" xmlns:p="http://schemas.openxmlformats.org/presentationml/2006/main">
   <p:cSld>
     <p:spTree>
@@ -9280,7 +5970,7 @@
                 </a:solidFill>
                 <a:latin typeface="+mn-ea"/>
               </a:rPr>
-              <a:t>성별 표준 섭취량 대비 비율 및 섭취 균형도를 수치화한 </a:t>
+              <a:t>성별 표준 섭취량 비율 및 섭취 균형도를 수치화한 </a:t>
             </a:r>
             <a:r>
               <a:rPr lang="ko-KR" altLang="en-US" sz="1400" b="1">
@@ -9567,7 +6257,7 @@
 </p:sld>
 </file>
 
-<file path=ppt/slides/slide7.xml><?xml version="1.0" encoding="utf-8"?>
+<file path=ppt/slides/slide5.xml><?xml version="1.0" encoding="utf-8"?>
 <p:sld xmlns:a="http://schemas.openxmlformats.org/drawingml/2006/main" xmlns:r="http://schemas.openxmlformats.org/officeDocument/2006/relationships" xmlns:p="http://schemas.openxmlformats.org/presentationml/2006/main">
   <p:cSld>
     <p:spTree>
@@ -9751,332 +6441,6 @@
     <p:extLst>
       <p:ext uri="{BB962C8B-B14F-4D97-AF65-F5344CB8AC3E}">
         <p14:creationId xmlns:p14="http://schemas.microsoft.com/office/powerpoint/2010/main" val="2563103981"/>
-      </p:ext>
-    </p:extLst>
-  </p:cSld>
-  <p:clrMapOvr>
-    <a:masterClrMapping/>
-  </p:clrMapOvr>
-</p:sld>
-</file>
-
-<file path=ppt/slides/slide8.xml><?xml version="1.0" encoding="utf-8"?>
-<p:sld xmlns:a="http://schemas.openxmlformats.org/drawingml/2006/main" xmlns:r="http://schemas.openxmlformats.org/officeDocument/2006/relationships" xmlns:p="http://schemas.openxmlformats.org/presentationml/2006/main">
-  <p:cSld>
-    <p:spTree>
-      <p:nvGrpSpPr>
-        <p:cNvPr id="1" name=""/>
-        <p:cNvGrpSpPr/>
-        <p:nvPr/>
-      </p:nvGrpSpPr>
-      <p:grpSpPr>
-        <a:xfrm>
-          <a:off x="0" y="0"/>
-          <a:ext cx="0" cy="0"/>
-          <a:chOff x="0" y="0"/>
-          <a:chExt cx="0" cy="0"/>
-        </a:xfrm>
-      </p:grpSpPr>
-      <p:sp>
-        <p:nvSpPr>
-          <p:cNvPr id="2" name="직사각형 1">
-            <a:extLst>
-              <a:ext uri="{FF2B5EF4-FFF2-40B4-BE49-F238E27FC236}">
-                <a16:creationId xmlns:a16="http://schemas.microsoft.com/office/drawing/2014/main" id="{0E71911F-795E-955F-950B-60464C6202D5}"/>
-              </a:ext>
-            </a:extLst>
-          </p:cNvPr>
-          <p:cNvSpPr/>
-          <p:nvPr/>
-        </p:nvSpPr>
-        <p:spPr>
-          <a:xfrm>
-            <a:off x="0" y="0"/>
-            <a:ext cx="12192000" cy="1180396"/>
-          </a:xfrm>
-          <a:prstGeom prst="rect">
-            <a:avLst/>
-          </a:prstGeom>
-          <a:solidFill>
-            <a:schemeClr val="dk1">
-              <a:alpha val="80000"/>
-            </a:schemeClr>
-          </a:solidFill>
-          <a:ln>
-            <a:noFill/>
-          </a:ln>
-        </p:spPr>
-        <p:style>
-          <a:lnRef idx="2">
-            <a:schemeClr val="dk1">
-              <a:shade val="15000"/>
-            </a:schemeClr>
-          </a:lnRef>
-          <a:fillRef idx="1">
-            <a:schemeClr val="dk1"/>
-          </a:fillRef>
-          <a:effectRef idx="0">
-            <a:schemeClr val="dk1"/>
-          </a:effectRef>
-          <a:fontRef idx="minor">
-            <a:schemeClr val="lt1"/>
-          </a:fontRef>
-        </p:style>
-        <p:txBody>
-          <a:bodyPr rtlCol="0" anchor="ctr"/>
-          <a:lstStyle/>
-          <a:p>
-            <a:endParaRPr lang="ko-KR" altLang="en-US"/>
-          </a:p>
-        </p:txBody>
-      </p:sp>
-      <p:sp>
-        <p:nvSpPr>
-          <p:cNvPr id="5" name="제목 1">
-            <a:extLst>
-              <a:ext uri="{FF2B5EF4-FFF2-40B4-BE49-F238E27FC236}">
-                <a16:creationId xmlns:a16="http://schemas.microsoft.com/office/drawing/2014/main" id="{E6B21E77-88D1-0F37-CAD7-BE7EC7FC1682}"/>
-              </a:ext>
-            </a:extLst>
-          </p:cNvPr>
-          <p:cNvSpPr txBox="1">
-            <a:spLocks/>
-          </p:cNvSpPr>
-          <p:nvPr/>
-        </p:nvSpPr>
-        <p:spPr>
-          <a:xfrm>
-            <a:off x="603253" y="234000"/>
-            <a:ext cx="2883105" cy="946104"/>
-          </a:xfrm>
-          <a:prstGeom prst="rect">
-            <a:avLst/>
-          </a:prstGeom>
-        </p:spPr>
-        <p:txBody>
-          <a:bodyPr vert="horz" lIns="91440" tIns="45720" rIns="91440" bIns="45720" rtlCol="0" anchor="ctr">
-            <a:normAutofit/>
-          </a:bodyPr>
-          <a:lstStyle>
-            <a:lvl1pPr algn="l" defTabSz="914400" rtl="0" eaLnBrk="1" latinLnBrk="1" hangingPunct="1">
-              <a:lnSpc>
-                <a:spcPct val="90000"/>
-              </a:lnSpc>
-              <a:spcBef>
-                <a:spcPct val="0"/>
-              </a:spcBef>
-              <a:buNone/>
-              <a:defRPr sz="4400" kern="1200">
-                <a:solidFill>
-                  <a:schemeClr val="tx1"/>
-                </a:solidFill>
-                <a:latin typeface="+mj-lt"/>
-                <a:ea typeface="+mj-ea"/>
-                <a:cs typeface="+mj-cs"/>
-              </a:defRPr>
-            </a:lvl1pPr>
-          </a:lstStyle>
-          <a:p>
-            <a:r>
-              <a:rPr lang="ko-KR" altLang="en-US" sz="3200" b="1">
-                <a:solidFill>
-                  <a:schemeClr val="bg1"/>
-                </a:solidFill>
-              </a:rPr>
-              <a:t>화면 설계서</a:t>
-            </a:r>
-            <a:br>
-              <a:rPr lang="en-US" altLang="ko-KR" sz="3200" b="1"/>
-            </a:br>
-            <a:r>
-              <a:rPr lang="en-US" altLang="ko-KR" sz="1400" b="0" i="0">
-                <a:solidFill>
-                  <a:schemeClr val="bg1">
-                    <a:lumMod val="75000"/>
-                  </a:schemeClr>
-                </a:solidFill>
-                <a:effectLst/>
-                <a:latin typeface="Noto Sans KR"/>
-              </a:rPr>
-              <a:t>Wireframe</a:t>
-            </a:r>
-            <a:endParaRPr lang="ko-KR" altLang="en-US" sz="1400" b="1">
-              <a:solidFill>
-                <a:schemeClr val="bg1">
-                  <a:lumMod val="75000"/>
-                </a:schemeClr>
-              </a:solidFill>
-            </a:endParaRPr>
-          </a:p>
-        </p:txBody>
-      </p:sp>
-    </p:spTree>
-    <p:extLst>
-      <p:ext uri="{BB962C8B-B14F-4D97-AF65-F5344CB8AC3E}">
-        <p14:creationId xmlns:p14="http://schemas.microsoft.com/office/powerpoint/2010/main" val="4241073865"/>
-      </p:ext>
-    </p:extLst>
-  </p:cSld>
-  <p:clrMapOvr>
-    <a:masterClrMapping/>
-  </p:clrMapOvr>
-</p:sld>
-</file>
-
-<file path=ppt/slides/slide9.xml><?xml version="1.0" encoding="utf-8"?>
-<p:sld xmlns:a="http://schemas.openxmlformats.org/drawingml/2006/main" xmlns:r="http://schemas.openxmlformats.org/officeDocument/2006/relationships" xmlns:p="http://schemas.openxmlformats.org/presentationml/2006/main">
-  <p:cSld>
-    <p:spTree>
-      <p:nvGrpSpPr>
-        <p:cNvPr id="1" name=""/>
-        <p:cNvGrpSpPr/>
-        <p:nvPr/>
-      </p:nvGrpSpPr>
-      <p:grpSpPr>
-        <a:xfrm>
-          <a:off x="0" y="0"/>
-          <a:ext cx="0" cy="0"/>
-          <a:chOff x="0" y="0"/>
-          <a:chExt cx="0" cy="0"/>
-        </a:xfrm>
-      </p:grpSpPr>
-      <p:sp>
-        <p:nvSpPr>
-          <p:cNvPr id="2" name="직사각형 1">
-            <a:extLst>
-              <a:ext uri="{FF2B5EF4-FFF2-40B4-BE49-F238E27FC236}">
-                <a16:creationId xmlns:a16="http://schemas.microsoft.com/office/drawing/2014/main" id="{0E71911F-795E-955F-950B-60464C6202D5}"/>
-              </a:ext>
-            </a:extLst>
-          </p:cNvPr>
-          <p:cNvSpPr/>
-          <p:nvPr/>
-        </p:nvSpPr>
-        <p:spPr>
-          <a:xfrm>
-            <a:off x="0" y="0"/>
-            <a:ext cx="12192000" cy="1180396"/>
-          </a:xfrm>
-          <a:prstGeom prst="rect">
-            <a:avLst/>
-          </a:prstGeom>
-          <a:solidFill>
-            <a:schemeClr val="dk1">
-              <a:alpha val="80000"/>
-            </a:schemeClr>
-          </a:solidFill>
-          <a:ln>
-            <a:noFill/>
-          </a:ln>
-        </p:spPr>
-        <p:style>
-          <a:lnRef idx="2">
-            <a:schemeClr val="dk1">
-              <a:shade val="15000"/>
-            </a:schemeClr>
-          </a:lnRef>
-          <a:fillRef idx="1">
-            <a:schemeClr val="dk1"/>
-          </a:fillRef>
-          <a:effectRef idx="0">
-            <a:schemeClr val="dk1"/>
-          </a:effectRef>
-          <a:fontRef idx="minor">
-            <a:schemeClr val="lt1"/>
-          </a:fontRef>
-        </p:style>
-        <p:txBody>
-          <a:bodyPr rtlCol="0" anchor="ctr"/>
-          <a:lstStyle/>
-          <a:p>
-            <a:endParaRPr lang="ko-KR" altLang="en-US"/>
-          </a:p>
-        </p:txBody>
-      </p:sp>
-      <p:sp>
-        <p:nvSpPr>
-          <p:cNvPr id="5" name="제목 1">
-            <a:extLst>
-              <a:ext uri="{FF2B5EF4-FFF2-40B4-BE49-F238E27FC236}">
-                <a16:creationId xmlns:a16="http://schemas.microsoft.com/office/drawing/2014/main" id="{E6B21E77-88D1-0F37-CAD7-BE7EC7FC1682}"/>
-              </a:ext>
-            </a:extLst>
-          </p:cNvPr>
-          <p:cNvSpPr txBox="1">
-            <a:spLocks/>
-          </p:cNvSpPr>
-          <p:nvPr/>
-        </p:nvSpPr>
-        <p:spPr>
-          <a:xfrm>
-            <a:off x="603253" y="234000"/>
-            <a:ext cx="2883105" cy="946104"/>
-          </a:xfrm>
-          <a:prstGeom prst="rect">
-            <a:avLst/>
-          </a:prstGeom>
-        </p:spPr>
-        <p:txBody>
-          <a:bodyPr vert="horz" lIns="91440" tIns="45720" rIns="91440" bIns="45720" rtlCol="0" anchor="ctr">
-            <a:normAutofit/>
-          </a:bodyPr>
-          <a:lstStyle>
-            <a:lvl1pPr algn="l" defTabSz="914400" rtl="0" eaLnBrk="1" latinLnBrk="1" hangingPunct="1">
-              <a:lnSpc>
-                <a:spcPct val="90000"/>
-              </a:lnSpc>
-              <a:spcBef>
-                <a:spcPct val="0"/>
-              </a:spcBef>
-              <a:buNone/>
-              <a:defRPr sz="4400" kern="1200">
-                <a:solidFill>
-                  <a:schemeClr val="tx1"/>
-                </a:solidFill>
-                <a:latin typeface="+mj-lt"/>
-                <a:ea typeface="+mj-ea"/>
-                <a:cs typeface="+mj-cs"/>
-              </a:defRPr>
-            </a:lvl1pPr>
-          </a:lstStyle>
-          <a:p>
-            <a:r>
-              <a:rPr lang="ko-KR" altLang="en-US" sz="3200" b="1">
-                <a:solidFill>
-                  <a:schemeClr val="bg1"/>
-                </a:solidFill>
-              </a:rPr>
-              <a:t>화면 설계서</a:t>
-            </a:r>
-            <a:br>
-              <a:rPr lang="en-US" altLang="ko-KR" sz="3200" b="1"/>
-            </a:br>
-            <a:r>
-              <a:rPr lang="en-US" altLang="ko-KR" sz="1400" b="0" i="0">
-                <a:solidFill>
-                  <a:schemeClr val="bg1">
-                    <a:lumMod val="75000"/>
-                  </a:schemeClr>
-                </a:solidFill>
-                <a:effectLst/>
-                <a:latin typeface="Noto Sans KR"/>
-              </a:rPr>
-              <a:t>Wireframe</a:t>
-            </a:r>
-            <a:endParaRPr lang="ko-KR" altLang="en-US" sz="1400" b="1">
-              <a:solidFill>
-                <a:schemeClr val="bg1">
-                  <a:lumMod val="75000"/>
-                </a:schemeClr>
-              </a:solidFill>
-            </a:endParaRPr>
-          </a:p>
-        </p:txBody>
-      </p:sp>
-    </p:spTree>
-    <p:extLst>
-      <p:ext uri="{BB962C8B-B14F-4D97-AF65-F5344CB8AC3E}">
-        <p14:creationId xmlns:p14="http://schemas.microsoft.com/office/powerpoint/2010/main" val="2991159526"/>
       </p:ext>
     </p:extLst>
   </p:cSld>

--- a/1차 프로젝트/기획서.pptx
+++ b/1차 프로젝트/기획서.pptx
@@ -4519,7 +4519,7 @@
                   </a:schemeClr>
                 </a:solidFill>
               </a:rPr>
-              <a:t>검사주기가 길어 조기 발견 어려움</a:t>
+              <a:t>검사주기가 길어 조기 대처 어려움</a:t>
             </a:r>
             <a:endParaRPr lang="ko-KR" altLang="en-US" sz="1600" b="1" dirty="0">
               <a:solidFill>
@@ -5663,7 +5663,7 @@
                 </a:solidFill>
                 <a:latin typeface="+mn-ea"/>
               </a:rPr>
-              <a:t>개별 요인의 위험도 및 영향도를 정량적으로 분석</a:t>
+              <a:t>개별 요인의 위험도 및 영향도 정량적 분석</a:t>
             </a:r>
             <a:endParaRPr lang="en-US" altLang="ko-KR" sz="1400">
               <a:solidFill>
@@ -5691,7 +5691,7 @@
                 </a:solidFill>
                 <a:latin typeface="+mn-ea"/>
               </a:rPr>
-              <a:t>분석된 데이터에서 고콜레스테롤 위험 요인과 수치를 직관적인 인포그래픽으로 시각화</a:t>
+              <a:t>분석된 데이터에서 고콜레스테롤 위험 요인과 수치를 인포그래픽으로 시각화</a:t>
             </a:r>
             <a:endParaRPr lang="en-US" altLang="ko-KR" sz="1400">
               <a:solidFill>
@@ -5844,7 +5844,7 @@
         <p:spPr>
           <a:xfrm>
             <a:off x="603252" y="2998112"/>
-            <a:ext cx="4972211" cy="3039999"/>
+            <a:ext cx="4972211" cy="2609112"/>
           </a:xfrm>
           <a:prstGeom prst="rect">
             <a:avLst/>
@@ -5873,7 +5873,7 @@
                 </a:solidFill>
                 <a:latin typeface="+mn-ea"/>
               </a:rPr>
-              <a:t>국민건강영양조사 식품섭취조사 데이터 활용</a:t>
+              <a:t>식품섭취조사 데이터 활용</a:t>
             </a:r>
             <a:r>
               <a:rPr lang="en-US" altLang="ko-KR" sz="1400">
@@ -6031,7 +6031,7 @@
                 </a:solidFill>
                 <a:latin typeface="+mn-ea"/>
               </a:rPr>
-              <a:t>식습관 정보에 인구사회학적 요소</a:t>
+              <a:t>사회경제적 요소</a:t>
             </a:r>
             <a:r>
               <a:rPr lang="en-US" altLang="ko-KR" sz="1400">
